--- a/slides/virtualization.pptx
+++ b/slides/virtualization.pptx
@@ -5,7 +5,7 @@
     <p:sldMasterId id="2147483648" r:id="rId1"/>
   </p:sldMasterIdLst>
   <p:notesMasterIdLst>
-    <p:notesMasterId r:id="rId50"/>
+    <p:notesMasterId r:id="rId51"/>
   </p:notesMasterIdLst>
   <p:sldIdLst>
     <p:sldId id="302" r:id="rId2"/>
@@ -52,10 +52,11 @@
     <p:sldId id="511" r:id="rId43"/>
     <p:sldId id="518" r:id="rId44"/>
     <p:sldId id="512" r:id="rId45"/>
-    <p:sldId id="514" r:id="rId46"/>
-    <p:sldId id="513" r:id="rId47"/>
-    <p:sldId id="515" r:id="rId48"/>
-    <p:sldId id="519" r:id="rId49"/>
+    <p:sldId id="520" r:id="rId46"/>
+    <p:sldId id="514" r:id="rId47"/>
+    <p:sldId id="513" r:id="rId48"/>
+    <p:sldId id="515" r:id="rId49"/>
+    <p:sldId id="519" r:id="rId50"/>
   </p:sldIdLst>
   <p:sldSz cx="12192000" cy="6858000"/>
   <p:notesSz cx="6858000" cy="9144000"/>
@@ -172,22 +173,6 @@
 
 <file path=ppt/changesInfos/changesInfo1.xml><?xml version="1.0" encoding="utf-8"?>
 <pc:chgInfo xmlns:a="http://schemas.openxmlformats.org/drawingml/2006/main" xmlns:r="http://schemas.openxmlformats.org/officeDocument/2006/relationships" xmlns:ac="http://schemas.microsoft.com/office/drawing/2013/main/command" xmlns:pc="http://schemas.microsoft.com/office/powerpoint/2013/main/command">
-  <pc:docChgLst>
-    <pc:chgData name="Vincenzo Massimiliano Gulisano" userId="887d7398-9e41-4331-abd4-9c23f064ea90" providerId="ADAL" clId="{5476F406-CA94-4A43-8A40-52F4D1C72801}"/>
-    <pc:docChg chg="modSld">
-      <pc:chgData name="Vincenzo Massimiliano Gulisano" userId="887d7398-9e41-4331-abd4-9c23f064ea90" providerId="ADAL" clId="{5476F406-CA94-4A43-8A40-52F4D1C72801}" dt="2023-10-12T05:55:18.975" v="12" actId="20577"/>
-      <pc:docMkLst>
-        <pc:docMk/>
-      </pc:docMkLst>
-      <pc:sldChg chg="modSp mod">
-        <pc:chgData name="Vincenzo Massimiliano Gulisano" userId="887d7398-9e41-4331-abd4-9c23f064ea90" providerId="ADAL" clId="{5476F406-CA94-4A43-8A40-52F4D1C72801}" dt="2023-10-12T05:55:18.975" v="12" actId="20577"/>
-        <pc:sldMkLst>
-          <pc:docMk/>
-          <pc:sldMk cId="1512327882" sldId="302"/>
-        </pc:sldMkLst>
-      </pc:sldChg>
-    </pc:docChg>
-  </pc:docChgLst>
   <pc:docChgLst>
     <pc:chgData name="Vincenzo Massimiliano Gulisano" userId="887d7398-9e41-4331-abd4-9c23f064ea90" providerId="ADAL" clId="{4ACA8A4E-1133-A247-AA8A-D98CA293822E}"/>
     <pc:docChg chg="modSld">
@@ -2173,6 +2158,22 @@
             <ac:cxnSpMk id="15" creationId="{B46400BD-798D-238A-135B-D09196EB6FEF}"/>
           </ac:cxnSpMkLst>
         </pc:cxnChg>
+      </pc:sldChg>
+    </pc:docChg>
+  </pc:docChgLst>
+  <pc:docChgLst>
+    <pc:chgData name="Vincenzo Massimiliano Gulisano" userId="887d7398-9e41-4331-abd4-9c23f064ea90" providerId="ADAL" clId="{5476F406-CA94-4A43-8A40-52F4D1C72801}"/>
+    <pc:docChg chg="modSld">
+      <pc:chgData name="Vincenzo Massimiliano Gulisano" userId="887d7398-9e41-4331-abd4-9c23f064ea90" providerId="ADAL" clId="{5476F406-CA94-4A43-8A40-52F4D1C72801}" dt="2023-10-12T05:55:18.975" v="12" actId="20577"/>
+      <pc:docMkLst>
+        <pc:docMk/>
+      </pc:docMkLst>
+      <pc:sldChg chg="modSp mod">
+        <pc:chgData name="Vincenzo Massimiliano Gulisano" userId="887d7398-9e41-4331-abd4-9c23f064ea90" providerId="ADAL" clId="{5476F406-CA94-4A43-8A40-52F4D1C72801}" dt="2023-10-12T05:55:18.975" v="12" actId="20577"/>
+        <pc:sldMkLst>
+          <pc:docMk/>
+          <pc:sldMk cId="1512327882" sldId="302"/>
+        </pc:sldMkLst>
       </pc:sldChg>
     </pc:docChg>
   </pc:docChgLst>
@@ -9761,7 +9762,7 @@
           <a:p>
             <a:fld id="{F5CA1724-FE87-D744-AEFA-DF7E2B83349C}" type="datetimeFigureOut">
               <a:rPr lang="en-SE" smtClean="0"/>
-              <a:t>10/20/25</a:t>
+              <a:t>7/12/26</a:t>
             </a:fld>
             <a:endParaRPr lang="en-SE"/>
           </a:p>
@@ -10546,28 +10547,30 @@
           <a:bodyPr/>
           <a:lstStyle/>
           <a:p>
+            <a:pPr marL="0" marR="0" lvl="0" indent="0" algn="l" defTabSz="914400" rtl="0" eaLnBrk="1" fontAlgn="auto" latinLnBrk="0" hangingPunct="1">
+              <a:lnSpc>
+                <a:spcPct val="100000"/>
+              </a:lnSpc>
+              <a:spcBef>
+                <a:spcPts val="0"/>
+              </a:spcBef>
+              <a:spcAft>
+                <a:spcPts val="0"/>
+              </a:spcAft>
+              <a:buClrTx/>
+              <a:buSzTx/>
+              <a:buFontTx/>
+              <a:buNone/>
+              <a:tabLst/>
+              <a:defRPr/>
+            </a:pPr>
             <a:r>
               <a:rPr lang="en-US" dirty="0"/>
-              <a:t>Containers gained  popularity recently (docker)</a:t>
-            </a:r>
-          </a:p>
-          <a:p>
-            <a:r>
-              <a:rPr lang="en-US" dirty="0"/>
-              <a:t>Not slides about how to use docker, just an introduction</a:t>
-            </a:r>
-          </a:p>
-          <a:p>
-            <a:r>
-              <a:rPr lang="en-US" dirty="0"/>
-              <a:t>VMs virtualize hardware, Containers virtualize OS</a:t>
-            </a:r>
-          </a:p>
-          <a:p>
-            <a:r>
-              <a:rPr lang="en-US" dirty="0"/>
-              <a:t>Note some limitations - CAN SAY IT IS SIMILAR FOR VMS TOO, OF COURSE</a:t>
-            </a:r>
+              <a:t>Containers became widely popular around 2013–2015, following Docker’s launch in 2013 and Kubernetes’ introduction in 2014. We can say that if a VM virtualizes hardware and runs a complete guest OS, then a container isolates one or more processes while sharing the host OS kernel. These processes are isolated from other processes, but their performance can still be affected by other workloads, as with VMs. The key difference is that containers also share the same kernel.</a:t>
+            </a:r>
+          </a:p>
+          <a:p>
+            <a:endParaRPr lang="en-US" dirty="0"/>
           </a:p>
         </p:txBody>
       </p:sp>
@@ -10651,9 +10654,26 @@
           <a:bodyPr/>
           <a:lstStyle/>
           <a:p>
+            <a:pPr marL="0" marR="0" lvl="0" indent="0" algn="l" defTabSz="914400" rtl="0" eaLnBrk="1" fontAlgn="auto" latinLnBrk="0" hangingPunct="1">
+              <a:lnSpc>
+                <a:spcPct val="100000"/>
+              </a:lnSpc>
+              <a:spcBef>
+                <a:spcPts val="0"/>
+              </a:spcBef>
+              <a:spcAft>
+                <a:spcPts val="0"/>
+              </a:spcAft>
+              <a:buClrTx/>
+              <a:buSzTx/>
+              <a:buFontTx/>
+              <a:buNone/>
+              <a:tabLst/>
+              <a:defRPr/>
+            </a:pPr>
             <a:r>
               <a:rPr lang="en-US" dirty="0"/>
-              <a:t>Not an exclusive list, main points</a:t>
+              <a:t>To isolate a set of processes, we must isolate resources and system views such as the filesystem, process IDs, user IDs, network interfaces, and IPC endpoints. For example, processes in different containers can have the same process ID. We may also define limits, quotas, or priorities for memory, CPU, and I/O. All in all, namespaces isolate what processes can see, while cgroups control or account for the resources they use.</a:t>
             </a:r>
           </a:p>
           <a:p>
@@ -10741,10 +10761,47 @@
           <a:bodyPr/>
           <a:lstStyle/>
           <a:p>
+            <a:pPr marL="0" marR="0" lvl="0" indent="0" algn="l" defTabSz="914400" rtl="0" eaLnBrk="1" fontAlgn="auto" latinLnBrk="0" hangingPunct="1">
+              <a:lnSpc>
+                <a:spcPct val="100000"/>
+              </a:lnSpc>
+              <a:spcBef>
+                <a:spcPts val="0"/>
+              </a:spcBef>
+              <a:spcAft>
+                <a:spcPts val="0"/>
+              </a:spcAft>
+              <a:buClrTx/>
+              <a:buSzTx/>
+              <a:buFontTx/>
+              <a:buNone/>
+              <a:tabLst/>
+              <a:defRPr/>
+            </a:pPr>
             <a:r>
               <a:rPr lang="en-US" dirty="0"/>
-              <a:t>For the monitoring, the point is that one needs to continuously check what processes in a container are doing and decide if they need to be limited</a:t>
-            </a:r>
+              <a:t>Some of these features are handled through namespaces. A namespace is a kernel feature that limits or isolates what a process can see and access. A process belongs to one namespace of each type. New namespaces can be created when a process starts, and a process can also join an existing namespace. Memory, CPU, and I/O controls instead require the kernel to account for resource usage and enforce limits or priorities.</a:t>
+            </a:r>
+          </a:p>
+          <a:p>
+            <a:pPr marL="0" marR="0" lvl="0" indent="0" algn="l" defTabSz="914400" rtl="0" eaLnBrk="1" fontAlgn="auto" latinLnBrk="0" hangingPunct="1">
+              <a:lnSpc>
+                <a:spcPct val="100000"/>
+              </a:lnSpc>
+              <a:spcBef>
+                <a:spcPts val="0"/>
+              </a:spcBef>
+              <a:spcAft>
+                <a:spcPts val="0"/>
+              </a:spcAft>
+              <a:buClrTx/>
+              <a:buSzTx/>
+              <a:buFontTx/>
+              <a:buNone/>
+              <a:tabLst/>
+              <a:defRPr/>
+            </a:pPr>
+            <a:endParaRPr lang="en-US" dirty="0"/>
           </a:p>
         </p:txBody>
       </p:sp>
@@ -10830,8 +10887,13 @@
           <a:p>
             <a:r>
               <a:rPr lang="en-US" dirty="0"/>
-              <a:t>This is an example for the root folder.</a:t>
-            </a:r>
+              <a:t>A mount namespace isolates the set of filesystem mounts visible to a process. Two processes in different mount namespaces may see different filesystems or different directory trees, even though they run on the same host. Container runtimes use mount namespaces together with other filesystem mechanisms to give each container its own root </a:t>
+            </a:r>
+            <a:r>
+              <a:rPr lang="en-US"/>
+              <a:t>filesystem.</a:t>
+            </a:r>
+            <a:endParaRPr lang="en-US" dirty="0"/>
           </a:p>
         </p:txBody>
       </p:sp>
@@ -10924,14 +10986,20 @@
           <a:p>
             <a:r>
               <a:rPr lang="en-US" dirty="0"/>
-              <a:t>Say I explain later why a tree, let’s just say a cgroup</a:t>
-            </a:r>
+              <a:t>For resources that require monitoring, the kernel provides controllers for resource types such as CPU, memory, and I/O. For each resource, cgroups are organized in a tree and specify restrictions. A process can belong to one cgroup for each resource.</a:t>
+            </a:r>
+          </a:p>
+          <a:p>
+            <a:endParaRPr lang="en-US" dirty="0"/>
           </a:p>
           <a:p>
             <a:r>
               <a:rPr lang="en-US" dirty="0"/>
-              <a:t>Say also CPU is not expressed in percentage, it’s a first simplification</a:t>
-            </a:r>
+              <a:t>For example, we could have a CPU controller with a cgroup representing a 50% CPU limit—using percentages only as a simplification—and a memory controller with a cgroup limiting usage to 2 GB. To limit processes A and B together to 50% of the CPU, we place both in cgroup c1. To also limit B to 2 GB of memory, we place B in memory cgroup m1.</a:t>
+            </a:r>
+          </a:p>
+          <a:p>
+            <a:endParaRPr lang="en-US" dirty="0"/>
           </a:p>
         </p:txBody>
       </p:sp>
@@ -11042,8 +11110,46 @@
           <a:p>
             <a:r>
               <a:rPr lang="en-US" dirty="0"/>
-              <a:t>Note, the second point is not that with time share you cannot, just that there can be different mechanisms to use, and some might be easier / more straightforward than another</a:t>
-            </a:r>
+              <a:t>So, why are cgroups hierarchical, and why are there multiple controllers?</a:t>
+            </a:r>
+          </a:p>
+          <a:p>
+            <a:endParaRPr lang="en-US" dirty="0"/>
+          </a:p>
+          <a:p>
+            <a:r>
+              <a:rPr lang="en-US" dirty="0"/>
+              <a:t>The hierarchy allows limits and resource distribution to be defined at several levels. Multiple controllers exist because CPU time, CPU placement, memory, I/O, and process counts require different accounting and enforcement mechanisms.</a:t>
+            </a:r>
+          </a:p>
+          <a:p>
+            <a:endParaRPr lang="en-US" dirty="0"/>
+          </a:p>
+          <a:p>
+            <a:r>
+              <a:rPr lang="en-US" dirty="0"/>
+              <a:t>In the previous example, A and B together received 50% of the CPU. To divide that allocation further—for example, 80% for A and 20% for B—we can create two child cgroups below the 50% group.</a:t>
+            </a:r>
+          </a:p>
+          <a:p>
+            <a:endParaRPr lang="en-US" dirty="0"/>
+          </a:p>
+          <a:p>
+            <a:r>
+              <a:rPr lang="en-US" dirty="0"/>
+              <a:t>Some controllers affect related aspects of execution. The CPU controller manages CPU time, while the </a:t>
+            </a:r>
+            <a:r>
+              <a:rPr lang="en-US" dirty="0" err="1"/>
+              <a:t>cpuset</a:t>
+            </a:r>
+            <a:r>
+              <a:rPr lang="en-US" dirty="0"/>
+              <a:t> controller determines which CPUs a process may use. On a four-core system, restricting A and B to two cores prevents them from using more than two cores simultaneously.</a:t>
+            </a:r>
+          </a:p>
+          <a:p>
+            <a:endParaRPr lang="en-US" dirty="0"/>
           </a:p>
         </p:txBody>
       </p:sp>
@@ -11220,7 +11326,15 @@
           <a:p>
             <a:r>
               <a:rPr lang="en-US" dirty="0"/>
-              <a:t>Note, the second point is not that with time share you cannot, just that there can be different mechanisms to use, and some might be easier / more straightforward than another</a:t>
+              <a:t>Different restrictions may conflict. For example, a process may belong to a </a:t>
+            </a:r>
+            <a:r>
+              <a:rPr lang="en-US" dirty="0" err="1"/>
+              <a:t>cpuset</a:t>
+            </a:r>
+            <a:r>
+              <a:rPr lang="en-US" dirty="0"/>
+              <a:t> cgroup that permits only core 1, while one of its threads is pinned to core 2. The OS enforces the intersection of these restrictions. Since the thread has no eligible CPU, it cannot be scheduled until one restriction changes.</a:t>
             </a:r>
           </a:p>
         </p:txBody>
@@ -11398,13 +11512,53 @@
           <a:p>
             <a:r>
               <a:rPr lang="en-US" dirty="0"/>
-              <a:t>We have different controllers for different types of resources</a:t>
-            </a:r>
-          </a:p>
-          <a:p>
+              <a:t>Different controllers manage different resources. For example, the CPU controller manages CPU bandwidth or relative weight, </a:t>
+            </a:r>
+            <a:r>
+              <a:rPr lang="en-US" dirty="0" err="1"/>
+              <a:t>cpuset</a:t>
+            </a:r>
             <a:r>
               <a:rPr lang="en-US" dirty="0"/>
-              <a:t>JUST GO THROUGH THE LIST</a:t>
+              <a:t> controls CPU and NUMA placement, memory controls memory usage, and </a:t>
+            </a:r>
+            <a:r>
+              <a:rPr lang="en-US" dirty="0" err="1"/>
+              <a:t>pids</a:t>
+            </a:r>
+            <a:r>
+              <a:rPr lang="en-US" dirty="0"/>
+              <a:t> limits the number of processes or tasks. The devices controller manages device access. For disk I/O, </a:t>
+            </a:r>
+            <a:r>
+              <a:rPr lang="en-US" sz="1200" kern="1200" dirty="0" err="1">
+                <a:solidFill>
+                  <a:schemeClr val="tx1"/>
+                </a:solidFill>
+                <a:latin typeface="+mn-lt"/>
+                <a:ea typeface="+mn-ea"/>
+                <a:cs typeface="+mn-cs"/>
+              </a:rPr>
+              <a:t>blkio</a:t>
+            </a:r>
+            <a:r>
+              <a:rPr lang="en-US" dirty="0"/>
+              <a:t> is the cgroup v1 controller, while </a:t>
+            </a:r>
+            <a:r>
+              <a:rPr lang="en-US" sz="1200" kern="1200" dirty="0">
+                <a:solidFill>
+                  <a:schemeClr val="tx1"/>
+                </a:solidFill>
+                <a:latin typeface="+mn-lt"/>
+                <a:ea typeface="+mn-ea"/>
+                <a:cs typeface="+mn-cs"/>
+              </a:rPr>
+              <a:t>io</a:t>
+            </a:r>
+            <a:r>
+              <a:rPr lang="en-US" dirty="0"/>
+              <a:t> is the corresponding cgroup v2 controller.</a:t>
             </a:r>
           </a:p>
         </p:txBody>
@@ -11608,6 +11762,120 @@
   <p:cSld>
     <p:spTree>
       <p:nvGrpSpPr>
+        <p:cNvPr id="1" name=""/>
+        <p:cNvGrpSpPr/>
+        <p:nvPr/>
+      </p:nvGrpSpPr>
+      <p:grpSpPr>
+        <a:xfrm>
+          <a:off x="0" y="0"/>
+          <a:ext cx="0" cy="0"/>
+          <a:chOff x="0" y="0"/>
+          <a:chExt cx="0" cy="0"/>
+        </a:xfrm>
+      </p:grpSpPr>
+      <p:sp>
+        <p:nvSpPr>
+          <p:cNvPr id="2" name="Slide Image Placeholder 1"/>
+          <p:cNvSpPr>
+            <a:spLocks noGrp="1" noRot="1" noChangeAspect="1"/>
+          </p:cNvSpPr>
+          <p:nvPr>
+            <p:ph type="sldImg"/>
+          </p:nvPr>
+        </p:nvSpPr>
+        <p:spPr/>
+      </p:sp>
+      <p:sp>
+        <p:nvSpPr>
+          <p:cNvPr id="3" name="Notes Placeholder 2"/>
+          <p:cNvSpPr>
+            <a:spLocks noGrp="1"/>
+          </p:cNvSpPr>
+          <p:nvPr>
+            <p:ph type="body" idx="1"/>
+          </p:nvPr>
+        </p:nvSpPr>
+        <p:spPr/>
+        <p:txBody>
+          <a:bodyPr/>
+          <a:lstStyle/>
+          <a:p>
+            <a:r>
+              <a:rPr lang="en-US" dirty="0"/>
+              <a:t>Please note that Linux supports two main versions of the cgroup interface.</a:t>
+            </a:r>
+          </a:p>
+          <a:p>
+            <a:endParaRPr lang="en-US" dirty="0"/>
+          </a:p>
+          <a:p>
+            <a:r>
+              <a:rPr lang="en-US" dirty="0"/>
+              <a:t>In cgroup v1, controllers can use separate hierarchies, so a process may belong to one cgroup for CPU control and another for memory control. This is flexible but can be difficult to manage.</a:t>
+            </a:r>
+          </a:p>
+          <a:p>
+            <a:endParaRPr lang="en-US" dirty="0"/>
+          </a:p>
+          <a:p>
+            <a:r>
+              <a:rPr lang="en-US" dirty="0"/>
+              <a:t>Cgroup v2 uses one unified hierarchy. A process belongs to one cgroup in that hierarchy, and the relevant controllers are enabled for that part of the tree. This provides a more consistent relationship between processes, parent groups, and resource limits.</a:t>
+            </a:r>
+          </a:p>
+          <a:p>
+            <a:endParaRPr lang="en-US" dirty="0"/>
+          </a:p>
+          <a:p>
+            <a:r>
+              <a:rPr lang="en-US" dirty="0"/>
+              <a:t>The following examples mix both versions because their purpose is to illustrate what cgroups can do rather than the exact configuration interface.</a:t>
+            </a:r>
+          </a:p>
+        </p:txBody>
+      </p:sp>
+      <p:sp>
+        <p:nvSpPr>
+          <p:cNvPr id="4" name="Slide Number Placeholder 3"/>
+          <p:cNvSpPr>
+            <a:spLocks noGrp="1"/>
+          </p:cNvSpPr>
+          <p:nvPr>
+            <p:ph type="sldNum" sz="quarter" idx="5"/>
+          </p:nvPr>
+        </p:nvSpPr>
+        <p:spPr/>
+        <p:txBody>
+          <a:bodyPr/>
+          <a:lstStyle/>
+          <a:p>
+            <a:fld id="{C55E3DE0-5E9E-8947-9DAA-E91C371FD659}" type="slidenum">
+              <a:rPr lang="en-SE" smtClean="0"/>
+              <a:t>45</a:t>
+            </a:fld>
+            <a:endParaRPr lang="en-SE"/>
+          </a:p>
+        </p:txBody>
+      </p:sp>
+    </p:spTree>
+    <p:extLst>
+      <p:ext uri="{BB962C8B-B14F-4D97-AF65-F5344CB8AC3E}">
+        <p14:creationId xmlns:p14="http://schemas.microsoft.com/office/powerpoint/2010/main" val="3356878844"/>
+      </p:ext>
+    </p:extLst>
+  </p:cSld>
+  <p:clrMapOvr>
+    <a:masterClrMapping/>
+  </p:clrMapOvr>
+</p:notes>
+</file>
+
+<file path=ppt/notesSlides/notesSlide21.xml><?xml version="1.0" encoding="utf-8"?>
+<p:notes xmlns:a="http://schemas.openxmlformats.org/drawingml/2006/main" xmlns:r="http://schemas.openxmlformats.org/officeDocument/2006/relationships" xmlns:p="http://schemas.openxmlformats.org/presentationml/2006/main">
+  <p:cSld>
+    <p:spTree>
+      <p:nvGrpSpPr>
         <p:cNvPr id="1" name="">
           <a:extLst>
             <a:ext uri="{FF2B5EF4-FFF2-40B4-BE49-F238E27FC236}">
@@ -11674,7 +11942,52 @@
           <a:p>
             <a:r>
               <a:rPr lang="en-US" dirty="0"/>
-              <a:t>CPU use shares, memory is different, they use limits and priorities</a:t>
+              <a:t>Let’s look at a more thorough example for the CPU controller. Each cgroup is assigned a number of shares. Typically, </a:t>
+            </a:r>
+            <a:r>
+              <a:rPr lang="en-US" sz="1200" kern="1200" dirty="0" err="1">
+                <a:solidFill>
+                  <a:schemeClr val="tx1"/>
+                </a:solidFill>
+                <a:latin typeface="+mn-lt"/>
+                <a:ea typeface="+mn-ea"/>
+                <a:cs typeface="+mn-cs"/>
+              </a:rPr>
+              <a:t>system.slice</a:t>
+            </a:r>
+            <a:r>
+              <a:rPr lang="en-US" dirty="0"/>
+              <a:t> contains system services, </a:t>
+            </a:r>
+            <a:r>
+              <a:rPr lang="en-US" sz="1200" kern="1200" dirty="0" err="1">
+                <a:solidFill>
+                  <a:schemeClr val="tx1"/>
+                </a:solidFill>
+                <a:latin typeface="+mn-lt"/>
+                <a:ea typeface="+mn-ea"/>
+                <a:cs typeface="+mn-cs"/>
+              </a:rPr>
+              <a:t>user.slice</a:t>
+            </a:r>
+            <a:r>
+              <a:rPr lang="en-US" dirty="0"/>
+              <a:t> contains user processes, and </a:t>
+            </a:r>
+            <a:r>
+              <a:rPr lang="en-US" sz="1200" kern="1200" dirty="0" err="1">
+                <a:solidFill>
+                  <a:schemeClr val="tx1"/>
+                </a:solidFill>
+                <a:latin typeface="+mn-lt"/>
+                <a:ea typeface="+mn-ea"/>
+                <a:cs typeface="+mn-cs"/>
+              </a:rPr>
+              <a:t>machine.slice</a:t>
+            </a:r>
+            <a:r>
+              <a:rPr lang="en-US" dirty="0"/>
+              <a:t> contains VMs and containers.</a:t>
             </a:r>
           </a:p>
           <a:p>
@@ -11682,88 +11995,29 @@
           </a:p>
           <a:p>
             <a:r>
-              <a:rPr lang="en-US" b="1" dirty="0"/>
-              <a:t>shares only matter when there is contention</a:t>
-            </a:r>
-            <a:r>
               <a:rPr lang="en-US" dirty="0"/>
-              <a:t> — that is, when both A and B are trying to use the CPU at the same time.</a:t>
-            </a:r>
+              <a:t>In this example, these three groups and G1 have equal shares. Under contention, G1 therefore receives approximately one quarter of the available CPU time. Shares matter only during contention: they define relative fairness, not fixed limits.</a:t>
+            </a:r>
+          </a:p>
+          <a:p>
+            <a:endParaRPr lang="en-US" dirty="0"/>
           </a:p>
           <a:p>
             <a:r>
               <a:rPr lang="en-US" dirty="0"/>
-              <a:t>So in your example:</a:t>
-            </a:r>
+              <a:t>Within G1, G1.A has 1,000 shares and G1.B has 10,000. G1.A therefore receives approximately one eleventh of G1’s allocation, or about 1/44— so around 2.3%—of the total CPU capacity under full contention.</a:t>
+            </a:r>
+          </a:p>
+          <a:p>
+            <a:endParaRPr lang="en-US" dirty="0"/>
           </a:p>
           <a:p>
             <a:r>
               <a:rPr lang="en-US" dirty="0"/>
-              <a:t>A and B each have equal shares (say, 1024 each).</a:t>
-            </a:r>
-          </a:p>
-          <a:p>
-            <a:r>
-              <a:rPr lang="en-US" dirty="0"/>
-              <a:t>P1 (in A) is CPU-bound.</a:t>
-            </a:r>
-          </a:p>
-          <a:p>
-            <a:r>
-              <a:rPr lang="en-US" dirty="0"/>
-              <a:t>P2 (in B) uses only 1 % of CPU (mostly idle).</a:t>
-            </a:r>
-          </a:p>
-          <a:p>
-            <a:r>
-              <a:rPr lang="en-US" dirty="0"/>
-              <a:t>Then:</a:t>
-            </a:r>
-          </a:p>
-          <a:p>
-            <a:r>
-              <a:rPr lang="en-US" dirty="0"/>
-              <a:t>Because B is mostly idle, the scheduler sees no contention.</a:t>
-            </a:r>
-          </a:p>
-          <a:p>
-            <a:r>
-              <a:rPr lang="en-US" dirty="0"/>
-              <a:t>P1 can temporarily use </a:t>
-            </a:r>
-            <a:r>
-              <a:rPr lang="en-US" b="1" dirty="0"/>
-              <a:t>close to 100 % of the CPU</a:t>
-            </a:r>
-            <a:r>
-              <a:rPr lang="en-US" dirty="0"/>
-              <a:t>.</a:t>
-            </a:r>
-          </a:p>
-          <a:p>
-            <a:r>
-              <a:rPr lang="en-US" dirty="0"/>
-              <a:t>When P2 starts running again, the scheduler will rebalance and gradually restore proportional fairness (~50/50).</a:t>
-            </a:r>
-          </a:p>
-          <a:p>
-            <a:r>
-              <a:rPr lang="en-US" dirty="0"/>
-              <a:t>This behavior is deliberate: </a:t>
-            </a:r>
-            <a:r>
-              <a:rPr lang="en-US" b="1" dirty="0"/>
-              <a:t>CPU shares define relative fairness under load, not fixed caps.</a:t>
-            </a:r>
-            <a:br>
-              <a:rPr lang="en-US" dirty="0"/>
-            </a:br>
-            <a:r>
-              <a:rPr lang="en-US" dirty="0"/>
-              <a:t>If you want to enforce a strict maximum, you must use </a:t>
-            </a:r>
-            <a:r>
-              <a:rPr lang="en-US" sz="1200" b="1" kern="1200" dirty="0" err="1">
+              <a:t>A strict maximum instead can be for instance enforced with </a:t>
+            </a:r>
+            <a:r>
+              <a:rPr lang="en-US" sz="1200" kern="1200" dirty="0" err="1">
                 <a:solidFill>
                   <a:schemeClr val="tx1"/>
                 </a:solidFill>
@@ -11774,36 +12028,14 @@
               <a:t>cpu.max</a:t>
             </a:r>
             <a:r>
-              <a:rPr lang="en-US" b="1" dirty="0"/>
-              <a:t> (in cgroups v2)</a:t>
-            </a:r>
-            <a:r>
               <a:rPr lang="en-US" dirty="0"/>
-              <a:t> or </a:t>
-            </a:r>
-            <a:r>
-              <a:rPr lang="en-US" b="1" dirty="0"/>
-              <a:t>CFS bandwidth control (</a:t>
-            </a:r>
-            <a:r>
-              <a:rPr lang="en-US" sz="1200" b="1" kern="1200" dirty="0" err="1">
-                <a:solidFill>
-                  <a:schemeClr val="tx1"/>
-                </a:solidFill>
-                <a:latin typeface="+mn-lt"/>
-                <a:ea typeface="+mn-ea"/>
-                <a:cs typeface="+mn-cs"/>
-              </a:rPr>
-              <a:t>cpu.cfs_quota_us</a:t>
-            </a:r>
-            <a:r>
-              <a:rPr lang="en-US" b="1" dirty="0"/>
-              <a:t>)</a:t>
-            </a:r>
-            <a:r>
-              <a:rPr lang="en-US" dirty="0"/>
-              <a:t> instead of shares.</a:t>
-            </a:r>
+              <a:t> in </a:t>
+            </a:r>
+            <a:r>
+              <a:rPr lang="en-US"/>
+              <a:t>cgroup v2.</a:t>
+            </a:r>
+            <a:endParaRPr lang="en-US" dirty="0"/>
           </a:p>
           <a:p>
             <a:endParaRPr lang="en-US" dirty="0"/>
@@ -11816,184 +12048,6 @@
             <a:extLst>
               <a:ext uri="{FF2B5EF4-FFF2-40B4-BE49-F238E27FC236}">
                 <a16:creationId xmlns:a16="http://schemas.microsoft.com/office/drawing/2014/main" id="{B3209606-3785-D6F7-BF11-FF31CC703FDE}"/>
-              </a:ext>
-            </a:extLst>
-          </p:cNvPr>
-          <p:cNvSpPr>
-            <a:spLocks noGrp="1"/>
-          </p:cNvSpPr>
-          <p:nvPr>
-            <p:ph type="sldNum" sz="quarter" idx="5"/>
-          </p:nvPr>
-        </p:nvSpPr>
-        <p:spPr/>
-        <p:txBody>
-          <a:bodyPr/>
-          <a:lstStyle/>
-          <a:p>
-            <a:pPr marL="0" marR="0" lvl="0" indent="0" algn="r" defTabSz="914400" rtl="0" eaLnBrk="1" fontAlgn="auto" latinLnBrk="0" hangingPunct="1">
-              <a:lnSpc>
-                <a:spcPct val="100000"/>
-              </a:lnSpc>
-              <a:spcBef>
-                <a:spcPts val="0"/>
-              </a:spcBef>
-              <a:spcAft>
-                <a:spcPts val="0"/>
-              </a:spcAft>
-              <a:buClrTx/>
-              <a:buSzTx/>
-              <a:buFontTx/>
-              <a:buNone/>
-              <a:tabLst/>
-              <a:defRPr/>
-            </a:pPr>
-            <a:fld id="{C55E3DE0-5E9E-8947-9DAA-E91C371FD659}" type="slidenum">
-              <a:rPr kumimoji="0" lang="en-SE" sz="1200" b="0" i="0" u="none" strike="noStrike" kern="1200" cap="none" spc="0" normalizeH="0" baseline="0" noProof="0" smtClean="0">
-                <a:ln>
-                  <a:noFill/>
-                </a:ln>
-                <a:solidFill>
-                  <a:prstClr val="black"/>
-                </a:solidFill>
-                <a:effectLst/>
-                <a:uLnTx/>
-                <a:uFillTx/>
-                <a:latin typeface="Calibri" panose="020F0502020204030204"/>
-                <a:ea typeface="+mn-ea"/>
-                <a:cs typeface="+mn-cs"/>
-              </a:rPr>
-              <a:pPr marL="0" marR="0" lvl="0" indent="0" algn="r" defTabSz="914400" rtl="0" eaLnBrk="1" fontAlgn="auto" latinLnBrk="0" hangingPunct="1">
-                <a:lnSpc>
-                  <a:spcPct val="100000"/>
-                </a:lnSpc>
-                <a:spcBef>
-                  <a:spcPts val="0"/>
-                </a:spcBef>
-                <a:spcAft>
-                  <a:spcPts val="0"/>
-                </a:spcAft>
-                <a:buClrTx/>
-                <a:buSzTx/>
-                <a:buFontTx/>
-                <a:buNone/>
-                <a:tabLst/>
-                <a:defRPr/>
-              </a:pPr>
-              <a:t>45</a:t>
-            </a:fld>
-            <a:endParaRPr kumimoji="0" lang="en-SE" sz="1200" b="0" i="0" u="none" strike="noStrike" kern="1200" cap="none" spc="0" normalizeH="0" baseline="0" noProof="0">
-              <a:ln>
-                <a:noFill/>
-              </a:ln>
-              <a:solidFill>
-                <a:prstClr val="black"/>
-              </a:solidFill>
-              <a:effectLst/>
-              <a:uLnTx/>
-              <a:uFillTx/>
-              <a:latin typeface="Calibri" panose="020F0502020204030204"/>
-              <a:ea typeface="+mn-ea"/>
-              <a:cs typeface="+mn-cs"/>
-            </a:endParaRPr>
-          </a:p>
-        </p:txBody>
-      </p:sp>
-    </p:spTree>
-    <p:extLst>
-      <p:ext uri="{BB962C8B-B14F-4D97-AF65-F5344CB8AC3E}">
-        <p14:creationId xmlns:p14="http://schemas.microsoft.com/office/powerpoint/2010/main" val="2122096367"/>
-      </p:ext>
-    </p:extLst>
-  </p:cSld>
-  <p:clrMapOvr>
-    <a:masterClrMapping/>
-  </p:clrMapOvr>
-</p:notes>
-</file>
-
-<file path=ppt/notesSlides/notesSlide21.xml><?xml version="1.0" encoding="utf-8"?>
-<p:notes xmlns:a="http://schemas.openxmlformats.org/drawingml/2006/main" xmlns:r="http://schemas.openxmlformats.org/officeDocument/2006/relationships" xmlns:p="http://schemas.openxmlformats.org/presentationml/2006/main">
-  <p:cSld>
-    <p:spTree>
-      <p:nvGrpSpPr>
-        <p:cNvPr id="1" name="">
-          <a:extLst>
-            <a:ext uri="{FF2B5EF4-FFF2-40B4-BE49-F238E27FC236}">
-              <a16:creationId xmlns:a16="http://schemas.microsoft.com/office/drawing/2014/main" id="{F622F223-54BD-32C6-7EBB-B0869C17C297}"/>
-            </a:ext>
-          </a:extLst>
-        </p:cNvPr>
-        <p:cNvGrpSpPr/>
-        <p:nvPr/>
-      </p:nvGrpSpPr>
-      <p:grpSpPr>
-        <a:xfrm>
-          <a:off x="0" y="0"/>
-          <a:ext cx="0" cy="0"/>
-          <a:chOff x="0" y="0"/>
-          <a:chExt cx="0" cy="0"/>
-        </a:xfrm>
-      </p:grpSpPr>
-      <p:sp>
-        <p:nvSpPr>
-          <p:cNvPr id="2" name="Slide Image Placeholder 1">
-            <a:extLst>
-              <a:ext uri="{FF2B5EF4-FFF2-40B4-BE49-F238E27FC236}">
-                <a16:creationId xmlns:a16="http://schemas.microsoft.com/office/drawing/2014/main" id="{BE5988F8-21CE-5255-0F50-F9F8162BF24C}"/>
-              </a:ext>
-            </a:extLst>
-          </p:cNvPr>
-          <p:cNvSpPr>
-            <a:spLocks noGrp="1" noRot="1" noChangeAspect="1"/>
-          </p:cNvSpPr>
-          <p:nvPr>
-            <p:ph type="sldImg"/>
-          </p:nvPr>
-        </p:nvSpPr>
-        <p:spPr/>
-        <p:txBody>
-          <a:bodyPr/>
-          <a:lstStyle/>
-          <a:p>
-            <a:endParaRPr lang="en-US"/>
-          </a:p>
-        </p:txBody>
-      </p:sp>
-      <p:sp>
-        <p:nvSpPr>
-          <p:cNvPr id="3" name="Notes Placeholder 2">
-            <a:extLst>
-              <a:ext uri="{FF2B5EF4-FFF2-40B4-BE49-F238E27FC236}">
-                <a16:creationId xmlns:a16="http://schemas.microsoft.com/office/drawing/2014/main" id="{67F469E6-F899-C1EB-3304-FBD66A841F1D}"/>
-              </a:ext>
-            </a:extLst>
-          </p:cNvPr>
-          <p:cNvSpPr>
-            <a:spLocks noGrp="1"/>
-          </p:cNvSpPr>
-          <p:nvPr>
-            <p:ph type="body" idx="1"/>
-          </p:nvPr>
-        </p:nvSpPr>
-        <p:spPr/>
-        <p:txBody>
-          <a:bodyPr/>
-          <a:lstStyle/>
-          <a:p>
-            <a:r>
-              <a:rPr lang="en-US" dirty="0"/>
-              <a:t>Here example with memory, in this case it is in absolute value</a:t>
-            </a:r>
-          </a:p>
-        </p:txBody>
-      </p:sp>
-      <p:sp>
-        <p:nvSpPr>
-          <p:cNvPr id="4" name="Slide Number Placeholder 3">
-            <a:extLst>
-              <a:ext uri="{FF2B5EF4-FFF2-40B4-BE49-F238E27FC236}">
-                <a16:creationId xmlns:a16="http://schemas.microsoft.com/office/drawing/2014/main" id="{1BF9E486-8F15-AB11-C6FA-03A3AFE6308D}"/>
               </a:ext>
             </a:extLst>
           </p:cNvPr>
@@ -12080,7 +12134,7 @@
     </p:spTree>
     <p:extLst>
       <p:ext uri="{BB962C8B-B14F-4D97-AF65-F5344CB8AC3E}">
-        <p14:creationId xmlns:p14="http://schemas.microsoft.com/office/powerpoint/2010/main" val="3884840774"/>
+        <p14:creationId xmlns:p14="http://schemas.microsoft.com/office/powerpoint/2010/main" val="2122096367"/>
       </p:ext>
     </p:extLst>
   </p:cSld>
@@ -12098,7 +12152,7 @@
         <p:cNvPr id="1" name="">
           <a:extLst>
             <a:ext uri="{FF2B5EF4-FFF2-40B4-BE49-F238E27FC236}">
-              <a16:creationId xmlns:a16="http://schemas.microsoft.com/office/drawing/2014/main" id="{750EC246-0D6A-7E1E-3B0B-BF21F428DC20}"/>
+              <a16:creationId xmlns:a16="http://schemas.microsoft.com/office/drawing/2014/main" id="{F622F223-54BD-32C6-7EBB-B0869C17C297}"/>
             </a:ext>
           </a:extLst>
         </p:cNvPr>
@@ -12118,7 +12172,7 @@
           <p:cNvPr id="2" name="Slide Image Placeholder 1">
             <a:extLst>
               <a:ext uri="{FF2B5EF4-FFF2-40B4-BE49-F238E27FC236}">
-                <a16:creationId xmlns:a16="http://schemas.microsoft.com/office/drawing/2014/main" id="{D44FFAF5-311A-0E65-5B55-0A54270BF45F}"/>
+                <a16:creationId xmlns:a16="http://schemas.microsoft.com/office/drawing/2014/main" id="{BE5988F8-21CE-5255-0F50-F9F8162BF24C}"/>
               </a:ext>
             </a:extLst>
           </p:cNvPr>
@@ -12143,7 +12197,7 @@
           <p:cNvPr id="3" name="Notes Placeholder 2">
             <a:extLst>
               <a:ext uri="{FF2B5EF4-FFF2-40B4-BE49-F238E27FC236}">
-                <a16:creationId xmlns:a16="http://schemas.microsoft.com/office/drawing/2014/main" id="{8A892993-F71D-A2E8-64E4-11F92E7ED165}"/>
+                <a16:creationId xmlns:a16="http://schemas.microsoft.com/office/drawing/2014/main" id="{67F469E6-F899-C1EB-3304-FBD66A841F1D}"/>
               </a:ext>
             </a:extLst>
           </p:cNvPr>
@@ -12161,8 +12215,34 @@
           <a:p>
             <a:r>
               <a:rPr lang="en-US" dirty="0"/>
-              <a:t>CPU use shares, memory is different, they use limits and priorities</a:t>
-            </a:r>
+              <a:t>Different controllers use different types of thresholds. Memory limits, for example, are commonly expressed as absolute byte values.</a:t>
+            </a:r>
+          </a:p>
+          <a:p>
+            <a:r>
+              <a:rPr lang="en-US" dirty="0"/>
+              <a:t>Here, G2.1 is limited to 1 GB and G2.2 to 1.5 GB. Together, however, they cannot use more than the 2 GB limit of their parent, G2. A child cgroup is constrained by both its own limit and its ancestors’ limits.</a:t>
+            </a:r>
+          </a:p>
+          <a:p>
+            <a:pPr marL="0" marR="0" lvl="0" indent="0" algn="l" defTabSz="914400" rtl="0" eaLnBrk="1" fontAlgn="auto" latinLnBrk="0" hangingPunct="1">
+              <a:lnSpc>
+                <a:spcPct val="100000"/>
+              </a:lnSpc>
+              <a:spcBef>
+                <a:spcPts val="0"/>
+              </a:spcBef>
+              <a:spcAft>
+                <a:spcPts val="0"/>
+              </a:spcAft>
+              <a:buClrTx/>
+              <a:buSzTx/>
+              <a:buFontTx/>
+              <a:buNone/>
+              <a:tabLst/>
+              <a:defRPr/>
+            </a:pPr>
+            <a:endParaRPr lang="en-US" dirty="0"/>
           </a:p>
         </p:txBody>
       </p:sp>
@@ -12171,7 +12251,7 @@
           <p:cNvPr id="4" name="Slide Number Placeholder 3">
             <a:extLst>
               <a:ext uri="{FF2B5EF4-FFF2-40B4-BE49-F238E27FC236}">
-                <a16:creationId xmlns:a16="http://schemas.microsoft.com/office/drawing/2014/main" id="{73F4E0D2-F73D-7830-2E8F-066F475B318C}"/>
+                <a16:creationId xmlns:a16="http://schemas.microsoft.com/office/drawing/2014/main" id="{1BF9E486-8F15-AB11-C6FA-03A3AFE6308D}"/>
               </a:ext>
             </a:extLst>
           </p:cNvPr>
@@ -12258,7 +12338,7 @@
     </p:spTree>
     <p:extLst>
       <p:ext uri="{BB962C8B-B14F-4D97-AF65-F5344CB8AC3E}">
-        <p14:creationId xmlns:p14="http://schemas.microsoft.com/office/powerpoint/2010/main" val="917175331"/>
+        <p14:creationId xmlns:p14="http://schemas.microsoft.com/office/powerpoint/2010/main" val="3884840774"/>
       </p:ext>
     </p:extLst>
   </p:cSld>
@@ -12276,7 +12356,7 @@
         <p:cNvPr id="1" name="">
           <a:extLst>
             <a:ext uri="{FF2B5EF4-FFF2-40B4-BE49-F238E27FC236}">
-              <a16:creationId xmlns:a16="http://schemas.microsoft.com/office/drawing/2014/main" id="{08636406-ED90-B8EC-A04F-5A388590E8C8}"/>
+              <a16:creationId xmlns:a16="http://schemas.microsoft.com/office/drawing/2014/main" id="{750EC246-0D6A-7E1E-3B0B-BF21F428DC20}"/>
             </a:ext>
           </a:extLst>
         </p:cNvPr>
@@ -12296,7 +12376,7 @@
           <p:cNvPr id="2" name="Slide Image Placeholder 1">
             <a:extLst>
               <a:ext uri="{FF2B5EF4-FFF2-40B4-BE49-F238E27FC236}">
-                <a16:creationId xmlns:a16="http://schemas.microsoft.com/office/drawing/2014/main" id="{25D176EB-294B-2DC0-F370-D8F083C4EC6D}"/>
+                <a16:creationId xmlns:a16="http://schemas.microsoft.com/office/drawing/2014/main" id="{D44FFAF5-311A-0E65-5B55-0A54270BF45F}"/>
               </a:ext>
             </a:extLst>
           </p:cNvPr>
@@ -12321,7 +12401,7 @@
           <p:cNvPr id="3" name="Notes Placeholder 2">
             <a:extLst>
               <a:ext uri="{FF2B5EF4-FFF2-40B4-BE49-F238E27FC236}">
-                <a16:creationId xmlns:a16="http://schemas.microsoft.com/office/drawing/2014/main" id="{251FAB40-6667-00EE-5B4D-CCD3D776FE44}"/>
+                <a16:creationId xmlns:a16="http://schemas.microsoft.com/office/drawing/2014/main" id="{8A892993-F71D-A2E8-64E4-11F92E7ED165}"/>
               </a:ext>
             </a:extLst>
           </p:cNvPr>
@@ -12339,7 +12419,7 @@
           <a:p>
             <a:r>
               <a:rPr lang="en-US" dirty="0"/>
-              <a:t>CPU use shares, memory is different, they use limits and priorities</a:t>
+              <a:t>This file shows the cgroup membership of process 4042126. Each line identifies a cgroup hierarchy or controller and the path of the cgroup to which the process belongs.</a:t>
             </a:r>
           </a:p>
         </p:txBody>
@@ -12349,7 +12429,7 @@
           <p:cNvPr id="4" name="Slide Number Placeholder 3">
             <a:extLst>
               <a:ext uri="{FF2B5EF4-FFF2-40B4-BE49-F238E27FC236}">
-                <a16:creationId xmlns:a16="http://schemas.microsoft.com/office/drawing/2014/main" id="{7BF30940-32E8-6D70-67ED-7DFB3B2201AF}"/>
+                <a16:creationId xmlns:a16="http://schemas.microsoft.com/office/drawing/2014/main" id="{73F4E0D2-F73D-7830-2E8F-066F475B318C}"/>
               </a:ext>
             </a:extLst>
           </p:cNvPr>
@@ -12415,6 +12495,229 @@
                 <a:defRPr/>
               </a:pPr>
               <a:t>48</a:t>
+            </a:fld>
+            <a:endParaRPr kumimoji="0" lang="en-SE" sz="1200" b="0" i="0" u="none" strike="noStrike" kern="1200" cap="none" spc="0" normalizeH="0" baseline="0" noProof="0">
+              <a:ln>
+                <a:noFill/>
+              </a:ln>
+              <a:solidFill>
+                <a:prstClr val="black"/>
+              </a:solidFill>
+              <a:effectLst/>
+              <a:uLnTx/>
+              <a:uFillTx/>
+              <a:latin typeface="Calibri" panose="020F0502020204030204"/>
+              <a:ea typeface="+mn-ea"/>
+              <a:cs typeface="+mn-cs"/>
+            </a:endParaRPr>
+          </a:p>
+        </p:txBody>
+      </p:sp>
+    </p:spTree>
+    <p:extLst>
+      <p:ext uri="{BB962C8B-B14F-4D97-AF65-F5344CB8AC3E}">
+        <p14:creationId xmlns:p14="http://schemas.microsoft.com/office/powerpoint/2010/main" val="917175331"/>
+      </p:ext>
+    </p:extLst>
+  </p:cSld>
+  <p:clrMapOvr>
+    <a:masterClrMapping/>
+  </p:clrMapOvr>
+</p:notes>
+</file>
+
+<file path=ppt/notesSlides/notesSlide24.xml><?xml version="1.0" encoding="utf-8"?>
+<p:notes xmlns:a="http://schemas.openxmlformats.org/drawingml/2006/main" xmlns:r="http://schemas.openxmlformats.org/officeDocument/2006/relationships" xmlns:p="http://schemas.openxmlformats.org/presentationml/2006/main">
+  <p:cSld>
+    <p:spTree>
+      <p:nvGrpSpPr>
+        <p:cNvPr id="1" name="">
+          <a:extLst>
+            <a:ext uri="{FF2B5EF4-FFF2-40B4-BE49-F238E27FC236}">
+              <a16:creationId xmlns:a16="http://schemas.microsoft.com/office/drawing/2014/main" id="{08636406-ED90-B8EC-A04F-5A388590E8C8}"/>
+            </a:ext>
+          </a:extLst>
+        </p:cNvPr>
+        <p:cNvGrpSpPr/>
+        <p:nvPr/>
+      </p:nvGrpSpPr>
+      <p:grpSpPr>
+        <a:xfrm>
+          <a:off x="0" y="0"/>
+          <a:ext cx="0" cy="0"/>
+          <a:chOff x="0" y="0"/>
+          <a:chExt cx="0" cy="0"/>
+        </a:xfrm>
+      </p:grpSpPr>
+      <p:sp>
+        <p:nvSpPr>
+          <p:cNvPr id="2" name="Slide Image Placeholder 1">
+            <a:extLst>
+              <a:ext uri="{FF2B5EF4-FFF2-40B4-BE49-F238E27FC236}">
+                <a16:creationId xmlns:a16="http://schemas.microsoft.com/office/drawing/2014/main" id="{25D176EB-294B-2DC0-F370-D8F083C4EC6D}"/>
+              </a:ext>
+            </a:extLst>
+          </p:cNvPr>
+          <p:cNvSpPr>
+            <a:spLocks noGrp="1" noRot="1" noChangeAspect="1"/>
+          </p:cNvSpPr>
+          <p:nvPr>
+            <p:ph type="sldImg"/>
+          </p:nvPr>
+        </p:nvSpPr>
+        <p:spPr/>
+        <p:txBody>
+          <a:bodyPr/>
+          <a:lstStyle/>
+          <a:p>
+            <a:endParaRPr lang="en-US"/>
+          </a:p>
+        </p:txBody>
+      </p:sp>
+      <p:sp>
+        <p:nvSpPr>
+          <p:cNvPr id="3" name="Notes Placeholder 2">
+            <a:extLst>
+              <a:ext uri="{FF2B5EF4-FFF2-40B4-BE49-F238E27FC236}">
+                <a16:creationId xmlns:a16="http://schemas.microsoft.com/office/drawing/2014/main" id="{251FAB40-6667-00EE-5B4D-CCD3D776FE44}"/>
+              </a:ext>
+            </a:extLst>
+          </p:cNvPr>
+          <p:cNvSpPr>
+            <a:spLocks noGrp="1"/>
+          </p:cNvSpPr>
+          <p:nvPr>
+            <p:ph type="body" idx="1"/>
+          </p:nvPr>
+        </p:nvSpPr>
+        <p:spPr/>
+        <p:txBody>
+          <a:bodyPr/>
+          <a:lstStyle/>
+          <a:p>
+            <a:r>
+              <a:rPr lang="en-US" dirty="0"/>
+              <a:t>This directory contains the cgroup v1 </a:t>
+            </a:r>
+            <a:r>
+              <a:rPr lang="en-US" sz="1200" kern="1200" dirty="0" err="1">
+                <a:solidFill>
+                  <a:schemeClr val="tx1"/>
+                </a:solidFill>
+                <a:latin typeface="+mn-lt"/>
+                <a:ea typeface="+mn-ea"/>
+                <a:cs typeface="+mn-cs"/>
+              </a:rPr>
+              <a:t>blkio</a:t>
+            </a:r>
+            <a:r>
+              <a:rPr lang="en-US" dirty="0"/>
+              <a:t> controller files for </a:t>
+            </a:r>
+            <a:r>
+              <a:rPr lang="en-US" sz="1200" kern="1200" dirty="0" err="1">
+                <a:solidFill>
+                  <a:schemeClr val="tx1"/>
+                </a:solidFill>
+                <a:latin typeface="+mn-lt"/>
+                <a:ea typeface="+mn-ea"/>
+                <a:cs typeface="+mn-cs"/>
+              </a:rPr>
+              <a:t>user.slice</a:t>
+            </a:r>
+            <a:r>
+              <a:rPr lang="en-US" dirty="0"/>
+              <a:t>. For example, reading </a:t>
+            </a:r>
+            <a:r>
+              <a:rPr lang="en-US" sz="1200" kern="1200" dirty="0" err="1">
+                <a:solidFill>
+                  <a:schemeClr val="tx1"/>
+                </a:solidFill>
+                <a:latin typeface="+mn-lt"/>
+                <a:ea typeface="+mn-ea"/>
+                <a:cs typeface="+mn-cs"/>
+              </a:rPr>
+              <a:t>blkio.throttle.io_service_bytes</a:t>
+            </a:r>
+            <a:r>
+              <a:rPr lang="en-US" dirty="0"/>
+              <a:t> shows the accumulated bytes transferred by devices for this cgroup.</a:t>
+            </a:r>
+          </a:p>
+        </p:txBody>
+      </p:sp>
+      <p:sp>
+        <p:nvSpPr>
+          <p:cNvPr id="4" name="Slide Number Placeholder 3">
+            <a:extLst>
+              <a:ext uri="{FF2B5EF4-FFF2-40B4-BE49-F238E27FC236}">
+                <a16:creationId xmlns:a16="http://schemas.microsoft.com/office/drawing/2014/main" id="{7BF30940-32E8-6D70-67ED-7DFB3B2201AF}"/>
+              </a:ext>
+            </a:extLst>
+          </p:cNvPr>
+          <p:cNvSpPr>
+            <a:spLocks noGrp="1"/>
+          </p:cNvSpPr>
+          <p:nvPr>
+            <p:ph type="sldNum" sz="quarter" idx="5"/>
+          </p:nvPr>
+        </p:nvSpPr>
+        <p:spPr/>
+        <p:txBody>
+          <a:bodyPr/>
+          <a:lstStyle/>
+          <a:p>
+            <a:pPr marL="0" marR="0" lvl="0" indent="0" algn="r" defTabSz="914400" rtl="0" eaLnBrk="1" fontAlgn="auto" latinLnBrk="0" hangingPunct="1">
+              <a:lnSpc>
+                <a:spcPct val="100000"/>
+              </a:lnSpc>
+              <a:spcBef>
+                <a:spcPts val="0"/>
+              </a:spcBef>
+              <a:spcAft>
+                <a:spcPts val="0"/>
+              </a:spcAft>
+              <a:buClrTx/>
+              <a:buSzTx/>
+              <a:buFontTx/>
+              <a:buNone/>
+              <a:tabLst/>
+              <a:defRPr/>
+            </a:pPr>
+            <a:fld id="{C55E3DE0-5E9E-8947-9DAA-E91C371FD659}" type="slidenum">
+              <a:rPr kumimoji="0" lang="en-SE" sz="1200" b="0" i="0" u="none" strike="noStrike" kern="1200" cap="none" spc="0" normalizeH="0" baseline="0" noProof="0" smtClean="0">
+                <a:ln>
+                  <a:noFill/>
+                </a:ln>
+                <a:solidFill>
+                  <a:prstClr val="black"/>
+                </a:solidFill>
+                <a:effectLst/>
+                <a:uLnTx/>
+                <a:uFillTx/>
+                <a:latin typeface="Calibri" panose="020F0502020204030204"/>
+                <a:ea typeface="+mn-ea"/>
+                <a:cs typeface="+mn-cs"/>
+              </a:rPr>
+              <a:pPr marL="0" marR="0" lvl="0" indent="0" algn="r" defTabSz="914400" rtl="0" eaLnBrk="1" fontAlgn="auto" latinLnBrk="0" hangingPunct="1">
+                <a:lnSpc>
+                  <a:spcPct val="100000"/>
+                </a:lnSpc>
+                <a:spcBef>
+                  <a:spcPts val="0"/>
+                </a:spcBef>
+                <a:spcAft>
+                  <a:spcPts val="0"/>
+                </a:spcAft>
+                <a:buClrTx/>
+                <a:buSzTx/>
+                <a:buFontTx/>
+                <a:buNone/>
+                <a:tabLst/>
+                <a:defRPr/>
+              </a:pPr>
+              <a:t>49</a:t>
             </a:fld>
             <a:endParaRPr kumimoji="0" lang="en-SE" sz="1200" b="0" i="0" u="none" strike="noStrike" kern="1200" cap="none" spc="0" normalizeH="0" baseline="0" noProof="0">
               <a:ln>
@@ -25010,188 +25313,188 @@
           <a:custGeom>
             <a:avLst/>
             <a:gdLst>
-              <a:gd name="connsiteX0" fmla="*/ 0 w 10853928"/>
-              <a:gd name="connsiteY0" fmla="*/ 0 h 18288"/>
-              <a:gd name="connsiteX1" fmla="*/ 461292 w 10853928"/>
-              <a:gd name="connsiteY1" fmla="*/ 0 h 18288"/>
-              <a:gd name="connsiteX2" fmla="*/ 1139662 w 10853928"/>
-              <a:gd name="connsiteY2" fmla="*/ 0 h 18288"/>
-              <a:gd name="connsiteX3" fmla="*/ 1926572 w 10853928"/>
-              <a:gd name="connsiteY3" fmla="*/ 0 h 18288"/>
-              <a:gd name="connsiteX4" fmla="*/ 2279325 w 10853928"/>
-              <a:gd name="connsiteY4" fmla="*/ 0 h 18288"/>
-              <a:gd name="connsiteX5" fmla="*/ 2632078 w 10853928"/>
-              <a:gd name="connsiteY5" fmla="*/ 0 h 18288"/>
-              <a:gd name="connsiteX6" fmla="*/ 3527527 w 10853928"/>
-              <a:gd name="connsiteY6" fmla="*/ 0 h 18288"/>
-              <a:gd name="connsiteX7" fmla="*/ 4205897 w 10853928"/>
-              <a:gd name="connsiteY7" fmla="*/ 0 h 18288"/>
-              <a:gd name="connsiteX8" fmla="*/ 4558650 w 10853928"/>
-              <a:gd name="connsiteY8" fmla="*/ 0 h 18288"/>
-              <a:gd name="connsiteX9" fmla="*/ 5237020 w 10853928"/>
-              <a:gd name="connsiteY9" fmla="*/ 0 h 18288"/>
-              <a:gd name="connsiteX10" fmla="*/ 6132469 w 10853928"/>
-              <a:gd name="connsiteY10" fmla="*/ 0 h 18288"/>
-              <a:gd name="connsiteX11" fmla="*/ 6702301 w 10853928"/>
-              <a:gd name="connsiteY11" fmla="*/ 0 h 18288"/>
-              <a:gd name="connsiteX12" fmla="*/ 7272132 w 10853928"/>
-              <a:gd name="connsiteY12" fmla="*/ 0 h 18288"/>
-              <a:gd name="connsiteX13" fmla="*/ 7950502 w 10853928"/>
-              <a:gd name="connsiteY13" fmla="*/ 0 h 18288"/>
-              <a:gd name="connsiteX14" fmla="*/ 8737412 w 10853928"/>
-              <a:gd name="connsiteY14" fmla="*/ 0 h 18288"/>
-              <a:gd name="connsiteX15" fmla="*/ 9524322 w 10853928"/>
-              <a:gd name="connsiteY15" fmla="*/ 0 h 18288"/>
-              <a:gd name="connsiteX16" fmla="*/ 10853928 w 10853928"/>
-              <a:gd name="connsiteY16" fmla="*/ 0 h 18288"/>
-              <a:gd name="connsiteX17" fmla="*/ 10853928 w 10853928"/>
-              <a:gd name="connsiteY17" fmla="*/ 18288 h 18288"/>
-              <a:gd name="connsiteX18" fmla="*/ 10392636 w 10853928"/>
-              <a:gd name="connsiteY18" fmla="*/ 18288 h 18288"/>
-              <a:gd name="connsiteX19" fmla="*/ 9497187 w 10853928"/>
-              <a:gd name="connsiteY19" fmla="*/ 18288 h 18288"/>
-              <a:gd name="connsiteX20" fmla="*/ 8818817 w 10853928"/>
-              <a:gd name="connsiteY20" fmla="*/ 18288 h 18288"/>
-              <a:gd name="connsiteX21" fmla="*/ 8466064 w 10853928"/>
-              <a:gd name="connsiteY21" fmla="*/ 18288 h 18288"/>
-              <a:gd name="connsiteX22" fmla="*/ 7787693 w 10853928"/>
-              <a:gd name="connsiteY22" fmla="*/ 18288 h 18288"/>
-              <a:gd name="connsiteX23" fmla="*/ 7217862 w 10853928"/>
-              <a:gd name="connsiteY23" fmla="*/ 18288 h 18288"/>
-              <a:gd name="connsiteX24" fmla="*/ 6648031 w 10853928"/>
-              <a:gd name="connsiteY24" fmla="*/ 18288 h 18288"/>
-              <a:gd name="connsiteX25" fmla="*/ 6078200 w 10853928"/>
-              <a:gd name="connsiteY25" fmla="*/ 18288 h 18288"/>
-              <a:gd name="connsiteX26" fmla="*/ 5508368 w 10853928"/>
-              <a:gd name="connsiteY26" fmla="*/ 18288 h 18288"/>
-              <a:gd name="connsiteX27" fmla="*/ 4721459 w 10853928"/>
-              <a:gd name="connsiteY27" fmla="*/ 18288 h 18288"/>
-              <a:gd name="connsiteX28" fmla="*/ 4043088 w 10853928"/>
-              <a:gd name="connsiteY28" fmla="*/ 18288 h 18288"/>
-              <a:gd name="connsiteX29" fmla="*/ 3690336 w 10853928"/>
-              <a:gd name="connsiteY29" fmla="*/ 18288 h 18288"/>
-              <a:gd name="connsiteX30" fmla="*/ 3120504 w 10853928"/>
-              <a:gd name="connsiteY30" fmla="*/ 18288 h 18288"/>
-              <a:gd name="connsiteX31" fmla="*/ 2333595 w 10853928"/>
-              <a:gd name="connsiteY31" fmla="*/ 18288 h 18288"/>
-              <a:gd name="connsiteX32" fmla="*/ 1872303 w 10853928"/>
-              <a:gd name="connsiteY32" fmla="*/ 18288 h 18288"/>
-              <a:gd name="connsiteX33" fmla="*/ 976854 w 10853928"/>
-              <a:gd name="connsiteY33" fmla="*/ 18288 h 18288"/>
-              <a:gd name="connsiteX34" fmla="*/ 0 w 10853928"/>
-              <a:gd name="connsiteY34" fmla="*/ 18288 h 18288"/>
-              <a:gd name="connsiteX35" fmla="*/ 0 w 10853928"/>
-              <a:gd name="connsiteY35" fmla="*/ 0 h 18288"/>
+              <a:gd name="csX0" fmla="*/ 0 w 10853928"/>
+              <a:gd name="csY0" fmla="*/ 0 h 18288"/>
+              <a:gd name="csX1" fmla="*/ 461292 w 10853928"/>
+              <a:gd name="csY1" fmla="*/ 0 h 18288"/>
+              <a:gd name="csX2" fmla="*/ 1139662 w 10853928"/>
+              <a:gd name="csY2" fmla="*/ 0 h 18288"/>
+              <a:gd name="csX3" fmla="*/ 1926572 w 10853928"/>
+              <a:gd name="csY3" fmla="*/ 0 h 18288"/>
+              <a:gd name="csX4" fmla="*/ 2279325 w 10853928"/>
+              <a:gd name="csY4" fmla="*/ 0 h 18288"/>
+              <a:gd name="csX5" fmla="*/ 2632078 w 10853928"/>
+              <a:gd name="csY5" fmla="*/ 0 h 18288"/>
+              <a:gd name="csX6" fmla="*/ 3527527 w 10853928"/>
+              <a:gd name="csY6" fmla="*/ 0 h 18288"/>
+              <a:gd name="csX7" fmla="*/ 4205897 w 10853928"/>
+              <a:gd name="csY7" fmla="*/ 0 h 18288"/>
+              <a:gd name="csX8" fmla="*/ 4558650 w 10853928"/>
+              <a:gd name="csY8" fmla="*/ 0 h 18288"/>
+              <a:gd name="csX9" fmla="*/ 5237020 w 10853928"/>
+              <a:gd name="csY9" fmla="*/ 0 h 18288"/>
+              <a:gd name="csX10" fmla="*/ 6132469 w 10853928"/>
+              <a:gd name="csY10" fmla="*/ 0 h 18288"/>
+              <a:gd name="csX11" fmla="*/ 6702301 w 10853928"/>
+              <a:gd name="csY11" fmla="*/ 0 h 18288"/>
+              <a:gd name="csX12" fmla="*/ 7272132 w 10853928"/>
+              <a:gd name="csY12" fmla="*/ 0 h 18288"/>
+              <a:gd name="csX13" fmla="*/ 7950502 w 10853928"/>
+              <a:gd name="csY13" fmla="*/ 0 h 18288"/>
+              <a:gd name="csX14" fmla="*/ 8737412 w 10853928"/>
+              <a:gd name="csY14" fmla="*/ 0 h 18288"/>
+              <a:gd name="csX15" fmla="*/ 9524322 w 10853928"/>
+              <a:gd name="csY15" fmla="*/ 0 h 18288"/>
+              <a:gd name="csX16" fmla="*/ 10853928 w 10853928"/>
+              <a:gd name="csY16" fmla="*/ 0 h 18288"/>
+              <a:gd name="csX17" fmla="*/ 10853928 w 10853928"/>
+              <a:gd name="csY17" fmla="*/ 18288 h 18288"/>
+              <a:gd name="csX18" fmla="*/ 10392636 w 10853928"/>
+              <a:gd name="csY18" fmla="*/ 18288 h 18288"/>
+              <a:gd name="csX19" fmla="*/ 9497187 w 10853928"/>
+              <a:gd name="csY19" fmla="*/ 18288 h 18288"/>
+              <a:gd name="csX20" fmla="*/ 8818817 w 10853928"/>
+              <a:gd name="csY20" fmla="*/ 18288 h 18288"/>
+              <a:gd name="csX21" fmla="*/ 8466064 w 10853928"/>
+              <a:gd name="csY21" fmla="*/ 18288 h 18288"/>
+              <a:gd name="csX22" fmla="*/ 7787693 w 10853928"/>
+              <a:gd name="csY22" fmla="*/ 18288 h 18288"/>
+              <a:gd name="csX23" fmla="*/ 7217862 w 10853928"/>
+              <a:gd name="csY23" fmla="*/ 18288 h 18288"/>
+              <a:gd name="csX24" fmla="*/ 6648031 w 10853928"/>
+              <a:gd name="csY24" fmla="*/ 18288 h 18288"/>
+              <a:gd name="csX25" fmla="*/ 6078200 w 10853928"/>
+              <a:gd name="csY25" fmla="*/ 18288 h 18288"/>
+              <a:gd name="csX26" fmla="*/ 5508368 w 10853928"/>
+              <a:gd name="csY26" fmla="*/ 18288 h 18288"/>
+              <a:gd name="csX27" fmla="*/ 4721459 w 10853928"/>
+              <a:gd name="csY27" fmla="*/ 18288 h 18288"/>
+              <a:gd name="csX28" fmla="*/ 4043088 w 10853928"/>
+              <a:gd name="csY28" fmla="*/ 18288 h 18288"/>
+              <a:gd name="csX29" fmla="*/ 3690336 w 10853928"/>
+              <a:gd name="csY29" fmla="*/ 18288 h 18288"/>
+              <a:gd name="csX30" fmla="*/ 3120504 w 10853928"/>
+              <a:gd name="csY30" fmla="*/ 18288 h 18288"/>
+              <a:gd name="csX31" fmla="*/ 2333595 w 10853928"/>
+              <a:gd name="csY31" fmla="*/ 18288 h 18288"/>
+              <a:gd name="csX32" fmla="*/ 1872303 w 10853928"/>
+              <a:gd name="csY32" fmla="*/ 18288 h 18288"/>
+              <a:gd name="csX33" fmla="*/ 976854 w 10853928"/>
+              <a:gd name="csY33" fmla="*/ 18288 h 18288"/>
+              <a:gd name="csX34" fmla="*/ 0 w 10853928"/>
+              <a:gd name="csY34" fmla="*/ 18288 h 18288"/>
+              <a:gd name="csX35" fmla="*/ 0 w 10853928"/>
+              <a:gd name="csY35" fmla="*/ 0 h 18288"/>
             </a:gdLst>
             <a:ahLst/>
             <a:cxnLst>
               <a:cxn ang="0">
-                <a:pos x="connsiteX0" y="connsiteY0"/>
+                <a:pos x="csX0" y="csY0"/>
               </a:cxn>
               <a:cxn ang="0">
-                <a:pos x="connsiteX1" y="connsiteY1"/>
+                <a:pos x="csX1" y="csY1"/>
               </a:cxn>
               <a:cxn ang="0">
-                <a:pos x="connsiteX2" y="connsiteY2"/>
+                <a:pos x="csX2" y="csY2"/>
               </a:cxn>
               <a:cxn ang="0">
-                <a:pos x="connsiteX3" y="connsiteY3"/>
+                <a:pos x="csX3" y="csY3"/>
               </a:cxn>
               <a:cxn ang="0">
-                <a:pos x="connsiteX4" y="connsiteY4"/>
+                <a:pos x="csX4" y="csY4"/>
               </a:cxn>
               <a:cxn ang="0">
-                <a:pos x="connsiteX5" y="connsiteY5"/>
+                <a:pos x="csX5" y="csY5"/>
               </a:cxn>
               <a:cxn ang="0">
-                <a:pos x="connsiteX6" y="connsiteY6"/>
+                <a:pos x="csX6" y="csY6"/>
               </a:cxn>
               <a:cxn ang="0">
-                <a:pos x="connsiteX7" y="connsiteY7"/>
+                <a:pos x="csX7" y="csY7"/>
               </a:cxn>
               <a:cxn ang="0">
-                <a:pos x="connsiteX8" y="connsiteY8"/>
+                <a:pos x="csX8" y="csY8"/>
               </a:cxn>
               <a:cxn ang="0">
-                <a:pos x="connsiteX9" y="connsiteY9"/>
+                <a:pos x="csX9" y="csY9"/>
               </a:cxn>
               <a:cxn ang="0">
-                <a:pos x="connsiteX10" y="connsiteY10"/>
+                <a:pos x="csX10" y="csY10"/>
               </a:cxn>
               <a:cxn ang="0">
-                <a:pos x="connsiteX11" y="connsiteY11"/>
+                <a:pos x="csX11" y="csY11"/>
               </a:cxn>
               <a:cxn ang="0">
-                <a:pos x="connsiteX12" y="connsiteY12"/>
+                <a:pos x="csX12" y="csY12"/>
               </a:cxn>
               <a:cxn ang="0">
-                <a:pos x="connsiteX13" y="connsiteY13"/>
+                <a:pos x="csX13" y="csY13"/>
               </a:cxn>
               <a:cxn ang="0">
-                <a:pos x="connsiteX14" y="connsiteY14"/>
+                <a:pos x="csX14" y="csY14"/>
               </a:cxn>
               <a:cxn ang="0">
-                <a:pos x="connsiteX15" y="connsiteY15"/>
+                <a:pos x="csX15" y="csY15"/>
               </a:cxn>
               <a:cxn ang="0">
-                <a:pos x="connsiteX16" y="connsiteY16"/>
+                <a:pos x="csX16" y="csY16"/>
               </a:cxn>
               <a:cxn ang="0">
-                <a:pos x="connsiteX17" y="connsiteY17"/>
+                <a:pos x="csX17" y="csY17"/>
               </a:cxn>
               <a:cxn ang="0">
-                <a:pos x="connsiteX18" y="connsiteY18"/>
+                <a:pos x="csX18" y="csY18"/>
               </a:cxn>
               <a:cxn ang="0">
-                <a:pos x="connsiteX19" y="connsiteY19"/>
+                <a:pos x="csX19" y="csY19"/>
               </a:cxn>
               <a:cxn ang="0">
-                <a:pos x="connsiteX20" y="connsiteY20"/>
+                <a:pos x="csX20" y="csY20"/>
               </a:cxn>
               <a:cxn ang="0">
-                <a:pos x="connsiteX21" y="connsiteY21"/>
+                <a:pos x="csX21" y="csY21"/>
               </a:cxn>
               <a:cxn ang="0">
-                <a:pos x="connsiteX22" y="connsiteY22"/>
+                <a:pos x="csX22" y="csY22"/>
               </a:cxn>
               <a:cxn ang="0">
-                <a:pos x="connsiteX23" y="connsiteY23"/>
+                <a:pos x="csX23" y="csY23"/>
               </a:cxn>
               <a:cxn ang="0">
-                <a:pos x="connsiteX24" y="connsiteY24"/>
+                <a:pos x="csX24" y="csY24"/>
               </a:cxn>
               <a:cxn ang="0">
-                <a:pos x="connsiteX25" y="connsiteY25"/>
+                <a:pos x="csX25" y="csY25"/>
               </a:cxn>
               <a:cxn ang="0">
-                <a:pos x="connsiteX26" y="connsiteY26"/>
+                <a:pos x="csX26" y="csY26"/>
               </a:cxn>
               <a:cxn ang="0">
-                <a:pos x="connsiteX27" y="connsiteY27"/>
+                <a:pos x="csX27" y="csY27"/>
               </a:cxn>
               <a:cxn ang="0">
-                <a:pos x="connsiteX28" y="connsiteY28"/>
+                <a:pos x="csX28" y="csY28"/>
               </a:cxn>
               <a:cxn ang="0">
-                <a:pos x="connsiteX29" y="connsiteY29"/>
+                <a:pos x="csX29" y="csY29"/>
               </a:cxn>
               <a:cxn ang="0">
-                <a:pos x="connsiteX30" y="connsiteY30"/>
+                <a:pos x="csX30" y="csY30"/>
               </a:cxn>
               <a:cxn ang="0">
-                <a:pos x="connsiteX31" y="connsiteY31"/>
+                <a:pos x="csX31" y="csY31"/>
               </a:cxn>
               <a:cxn ang="0">
-                <a:pos x="connsiteX32" y="connsiteY32"/>
+                <a:pos x="csX32" y="csY32"/>
               </a:cxn>
               <a:cxn ang="0">
-                <a:pos x="connsiteX33" y="connsiteY33"/>
+                <a:pos x="csX33" y="csY33"/>
               </a:cxn>
               <a:cxn ang="0">
-                <a:pos x="connsiteX34" y="connsiteY34"/>
+                <a:pos x="csX34" y="csY34"/>
               </a:cxn>
               <a:cxn ang="0">
-                <a:pos x="connsiteX35" y="connsiteY35"/>
+                <a:pos x="csX35" y="csY35"/>
               </a:cxn>
             </a:cxnLst>
             <a:rect l="l" t="t" r="r" b="b"/>
@@ -25641,19 +25944,19 @@
         </p:spPr>
         <p:txBody>
           <a:bodyPr>
-            <a:normAutofit fontScale="92500" lnSpcReduction="10000"/>
+            <a:normAutofit/>
           </a:bodyPr>
           <a:lstStyle/>
           <a:p>
             <a:r>
-              <a:rPr lang="en-US" sz="3200" dirty="0"/>
+              <a:rPr lang="en-US" dirty="0"/>
               <a:t>VMs virtualize hardware</a:t>
             </a:r>
           </a:p>
           <a:p>
             <a:r>
-              <a:rPr lang="en-US" sz="3200" dirty="0"/>
-              <a:t>Containers virtualize OSs</a:t>
+              <a:rPr lang="en-US" dirty="0"/>
+              <a:t>Containers provide OS-level virtualization</a:t>
             </a:r>
           </a:p>
           <a:p>
@@ -25662,7 +25965,7 @@
               <a:buChar char="à"/>
             </a:pPr>
             <a:r>
-              <a:rPr lang="en-US" sz="3200" dirty="0">
+              <a:rPr lang="en-US" sz="2800" dirty="0">
                 <a:sym typeface="Wingdings" pitchFamily="2" charset="2"/>
               </a:rPr>
               <a:t>Each process / set of processes believes it’s running in its own OS</a:t>
@@ -25670,7 +25973,7 @@
           </a:p>
           <a:p>
             <a:r>
-              <a:rPr lang="en-US" sz="3200" dirty="0">
+              <a:rPr lang="en-US" dirty="0">
                 <a:sym typeface="Wingdings" pitchFamily="2" charset="2"/>
               </a:rPr>
               <a:t>Note, under the hood:</a:t>
@@ -25679,16 +25982,16 @@
           <a:p>
             <a:pPr lvl="1"/>
             <a:r>
-              <a:rPr lang="en-US" sz="3200" dirty="0">
+              <a:rPr lang="en-US" sz="2800" dirty="0">
                 <a:sym typeface="Wingdings" pitchFamily="2" charset="2"/>
               </a:rPr>
-              <a:t>Processes share the same OS and hardware. Processes are isolated, but the performance of an isolated process / set of processes is always somehow affected by what other processes do</a:t>
+              <a:t>Processes share the same OS and hardware. Processes are isolated, but the performance of a set of processes is always somehow affected by what other processes do</a:t>
             </a:r>
           </a:p>
           <a:p>
             <a:pPr lvl="1"/>
             <a:r>
-              <a:rPr lang="en-US" sz="3200" dirty="0"/>
+              <a:rPr lang="en-US" sz="2800" dirty="0"/>
               <a:t>All processes / sets of processes need to share OS</a:t>
             </a:r>
           </a:p>
@@ -25992,188 +26295,188 @@
           <a:custGeom>
             <a:avLst/>
             <a:gdLst>
-              <a:gd name="connsiteX0" fmla="*/ 0 w 10853928"/>
-              <a:gd name="connsiteY0" fmla="*/ 0 h 18288"/>
-              <a:gd name="connsiteX1" fmla="*/ 461292 w 10853928"/>
-              <a:gd name="connsiteY1" fmla="*/ 0 h 18288"/>
-              <a:gd name="connsiteX2" fmla="*/ 1139662 w 10853928"/>
-              <a:gd name="connsiteY2" fmla="*/ 0 h 18288"/>
-              <a:gd name="connsiteX3" fmla="*/ 1926572 w 10853928"/>
-              <a:gd name="connsiteY3" fmla="*/ 0 h 18288"/>
-              <a:gd name="connsiteX4" fmla="*/ 2279325 w 10853928"/>
-              <a:gd name="connsiteY4" fmla="*/ 0 h 18288"/>
-              <a:gd name="connsiteX5" fmla="*/ 2632078 w 10853928"/>
-              <a:gd name="connsiteY5" fmla="*/ 0 h 18288"/>
-              <a:gd name="connsiteX6" fmla="*/ 3527527 w 10853928"/>
-              <a:gd name="connsiteY6" fmla="*/ 0 h 18288"/>
-              <a:gd name="connsiteX7" fmla="*/ 4205897 w 10853928"/>
-              <a:gd name="connsiteY7" fmla="*/ 0 h 18288"/>
-              <a:gd name="connsiteX8" fmla="*/ 4558650 w 10853928"/>
-              <a:gd name="connsiteY8" fmla="*/ 0 h 18288"/>
-              <a:gd name="connsiteX9" fmla="*/ 5237020 w 10853928"/>
-              <a:gd name="connsiteY9" fmla="*/ 0 h 18288"/>
-              <a:gd name="connsiteX10" fmla="*/ 6132469 w 10853928"/>
-              <a:gd name="connsiteY10" fmla="*/ 0 h 18288"/>
-              <a:gd name="connsiteX11" fmla="*/ 6702301 w 10853928"/>
-              <a:gd name="connsiteY11" fmla="*/ 0 h 18288"/>
-              <a:gd name="connsiteX12" fmla="*/ 7272132 w 10853928"/>
-              <a:gd name="connsiteY12" fmla="*/ 0 h 18288"/>
-              <a:gd name="connsiteX13" fmla="*/ 7950502 w 10853928"/>
-              <a:gd name="connsiteY13" fmla="*/ 0 h 18288"/>
-              <a:gd name="connsiteX14" fmla="*/ 8737412 w 10853928"/>
-              <a:gd name="connsiteY14" fmla="*/ 0 h 18288"/>
-              <a:gd name="connsiteX15" fmla="*/ 9524322 w 10853928"/>
-              <a:gd name="connsiteY15" fmla="*/ 0 h 18288"/>
-              <a:gd name="connsiteX16" fmla="*/ 10853928 w 10853928"/>
-              <a:gd name="connsiteY16" fmla="*/ 0 h 18288"/>
-              <a:gd name="connsiteX17" fmla="*/ 10853928 w 10853928"/>
-              <a:gd name="connsiteY17" fmla="*/ 18288 h 18288"/>
-              <a:gd name="connsiteX18" fmla="*/ 10392636 w 10853928"/>
-              <a:gd name="connsiteY18" fmla="*/ 18288 h 18288"/>
-              <a:gd name="connsiteX19" fmla="*/ 9497187 w 10853928"/>
-              <a:gd name="connsiteY19" fmla="*/ 18288 h 18288"/>
-              <a:gd name="connsiteX20" fmla="*/ 8818817 w 10853928"/>
-              <a:gd name="connsiteY20" fmla="*/ 18288 h 18288"/>
-              <a:gd name="connsiteX21" fmla="*/ 8466064 w 10853928"/>
-              <a:gd name="connsiteY21" fmla="*/ 18288 h 18288"/>
-              <a:gd name="connsiteX22" fmla="*/ 7787693 w 10853928"/>
-              <a:gd name="connsiteY22" fmla="*/ 18288 h 18288"/>
-              <a:gd name="connsiteX23" fmla="*/ 7217862 w 10853928"/>
-              <a:gd name="connsiteY23" fmla="*/ 18288 h 18288"/>
-              <a:gd name="connsiteX24" fmla="*/ 6648031 w 10853928"/>
-              <a:gd name="connsiteY24" fmla="*/ 18288 h 18288"/>
-              <a:gd name="connsiteX25" fmla="*/ 6078200 w 10853928"/>
-              <a:gd name="connsiteY25" fmla="*/ 18288 h 18288"/>
-              <a:gd name="connsiteX26" fmla="*/ 5508368 w 10853928"/>
-              <a:gd name="connsiteY26" fmla="*/ 18288 h 18288"/>
-              <a:gd name="connsiteX27" fmla="*/ 4721459 w 10853928"/>
-              <a:gd name="connsiteY27" fmla="*/ 18288 h 18288"/>
-              <a:gd name="connsiteX28" fmla="*/ 4043088 w 10853928"/>
-              <a:gd name="connsiteY28" fmla="*/ 18288 h 18288"/>
-              <a:gd name="connsiteX29" fmla="*/ 3690336 w 10853928"/>
-              <a:gd name="connsiteY29" fmla="*/ 18288 h 18288"/>
-              <a:gd name="connsiteX30" fmla="*/ 3120504 w 10853928"/>
-              <a:gd name="connsiteY30" fmla="*/ 18288 h 18288"/>
-              <a:gd name="connsiteX31" fmla="*/ 2333595 w 10853928"/>
-              <a:gd name="connsiteY31" fmla="*/ 18288 h 18288"/>
-              <a:gd name="connsiteX32" fmla="*/ 1872303 w 10853928"/>
-              <a:gd name="connsiteY32" fmla="*/ 18288 h 18288"/>
-              <a:gd name="connsiteX33" fmla="*/ 976854 w 10853928"/>
-              <a:gd name="connsiteY33" fmla="*/ 18288 h 18288"/>
-              <a:gd name="connsiteX34" fmla="*/ 0 w 10853928"/>
-              <a:gd name="connsiteY34" fmla="*/ 18288 h 18288"/>
-              <a:gd name="connsiteX35" fmla="*/ 0 w 10853928"/>
-              <a:gd name="connsiteY35" fmla="*/ 0 h 18288"/>
+              <a:gd name="csX0" fmla="*/ 0 w 10853928"/>
+              <a:gd name="csY0" fmla="*/ 0 h 18288"/>
+              <a:gd name="csX1" fmla="*/ 461292 w 10853928"/>
+              <a:gd name="csY1" fmla="*/ 0 h 18288"/>
+              <a:gd name="csX2" fmla="*/ 1139662 w 10853928"/>
+              <a:gd name="csY2" fmla="*/ 0 h 18288"/>
+              <a:gd name="csX3" fmla="*/ 1926572 w 10853928"/>
+              <a:gd name="csY3" fmla="*/ 0 h 18288"/>
+              <a:gd name="csX4" fmla="*/ 2279325 w 10853928"/>
+              <a:gd name="csY4" fmla="*/ 0 h 18288"/>
+              <a:gd name="csX5" fmla="*/ 2632078 w 10853928"/>
+              <a:gd name="csY5" fmla="*/ 0 h 18288"/>
+              <a:gd name="csX6" fmla="*/ 3527527 w 10853928"/>
+              <a:gd name="csY6" fmla="*/ 0 h 18288"/>
+              <a:gd name="csX7" fmla="*/ 4205897 w 10853928"/>
+              <a:gd name="csY7" fmla="*/ 0 h 18288"/>
+              <a:gd name="csX8" fmla="*/ 4558650 w 10853928"/>
+              <a:gd name="csY8" fmla="*/ 0 h 18288"/>
+              <a:gd name="csX9" fmla="*/ 5237020 w 10853928"/>
+              <a:gd name="csY9" fmla="*/ 0 h 18288"/>
+              <a:gd name="csX10" fmla="*/ 6132469 w 10853928"/>
+              <a:gd name="csY10" fmla="*/ 0 h 18288"/>
+              <a:gd name="csX11" fmla="*/ 6702301 w 10853928"/>
+              <a:gd name="csY11" fmla="*/ 0 h 18288"/>
+              <a:gd name="csX12" fmla="*/ 7272132 w 10853928"/>
+              <a:gd name="csY12" fmla="*/ 0 h 18288"/>
+              <a:gd name="csX13" fmla="*/ 7950502 w 10853928"/>
+              <a:gd name="csY13" fmla="*/ 0 h 18288"/>
+              <a:gd name="csX14" fmla="*/ 8737412 w 10853928"/>
+              <a:gd name="csY14" fmla="*/ 0 h 18288"/>
+              <a:gd name="csX15" fmla="*/ 9524322 w 10853928"/>
+              <a:gd name="csY15" fmla="*/ 0 h 18288"/>
+              <a:gd name="csX16" fmla="*/ 10853928 w 10853928"/>
+              <a:gd name="csY16" fmla="*/ 0 h 18288"/>
+              <a:gd name="csX17" fmla="*/ 10853928 w 10853928"/>
+              <a:gd name="csY17" fmla="*/ 18288 h 18288"/>
+              <a:gd name="csX18" fmla="*/ 10392636 w 10853928"/>
+              <a:gd name="csY18" fmla="*/ 18288 h 18288"/>
+              <a:gd name="csX19" fmla="*/ 9497187 w 10853928"/>
+              <a:gd name="csY19" fmla="*/ 18288 h 18288"/>
+              <a:gd name="csX20" fmla="*/ 8818817 w 10853928"/>
+              <a:gd name="csY20" fmla="*/ 18288 h 18288"/>
+              <a:gd name="csX21" fmla="*/ 8466064 w 10853928"/>
+              <a:gd name="csY21" fmla="*/ 18288 h 18288"/>
+              <a:gd name="csX22" fmla="*/ 7787693 w 10853928"/>
+              <a:gd name="csY22" fmla="*/ 18288 h 18288"/>
+              <a:gd name="csX23" fmla="*/ 7217862 w 10853928"/>
+              <a:gd name="csY23" fmla="*/ 18288 h 18288"/>
+              <a:gd name="csX24" fmla="*/ 6648031 w 10853928"/>
+              <a:gd name="csY24" fmla="*/ 18288 h 18288"/>
+              <a:gd name="csX25" fmla="*/ 6078200 w 10853928"/>
+              <a:gd name="csY25" fmla="*/ 18288 h 18288"/>
+              <a:gd name="csX26" fmla="*/ 5508368 w 10853928"/>
+              <a:gd name="csY26" fmla="*/ 18288 h 18288"/>
+              <a:gd name="csX27" fmla="*/ 4721459 w 10853928"/>
+              <a:gd name="csY27" fmla="*/ 18288 h 18288"/>
+              <a:gd name="csX28" fmla="*/ 4043088 w 10853928"/>
+              <a:gd name="csY28" fmla="*/ 18288 h 18288"/>
+              <a:gd name="csX29" fmla="*/ 3690336 w 10853928"/>
+              <a:gd name="csY29" fmla="*/ 18288 h 18288"/>
+              <a:gd name="csX30" fmla="*/ 3120504 w 10853928"/>
+              <a:gd name="csY30" fmla="*/ 18288 h 18288"/>
+              <a:gd name="csX31" fmla="*/ 2333595 w 10853928"/>
+              <a:gd name="csY31" fmla="*/ 18288 h 18288"/>
+              <a:gd name="csX32" fmla="*/ 1872303 w 10853928"/>
+              <a:gd name="csY32" fmla="*/ 18288 h 18288"/>
+              <a:gd name="csX33" fmla="*/ 976854 w 10853928"/>
+              <a:gd name="csY33" fmla="*/ 18288 h 18288"/>
+              <a:gd name="csX34" fmla="*/ 0 w 10853928"/>
+              <a:gd name="csY34" fmla="*/ 18288 h 18288"/>
+              <a:gd name="csX35" fmla="*/ 0 w 10853928"/>
+              <a:gd name="csY35" fmla="*/ 0 h 18288"/>
             </a:gdLst>
             <a:ahLst/>
             <a:cxnLst>
               <a:cxn ang="0">
-                <a:pos x="connsiteX0" y="connsiteY0"/>
+                <a:pos x="csX0" y="csY0"/>
               </a:cxn>
               <a:cxn ang="0">
-                <a:pos x="connsiteX1" y="connsiteY1"/>
+                <a:pos x="csX1" y="csY1"/>
               </a:cxn>
               <a:cxn ang="0">
-                <a:pos x="connsiteX2" y="connsiteY2"/>
+                <a:pos x="csX2" y="csY2"/>
               </a:cxn>
               <a:cxn ang="0">
-                <a:pos x="connsiteX3" y="connsiteY3"/>
+                <a:pos x="csX3" y="csY3"/>
               </a:cxn>
               <a:cxn ang="0">
-                <a:pos x="connsiteX4" y="connsiteY4"/>
+                <a:pos x="csX4" y="csY4"/>
               </a:cxn>
               <a:cxn ang="0">
-                <a:pos x="connsiteX5" y="connsiteY5"/>
+                <a:pos x="csX5" y="csY5"/>
               </a:cxn>
               <a:cxn ang="0">
-                <a:pos x="connsiteX6" y="connsiteY6"/>
+                <a:pos x="csX6" y="csY6"/>
               </a:cxn>
               <a:cxn ang="0">
-                <a:pos x="connsiteX7" y="connsiteY7"/>
+                <a:pos x="csX7" y="csY7"/>
               </a:cxn>
               <a:cxn ang="0">
-                <a:pos x="connsiteX8" y="connsiteY8"/>
+                <a:pos x="csX8" y="csY8"/>
               </a:cxn>
               <a:cxn ang="0">
-                <a:pos x="connsiteX9" y="connsiteY9"/>
+                <a:pos x="csX9" y="csY9"/>
               </a:cxn>
               <a:cxn ang="0">
-                <a:pos x="connsiteX10" y="connsiteY10"/>
+                <a:pos x="csX10" y="csY10"/>
               </a:cxn>
               <a:cxn ang="0">
-                <a:pos x="connsiteX11" y="connsiteY11"/>
+                <a:pos x="csX11" y="csY11"/>
               </a:cxn>
               <a:cxn ang="0">
-                <a:pos x="connsiteX12" y="connsiteY12"/>
+                <a:pos x="csX12" y="csY12"/>
               </a:cxn>
               <a:cxn ang="0">
-                <a:pos x="connsiteX13" y="connsiteY13"/>
+                <a:pos x="csX13" y="csY13"/>
               </a:cxn>
               <a:cxn ang="0">
-                <a:pos x="connsiteX14" y="connsiteY14"/>
+                <a:pos x="csX14" y="csY14"/>
               </a:cxn>
               <a:cxn ang="0">
-                <a:pos x="connsiteX15" y="connsiteY15"/>
+                <a:pos x="csX15" y="csY15"/>
               </a:cxn>
               <a:cxn ang="0">
-                <a:pos x="connsiteX16" y="connsiteY16"/>
+                <a:pos x="csX16" y="csY16"/>
               </a:cxn>
               <a:cxn ang="0">
-                <a:pos x="connsiteX17" y="connsiteY17"/>
+                <a:pos x="csX17" y="csY17"/>
               </a:cxn>
               <a:cxn ang="0">
-                <a:pos x="connsiteX18" y="connsiteY18"/>
+                <a:pos x="csX18" y="csY18"/>
               </a:cxn>
               <a:cxn ang="0">
-                <a:pos x="connsiteX19" y="connsiteY19"/>
+                <a:pos x="csX19" y="csY19"/>
               </a:cxn>
               <a:cxn ang="0">
-                <a:pos x="connsiteX20" y="connsiteY20"/>
+                <a:pos x="csX20" y="csY20"/>
               </a:cxn>
               <a:cxn ang="0">
-                <a:pos x="connsiteX21" y="connsiteY21"/>
+                <a:pos x="csX21" y="csY21"/>
               </a:cxn>
               <a:cxn ang="0">
-                <a:pos x="connsiteX22" y="connsiteY22"/>
+                <a:pos x="csX22" y="csY22"/>
               </a:cxn>
               <a:cxn ang="0">
-                <a:pos x="connsiteX23" y="connsiteY23"/>
+                <a:pos x="csX23" y="csY23"/>
               </a:cxn>
               <a:cxn ang="0">
-                <a:pos x="connsiteX24" y="connsiteY24"/>
+                <a:pos x="csX24" y="csY24"/>
               </a:cxn>
               <a:cxn ang="0">
-                <a:pos x="connsiteX25" y="connsiteY25"/>
+                <a:pos x="csX25" y="csY25"/>
               </a:cxn>
               <a:cxn ang="0">
-                <a:pos x="connsiteX26" y="connsiteY26"/>
+                <a:pos x="csX26" y="csY26"/>
               </a:cxn>
               <a:cxn ang="0">
-                <a:pos x="connsiteX27" y="connsiteY27"/>
+                <a:pos x="csX27" y="csY27"/>
               </a:cxn>
               <a:cxn ang="0">
-                <a:pos x="connsiteX28" y="connsiteY28"/>
+                <a:pos x="csX28" y="csY28"/>
               </a:cxn>
               <a:cxn ang="0">
-                <a:pos x="connsiteX29" y="connsiteY29"/>
+                <a:pos x="csX29" y="csY29"/>
               </a:cxn>
               <a:cxn ang="0">
-                <a:pos x="connsiteX30" y="connsiteY30"/>
+                <a:pos x="csX30" y="csY30"/>
               </a:cxn>
               <a:cxn ang="0">
-                <a:pos x="connsiteX31" y="connsiteY31"/>
+                <a:pos x="csX31" y="csY31"/>
               </a:cxn>
               <a:cxn ang="0">
-                <a:pos x="connsiteX32" y="connsiteY32"/>
+                <a:pos x="csX32" y="csY32"/>
               </a:cxn>
               <a:cxn ang="0">
-                <a:pos x="connsiteX33" y="connsiteY33"/>
+                <a:pos x="csX33" y="csY33"/>
               </a:cxn>
               <a:cxn ang="0">
-                <a:pos x="connsiteX34" y="connsiteY34"/>
+                <a:pos x="csX34" y="csY34"/>
               </a:cxn>
               <a:cxn ang="0">
-                <a:pos x="connsiteX35" y="connsiteY35"/>
+                <a:pos x="csX35" y="csY35"/>
               </a:cxn>
             </a:cxnLst>
             <a:rect l="l" t="t" r="r" b="b"/>
@@ -27012,188 +27315,188 @@
           <a:custGeom>
             <a:avLst/>
             <a:gdLst>
-              <a:gd name="connsiteX0" fmla="*/ 0 w 10853928"/>
-              <a:gd name="connsiteY0" fmla="*/ 0 h 18288"/>
-              <a:gd name="connsiteX1" fmla="*/ 461292 w 10853928"/>
-              <a:gd name="connsiteY1" fmla="*/ 0 h 18288"/>
-              <a:gd name="connsiteX2" fmla="*/ 1139662 w 10853928"/>
-              <a:gd name="connsiteY2" fmla="*/ 0 h 18288"/>
-              <a:gd name="connsiteX3" fmla="*/ 1926572 w 10853928"/>
-              <a:gd name="connsiteY3" fmla="*/ 0 h 18288"/>
-              <a:gd name="connsiteX4" fmla="*/ 2279325 w 10853928"/>
-              <a:gd name="connsiteY4" fmla="*/ 0 h 18288"/>
-              <a:gd name="connsiteX5" fmla="*/ 2632078 w 10853928"/>
-              <a:gd name="connsiteY5" fmla="*/ 0 h 18288"/>
-              <a:gd name="connsiteX6" fmla="*/ 3527527 w 10853928"/>
-              <a:gd name="connsiteY6" fmla="*/ 0 h 18288"/>
-              <a:gd name="connsiteX7" fmla="*/ 4205897 w 10853928"/>
-              <a:gd name="connsiteY7" fmla="*/ 0 h 18288"/>
-              <a:gd name="connsiteX8" fmla="*/ 4558650 w 10853928"/>
-              <a:gd name="connsiteY8" fmla="*/ 0 h 18288"/>
-              <a:gd name="connsiteX9" fmla="*/ 5237020 w 10853928"/>
-              <a:gd name="connsiteY9" fmla="*/ 0 h 18288"/>
-              <a:gd name="connsiteX10" fmla="*/ 6132469 w 10853928"/>
-              <a:gd name="connsiteY10" fmla="*/ 0 h 18288"/>
-              <a:gd name="connsiteX11" fmla="*/ 6702301 w 10853928"/>
-              <a:gd name="connsiteY11" fmla="*/ 0 h 18288"/>
-              <a:gd name="connsiteX12" fmla="*/ 7272132 w 10853928"/>
-              <a:gd name="connsiteY12" fmla="*/ 0 h 18288"/>
-              <a:gd name="connsiteX13" fmla="*/ 7950502 w 10853928"/>
-              <a:gd name="connsiteY13" fmla="*/ 0 h 18288"/>
-              <a:gd name="connsiteX14" fmla="*/ 8737412 w 10853928"/>
-              <a:gd name="connsiteY14" fmla="*/ 0 h 18288"/>
-              <a:gd name="connsiteX15" fmla="*/ 9524322 w 10853928"/>
-              <a:gd name="connsiteY15" fmla="*/ 0 h 18288"/>
-              <a:gd name="connsiteX16" fmla="*/ 10853928 w 10853928"/>
-              <a:gd name="connsiteY16" fmla="*/ 0 h 18288"/>
-              <a:gd name="connsiteX17" fmla="*/ 10853928 w 10853928"/>
-              <a:gd name="connsiteY17" fmla="*/ 18288 h 18288"/>
-              <a:gd name="connsiteX18" fmla="*/ 10392636 w 10853928"/>
-              <a:gd name="connsiteY18" fmla="*/ 18288 h 18288"/>
-              <a:gd name="connsiteX19" fmla="*/ 9497187 w 10853928"/>
-              <a:gd name="connsiteY19" fmla="*/ 18288 h 18288"/>
-              <a:gd name="connsiteX20" fmla="*/ 8818817 w 10853928"/>
-              <a:gd name="connsiteY20" fmla="*/ 18288 h 18288"/>
-              <a:gd name="connsiteX21" fmla="*/ 8466064 w 10853928"/>
-              <a:gd name="connsiteY21" fmla="*/ 18288 h 18288"/>
-              <a:gd name="connsiteX22" fmla="*/ 7787693 w 10853928"/>
-              <a:gd name="connsiteY22" fmla="*/ 18288 h 18288"/>
-              <a:gd name="connsiteX23" fmla="*/ 7217862 w 10853928"/>
-              <a:gd name="connsiteY23" fmla="*/ 18288 h 18288"/>
-              <a:gd name="connsiteX24" fmla="*/ 6648031 w 10853928"/>
-              <a:gd name="connsiteY24" fmla="*/ 18288 h 18288"/>
-              <a:gd name="connsiteX25" fmla="*/ 6078200 w 10853928"/>
-              <a:gd name="connsiteY25" fmla="*/ 18288 h 18288"/>
-              <a:gd name="connsiteX26" fmla="*/ 5508368 w 10853928"/>
-              <a:gd name="connsiteY26" fmla="*/ 18288 h 18288"/>
-              <a:gd name="connsiteX27" fmla="*/ 4721459 w 10853928"/>
-              <a:gd name="connsiteY27" fmla="*/ 18288 h 18288"/>
-              <a:gd name="connsiteX28" fmla="*/ 4043088 w 10853928"/>
-              <a:gd name="connsiteY28" fmla="*/ 18288 h 18288"/>
-              <a:gd name="connsiteX29" fmla="*/ 3690336 w 10853928"/>
-              <a:gd name="connsiteY29" fmla="*/ 18288 h 18288"/>
-              <a:gd name="connsiteX30" fmla="*/ 3120504 w 10853928"/>
-              <a:gd name="connsiteY30" fmla="*/ 18288 h 18288"/>
-              <a:gd name="connsiteX31" fmla="*/ 2333595 w 10853928"/>
-              <a:gd name="connsiteY31" fmla="*/ 18288 h 18288"/>
-              <a:gd name="connsiteX32" fmla="*/ 1872303 w 10853928"/>
-              <a:gd name="connsiteY32" fmla="*/ 18288 h 18288"/>
-              <a:gd name="connsiteX33" fmla="*/ 976854 w 10853928"/>
-              <a:gd name="connsiteY33" fmla="*/ 18288 h 18288"/>
-              <a:gd name="connsiteX34" fmla="*/ 0 w 10853928"/>
-              <a:gd name="connsiteY34" fmla="*/ 18288 h 18288"/>
-              <a:gd name="connsiteX35" fmla="*/ 0 w 10853928"/>
-              <a:gd name="connsiteY35" fmla="*/ 0 h 18288"/>
+              <a:gd name="csX0" fmla="*/ 0 w 10853928"/>
+              <a:gd name="csY0" fmla="*/ 0 h 18288"/>
+              <a:gd name="csX1" fmla="*/ 461292 w 10853928"/>
+              <a:gd name="csY1" fmla="*/ 0 h 18288"/>
+              <a:gd name="csX2" fmla="*/ 1139662 w 10853928"/>
+              <a:gd name="csY2" fmla="*/ 0 h 18288"/>
+              <a:gd name="csX3" fmla="*/ 1926572 w 10853928"/>
+              <a:gd name="csY3" fmla="*/ 0 h 18288"/>
+              <a:gd name="csX4" fmla="*/ 2279325 w 10853928"/>
+              <a:gd name="csY4" fmla="*/ 0 h 18288"/>
+              <a:gd name="csX5" fmla="*/ 2632078 w 10853928"/>
+              <a:gd name="csY5" fmla="*/ 0 h 18288"/>
+              <a:gd name="csX6" fmla="*/ 3527527 w 10853928"/>
+              <a:gd name="csY6" fmla="*/ 0 h 18288"/>
+              <a:gd name="csX7" fmla="*/ 4205897 w 10853928"/>
+              <a:gd name="csY7" fmla="*/ 0 h 18288"/>
+              <a:gd name="csX8" fmla="*/ 4558650 w 10853928"/>
+              <a:gd name="csY8" fmla="*/ 0 h 18288"/>
+              <a:gd name="csX9" fmla="*/ 5237020 w 10853928"/>
+              <a:gd name="csY9" fmla="*/ 0 h 18288"/>
+              <a:gd name="csX10" fmla="*/ 6132469 w 10853928"/>
+              <a:gd name="csY10" fmla="*/ 0 h 18288"/>
+              <a:gd name="csX11" fmla="*/ 6702301 w 10853928"/>
+              <a:gd name="csY11" fmla="*/ 0 h 18288"/>
+              <a:gd name="csX12" fmla="*/ 7272132 w 10853928"/>
+              <a:gd name="csY12" fmla="*/ 0 h 18288"/>
+              <a:gd name="csX13" fmla="*/ 7950502 w 10853928"/>
+              <a:gd name="csY13" fmla="*/ 0 h 18288"/>
+              <a:gd name="csX14" fmla="*/ 8737412 w 10853928"/>
+              <a:gd name="csY14" fmla="*/ 0 h 18288"/>
+              <a:gd name="csX15" fmla="*/ 9524322 w 10853928"/>
+              <a:gd name="csY15" fmla="*/ 0 h 18288"/>
+              <a:gd name="csX16" fmla="*/ 10853928 w 10853928"/>
+              <a:gd name="csY16" fmla="*/ 0 h 18288"/>
+              <a:gd name="csX17" fmla="*/ 10853928 w 10853928"/>
+              <a:gd name="csY17" fmla="*/ 18288 h 18288"/>
+              <a:gd name="csX18" fmla="*/ 10392636 w 10853928"/>
+              <a:gd name="csY18" fmla="*/ 18288 h 18288"/>
+              <a:gd name="csX19" fmla="*/ 9497187 w 10853928"/>
+              <a:gd name="csY19" fmla="*/ 18288 h 18288"/>
+              <a:gd name="csX20" fmla="*/ 8818817 w 10853928"/>
+              <a:gd name="csY20" fmla="*/ 18288 h 18288"/>
+              <a:gd name="csX21" fmla="*/ 8466064 w 10853928"/>
+              <a:gd name="csY21" fmla="*/ 18288 h 18288"/>
+              <a:gd name="csX22" fmla="*/ 7787693 w 10853928"/>
+              <a:gd name="csY22" fmla="*/ 18288 h 18288"/>
+              <a:gd name="csX23" fmla="*/ 7217862 w 10853928"/>
+              <a:gd name="csY23" fmla="*/ 18288 h 18288"/>
+              <a:gd name="csX24" fmla="*/ 6648031 w 10853928"/>
+              <a:gd name="csY24" fmla="*/ 18288 h 18288"/>
+              <a:gd name="csX25" fmla="*/ 6078200 w 10853928"/>
+              <a:gd name="csY25" fmla="*/ 18288 h 18288"/>
+              <a:gd name="csX26" fmla="*/ 5508368 w 10853928"/>
+              <a:gd name="csY26" fmla="*/ 18288 h 18288"/>
+              <a:gd name="csX27" fmla="*/ 4721459 w 10853928"/>
+              <a:gd name="csY27" fmla="*/ 18288 h 18288"/>
+              <a:gd name="csX28" fmla="*/ 4043088 w 10853928"/>
+              <a:gd name="csY28" fmla="*/ 18288 h 18288"/>
+              <a:gd name="csX29" fmla="*/ 3690336 w 10853928"/>
+              <a:gd name="csY29" fmla="*/ 18288 h 18288"/>
+              <a:gd name="csX30" fmla="*/ 3120504 w 10853928"/>
+              <a:gd name="csY30" fmla="*/ 18288 h 18288"/>
+              <a:gd name="csX31" fmla="*/ 2333595 w 10853928"/>
+              <a:gd name="csY31" fmla="*/ 18288 h 18288"/>
+              <a:gd name="csX32" fmla="*/ 1872303 w 10853928"/>
+              <a:gd name="csY32" fmla="*/ 18288 h 18288"/>
+              <a:gd name="csX33" fmla="*/ 976854 w 10853928"/>
+              <a:gd name="csY33" fmla="*/ 18288 h 18288"/>
+              <a:gd name="csX34" fmla="*/ 0 w 10853928"/>
+              <a:gd name="csY34" fmla="*/ 18288 h 18288"/>
+              <a:gd name="csX35" fmla="*/ 0 w 10853928"/>
+              <a:gd name="csY35" fmla="*/ 0 h 18288"/>
             </a:gdLst>
             <a:ahLst/>
             <a:cxnLst>
               <a:cxn ang="0">
-                <a:pos x="connsiteX0" y="connsiteY0"/>
+                <a:pos x="csX0" y="csY0"/>
               </a:cxn>
               <a:cxn ang="0">
-                <a:pos x="connsiteX1" y="connsiteY1"/>
+                <a:pos x="csX1" y="csY1"/>
               </a:cxn>
               <a:cxn ang="0">
-                <a:pos x="connsiteX2" y="connsiteY2"/>
+                <a:pos x="csX2" y="csY2"/>
               </a:cxn>
               <a:cxn ang="0">
-                <a:pos x="connsiteX3" y="connsiteY3"/>
+                <a:pos x="csX3" y="csY3"/>
               </a:cxn>
               <a:cxn ang="0">
-                <a:pos x="connsiteX4" y="connsiteY4"/>
+                <a:pos x="csX4" y="csY4"/>
               </a:cxn>
               <a:cxn ang="0">
-                <a:pos x="connsiteX5" y="connsiteY5"/>
+                <a:pos x="csX5" y="csY5"/>
               </a:cxn>
               <a:cxn ang="0">
-                <a:pos x="connsiteX6" y="connsiteY6"/>
+                <a:pos x="csX6" y="csY6"/>
               </a:cxn>
               <a:cxn ang="0">
-                <a:pos x="connsiteX7" y="connsiteY7"/>
+                <a:pos x="csX7" y="csY7"/>
               </a:cxn>
               <a:cxn ang="0">
-                <a:pos x="connsiteX8" y="connsiteY8"/>
+                <a:pos x="csX8" y="csY8"/>
               </a:cxn>
               <a:cxn ang="0">
-                <a:pos x="connsiteX9" y="connsiteY9"/>
+                <a:pos x="csX9" y="csY9"/>
               </a:cxn>
               <a:cxn ang="0">
-                <a:pos x="connsiteX10" y="connsiteY10"/>
+                <a:pos x="csX10" y="csY10"/>
               </a:cxn>
               <a:cxn ang="0">
-                <a:pos x="connsiteX11" y="connsiteY11"/>
+                <a:pos x="csX11" y="csY11"/>
               </a:cxn>
               <a:cxn ang="0">
-                <a:pos x="connsiteX12" y="connsiteY12"/>
+                <a:pos x="csX12" y="csY12"/>
               </a:cxn>
               <a:cxn ang="0">
-                <a:pos x="connsiteX13" y="connsiteY13"/>
+                <a:pos x="csX13" y="csY13"/>
               </a:cxn>
               <a:cxn ang="0">
-                <a:pos x="connsiteX14" y="connsiteY14"/>
+                <a:pos x="csX14" y="csY14"/>
               </a:cxn>
               <a:cxn ang="0">
-                <a:pos x="connsiteX15" y="connsiteY15"/>
+                <a:pos x="csX15" y="csY15"/>
               </a:cxn>
               <a:cxn ang="0">
-                <a:pos x="connsiteX16" y="connsiteY16"/>
+                <a:pos x="csX16" y="csY16"/>
               </a:cxn>
               <a:cxn ang="0">
-                <a:pos x="connsiteX17" y="connsiteY17"/>
+                <a:pos x="csX17" y="csY17"/>
               </a:cxn>
               <a:cxn ang="0">
-                <a:pos x="connsiteX18" y="connsiteY18"/>
+                <a:pos x="csX18" y="csY18"/>
               </a:cxn>
               <a:cxn ang="0">
-                <a:pos x="connsiteX19" y="connsiteY19"/>
+                <a:pos x="csX19" y="csY19"/>
               </a:cxn>
               <a:cxn ang="0">
-                <a:pos x="connsiteX20" y="connsiteY20"/>
+                <a:pos x="csX20" y="csY20"/>
               </a:cxn>
               <a:cxn ang="0">
-                <a:pos x="connsiteX21" y="connsiteY21"/>
+                <a:pos x="csX21" y="csY21"/>
               </a:cxn>
               <a:cxn ang="0">
-                <a:pos x="connsiteX22" y="connsiteY22"/>
+                <a:pos x="csX22" y="csY22"/>
               </a:cxn>
               <a:cxn ang="0">
-                <a:pos x="connsiteX23" y="connsiteY23"/>
+                <a:pos x="csX23" y="csY23"/>
               </a:cxn>
               <a:cxn ang="0">
-                <a:pos x="connsiteX24" y="connsiteY24"/>
+                <a:pos x="csX24" y="csY24"/>
               </a:cxn>
               <a:cxn ang="0">
-                <a:pos x="connsiteX25" y="connsiteY25"/>
+                <a:pos x="csX25" y="csY25"/>
               </a:cxn>
               <a:cxn ang="0">
-                <a:pos x="connsiteX26" y="connsiteY26"/>
+                <a:pos x="csX26" y="csY26"/>
               </a:cxn>
               <a:cxn ang="0">
-                <a:pos x="connsiteX27" y="connsiteY27"/>
+                <a:pos x="csX27" y="csY27"/>
               </a:cxn>
               <a:cxn ang="0">
-                <a:pos x="connsiteX28" y="connsiteY28"/>
+                <a:pos x="csX28" y="csY28"/>
               </a:cxn>
               <a:cxn ang="0">
-                <a:pos x="connsiteX29" y="connsiteY29"/>
+                <a:pos x="csX29" y="csY29"/>
               </a:cxn>
               <a:cxn ang="0">
-                <a:pos x="connsiteX30" y="connsiteY30"/>
+                <a:pos x="csX30" y="csY30"/>
               </a:cxn>
               <a:cxn ang="0">
-                <a:pos x="connsiteX31" y="connsiteY31"/>
+                <a:pos x="csX31" y="csY31"/>
               </a:cxn>
               <a:cxn ang="0">
-                <a:pos x="connsiteX32" y="connsiteY32"/>
+                <a:pos x="csX32" y="csY32"/>
               </a:cxn>
               <a:cxn ang="0">
-                <a:pos x="connsiteX33" y="connsiteY33"/>
+                <a:pos x="csX33" y="csY33"/>
               </a:cxn>
               <a:cxn ang="0">
-                <a:pos x="connsiteX34" y="connsiteY34"/>
+                <a:pos x="csX34" y="csY34"/>
               </a:cxn>
               <a:cxn ang="0">
-                <a:pos x="connsiteX35" y="connsiteY35"/>
+                <a:pos x="csX35" y="csY35"/>
               </a:cxn>
             </a:cxnLst>
             <a:rect l="l" t="t" r="r" b="b"/>
@@ -28602,14 +28905,15 @@
         </p:spPr>
         <p:txBody>
           <a:bodyPr>
-            <a:normAutofit/>
+            <a:noAutofit/>
           </a:bodyPr>
           <a:lstStyle/>
           <a:p>
             <a:r>
-              <a:rPr lang="en-US" sz="5400" dirty="0"/>
-              <a:t>Example of namespace: File System</a:t>
-            </a:r>
+              <a:rPr lang="en-US" sz="4800" b="1" dirty="0"/>
+              <a:t>Example of namespace: Mount namespace</a:t>
+            </a:r>
+            <a:endParaRPr lang="en-US" sz="4800" dirty="0"/>
           </a:p>
         </p:txBody>
       </p:sp>
@@ -28644,188 +28948,188 @@
           <a:custGeom>
             <a:avLst/>
             <a:gdLst>
-              <a:gd name="connsiteX0" fmla="*/ 0 w 10853928"/>
-              <a:gd name="connsiteY0" fmla="*/ 0 h 18288"/>
-              <a:gd name="connsiteX1" fmla="*/ 461292 w 10853928"/>
-              <a:gd name="connsiteY1" fmla="*/ 0 h 18288"/>
-              <a:gd name="connsiteX2" fmla="*/ 1139662 w 10853928"/>
-              <a:gd name="connsiteY2" fmla="*/ 0 h 18288"/>
-              <a:gd name="connsiteX3" fmla="*/ 1926572 w 10853928"/>
-              <a:gd name="connsiteY3" fmla="*/ 0 h 18288"/>
-              <a:gd name="connsiteX4" fmla="*/ 2279325 w 10853928"/>
-              <a:gd name="connsiteY4" fmla="*/ 0 h 18288"/>
-              <a:gd name="connsiteX5" fmla="*/ 2632078 w 10853928"/>
-              <a:gd name="connsiteY5" fmla="*/ 0 h 18288"/>
-              <a:gd name="connsiteX6" fmla="*/ 3527527 w 10853928"/>
-              <a:gd name="connsiteY6" fmla="*/ 0 h 18288"/>
-              <a:gd name="connsiteX7" fmla="*/ 4205897 w 10853928"/>
-              <a:gd name="connsiteY7" fmla="*/ 0 h 18288"/>
-              <a:gd name="connsiteX8" fmla="*/ 4558650 w 10853928"/>
-              <a:gd name="connsiteY8" fmla="*/ 0 h 18288"/>
-              <a:gd name="connsiteX9" fmla="*/ 5237020 w 10853928"/>
-              <a:gd name="connsiteY9" fmla="*/ 0 h 18288"/>
-              <a:gd name="connsiteX10" fmla="*/ 6132469 w 10853928"/>
-              <a:gd name="connsiteY10" fmla="*/ 0 h 18288"/>
-              <a:gd name="connsiteX11" fmla="*/ 6702301 w 10853928"/>
-              <a:gd name="connsiteY11" fmla="*/ 0 h 18288"/>
-              <a:gd name="connsiteX12" fmla="*/ 7272132 w 10853928"/>
-              <a:gd name="connsiteY12" fmla="*/ 0 h 18288"/>
-              <a:gd name="connsiteX13" fmla="*/ 7950502 w 10853928"/>
-              <a:gd name="connsiteY13" fmla="*/ 0 h 18288"/>
-              <a:gd name="connsiteX14" fmla="*/ 8737412 w 10853928"/>
-              <a:gd name="connsiteY14" fmla="*/ 0 h 18288"/>
-              <a:gd name="connsiteX15" fmla="*/ 9524322 w 10853928"/>
-              <a:gd name="connsiteY15" fmla="*/ 0 h 18288"/>
-              <a:gd name="connsiteX16" fmla="*/ 10853928 w 10853928"/>
-              <a:gd name="connsiteY16" fmla="*/ 0 h 18288"/>
-              <a:gd name="connsiteX17" fmla="*/ 10853928 w 10853928"/>
-              <a:gd name="connsiteY17" fmla="*/ 18288 h 18288"/>
-              <a:gd name="connsiteX18" fmla="*/ 10392636 w 10853928"/>
-              <a:gd name="connsiteY18" fmla="*/ 18288 h 18288"/>
-              <a:gd name="connsiteX19" fmla="*/ 9497187 w 10853928"/>
-              <a:gd name="connsiteY19" fmla="*/ 18288 h 18288"/>
-              <a:gd name="connsiteX20" fmla="*/ 8818817 w 10853928"/>
-              <a:gd name="connsiteY20" fmla="*/ 18288 h 18288"/>
-              <a:gd name="connsiteX21" fmla="*/ 8466064 w 10853928"/>
-              <a:gd name="connsiteY21" fmla="*/ 18288 h 18288"/>
-              <a:gd name="connsiteX22" fmla="*/ 7787693 w 10853928"/>
-              <a:gd name="connsiteY22" fmla="*/ 18288 h 18288"/>
-              <a:gd name="connsiteX23" fmla="*/ 7217862 w 10853928"/>
-              <a:gd name="connsiteY23" fmla="*/ 18288 h 18288"/>
-              <a:gd name="connsiteX24" fmla="*/ 6648031 w 10853928"/>
-              <a:gd name="connsiteY24" fmla="*/ 18288 h 18288"/>
-              <a:gd name="connsiteX25" fmla="*/ 6078200 w 10853928"/>
-              <a:gd name="connsiteY25" fmla="*/ 18288 h 18288"/>
-              <a:gd name="connsiteX26" fmla="*/ 5508368 w 10853928"/>
-              <a:gd name="connsiteY26" fmla="*/ 18288 h 18288"/>
-              <a:gd name="connsiteX27" fmla="*/ 4721459 w 10853928"/>
-              <a:gd name="connsiteY27" fmla="*/ 18288 h 18288"/>
-              <a:gd name="connsiteX28" fmla="*/ 4043088 w 10853928"/>
-              <a:gd name="connsiteY28" fmla="*/ 18288 h 18288"/>
-              <a:gd name="connsiteX29" fmla="*/ 3690336 w 10853928"/>
-              <a:gd name="connsiteY29" fmla="*/ 18288 h 18288"/>
-              <a:gd name="connsiteX30" fmla="*/ 3120504 w 10853928"/>
-              <a:gd name="connsiteY30" fmla="*/ 18288 h 18288"/>
-              <a:gd name="connsiteX31" fmla="*/ 2333595 w 10853928"/>
-              <a:gd name="connsiteY31" fmla="*/ 18288 h 18288"/>
-              <a:gd name="connsiteX32" fmla="*/ 1872303 w 10853928"/>
-              <a:gd name="connsiteY32" fmla="*/ 18288 h 18288"/>
-              <a:gd name="connsiteX33" fmla="*/ 976854 w 10853928"/>
-              <a:gd name="connsiteY33" fmla="*/ 18288 h 18288"/>
-              <a:gd name="connsiteX34" fmla="*/ 0 w 10853928"/>
-              <a:gd name="connsiteY34" fmla="*/ 18288 h 18288"/>
-              <a:gd name="connsiteX35" fmla="*/ 0 w 10853928"/>
-              <a:gd name="connsiteY35" fmla="*/ 0 h 18288"/>
+              <a:gd name="csX0" fmla="*/ 0 w 10853928"/>
+              <a:gd name="csY0" fmla="*/ 0 h 18288"/>
+              <a:gd name="csX1" fmla="*/ 461292 w 10853928"/>
+              <a:gd name="csY1" fmla="*/ 0 h 18288"/>
+              <a:gd name="csX2" fmla="*/ 1139662 w 10853928"/>
+              <a:gd name="csY2" fmla="*/ 0 h 18288"/>
+              <a:gd name="csX3" fmla="*/ 1926572 w 10853928"/>
+              <a:gd name="csY3" fmla="*/ 0 h 18288"/>
+              <a:gd name="csX4" fmla="*/ 2279325 w 10853928"/>
+              <a:gd name="csY4" fmla="*/ 0 h 18288"/>
+              <a:gd name="csX5" fmla="*/ 2632078 w 10853928"/>
+              <a:gd name="csY5" fmla="*/ 0 h 18288"/>
+              <a:gd name="csX6" fmla="*/ 3527527 w 10853928"/>
+              <a:gd name="csY6" fmla="*/ 0 h 18288"/>
+              <a:gd name="csX7" fmla="*/ 4205897 w 10853928"/>
+              <a:gd name="csY7" fmla="*/ 0 h 18288"/>
+              <a:gd name="csX8" fmla="*/ 4558650 w 10853928"/>
+              <a:gd name="csY8" fmla="*/ 0 h 18288"/>
+              <a:gd name="csX9" fmla="*/ 5237020 w 10853928"/>
+              <a:gd name="csY9" fmla="*/ 0 h 18288"/>
+              <a:gd name="csX10" fmla="*/ 6132469 w 10853928"/>
+              <a:gd name="csY10" fmla="*/ 0 h 18288"/>
+              <a:gd name="csX11" fmla="*/ 6702301 w 10853928"/>
+              <a:gd name="csY11" fmla="*/ 0 h 18288"/>
+              <a:gd name="csX12" fmla="*/ 7272132 w 10853928"/>
+              <a:gd name="csY12" fmla="*/ 0 h 18288"/>
+              <a:gd name="csX13" fmla="*/ 7950502 w 10853928"/>
+              <a:gd name="csY13" fmla="*/ 0 h 18288"/>
+              <a:gd name="csX14" fmla="*/ 8737412 w 10853928"/>
+              <a:gd name="csY14" fmla="*/ 0 h 18288"/>
+              <a:gd name="csX15" fmla="*/ 9524322 w 10853928"/>
+              <a:gd name="csY15" fmla="*/ 0 h 18288"/>
+              <a:gd name="csX16" fmla="*/ 10853928 w 10853928"/>
+              <a:gd name="csY16" fmla="*/ 0 h 18288"/>
+              <a:gd name="csX17" fmla="*/ 10853928 w 10853928"/>
+              <a:gd name="csY17" fmla="*/ 18288 h 18288"/>
+              <a:gd name="csX18" fmla="*/ 10392636 w 10853928"/>
+              <a:gd name="csY18" fmla="*/ 18288 h 18288"/>
+              <a:gd name="csX19" fmla="*/ 9497187 w 10853928"/>
+              <a:gd name="csY19" fmla="*/ 18288 h 18288"/>
+              <a:gd name="csX20" fmla="*/ 8818817 w 10853928"/>
+              <a:gd name="csY20" fmla="*/ 18288 h 18288"/>
+              <a:gd name="csX21" fmla="*/ 8466064 w 10853928"/>
+              <a:gd name="csY21" fmla="*/ 18288 h 18288"/>
+              <a:gd name="csX22" fmla="*/ 7787693 w 10853928"/>
+              <a:gd name="csY22" fmla="*/ 18288 h 18288"/>
+              <a:gd name="csX23" fmla="*/ 7217862 w 10853928"/>
+              <a:gd name="csY23" fmla="*/ 18288 h 18288"/>
+              <a:gd name="csX24" fmla="*/ 6648031 w 10853928"/>
+              <a:gd name="csY24" fmla="*/ 18288 h 18288"/>
+              <a:gd name="csX25" fmla="*/ 6078200 w 10853928"/>
+              <a:gd name="csY25" fmla="*/ 18288 h 18288"/>
+              <a:gd name="csX26" fmla="*/ 5508368 w 10853928"/>
+              <a:gd name="csY26" fmla="*/ 18288 h 18288"/>
+              <a:gd name="csX27" fmla="*/ 4721459 w 10853928"/>
+              <a:gd name="csY27" fmla="*/ 18288 h 18288"/>
+              <a:gd name="csX28" fmla="*/ 4043088 w 10853928"/>
+              <a:gd name="csY28" fmla="*/ 18288 h 18288"/>
+              <a:gd name="csX29" fmla="*/ 3690336 w 10853928"/>
+              <a:gd name="csY29" fmla="*/ 18288 h 18288"/>
+              <a:gd name="csX30" fmla="*/ 3120504 w 10853928"/>
+              <a:gd name="csY30" fmla="*/ 18288 h 18288"/>
+              <a:gd name="csX31" fmla="*/ 2333595 w 10853928"/>
+              <a:gd name="csY31" fmla="*/ 18288 h 18288"/>
+              <a:gd name="csX32" fmla="*/ 1872303 w 10853928"/>
+              <a:gd name="csY32" fmla="*/ 18288 h 18288"/>
+              <a:gd name="csX33" fmla="*/ 976854 w 10853928"/>
+              <a:gd name="csY33" fmla="*/ 18288 h 18288"/>
+              <a:gd name="csX34" fmla="*/ 0 w 10853928"/>
+              <a:gd name="csY34" fmla="*/ 18288 h 18288"/>
+              <a:gd name="csX35" fmla="*/ 0 w 10853928"/>
+              <a:gd name="csY35" fmla="*/ 0 h 18288"/>
             </a:gdLst>
             <a:ahLst/>
             <a:cxnLst>
               <a:cxn ang="0">
-                <a:pos x="connsiteX0" y="connsiteY0"/>
+                <a:pos x="csX0" y="csY0"/>
               </a:cxn>
               <a:cxn ang="0">
-                <a:pos x="connsiteX1" y="connsiteY1"/>
+                <a:pos x="csX1" y="csY1"/>
               </a:cxn>
               <a:cxn ang="0">
-                <a:pos x="connsiteX2" y="connsiteY2"/>
+                <a:pos x="csX2" y="csY2"/>
               </a:cxn>
               <a:cxn ang="0">
-                <a:pos x="connsiteX3" y="connsiteY3"/>
+                <a:pos x="csX3" y="csY3"/>
               </a:cxn>
               <a:cxn ang="0">
-                <a:pos x="connsiteX4" y="connsiteY4"/>
+                <a:pos x="csX4" y="csY4"/>
               </a:cxn>
               <a:cxn ang="0">
-                <a:pos x="connsiteX5" y="connsiteY5"/>
+                <a:pos x="csX5" y="csY5"/>
               </a:cxn>
               <a:cxn ang="0">
-                <a:pos x="connsiteX6" y="connsiteY6"/>
+                <a:pos x="csX6" y="csY6"/>
               </a:cxn>
               <a:cxn ang="0">
-                <a:pos x="connsiteX7" y="connsiteY7"/>
+                <a:pos x="csX7" y="csY7"/>
               </a:cxn>
               <a:cxn ang="0">
-                <a:pos x="connsiteX8" y="connsiteY8"/>
+                <a:pos x="csX8" y="csY8"/>
               </a:cxn>
               <a:cxn ang="0">
-                <a:pos x="connsiteX9" y="connsiteY9"/>
+                <a:pos x="csX9" y="csY9"/>
               </a:cxn>
               <a:cxn ang="0">
-                <a:pos x="connsiteX10" y="connsiteY10"/>
+                <a:pos x="csX10" y="csY10"/>
               </a:cxn>
               <a:cxn ang="0">
-                <a:pos x="connsiteX11" y="connsiteY11"/>
+                <a:pos x="csX11" y="csY11"/>
               </a:cxn>
               <a:cxn ang="0">
-                <a:pos x="connsiteX12" y="connsiteY12"/>
+                <a:pos x="csX12" y="csY12"/>
               </a:cxn>
               <a:cxn ang="0">
-                <a:pos x="connsiteX13" y="connsiteY13"/>
+                <a:pos x="csX13" y="csY13"/>
               </a:cxn>
               <a:cxn ang="0">
-                <a:pos x="connsiteX14" y="connsiteY14"/>
+                <a:pos x="csX14" y="csY14"/>
               </a:cxn>
               <a:cxn ang="0">
-                <a:pos x="connsiteX15" y="connsiteY15"/>
+                <a:pos x="csX15" y="csY15"/>
               </a:cxn>
               <a:cxn ang="0">
-                <a:pos x="connsiteX16" y="connsiteY16"/>
+                <a:pos x="csX16" y="csY16"/>
               </a:cxn>
               <a:cxn ang="0">
-                <a:pos x="connsiteX17" y="connsiteY17"/>
+                <a:pos x="csX17" y="csY17"/>
               </a:cxn>
               <a:cxn ang="0">
-                <a:pos x="connsiteX18" y="connsiteY18"/>
+                <a:pos x="csX18" y="csY18"/>
               </a:cxn>
               <a:cxn ang="0">
-                <a:pos x="connsiteX19" y="connsiteY19"/>
+                <a:pos x="csX19" y="csY19"/>
               </a:cxn>
               <a:cxn ang="0">
-                <a:pos x="connsiteX20" y="connsiteY20"/>
+                <a:pos x="csX20" y="csY20"/>
               </a:cxn>
               <a:cxn ang="0">
-                <a:pos x="connsiteX21" y="connsiteY21"/>
+                <a:pos x="csX21" y="csY21"/>
               </a:cxn>
               <a:cxn ang="0">
-                <a:pos x="connsiteX22" y="connsiteY22"/>
+                <a:pos x="csX22" y="csY22"/>
               </a:cxn>
               <a:cxn ang="0">
-                <a:pos x="connsiteX23" y="connsiteY23"/>
+                <a:pos x="csX23" y="csY23"/>
               </a:cxn>
               <a:cxn ang="0">
-                <a:pos x="connsiteX24" y="connsiteY24"/>
+                <a:pos x="csX24" y="csY24"/>
               </a:cxn>
               <a:cxn ang="0">
-                <a:pos x="connsiteX25" y="connsiteY25"/>
+                <a:pos x="csX25" y="csY25"/>
               </a:cxn>
               <a:cxn ang="0">
-                <a:pos x="connsiteX26" y="connsiteY26"/>
+                <a:pos x="csX26" y="csY26"/>
               </a:cxn>
               <a:cxn ang="0">
-                <a:pos x="connsiteX27" y="connsiteY27"/>
+                <a:pos x="csX27" y="csY27"/>
               </a:cxn>
               <a:cxn ang="0">
-                <a:pos x="connsiteX28" y="connsiteY28"/>
+                <a:pos x="csX28" y="csY28"/>
               </a:cxn>
               <a:cxn ang="0">
-                <a:pos x="connsiteX29" y="connsiteY29"/>
+                <a:pos x="csX29" y="csY29"/>
               </a:cxn>
               <a:cxn ang="0">
-                <a:pos x="connsiteX30" y="connsiteY30"/>
+                <a:pos x="csX30" y="csY30"/>
               </a:cxn>
               <a:cxn ang="0">
-                <a:pos x="connsiteX31" y="connsiteY31"/>
+                <a:pos x="csX31" y="csY31"/>
               </a:cxn>
               <a:cxn ang="0">
-                <a:pos x="connsiteX32" y="connsiteY32"/>
+                <a:pos x="csX32" y="csY32"/>
               </a:cxn>
               <a:cxn ang="0">
-                <a:pos x="connsiteX33" y="connsiteY33"/>
+                <a:pos x="csX33" y="csY33"/>
               </a:cxn>
               <a:cxn ang="0">
-                <a:pos x="connsiteX34" y="connsiteY34"/>
+                <a:pos x="csX34" y="csY34"/>
               </a:cxn>
               <a:cxn ang="0">
-                <a:pos x="connsiteX35" y="connsiteY35"/>
+                <a:pos x="csX35" y="csY35"/>
               </a:cxn>
             </a:cxnLst>
             <a:rect l="l" t="t" r="r" b="b"/>
@@ -29304,20 +29608,81 @@
         </p:spPr>
         <p:txBody>
           <a:bodyPr>
-            <a:normAutofit/>
+            <a:normAutofit lnSpcReduction="10000"/>
           </a:bodyPr>
           <a:lstStyle/>
           <a:p>
             <a:r>
               <a:rPr lang="en-US" sz="3200" dirty="0"/>
-              <a:t>File System namespace: subtree that starts from a root set by the chroot system call</a:t>
-            </a:r>
-          </a:p>
-          <a:p>
+              <a:t>Gives a process its own view of the filesystem mount hierarchy</a:t>
+            </a:r>
+          </a:p>
+          <a:p>
+            <a:r>
+              <a:rPr lang="en-US" sz="3200" dirty="0"/>
+              <a:t>Processes in different mount namespaces can see different mounted filesystems</a:t>
+            </a:r>
+          </a:p>
+          <a:p>
+            <a:r>
+              <a:rPr lang="en-US" sz="3200" dirty="0"/>
+              <a:t>Created or managed using mechanisms such as </a:t>
+            </a:r>
+            <a:r>
+              <a:rPr lang="en-US" dirty="0"/>
+              <a:t>clone()</a:t>
+            </a:r>
+            <a:r>
+              <a:rPr lang="en-US" sz="3200" dirty="0"/>
+              <a:t>, </a:t>
+            </a:r>
+            <a:r>
+              <a:rPr lang="en-US" dirty="0" err="1"/>
+              <a:t>unshare</a:t>
+            </a:r>
+            <a:r>
+              <a:rPr lang="en-US" dirty="0"/>
+              <a:t>()</a:t>
+            </a:r>
+            <a:r>
+              <a:rPr lang="en-US" sz="3200" dirty="0"/>
+              <a:t>, and </a:t>
+            </a:r>
+            <a:r>
+              <a:rPr lang="en-US" dirty="0" err="1"/>
+              <a:t>setns</a:t>
+            </a:r>
+            <a:r>
+              <a:rPr lang="en-US" dirty="0"/>
+              <a:t>()</a:t>
+            </a:r>
             <a:endParaRPr lang="en-US" sz="3200" dirty="0"/>
           </a:p>
           <a:p>
-            <a:endParaRPr lang="en-US" sz="3200" dirty="0"/>
+            <a:r>
+              <a:rPr lang="en-US" sz="3200" dirty="0"/>
+              <a:t>Container runtimes combine mount namespaces with mounts and mechanisms such as </a:t>
+            </a:r>
+            <a:r>
+              <a:rPr lang="en-US" dirty="0" err="1"/>
+              <a:t>pivot_root</a:t>
+            </a:r>
+            <a:r>
+              <a:rPr lang="en-US" dirty="0"/>
+              <a:t>()</a:t>
+            </a:r>
+            <a:r>
+              <a:rPr lang="en-US" sz="3200" dirty="0"/>
+              <a:t> or </a:t>
+            </a:r>
+            <a:r>
+              <a:rPr lang="en-US" dirty="0"/>
+              <a:t>chroot()</a:t>
+            </a:r>
+            <a:r>
+              <a:rPr lang="en-US" sz="3200" dirty="0"/>
+              <a:t> to provide an isolated root filesystem</a:t>
+            </a:r>
           </a:p>
         </p:txBody>
       </p:sp>
@@ -29587,109 +29952,6 @@
           </a:p>
         </p:txBody>
       </p:sp>
-      <p:grpSp>
-        <p:nvGrpSpPr>
-          <p:cNvPr id="15" name="Group 14">
-            <a:extLst>
-              <a:ext uri="{FF2B5EF4-FFF2-40B4-BE49-F238E27FC236}">
-                <a16:creationId xmlns:a16="http://schemas.microsoft.com/office/drawing/2014/main" id="{2137A52E-CC8E-7C22-3F2B-653D4EE63A9C}"/>
-              </a:ext>
-            </a:extLst>
-          </p:cNvPr>
-          <p:cNvGrpSpPr/>
-          <p:nvPr/>
-        </p:nvGrpSpPr>
-        <p:grpSpPr>
-          <a:xfrm>
-            <a:off x="2099460" y="3117273"/>
-            <a:ext cx="7990031" cy="3012157"/>
-            <a:chOff x="2099460" y="3117273"/>
-            <a:chExt cx="7990031" cy="3012157"/>
-          </a:xfrm>
-        </p:grpSpPr>
-        <p:pic>
-          <p:nvPicPr>
-            <p:cNvPr id="12" name="Picture 11">
-              <a:extLst>
-                <a:ext uri="{FF2B5EF4-FFF2-40B4-BE49-F238E27FC236}">
-                  <a16:creationId xmlns:a16="http://schemas.microsoft.com/office/drawing/2014/main" id="{B22528F3-8D90-10CB-7894-DB0B55C483EC}"/>
-                </a:ext>
-              </a:extLst>
-            </p:cNvPr>
-            <p:cNvPicPr>
-              <a:picLocks noChangeAspect="1"/>
-            </p:cNvPicPr>
-            <p:nvPr/>
-          </p:nvPicPr>
-          <p:blipFill>
-            <a:blip r:embed="rId3"/>
-            <a:stretch>
-              <a:fillRect/>
-            </a:stretch>
-          </p:blipFill>
-          <p:spPr>
-            <a:xfrm>
-              <a:off x="2099460" y="3117273"/>
-              <a:ext cx="7990031" cy="2837151"/>
-            </a:xfrm>
-            <a:prstGeom prst="rect">
-              <a:avLst/>
-            </a:prstGeom>
-          </p:spPr>
-        </p:pic>
-        <p:sp>
-          <p:nvSpPr>
-            <p:cNvPr id="14" name="Rectangle 13">
-              <a:extLst>
-                <a:ext uri="{FF2B5EF4-FFF2-40B4-BE49-F238E27FC236}">
-                  <a16:creationId xmlns:a16="http://schemas.microsoft.com/office/drawing/2014/main" id="{7E3FBA91-1300-7A06-8F6B-E6649E05E712}"/>
-                </a:ext>
-              </a:extLst>
-            </p:cNvPr>
-            <p:cNvSpPr/>
-            <p:nvPr/>
-          </p:nvSpPr>
-          <p:spPr>
-            <a:xfrm>
-              <a:off x="7789636" y="5725839"/>
-              <a:ext cx="2299855" cy="403591"/>
-            </a:xfrm>
-            <a:prstGeom prst="rect">
-              <a:avLst/>
-            </a:prstGeom>
-            <a:solidFill>
-              <a:schemeClr val="bg1"/>
-            </a:solidFill>
-            <a:ln>
-              <a:noFill/>
-            </a:ln>
-          </p:spPr>
-          <p:style>
-            <a:lnRef idx="2">
-              <a:schemeClr val="accent1">
-                <a:shade val="15000"/>
-              </a:schemeClr>
-            </a:lnRef>
-            <a:fillRef idx="1">
-              <a:schemeClr val="accent1"/>
-            </a:fillRef>
-            <a:effectRef idx="0">
-              <a:schemeClr val="accent1"/>
-            </a:effectRef>
-            <a:fontRef idx="minor">
-              <a:schemeClr val="lt1"/>
-            </a:fontRef>
-          </p:style>
-          <p:txBody>
-            <a:bodyPr rtlCol="0" anchor="ctr"/>
-            <a:lstStyle/>
-            <a:p>
-              <a:pPr algn="ctr"/>
-              <a:endParaRPr lang="en-US"/>
-            </a:p>
-          </p:txBody>
-        </p:sp>
-      </p:grpSp>
     </p:spTree>
     <p:extLst>
       <p:ext uri="{BB962C8B-B14F-4D97-AF65-F5344CB8AC3E}">
@@ -29896,188 +30158,188 @@
           <a:custGeom>
             <a:avLst/>
             <a:gdLst>
-              <a:gd name="connsiteX0" fmla="*/ 0 w 10853928"/>
-              <a:gd name="connsiteY0" fmla="*/ 0 h 18288"/>
-              <a:gd name="connsiteX1" fmla="*/ 461292 w 10853928"/>
-              <a:gd name="connsiteY1" fmla="*/ 0 h 18288"/>
-              <a:gd name="connsiteX2" fmla="*/ 1139662 w 10853928"/>
-              <a:gd name="connsiteY2" fmla="*/ 0 h 18288"/>
-              <a:gd name="connsiteX3" fmla="*/ 1926572 w 10853928"/>
-              <a:gd name="connsiteY3" fmla="*/ 0 h 18288"/>
-              <a:gd name="connsiteX4" fmla="*/ 2279325 w 10853928"/>
-              <a:gd name="connsiteY4" fmla="*/ 0 h 18288"/>
-              <a:gd name="connsiteX5" fmla="*/ 2632078 w 10853928"/>
-              <a:gd name="connsiteY5" fmla="*/ 0 h 18288"/>
-              <a:gd name="connsiteX6" fmla="*/ 3527527 w 10853928"/>
-              <a:gd name="connsiteY6" fmla="*/ 0 h 18288"/>
-              <a:gd name="connsiteX7" fmla="*/ 4205897 w 10853928"/>
-              <a:gd name="connsiteY7" fmla="*/ 0 h 18288"/>
-              <a:gd name="connsiteX8" fmla="*/ 4558650 w 10853928"/>
-              <a:gd name="connsiteY8" fmla="*/ 0 h 18288"/>
-              <a:gd name="connsiteX9" fmla="*/ 5237020 w 10853928"/>
-              <a:gd name="connsiteY9" fmla="*/ 0 h 18288"/>
-              <a:gd name="connsiteX10" fmla="*/ 6132469 w 10853928"/>
-              <a:gd name="connsiteY10" fmla="*/ 0 h 18288"/>
-              <a:gd name="connsiteX11" fmla="*/ 6702301 w 10853928"/>
-              <a:gd name="connsiteY11" fmla="*/ 0 h 18288"/>
-              <a:gd name="connsiteX12" fmla="*/ 7272132 w 10853928"/>
-              <a:gd name="connsiteY12" fmla="*/ 0 h 18288"/>
-              <a:gd name="connsiteX13" fmla="*/ 7950502 w 10853928"/>
-              <a:gd name="connsiteY13" fmla="*/ 0 h 18288"/>
-              <a:gd name="connsiteX14" fmla="*/ 8737412 w 10853928"/>
-              <a:gd name="connsiteY14" fmla="*/ 0 h 18288"/>
-              <a:gd name="connsiteX15" fmla="*/ 9524322 w 10853928"/>
-              <a:gd name="connsiteY15" fmla="*/ 0 h 18288"/>
-              <a:gd name="connsiteX16" fmla="*/ 10853928 w 10853928"/>
-              <a:gd name="connsiteY16" fmla="*/ 0 h 18288"/>
-              <a:gd name="connsiteX17" fmla="*/ 10853928 w 10853928"/>
-              <a:gd name="connsiteY17" fmla="*/ 18288 h 18288"/>
-              <a:gd name="connsiteX18" fmla="*/ 10392636 w 10853928"/>
-              <a:gd name="connsiteY18" fmla="*/ 18288 h 18288"/>
-              <a:gd name="connsiteX19" fmla="*/ 9497187 w 10853928"/>
-              <a:gd name="connsiteY19" fmla="*/ 18288 h 18288"/>
-              <a:gd name="connsiteX20" fmla="*/ 8818817 w 10853928"/>
-              <a:gd name="connsiteY20" fmla="*/ 18288 h 18288"/>
-              <a:gd name="connsiteX21" fmla="*/ 8466064 w 10853928"/>
-              <a:gd name="connsiteY21" fmla="*/ 18288 h 18288"/>
-              <a:gd name="connsiteX22" fmla="*/ 7787693 w 10853928"/>
-              <a:gd name="connsiteY22" fmla="*/ 18288 h 18288"/>
-              <a:gd name="connsiteX23" fmla="*/ 7217862 w 10853928"/>
-              <a:gd name="connsiteY23" fmla="*/ 18288 h 18288"/>
-              <a:gd name="connsiteX24" fmla="*/ 6648031 w 10853928"/>
-              <a:gd name="connsiteY24" fmla="*/ 18288 h 18288"/>
-              <a:gd name="connsiteX25" fmla="*/ 6078200 w 10853928"/>
-              <a:gd name="connsiteY25" fmla="*/ 18288 h 18288"/>
-              <a:gd name="connsiteX26" fmla="*/ 5508368 w 10853928"/>
-              <a:gd name="connsiteY26" fmla="*/ 18288 h 18288"/>
-              <a:gd name="connsiteX27" fmla="*/ 4721459 w 10853928"/>
-              <a:gd name="connsiteY27" fmla="*/ 18288 h 18288"/>
-              <a:gd name="connsiteX28" fmla="*/ 4043088 w 10853928"/>
-              <a:gd name="connsiteY28" fmla="*/ 18288 h 18288"/>
-              <a:gd name="connsiteX29" fmla="*/ 3690336 w 10853928"/>
-              <a:gd name="connsiteY29" fmla="*/ 18288 h 18288"/>
-              <a:gd name="connsiteX30" fmla="*/ 3120504 w 10853928"/>
-              <a:gd name="connsiteY30" fmla="*/ 18288 h 18288"/>
-              <a:gd name="connsiteX31" fmla="*/ 2333595 w 10853928"/>
-              <a:gd name="connsiteY31" fmla="*/ 18288 h 18288"/>
-              <a:gd name="connsiteX32" fmla="*/ 1872303 w 10853928"/>
-              <a:gd name="connsiteY32" fmla="*/ 18288 h 18288"/>
-              <a:gd name="connsiteX33" fmla="*/ 976854 w 10853928"/>
-              <a:gd name="connsiteY33" fmla="*/ 18288 h 18288"/>
-              <a:gd name="connsiteX34" fmla="*/ 0 w 10853928"/>
-              <a:gd name="connsiteY34" fmla="*/ 18288 h 18288"/>
-              <a:gd name="connsiteX35" fmla="*/ 0 w 10853928"/>
-              <a:gd name="connsiteY35" fmla="*/ 0 h 18288"/>
+              <a:gd name="csX0" fmla="*/ 0 w 10853928"/>
+              <a:gd name="csY0" fmla="*/ 0 h 18288"/>
+              <a:gd name="csX1" fmla="*/ 461292 w 10853928"/>
+              <a:gd name="csY1" fmla="*/ 0 h 18288"/>
+              <a:gd name="csX2" fmla="*/ 1139662 w 10853928"/>
+              <a:gd name="csY2" fmla="*/ 0 h 18288"/>
+              <a:gd name="csX3" fmla="*/ 1926572 w 10853928"/>
+              <a:gd name="csY3" fmla="*/ 0 h 18288"/>
+              <a:gd name="csX4" fmla="*/ 2279325 w 10853928"/>
+              <a:gd name="csY4" fmla="*/ 0 h 18288"/>
+              <a:gd name="csX5" fmla="*/ 2632078 w 10853928"/>
+              <a:gd name="csY5" fmla="*/ 0 h 18288"/>
+              <a:gd name="csX6" fmla="*/ 3527527 w 10853928"/>
+              <a:gd name="csY6" fmla="*/ 0 h 18288"/>
+              <a:gd name="csX7" fmla="*/ 4205897 w 10853928"/>
+              <a:gd name="csY7" fmla="*/ 0 h 18288"/>
+              <a:gd name="csX8" fmla="*/ 4558650 w 10853928"/>
+              <a:gd name="csY8" fmla="*/ 0 h 18288"/>
+              <a:gd name="csX9" fmla="*/ 5237020 w 10853928"/>
+              <a:gd name="csY9" fmla="*/ 0 h 18288"/>
+              <a:gd name="csX10" fmla="*/ 6132469 w 10853928"/>
+              <a:gd name="csY10" fmla="*/ 0 h 18288"/>
+              <a:gd name="csX11" fmla="*/ 6702301 w 10853928"/>
+              <a:gd name="csY11" fmla="*/ 0 h 18288"/>
+              <a:gd name="csX12" fmla="*/ 7272132 w 10853928"/>
+              <a:gd name="csY12" fmla="*/ 0 h 18288"/>
+              <a:gd name="csX13" fmla="*/ 7950502 w 10853928"/>
+              <a:gd name="csY13" fmla="*/ 0 h 18288"/>
+              <a:gd name="csX14" fmla="*/ 8737412 w 10853928"/>
+              <a:gd name="csY14" fmla="*/ 0 h 18288"/>
+              <a:gd name="csX15" fmla="*/ 9524322 w 10853928"/>
+              <a:gd name="csY15" fmla="*/ 0 h 18288"/>
+              <a:gd name="csX16" fmla="*/ 10853928 w 10853928"/>
+              <a:gd name="csY16" fmla="*/ 0 h 18288"/>
+              <a:gd name="csX17" fmla="*/ 10853928 w 10853928"/>
+              <a:gd name="csY17" fmla="*/ 18288 h 18288"/>
+              <a:gd name="csX18" fmla="*/ 10392636 w 10853928"/>
+              <a:gd name="csY18" fmla="*/ 18288 h 18288"/>
+              <a:gd name="csX19" fmla="*/ 9497187 w 10853928"/>
+              <a:gd name="csY19" fmla="*/ 18288 h 18288"/>
+              <a:gd name="csX20" fmla="*/ 8818817 w 10853928"/>
+              <a:gd name="csY20" fmla="*/ 18288 h 18288"/>
+              <a:gd name="csX21" fmla="*/ 8466064 w 10853928"/>
+              <a:gd name="csY21" fmla="*/ 18288 h 18288"/>
+              <a:gd name="csX22" fmla="*/ 7787693 w 10853928"/>
+              <a:gd name="csY22" fmla="*/ 18288 h 18288"/>
+              <a:gd name="csX23" fmla="*/ 7217862 w 10853928"/>
+              <a:gd name="csY23" fmla="*/ 18288 h 18288"/>
+              <a:gd name="csX24" fmla="*/ 6648031 w 10853928"/>
+              <a:gd name="csY24" fmla="*/ 18288 h 18288"/>
+              <a:gd name="csX25" fmla="*/ 6078200 w 10853928"/>
+              <a:gd name="csY25" fmla="*/ 18288 h 18288"/>
+              <a:gd name="csX26" fmla="*/ 5508368 w 10853928"/>
+              <a:gd name="csY26" fmla="*/ 18288 h 18288"/>
+              <a:gd name="csX27" fmla="*/ 4721459 w 10853928"/>
+              <a:gd name="csY27" fmla="*/ 18288 h 18288"/>
+              <a:gd name="csX28" fmla="*/ 4043088 w 10853928"/>
+              <a:gd name="csY28" fmla="*/ 18288 h 18288"/>
+              <a:gd name="csX29" fmla="*/ 3690336 w 10853928"/>
+              <a:gd name="csY29" fmla="*/ 18288 h 18288"/>
+              <a:gd name="csX30" fmla="*/ 3120504 w 10853928"/>
+              <a:gd name="csY30" fmla="*/ 18288 h 18288"/>
+              <a:gd name="csX31" fmla="*/ 2333595 w 10853928"/>
+              <a:gd name="csY31" fmla="*/ 18288 h 18288"/>
+              <a:gd name="csX32" fmla="*/ 1872303 w 10853928"/>
+              <a:gd name="csY32" fmla="*/ 18288 h 18288"/>
+              <a:gd name="csX33" fmla="*/ 976854 w 10853928"/>
+              <a:gd name="csY33" fmla="*/ 18288 h 18288"/>
+              <a:gd name="csX34" fmla="*/ 0 w 10853928"/>
+              <a:gd name="csY34" fmla="*/ 18288 h 18288"/>
+              <a:gd name="csX35" fmla="*/ 0 w 10853928"/>
+              <a:gd name="csY35" fmla="*/ 0 h 18288"/>
             </a:gdLst>
             <a:ahLst/>
             <a:cxnLst>
               <a:cxn ang="0">
-                <a:pos x="connsiteX0" y="connsiteY0"/>
+                <a:pos x="csX0" y="csY0"/>
               </a:cxn>
               <a:cxn ang="0">
-                <a:pos x="connsiteX1" y="connsiteY1"/>
+                <a:pos x="csX1" y="csY1"/>
               </a:cxn>
               <a:cxn ang="0">
-                <a:pos x="connsiteX2" y="connsiteY2"/>
+                <a:pos x="csX2" y="csY2"/>
               </a:cxn>
               <a:cxn ang="0">
-                <a:pos x="connsiteX3" y="connsiteY3"/>
+                <a:pos x="csX3" y="csY3"/>
               </a:cxn>
               <a:cxn ang="0">
-                <a:pos x="connsiteX4" y="connsiteY4"/>
+                <a:pos x="csX4" y="csY4"/>
               </a:cxn>
               <a:cxn ang="0">
-                <a:pos x="connsiteX5" y="connsiteY5"/>
+                <a:pos x="csX5" y="csY5"/>
               </a:cxn>
               <a:cxn ang="0">
-                <a:pos x="connsiteX6" y="connsiteY6"/>
+                <a:pos x="csX6" y="csY6"/>
               </a:cxn>
               <a:cxn ang="0">
-                <a:pos x="connsiteX7" y="connsiteY7"/>
+                <a:pos x="csX7" y="csY7"/>
               </a:cxn>
               <a:cxn ang="0">
-                <a:pos x="connsiteX8" y="connsiteY8"/>
+                <a:pos x="csX8" y="csY8"/>
               </a:cxn>
               <a:cxn ang="0">
-                <a:pos x="connsiteX9" y="connsiteY9"/>
+                <a:pos x="csX9" y="csY9"/>
               </a:cxn>
               <a:cxn ang="0">
-                <a:pos x="connsiteX10" y="connsiteY10"/>
+                <a:pos x="csX10" y="csY10"/>
               </a:cxn>
               <a:cxn ang="0">
-                <a:pos x="connsiteX11" y="connsiteY11"/>
+                <a:pos x="csX11" y="csY11"/>
               </a:cxn>
               <a:cxn ang="0">
-                <a:pos x="connsiteX12" y="connsiteY12"/>
+                <a:pos x="csX12" y="csY12"/>
               </a:cxn>
               <a:cxn ang="0">
-                <a:pos x="connsiteX13" y="connsiteY13"/>
+                <a:pos x="csX13" y="csY13"/>
               </a:cxn>
               <a:cxn ang="0">
-                <a:pos x="connsiteX14" y="connsiteY14"/>
+                <a:pos x="csX14" y="csY14"/>
               </a:cxn>
               <a:cxn ang="0">
-                <a:pos x="connsiteX15" y="connsiteY15"/>
+                <a:pos x="csX15" y="csY15"/>
               </a:cxn>
               <a:cxn ang="0">
-                <a:pos x="connsiteX16" y="connsiteY16"/>
+                <a:pos x="csX16" y="csY16"/>
               </a:cxn>
               <a:cxn ang="0">
-                <a:pos x="connsiteX17" y="connsiteY17"/>
+                <a:pos x="csX17" y="csY17"/>
               </a:cxn>
               <a:cxn ang="0">
-                <a:pos x="connsiteX18" y="connsiteY18"/>
+                <a:pos x="csX18" y="csY18"/>
               </a:cxn>
               <a:cxn ang="0">
-                <a:pos x="connsiteX19" y="connsiteY19"/>
+                <a:pos x="csX19" y="csY19"/>
               </a:cxn>
               <a:cxn ang="0">
-                <a:pos x="connsiteX20" y="connsiteY20"/>
+                <a:pos x="csX20" y="csY20"/>
               </a:cxn>
               <a:cxn ang="0">
-                <a:pos x="connsiteX21" y="connsiteY21"/>
+                <a:pos x="csX21" y="csY21"/>
               </a:cxn>
               <a:cxn ang="0">
-                <a:pos x="connsiteX22" y="connsiteY22"/>
+                <a:pos x="csX22" y="csY22"/>
               </a:cxn>
               <a:cxn ang="0">
-                <a:pos x="connsiteX23" y="connsiteY23"/>
+                <a:pos x="csX23" y="csY23"/>
               </a:cxn>
               <a:cxn ang="0">
-                <a:pos x="connsiteX24" y="connsiteY24"/>
+                <a:pos x="csX24" y="csY24"/>
               </a:cxn>
               <a:cxn ang="0">
-                <a:pos x="connsiteX25" y="connsiteY25"/>
+                <a:pos x="csX25" y="csY25"/>
               </a:cxn>
               <a:cxn ang="0">
-                <a:pos x="connsiteX26" y="connsiteY26"/>
+                <a:pos x="csX26" y="csY26"/>
               </a:cxn>
               <a:cxn ang="0">
-                <a:pos x="connsiteX27" y="connsiteY27"/>
+                <a:pos x="csX27" y="csY27"/>
               </a:cxn>
               <a:cxn ang="0">
-                <a:pos x="connsiteX28" y="connsiteY28"/>
+                <a:pos x="csX28" y="csY28"/>
               </a:cxn>
               <a:cxn ang="0">
-                <a:pos x="connsiteX29" y="connsiteY29"/>
+                <a:pos x="csX29" y="csY29"/>
               </a:cxn>
               <a:cxn ang="0">
-                <a:pos x="connsiteX30" y="connsiteY30"/>
+                <a:pos x="csX30" y="csY30"/>
               </a:cxn>
               <a:cxn ang="0">
-                <a:pos x="connsiteX31" y="connsiteY31"/>
+                <a:pos x="csX31" y="csY31"/>
               </a:cxn>
               <a:cxn ang="0">
-                <a:pos x="connsiteX32" y="connsiteY32"/>
+                <a:pos x="csX32" y="csY32"/>
               </a:cxn>
               <a:cxn ang="0">
-                <a:pos x="connsiteX33" y="connsiteY33"/>
+                <a:pos x="csX33" y="csY33"/>
               </a:cxn>
               <a:cxn ang="0">
-                <a:pos x="connsiteX34" y="connsiteY34"/>
+                <a:pos x="csX34" y="csY34"/>
               </a:cxn>
               <a:cxn ang="0">
-                <a:pos x="connsiteX35" y="connsiteY35"/>
+                <a:pos x="csX35" y="csY35"/>
               </a:cxn>
             </a:cxnLst>
             <a:rect l="l" t="t" r="r" b="b"/>
@@ -30556,13 +30818,13 @@
         </p:spPr>
         <p:txBody>
           <a:bodyPr>
-            <a:normAutofit fontScale="92500" lnSpcReduction="20000"/>
+            <a:normAutofit fontScale="92500" lnSpcReduction="10000"/>
           </a:bodyPr>
           <a:lstStyle/>
           <a:p>
             <a:r>
               <a:rPr lang="en-US" dirty="0"/>
-              <a:t>1 controller per resource:</a:t>
+              <a:t>One controller per resource type:</a:t>
             </a:r>
           </a:p>
           <a:p>
@@ -30603,12 +30865,9 @@
           <a:p>
             <a:r>
               <a:rPr lang="en-US" dirty="0"/>
-              <a:t>Each process belongs to one (and only one) cgroup per resource of interest, called </a:t>
-            </a:r>
-            <a:r>
-              <a:rPr lang="en-US" b="1" dirty="0"/>
-              <a:t>controller</a:t>
-            </a:r>
+              <a:t>Each process belongs to exactly one cgroup for each resource of interest, and each resource is managed by a controller</a:t>
+            </a:r>
+            <a:endParaRPr lang="en-US" b="1" dirty="0"/>
           </a:p>
           <a:p>
             <a:r>
@@ -30620,7 +30879,7 @@
             <a:pPr lvl="1"/>
             <a:r>
               <a:rPr lang="en-US" dirty="0"/>
-              <a:t>CPU: c1:50%, c2:20%, c3:30%</a:t>
+              <a:t>CPU: c1:50%</a:t>
             </a:r>
           </a:p>
           <a:p>
@@ -30634,17 +30893,18 @@
             <a:pPr lvl="1"/>
             <a:r>
               <a:rPr lang="en-US" dirty="0"/>
-              <a:t>Processes A and B should use 50% of CPU</a:t>
-            </a:r>
-          </a:p>
-          <a:p>
-            <a:pPr lvl="2"/>
-            <a:r>
-              <a:rPr lang="en-US" sz="2400" dirty="0"/>
+              <a:t>Processes A and B should use 50% of CPU:</a:t>
+            </a:r>
+            <a:r>
+              <a:rPr lang="en-US" sz="2000" dirty="0"/>
+              <a:t> </a:t>
+            </a:r>
+            <a:r>
+              <a:rPr lang="en-US" dirty="0"/>
               <a:t>A </a:t>
             </a:r>
             <a:r>
-              <a:rPr lang="en-US" sz="2400" dirty="0">
+              <a:rPr lang="en-US" dirty="0">
                 <a:sym typeface="Wingdings" pitchFamily="2" charset="2"/>
               </a:rPr>
               <a:t> c1 in CPU / B  c1 in CPU</a:t>
@@ -30656,18 +30916,9 @@
               <a:rPr lang="en-US" dirty="0">
                 <a:sym typeface="Wingdings" pitchFamily="2" charset="2"/>
               </a:rPr>
-              <a:t>Process B should not use more than 2GB of memory</a:t>
-            </a:r>
-          </a:p>
-          <a:p>
-            <a:pPr lvl="2"/>
-            <a:r>
-              <a:rPr lang="en-US" sz="2400" dirty="0">
-                <a:sym typeface="Wingdings" pitchFamily="2" charset="2"/>
-              </a:rPr>
-              <a:t>B  m1 in Memory</a:t>
-            </a:r>
-            <a:endParaRPr lang="en-US" sz="2400" dirty="0"/>
+              <a:t>Process B should not use more than 2GB of memory: B  m1 in Memory</a:t>
+            </a:r>
+            <a:endParaRPr lang="en-US" dirty="0"/>
           </a:p>
           <a:p>
             <a:endParaRPr lang="en-US" sz="2400" dirty="0"/>
@@ -31142,188 +31393,188 @@
           <a:custGeom>
             <a:avLst/>
             <a:gdLst>
-              <a:gd name="connsiteX0" fmla="*/ 0 w 10853928"/>
-              <a:gd name="connsiteY0" fmla="*/ 0 h 18288"/>
-              <a:gd name="connsiteX1" fmla="*/ 461292 w 10853928"/>
-              <a:gd name="connsiteY1" fmla="*/ 0 h 18288"/>
-              <a:gd name="connsiteX2" fmla="*/ 1139662 w 10853928"/>
-              <a:gd name="connsiteY2" fmla="*/ 0 h 18288"/>
-              <a:gd name="connsiteX3" fmla="*/ 1926572 w 10853928"/>
-              <a:gd name="connsiteY3" fmla="*/ 0 h 18288"/>
-              <a:gd name="connsiteX4" fmla="*/ 2279325 w 10853928"/>
-              <a:gd name="connsiteY4" fmla="*/ 0 h 18288"/>
-              <a:gd name="connsiteX5" fmla="*/ 2632078 w 10853928"/>
-              <a:gd name="connsiteY5" fmla="*/ 0 h 18288"/>
-              <a:gd name="connsiteX6" fmla="*/ 3527527 w 10853928"/>
-              <a:gd name="connsiteY6" fmla="*/ 0 h 18288"/>
-              <a:gd name="connsiteX7" fmla="*/ 4205897 w 10853928"/>
-              <a:gd name="connsiteY7" fmla="*/ 0 h 18288"/>
-              <a:gd name="connsiteX8" fmla="*/ 4558650 w 10853928"/>
-              <a:gd name="connsiteY8" fmla="*/ 0 h 18288"/>
-              <a:gd name="connsiteX9" fmla="*/ 5237020 w 10853928"/>
-              <a:gd name="connsiteY9" fmla="*/ 0 h 18288"/>
-              <a:gd name="connsiteX10" fmla="*/ 6132469 w 10853928"/>
-              <a:gd name="connsiteY10" fmla="*/ 0 h 18288"/>
-              <a:gd name="connsiteX11" fmla="*/ 6702301 w 10853928"/>
-              <a:gd name="connsiteY11" fmla="*/ 0 h 18288"/>
-              <a:gd name="connsiteX12" fmla="*/ 7272132 w 10853928"/>
-              <a:gd name="connsiteY12" fmla="*/ 0 h 18288"/>
-              <a:gd name="connsiteX13" fmla="*/ 7950502 w 10853928"/>
-              <a:gd name="connsiteY13" fmla="*/ 0 h 18288"/>
-              <a:gd name="connsiteX14" fmla="*/ 8737412 w 10853928"/>
-              <a:gd name="connsiteY14" fmla="*/ 0 h 18288"/>
-              <a:gd name="connsiteX15" fmla="*/ 9524322 w 10853928"/>
-              <a:gd name="connsiteY15" fmla="*/ 0 h 18288"/>
-              <a:gd name="connsiteX16" fmla="*/ 10853928 w 10853928"/>
-              <a:gd name="connsiteY16" fmla="*/ 0 h 18288"/>
-              <a:gd name="connsiteX17" fmla="*/ 10853928 w 10853928"/>
-              <a:gd name="connsiteY17" fmla="*/ 18288 h 18288"/>
-              <a:gd name="connsiteX18" fmla="*/ 10392636 w 10853928"/>
-              <a:gd name="connsiteY18" fmla="*/ 18288 h 18288"/>
-              <a:gd name="connsiteX19" fmla="*/ 9497187 w 10853928"/>
-              <a:gd name="connsiteY19" fmla="*/ 18288 h 18288"/>
-              <a:gd name="connsiteX20" fmla="*/ 8818817 w 10853928"/>
-              <a:gd name="connsiteY20" fmla="*/ 18288 h 18288"/>
-              <a:gd name="connsiteX21" fmla="*/ 8466064 w 10853928"/>
-              <a:gd name="connsiteY21" fmla="*/ 18288 h 18288"/>
-              <a:gd name="connsiteX22" fmla="*/ 7787693 w 10853928"/>
-              <a:gd name="connsiteY22" fmla="*/ 18288 h 18288"/>
-              <a:gd name="connsiteX23" fmla="*/ 7217862 w 10853928"/>
-              <a:gd name="connsiteY23" fmla="*/ 18288 h 18288"/>
-              <a:gd name="connsiteX24" fmla="*/ 6648031 w 10853928"/>
-              <a:gd name="connsiteY24" fmla="*/ 18288 h 18288"/>
-              <a:gd name="connsiteX25" fmla="*/ 6078200 w 10853928"/>
-              <a:gd name="connsiteY25" fmla="*/ 18288 h 18288"/>
-              <a:gd name="connsiteX26" fmla="*/ 5508368 w 10853928"/>
-              <a:gd name="connsiteY26" fmla="*/ 18288 h 18288"/>
-              <a:gd name="connsiteX27" fmla="*/ 4721459 w 10853928"/>
-              <a:gd name="connsiteY27" fmla="*/ 18288 h 18288"/>
-              <a:gd name="connsiteX28" fmla="*/ 4043088 w 10853928"/>
-              <a:gd name="connsiteY28" fmla="*/ 18288 h 18288"/>
-              <a:gd name="connsiteX29" fmla="*/ 3690336 w 10853928"/>
-              <a:gd name="connsiteY29" fmla="*/ 18288 h 18288"/>
-              <a:gd name="connsiteX30" fmla="*/ 3120504 w 10853928"/>
-              <a:gd name="connsiteY30" fmla="*/ 18288 h 18288"/>
-              <a:gd name="connsiteX31" fmla="*/ 2333595 w 10853928"/>
-              <a:gd name="connsiteY31" fmla="*/ 18288 h 18288"/>
-              <a:gd name="connsiteX32" fmla="*/ 1872303 w 10853928"/>
-              <a:gd name="connsiteY32" fmla="*/ 18288 h 18288"/>
-              <a:gd name="connsiteX33" fmla="*/ 976854 w 10853928"/>
-              <a:gd name="connsiteY33" fmla="*/ 18288 h 18288"/>
-              <a:gd name="connsiteX34" fmla="*/ 0 w 10853928"/>
-              <a:gd name="connsiteY34" fmla="*/ 18288 h 18288"/>
-              <a:gd name="connsiteX35" fmla="*/ 0 w 10853928"/>
-              <a:gd name="connsiteY35" fmla="*/ 0 h 18288"/>
+              <a:gd name="csX0" fmla="*/ 0 w 10853928"/>
+              <a:gd name="csY0" fmla="*/ 0 h 18288"/>
+              <a:gd name="csX1" fmla="*/ 461292 w 10853928"/>
+              <a:gd name="csY1" fmla="*/ 0 h 18288"/>
+              <a:gd name="csX2" fmla="*/ 1139662 w 10853928"/>
+              <a:gd name="csY2" fmla="*/ 0 h 18288"/>
+              <a:gd name="csX3" fmla="*/ 1926572 w 10853928"/>
+              <a:gd name="csY3" fmla="*/ 0 h 18288"/>
+              <a:gd name="csX4" fmla="*/ 2279325 w 10853928"/>
+              <a:gd name="csY4" fmla="*/ 0 h 18288"/>
+              <a:gd name="csX5" fmla="*/ 2632078 w 10853928"/>
+              <a:gd name="csY5" fmla="*/ 0 h 18288"/>
+              <a:gd name="csX6" fmla="*/ 3527527 w 10853928"/>
+              <a:gd name="csY6" fmla="*/ 0 h 18288"/>
+              <a:gd name="csX7" fmla="*/ 4205897 w 10853928"/>
+              <a:gd name="csY7" fmla="*/ 0 h 18288"/>
+              <a:gd name="csX8" fmla="*/ 4558650 w 10853928"/>
+              <a:gd name="csY8" fmla="*/ 0 h 18288"/>
+              <a:gd name="csX9" fmla="*/ 5237020 w 10853928"/>
+              <a:gd name="csY9" fmla="*/ 0 h 18288"/>
+              <a:gd name="csX10" fmla="*/ 6132469 w 10853928"/>
+              <a:gd name="csY10" fmla="*/ 0 h 18288"/>
+              <a:gd name="csX11" fmla="*/ 6702301 w 10853928"/>
+              <a:gd name="csY11" fmla="*/ 0 h 18288"/>
+              <a:gd name="csX12" fmla="*/ 7272132 w 10853928"/>
+              <a:gd name="csY12" fmla="*/ 0 h 18288"/>
+              <a:gd name="csX13" fmla="*/ 7950502 w 10853928"/>
+              <a:gd name="csY13" fmla="*/ 0 h 18288"/>
+              <a:gd name="csX14" fmla="*/ 8737412 w 10853928"/>
+              <a:gd name="csY14" fmla="*/ 0 h 18288"/>
+              <a:gd name="csX15" fmla="*/ 9524322 w 10853928"/>
+              <a:gd name="csY15" fmla="*/ 0 h 18288"/>
+              <a:gd name="csX16" fmla="*/ 10853928 w 10853928"/>
+              <a:gd name="csY16" fmla="*/ 0 h 18288"/>
+              <a:gd name="csX17" fmla="*/ 10853928 w 10853928"/>
+              <a:gd name="csY17" fmla="*/ 18288 h 18288"/>
+              <a:gd name="csX18" fmla="*/ 10392636 w 10853928"/>
+              <a:gd name="csY18" fmla="*/ 18288 h 18288"/>
+              <a:gd name="csX19" fmla="*/ 9497187 w 10853928"/>
+              <a:gd name="csY19" fmla="*/ 18288 h 18288"/>
+              <a:gd name="csX20" fmla="*/ 8818817 w 10853928"/>
+              <a:gd name="csY20" fmla="*/ 18288 h 18288"/>
+              <a:gd name="csX21" fmla="*/ 8466064 w 10853928"/>
+              <a:gd name="csY21" fmla="*/ 18288 h 18288"/>
+              <a:gd name="csX22" fmla="*/ 7787693 w 10853928"/>
+              <a:gd name="csY22" fmla="*/ 18288 h 18288"/>
+              <a:gd name="csX23" fmla="*/ 7217862 w 10853928"/>
+              <a:gd name="csY23" fmla="*/ 18288 h 18288"/>
+              <a:gd name="csX24" fmla="*/ 6648031 w 10853928"/>
+              <a:gd name="csY24" fmla="*/ 18288 h 18288"/>
+              <a:gd name="csX25" fmla="*/ 6078200 w 10853928"/>
+              <a:gd name="csY25" fmla="*/ 18288 h 18288"/>
+              <a:gd name="csX26" fmla="*/ 5508368 w 10853928"/>
+              <a:gd name="csY26" fmla="*/ 18288 h 18288"/>
+              <a:gd name="csX27" fmla="*/ 4721459 w 10853928"/>
+              <a:gd name="csY27" fmla="*/ 18288 h 18288"/>
+              <a:gd name="csX28" fmla="*/ 4043088 w 10853928"/>
+              <a:gd name="csY28" fmla="*/ 18288 h 18288"/>
+              <a:gd name="csX29" fmla="*/ 3690336 w 10853928"/>
+              <a:gd name="csY29" fmla="*/ 18288 h 18288"/>
+              <a:gd name="csX30" fmla="*/ 3120504 w 10853928"/>
+              <a:gd name="csY30" fmla="*/ 18288 h 18288"/>
+              <a:gd name="csX31" fmla="*/ 2333595 w 10853928"/>
+              <a:gd name="csY31" fmla="*/ 18288 h 18288"/>
+              <a:gd name="csX32" fmla="*/ 1872303 w 10853928"/>
+              <a:gd name="csY32" fmla="*/ 18288 h 18288"/>
+              <a:gd name="csX33" fmla="*/ 976854 w 10853928"/>
+              <a:gd name="csY33" fmla="*/ 18288 h 18288"/>
+              <a:gd name="csX34" fmla="*/ 0 w 10853928"/>
+              <a:gd name="csY34" fmla="*/ 18288 h 18288"/>
+              <a:gd name="csX35" fmla="*/ 0 w 10853928"/>
+              <a:gd name="csY35" fmla="*/ 0 h 18288"/>
             </a:gdLst>
             <a:ahLst/>
             <a:cxnLst>
               <a:cxn ang="0">
-                <a:pos x="connsiteX0" y="connsiteY0"/>
+                <a:pos x="csX0" y="csY0"/>
               </a:cxn>
               <a:cxn ang="0">
-                <a:pos x="connsiteX1" y="connsiteY1"/>
+                <a:pos x="csX1" y="csY1"/>
               </a:cxn>
               <a:cxn ang="0">
-                <a:pos x="connsiteX2" y="connsiteY2"/>
+                <a:pos x="csX2" y="csY2"/>
               </a:cxn>
               <a:cxn ang="0">
-                <a:pos x="connsiteX3" y="connsiteY3"/>
+                <a:pos x="csX3" y="csY3"/>
               </a:cxn>
               <a:cxn ang="0">
-                <a:pos x="connsiteX4" y="connsiteY4"/>
+                <a:pos x="csX4" y="csY4"/>
               </a:cxn>
               <a:cxn ang="0">
-                <a:pos x="connsiteX5" y="connsiteY5"/>
+                <a:pos x="csX5" y="csY5"/>
               </a:cxn>
               <a:cxn ang="0">
-                <a:pos x="connsiteX6" y="connsiteY6"/>
+                <a:pos x="csX6" y="csY6"/>
               </a:cxn>
               <a:cxn ang="0">
-                <a:pos x="connsiteX7" y="connsiteY7"/>
+                <a:pos x="csX7" y="csY7"/>
               </a:cxn>
               <a:cxn ang="0">
-                <a:pos x="connsiteX8" y="connsiteY8"/>
+                <a:pos x="csX8" y="csY8"/>
               </a:cxn>
               <a:cxn ang="0">
-                <a:pos x="connsiteX9" y="connsiteY9"/>
+                <a:pos x="csX9" y="csY9"/>
               </a:cxn>
               <a:cxn ang="0">
-                <a:pos x="connsiteX10" y="connsiteY10"/>
+                <a:pos x="csX10" y="csY10"/>
               </a:cxn>
               <a:cxn ang="0">
-                <a:pos x="connsiteX11" y="connsiteY11"/>
+                <a:pos x="csX11" y="csY11"/>
               </a:cxn>
               <a:cxn ang="0">
-                <a:pos x="connsiteX12" y="connsiteY12"/>
+                <a:pos x="csX12" y="csY12"/>
               </a:cxn>
               <a:cxn ang="0">
-                <a:pos x="connsiteX13" y="connsiteY13"/>
+                <a:pos x="csX13" y="csY13"/>
               </a:cxn>
               <a:cxn ang="0">
-                <a:pos x="connsiteX14" y="connsiteY14"/>
+                <a:pos x="csX14" y="csY14"/>
               </a:cxn>
               <a:cxn ang="0">
-                <a:pos x="connsiteX15" y="connsiteY15"/>
+                <a:pos x="csX15" y="csY15"/>
               </a:cxn>
               <a:cxn ang="0">
-                <a:pos x="connsiteX16" y="connsiteY16"/>
+                <a:pos x="csX16" y="csY16"/>
               </a:cxn>
               <a:cxn ang="0">
-                <a:pos x="connsiteX17" y="connsiteY17"/>
+                <a:pos x="csX17" y="csY17"/>
               </a:cxn>
               <a:cxn ang="0">
-                <a:pos x="connsiteX18" y="connsiteY18"/>
+                <a:pos x="csX18" y="csY18"/>
               </a:cxn>
               <a:cxn ang="0">
-                <a:pos x="connsiteX19" y="connsiteY19"/>
+                <a:pos x="csX19" y="csY19"/>
               </a:cxn>
               <a:cxn ang="0">
-                <a:pos x="connsiteX20" y="connsiteY20"/>
+                <a:pos x="csX20" y="csY20"/>
               </a:cxn>
               <a:cxn ang="0">
-                <a:pos x="connsiteX21" y="connsiteY21"/>
+                <a:pos x="csX21" y="csY21"/>
               </a:cxn>
               <a:cxn ang="0">
-                <a:pos x="connsiteX22" y="connsiteY22"/>
+                <a:pos x="csX22" y="csY22"/>
               </a:cxn>
               <a:cxn ang="0">
-                <a:pos x="connsiteX23" y="connsiteY23"/>
+                <a:pos x="csX23" y="csY23"/>
               </a:cxn>
               <a:cxn ang="0">
-                <a:pos x="connsiteX24" y="connsiteY24"/>
+                <a:pos x="csX24" y="csY24"/>
               </a:cxn>
               <a:cxn ang="0">
-                <a:pos x="connsiteX25" y="connsiteY25"/>
+                <a:pos x="csX25" y="csY25"/>
               </a:cxn>
               <a:cxn ang="0">
-                <a:pos x="connsiteX26" y="connsiteY26"/>
+                <a:pos x="csX26" y="csY26"/>
               </a:cxn>
               <a:cxn ang="0">
-                <a:pos x="connsiteX27" y="connsiteY27"/>
+                <a:pos x="csX27" y="csY27"/>
               </a:cxn>
               <a:cxn ang="0">
-                <a:pos x="connsiteX28" y="connsiteY28"/>
+                <a:pos x="csX28" y="csY28"/>
               </a:cxn>
               <a:cxn ang="0">
-                <a:pos x="connsiteX29" y="connsiteY29"/>
+                <a:pos x="csX29" y="csY29"/>
               </a:cxn>
               <a:cxn ang="0">
-                <a:pos x="connsiteX30" y="connsiteY30"/>
+                <a:pos x="csX30" y="csY30"/>
               </a:cxn>
               <a:cxn ang="0">
-                <a:pos x="connsiteX31" y="connsiteY31"/>
+                <a:pos x="csX31" y="csY31"/>
               </a:cxn>
               <a:cxn ang="0">
-                <a:pos x="connsiteX32" y="connsiteY32"/>
+                <a:pos x="csX32" y="csY32"/>
               </a:cxn>
               <a:cxn ang="0">
-                <a:pos x="connsiteX33" y="connsiteY33"/>
+                <a:pos x="csX33" y="csY33"/>
               </a:cxn>
               <a:cxn ang="0">
-                <a:pos x="connsiteX34" y="connsiteY34"/>
+                <a:pos x="csX34" y="csY34"/>
               </a:cxn>
               <a:cxn ang="0">
-                <a:pos x="connsiteX35" y="connsiteY35"/>
+                <a:pos x="csX35" y="csY35"/>
               </a:cxn>
             </a:cxnLst>
             <a:rect l="l" t="t" r="r" b="b"/>
@@ -31808,7 +32059,7 @@
           <a:p>
             <a:r>
               <a:rPr lang="en-US" sz="3600" dirty="0"/>
-              <a:t>Processes A and B should use 50% of CPU ✅</a:t>
+              <a:t>Processes A and B should use 50% of CPU </a:t>
             </a:r>
           </a:p>
           <a:p>
@@ -31838,21 +32089,7 @@
             </a:r>
             <a:r>
               <a:rPr lang="en-US" sz="3200" dirty="0"/>
-              <a:t>Processes A and B should use 50% of CPU ✅</a:t>
-            </a:r>
-          </a:p>
-          <a:p>
-            <a:pPr lvl="1"/>
-            <a:r>
-              <a:rPr lang="en-US" sz="3200" b="1" u="sng" dirty="0"/>
-              <a:t>But what if we need to time share instead?</a:t>
-            </a:r>
-          </a:p>
-          <a:p>
-            <a:pPr lvl="2"/>
-            <a:r>
-              <a:rPr lang="en-US" sz="2800" i="1" dirty="0"/>
-              <a:t>Can be done, of course, but requires an approach that is not as direct as the other…</a:t>
+              <a:t>Processes A and B cannot use more than 50% of CPU </a:t>
             </a:r>
           </a:p>
         </p:txBody>
@@ -32286,7 +32523,7 @@
           <a:p>
             <a:r>
               <a:rPr lang="en-US" dirty="0"/>
-              <a:t>Note: there can be different ways of enforcing a restrictions, and they might also conflict…</a:t>
+              <a:t>Note: there can be different ways of enforcing a restriction, and they might also conflict…</a:t>
             </a:r>
           </a:p>
         </p:txBody>
@@ -32322,188 +32559,188 @@
           <a:custGeom>
             <a:avLst/>
             <a:gdLst>
-              <a:gd name="connsiteX0" fmla="*/ 0 w 10853928"/>
-              <a:gd name="connsiteY0" fmla="*/ 0 h 18288"/>
-              <a:gd name="connsiteX1" fmla="*/ 461292 w 10853928"/>
-              <a:gd name="connsiteY1" fmla="*/ 0 h 18288"/>
-              <a:gd name="connsiteX2" fmla="*/ 1139662 w 10853928"/>
-              <a:gd name="connsiteY2" fmla="*/ 0 h 18288"/>
-              <a:gd name="connsiteX3" fmla="*/ 1926572 w 10853928"/>
-              <a:gd name="connsiteY3" fmla="*/ 0 h 18288"/>
-              <a:gd name="connsiteX4" fmla="*/ 2279325 w 10853928"/>
-              <a:gd name="connsiteY4" fmla="*/ 0 h 18288"/>
-              <a:gd name="connsiteX5" fmla="*/ 2632078 w 10853928"/>
-              <a:gd name="connsiteY5" fmla="*/ 0 h 18288"/>
-              <a:gd name="connsiteX6" fmla="*/ 3527527 w 10853928"/>
-              <a:gd name="connsiteY6" fmla="*/ 0 h 18288"/>
-              <a:gd name="connsiteX7" fmla="*/ 4205897 w 10853928"/>
-              <a:gd name="connsiteY7" fmla="*/ 0 h 18288"/>
-              <a:gd name="connsiteX8" fmla="*/ 4558650 w 10853928"/>
-              <a:gd name="connsiteY8" fmla="*/ 0 h 18288"/>
-              <a:gd name="connsiteX9" fmla="*/ 5237020 w 10853928"/>
-              <a:gd name="connsiteY9" fmla="*/ 0 h 18288"/>
-              <a:gd name="connsiteX10" fmla="*/ 6132469 w 10853928"/>
-              <a:gd name="connsiteY10" fmla="*/ 0 h 18288"/>
-              <a:gd name="connsiteX11" fmla="*/ 6702301 w 10853928"/>
-              <a:gd name="connsiteY11" fmla="*/ 0 h 18288"/>
-              <a:gd name="connsiteX12" fmla="*/ 7272132 w 10853928"/>
-              <a:gd name="connsiteY12" fmla="*/ 0 h 18288"/>
-              <a:gd name="connsiteX13" fmla="*/ 7950502 w 10853928"/>
-              <a:gd name="connsiteY13" fmla="*/ 0 h 18288"/>
-              <a:gd name="connsiteX14" fmla="*/ 8737412 w 10853928"/>
-              <a:gd name="connsiteY14" fmla="*/ 0 h 18288"/>
-              <a:gd name="connsiteX15" fmla="*/ 9524322 w 10853928"/>
-              <a:gd name="connsiteY15" fmla="*/ 0 h 18288"/>
-              <a:gd name="connsiteX16" fmla="*/ 10853928 w 10853928"/>
-              <a:gd name="connsiteY16" fmla="*/ 0 h 18288"/>
-              <a:gd name="connsiteX17" fmla="*/ 10853928 w 10853928"/>
-              <a:gd name="connsiteY17" fmla="*/ 18288 h 18288"/>
-              <a:gd name="connsiteX18" fmla="*/ 10392636 w 10853928"/>
-              <a:gd name="connsiteY18" fmla="*/ 18288 h 18288"/>
-              <a:gd name="connsiteX19" fmla="*/ 9497187 w 10853928"/>
-              <a:gd name="connsiteY19" fmla="*/ 18288 h 18288"/>
-              <a:gd name="connsiteX20" fmla="*/ 8818817 w 10853928"/>
-              <a:gd name="connsiteY20" fmla="*/ 18288 h 18288"/>
-              <a:gd name="connsiteX21" fmla="*/ 8466064 w 10853928"/>
-              <a:gd name="connsiteY21" fmla="*/ 18288 h 18288"/>
-              <a:gd name="connsiteX22" fmla="*/ 7787693 w 10853928"/>
-              <a:gd name="connsiteY22" fmla="*/ 18288 h 18288"/>
-              <a:gd name="connsiteX23" fmla="*/ 7217862 w 10853928"/>
-              <a:gd name="connsiteY23" fmla="*/ 18288 h 18288"/>
-              <a:gd name="connsiteX24" fmla="*/ 6648031 w 10853928"/>
-              <a:gd name="connsiteY24" fmla="*/ 18288 h 18288"/>
-              <a:gd name="connsiteX25" fmla="*/ 6078200 w 10853928"/>
-              <a:gd name="connsiteY25" fmla="*/ 18288 h 18288"/>
-              <a:gd name="connsiteX26" fmla="*/ 5508368 w 10853928"/>
-              <a:gd name="connsiteY26" fmla="*/ 18288 h 18288"/>
-              <a:gd name="connsiteX27" fmla="*/ 4721459 w 10853928"/>
-              <a:gd name="connsiteY27" fmla="*/ 18288 h 18288"/>
-              <a:gd name="connsiteX28" fmla="*/ 4043088 w 10853928"/>
-              <a:gd name="connsiteY28" fmla="*/ 18288 h 18288"/>
-              <a:gd name="connsiteX29" fmla="*/ 3690336 w 10853928"/>
-              <a:gd name="connsiteY29" fmla="*/ 18288 h 18288"/>
-              <a:gd name="connsiteX30" fmla="*/ 3120504 w 10853928"/>
-              <a:gd name="connsiteY30" fmla="*/ 18288 h 18288"/>
-              <a:gd name="connsiteX31" fmla="*/ 2333595 w 10853928"/>
-              <a:gd name="connsiteY31" fmla="*/ 18288 h 18288"/>
-              <a:gd name="connsiteX32" fmla="*/ 1872303 w 10853928"/>
-              <a:gd name="connsiteY32" fmla="*/ 18288 h 18288"/>
-              <a:gd name="connsiteX33" fmla="*/ 976854 w 10853928"/>
-              <a:gd name="connsiteY33" fmla="*/ 18288 h 18288"/>
-              <a:gd name="connsiteX34" fmla="*/ 0 w 10853928"/>
-              <a:gd name="connsiteY34" fmla="*/ 18288 h 18288"/>
-              <a:gd name="connsiteX35" fmla="*/ 0 w 10853928"/>
-              <a:gd name="connsiteY35" fmla="*/ 0 h 18288"/>
+              <a:gd name="csX0" fmla="*/ 0 w 10853928"/>
+              <a:gd name="csY0" fmla="*/ 0 h 18288"/>
+              <a:gd name="csX1" fmla="*/ 461292 w 10853928"/>
+              <a:gd name="csY1" fmla="*/ 0 h 18288"/>
+              <a:gd name="csX2" fmla="*/ 1139662 w 10853928"/>
+              <a:gd name="csY2" fmla="*/ 0 h 18288"/>
+              <a:gd name="csX3" fmla="*/ 1926572 w 10853928"/>
+              <a:gd name="csY3" fmla="*/ 0 h 18288"/>
+              <a:gd name="csX4" fmla="*/ 2279325 w 10853928"/>
+              <a:gd name="csY4" fmla="*/ 0 h 18288"/>
+              <a:gd name="csX5" fmla="*/ 2632078 w 10853928"/>
+              <a:gd name="csY5" fmla="*/ 0 h 18288"/>
+              <a:gd name="csX6" fmla="*/ 3527527 w 10853928"/>
+              <a:gd name="csY6" fmla="*/ 0 h 18288"/>
+              <a:gd name="csX7" fmla="*/ 4205897 w 10853928"/>
+              <a:gd name="csY7" fmla="*/ 0 h 18288"/>
+              <a:gd name="csX8" fmla="*/ 4558650 w 10853928"/>
+              <a:gd name="csY8" fmla="*/ 0 h 18288"/>
+              <a:gd name="csX9" fmla="*/ 5237020 w 10853928"/>
+              <a:gd name="csY9" fmla="*/ 0 h 18288"/>
+              <a:gd name="csX10" fmla="*/ 6132469 w 10853928"/>
+              <a:gd name="csY10" fmla="*/ 0 h 18288"/>
+              <a:gd name="csX11" fmla="*/ 6702301 w 10853928"/>
+              <a:gd name="csY11" fmla="*/ 0 h 18288"/>
+              <a:gd name="csX12" fmla="*/ 7272132 w 10853928"/>
+              <a:gd name="csY12" fmla="*/ 0 h 18288"/>
+              <a:gd name="csX13" fmla="*/ 7950502 w 10853928"/>
+              <a:gd name="csY13" fmla="*/ 0 h 18288"/>
+              <a:gd name="csX14" fmla="*/ 8737412 w 10853928"/>
+              <a:gd name="csY14" fmla="*/ 0 h 18288"/>
+              <a:gd name="csX15" fmla="*/ 9524322 w 10853928"/>
+              <a:gd name="csY15" fmla="*/ 0 h 18288"/>
+              <a:gd name="csX16" fmla="*/ 10853928 w 10853928"/>
+              <a:gd name="csY16" fmla="*/ 0 h 18288"/>
+              <a:gd name="csX17" fmla="*/ 10853928 w 10853928"/>
+              <a:gd name="csY17" fmla="*/ 18288 h 18288"/>
+              <a:gd name="csX18" fmla="*/ 10392636 w 10853928"/>
+              <a:gd name="csY18" fmla="*/ 18288 h 18288"/>
+              <a:gd name="csX19" fmla="*/ 9497187 w 10853928"/>
+              <a:gd name="csY19" fmla="*/ 18288 h 18288"/>
+              <a:gd name="csX20" fmla="*/ 8818817 w 10853928"/>
+              <a:gd name="csY20" fmla="*/ 18288 h 18288"/>
+              <a:gd name="csX21" fmla="*/ 8466064 w 10853928"/>
+              <a:gd name="csY21" fmla="*/ 18288 h 18288"/>
+              <a:gd name="csX22" fmla="*/ 7787693 w 10853928"/>
+              <a:gd name="csY22" fmla="*/ 18288 h 18288"/>
+              <a:gd name="csX23" fmla="*/ 7217862 w 10853928"/>
+              <a:gd name="csY23" fmla="*/ 18288 h 18288"/>
+              <a:gd name="csX24" fmla="*/ 6648031 w 10853928"/>
+              <a:gd name="csY24" fmla="*/ 18288 h 18288"/>
+              <a:gd name="csX25" fmla="*/ 6078200 w 10853928"/>
+              <a:gd name="csY25" fmla="*/ 18288 h 18288"/>
+              <a:gd name="csX26" fmla="*/ 5508368 w 10853928"/>
+              <a:gd name="csY26" fmla="*/ 18288 h 18288"/>
+              <a:gd name="csX27" fmla="*/ 4721459 w 10853928"/>
+              <a:gd name="csY27" fmla="*/ 18288 h 18288"/>
+              <a:gd name="csX28" fmla="*/ 4043088 w 10853928"/>
+              <a:gd name="csY28" fmla="*/ 18288 h 18288"/>
+              <a:gd name="csX29" fmla="*/ 3690336 w 10853928"/>
+              <a:gd name="csY29" fmla="*/ 18288 h 18288"/>
+              <a:gd name="csX30" fmla="*/ 3120504 w 10853928"/>
+              <a:gd name="csY30" fmla="*/ 18288 h 18288"/>
+              <a:gd name="csX31" fmla="*/ 2333595 w 10853928"/>
+              <a:gd name="csY31" fmla="*/ 18288 h 18288"/>
+              <a:gd name="csX32" fmla="*/ 1872303 w 10853928"/>
+              <a:gd name="csY32" fmla="*/ 18288 h 18288"/>
+              <a:gd name="csX33" fmla="*/ 976854 w 10853928"/>
+              <a:gd name="csY33" fmla="*/ 18288 h 18288"/>
+              <a:gd name="csX34" fmla="*/ 0 w 10853928"/>
+              <a:gd name="csY34" fmla="*/ 18288 h 18288"/>
+              <a:gd name="csX35" fmla="*/ 0 w 10853928"/>
+              <a:gd name="csY35" fmla="*/ 0 h 18288"/>
             </a:gdLst>
             <a:ahLst/>
             <a:cxnLst>
               <a:cxn ang="0">
-                <a:pos x="connsiteX0" y="connsiteY0"/>
+                <a:pos x="csX0" y="csY0"/>
               </a:cxn>
               <a:cxn ang="0">
-                <a:pos x="connsiteX1" y="connsiteY1"/>
+                <a:pos x="csX1" y="csY1"/>
               </a:cxn>
               <a:cxn ang="0">
-                <a:pos x="connsiteX2" y="connsiteY2"/>
+                <a:pos x="csX2" y="csY2"/>
               </a:cxn>
               <a:cxn ang="0">
-                <a:pos x="connsiteX3" y="connsiteY3"/>
+                <a:pos x="csX3" y="csY3"/>
               </a:cxn>
               <a:cxn ang="0">
-                <a:pos x="connsiteX4" y="connsiteY4"/>
+                <a:pos x="csX4" y="csY4"/>
               </a:cxn>
               <a:cxn ang="0">
-                <a:pos x="connsiteX5" y="connsiteY5"/>
+                <a:pos x="csX5" y="csY5"/>
               </a:cxn>
               <a:cxn ang="0">
-                <a:pos x="connsiteX6" y="connsiteY6"/>
+                <a:pos x="csX6" y="csY6"/>
               </a:cxn>
               <a:cxn ang="0">
-                <a:pos x="connsiteX7" y="connsiteY7"/>
+                <a:pos x="csX7" y="csY7"/>
               </a:cxn>
               <a:cxn ang="0">
-                <a:pos x="connsiteX8" y="connsiteY8"/>
+                <a:pos x="csX8" y="csY8"/>
               </a:cxn>
               <a:cxn ang="0">
-                <a:pos x="connsiteX9" y="connsiteY9"/>
+                <a:pos x="csX9" y="csY9"/>
               </a:cxn>
               <a:cxn ang="0">
-                <a:pos x="connsiteX10" y="connsiteY10"/>
+                <a:pos x="csX10" y="csY10"/>
               </a:cxn>
               <a:cxn ang="0">
-                <a:pos x="connsiteX11" y="connsiteY11"/>
+                <a:pos x="csX11" y="csY11"/>
               </a:cxn>
               <a:cxn ang="0">
-                <a:pos x="connsiteX12" y="connsiteY12"/>
+                <a:pos x="csX12" y="csY12"/>
               </a:cxn>
               <a:cxn ang="0">
-                <a:pos x="connsiteX13" y="connsiteY13"/>
+                <a:pos x="csX13" y="csY13"/>
               </a:cxn>
               <a:cxn ang="0">
-                <a:pos x="connsiteX14" y="connsiteY14"/>
+                <a:pos x="csX14" y="csY14"/>
               </a:cxn>
               <a:cxn ang="0">
-                <a:pos x="connsiteX15" y="connsiteY15"/>
+                <a:pos x="csX15" y="csY15"/>
               </a:cxn>
               <a:cxn ang="0">
-                <a:pos x="connsiteX16" y="connsiteY16"/>
+                <a:pos x="csX16" y="csY16"/>
               </a:cxn>
               <a:cxn ang="0">
-                <a:pos x="connsiteX17" y="connsiteY17"/>
+                <a:pos x="csX17" y="csY17"/>
               </a:cxn>
               <a:cxn ang="0">
-                <a:pos x="connsiteX18" y="connsiteY18"/>
+                <a:pos x="csX18" y="csY18"/>
               </a:cxn>
               <a:cxn ang="0">
-                <a:pos x="connsiteX19" y="connsiteY19"/>
+                <a:pos x="csX19" y="csY19"/>
               </a:cxn>
               <a:cxn ang="0">
-                <a:pos x="connsiteX20" y="connsiteY20"/>
+                <a:pos x="csX20" y="csY20"/>
               </a:cxn>
               <a:cxn ang="0">
-                <a:pos x="connsiteX21" y="connsiteY21"/>
+                <a:pos x="csX21" y="csY21"/>
               </a:cxn>
               <a:cxn ang="0">
-                <a:pos x="connsiteX22" y="connsiteY22"/>
+                <a:pos x="csX22" y="csY22"/>
               </a:cxn>
               <a:cxn ang="0">
-                <a:pos x="connsiteX23" y="connsiteY23"/>
+                <a:pos x="csX23" y="csY23"/>
               </a:cxn>
               <a:cxn ang="0">
-                <a:pos x="connsiteX24" y="connsiteY24"/>
+                <a:pos x="csX24" y="csY24"/>
               </a:cxn>
               <a:cxn ang="0">
-                <a:pos x="connsiteX25" y="connsiteY25"/>
+                <a:pos x="csX25" y="csY25"/>
               </a:cxn>
               <a:cxn ang="0">
-                <a:pos x="connsiteX26" y="connsiteY26"/>
+                <a:pos x="csX26" y="csY26"/>
               </a:cxn>
               <a:cxn ang="0">
-                <a:pos x="connsiteX27" y="connsiteY27"/>
+                <a:pos x="csX27" y="csY27"/>
               </a:cxn>
               <a:cxn ang="0">
-                <a:pos x="connsiteX28" y="connsiteY28"/>
+                <a:pos x="csX28" y="csY28"/>
               </a:cxn>
               <a:cxn ang="0">
-                <a:pos x="connsiteX29" y="connsiteY29"/>
+                <a:pos x="csX29" y="csY29"/>
               </a:cxn>
               <a:cxn ang="0">
-                <a:pos x="connsiteX30" y="connsiteY30"/>
+                <a:pos x="csX30" y="csY30"/>
               </a:cxn>
               <a:cxn ang="0">
-                <a:pos x="connsiteX31" y="connsiteY31"/>
+                <a:pos x="csX31" y="csY31"/>
               </a:cxn>
               <a:cxn ang="0">
-                <a:pos x="connsiteX32" y="connsiteY32"/>
+                <a:pos x="csX32" y="csY32"/>
               </a:cxn>
               <a:cxn ang="0">
-                <a:pos x="connsiteX33" y="connsiteY33"/>
+                <a:pos x="csX33" y="csY33"/>
               </a:cxn>
               <a:cxn ang="0">
-                <a:pos x="connsiteX34" y="connsiteY34"/>
+                <a:pos x="csX34" y="csY34"/>
               </a:cxn>
               <a:cxn ang="0">
-                <a:pos x="connsiteX35" y="connsiteY35"/>
+                <a:pos x="csX35" y="csY35"/>
               </a:cxn>
             </a:cxnLst>
             <a:rect l="l" t="t" r="r" b="b"/>
@@ -32996,7 +33233,7 @@
             </a:r>
             <a:r>
               <a:rPr lang="en-US" sz="3600" dirty="0"/>
-              <a:t> controller: use only cores 1 and 2</a:t>
+              <a:t> controller: use only core 1</a:t>
             </a:r>
           </a:p>
           <a:p>
@@ -33497,188 +33734,188 @@
           <a:custGeom>
             <a:avLst/>
             <a:gdLst>
-              <a:gd name="connsiteX0" fmla="*/ 0 w 10853928"/>
-              <a:gd name="connsiteY0" fmla="*/ 0 h 18288"/>
-              <a:gd name="connsiteX1" fmla="*/ 461292 w 10853928"/>
-              <a:gd name="connsiteY1" fmla="*/ 0 h 18288"/>
-              <a:gd name="connsiteX2" fmla="*/ 1139662 w 10853928"/>
-              <a:gd name="connsiteY2" fmla="*/ 0 h 18288"/>
-              <a:gd name="connsiteX3" fmla="*/ 1926572 w 10853928"/>
-              <a:gd name="connsiteY3" fmla="*/ 0 h 18288"/>
-              <a:gd name="connsiteX4" fmla="*/ 2279325 w 10853928"/>
-              <a:gd name="connsiteY4" fmla="*/ 0 h 18288"/>
-              <a:gd name="connsiteX5" fmla="*/ 2632078 w 10853928"/>
-              <a:gd name="connsiteY5" fmla="*/ 0 h 18288"/>
-              <a:gd name="connsiteX6" fmla="*/ 3527527 w 10853928"/>
-              <a:gd name="connsiteY6" fmla="*/ 0 h 18288"/>
-              <a:gd name="connsiteX7" fmla="*/ 4205897 w 10853928"/>
-              <a:gd name="connsiteY7" fmla="*/ 0 h 18288"/>
-              <a:gd name="connsiteX8" fmla="*/ 4558650 w 10853928"/>
-              <a:gd name="connsiteY8" fmla="*/ 0 h 18288"/>
-              <a:gd name="connsiteX9" fmla="*/ 5237020 w 10853928"/>
-              <a:gd name="connsiteY9" fmla="*/ 0 h 18288"/>
-              <a:gd name="connsiteX10" fmla="*/ 6132469 w 10853928"/>
-              <a:gd name="connsiteY10" fmla="*/ 0 h 18288"/>
-              <a:gd name="connsiteX11" fmla="*/ 6702301 w 10853928"/>
-              <a:gd name="connsiteY11" fmla="*/ 0 h 18288"/>
-              <a:gd name="connsiteX12" fmla="*/ 7272132 w 10853928"/>
-              <a:gd name="connsiteY12" fmla="*/ 0 h 18288"/>
-              <a:gd name="connsiteX13" fmla="*/ 7950502 w 10853928"/>
-              <a:gd name="connsiteY13" fmla="*/ 0 h 18288"/>
-              <a:gd name="connsiteX14" fmla="*/ 8737412 w 10853928"/>
-              <a:gd name="connsiteY14" fmla="*/ 0 h 18288"/>
-              <a:gd name="connsiteX15" fmla="*/ 9524322 w 10853928"/>
-              <a:gd name="connsiteY15" fmla="*/ 0 h 18288"/>
-              <a:gd name="connsiteX16" fmla="*/ 10853928 w 10853928"/>
-              <a:gd name="connsiteY16" fmla="*/ 0 h 18288"/>
-              <a:gd name="connsiteX17" fmla="*/ 10853928 w 10853928"/>
-              <a:gd name="connsiteY17" fmla="*/ 18288 h 18288"/>
-              <a:gd name="connsiteX18" fmla="*/ 10392636 w 10853928"/>
-              <a:gd name="connsiteY18" fmla="*/ 18288 h 18288"/>
-              <a:gd name="connsiteX19" fmla="*/ 9497187 w 10853928"/>
-              <a:gd name="connsiteY19" fmla="*/ 18288 h 18288"/>
-              <a:gd name="connsiteX20" fmla="*/ 8818817 w 10853928"/>
-              <a:gd name="connsiteY20" fmla="*/ 18288 h 18288"/>
-              <a:gd name="connsiteX21" fmla="*/ 8466064 w 10853928"/>
-              <a:gd name="connsiteY21" fmla="*/ 18288 h 18288"/>
-              <a:gd name="connsiteX22" fmla="*/ 7787693 w 10853928"/>
-              <a:gd name="connsiteY22" fmla="*/ 18288 h 18288"/>
-              <a:gd name="connsiteX23" fmla="*/ 7217862 w 10853928"/>
-              <a:gd name="connsiteY23" fmla="*/ 18288 h 18288"/>
-              <a:gd name="connsiteX24" fmla="*/ 6648031 w 10853928"/>
-              <a:gd name="connsiteY24" fmla="*/ 18288 h 18288"/>
-              <a:gd name="connsiteX25" fmla="*/ 6078200 w 10853928"/>
-              <a:gd name="connsiteY25" fmla="*/ 18288 h 18288"/>
-              <a:gd name="connsiteX26" fmla="*/ 5508368 w 10853928"/>
-              <a:gd name="connsiteY26" fmla="*/ 18288 h 18288"/>
-              <a:gd name="connsiteX27" fmla="*/ 4721459 w 10853928"/>
-              <a:gd name="connsiteY27" fmla="*/ 18288 h 18288"/>
-              <a:gd name="connsiteX28" fmla="*/ 4043088 w 10853928"/>
-              <a:gd name="connsiteY28" fmla="*/ 18288 h 18288"/>
-              <a:gd name="connsiteX29" fmla="*/ 3690336 w 10853928"/>
-              <a:gd name="connsiteY29" fmla="*/ 18288 h 18288"/>
-              <a:gd name="connsiteX30" fmla="*/ 3120504 w 10853928"/>
-              <a:gd name="connsiteY30" fmla="*/ 18288 h 18288"/>
-              <a:gd name="connsiteX31" fmla="*/ 2333595 w 10853928"/>
-              <a:gd name="connsiteY31" fmla="*/ 18288 h 18288"/>
-              <a:gd name="connsiteX32" fmla="*/ 1872303 w 10853928"/>
-              <a:gd name="connsiteY32" fmla="*/ 18288 h 18288"/>
-              <a:gd name="connsiteX33" fmla="*/ 976854 w 10853928"/>
-              <a:gd name="connsiteY33" fmla="*/ 18288 h 18288"/>
-              <a:gd name="connsiteX34" fmla="*/ 0 w 10853928"/>
-              <a:gd name="connsiteY34" fmla="*/ 18288 h 18288"/>
-              <a:gd name="connsiteX35" fmla="*/ 0 w 10853928"/>
-              <a:gd name="connsiteY35" fmla="*/ 0 h 18288"/>
+              <a:gd name="csX0" fmla="*/ 0 w 10853928"/>
+              <a:gd name="csY0" fmla="*/ 0 h 18288"/>
+              <a:gd name="csX1" fmla="*/ 461292 w 10853928"/>
+              <a:gd name="csY1" fmla="*/ 0 h 18288"/>
+              <a:gd name="csX2" fmla="*/ 1139662 w 10853928"/>
+              <a:gd name="csY2" fmla="*/ 0 h 18288"/>
+              <a:gd name="csX3" fmla="*/ 1926572 w 10853928"/>
+              <a:gd name="csY3" fmla="*/ 0 h 18288"/>
+              <a:gd name="csX4" fmla="*/ 2279325 w 10853928"/>
+              <a:gd name="csY4" fmla="*/ 0 h 18288"/>
+              <a:gd name="csX5" fmla="*/ 2632078 w 10853928"/>
+              <a:gd name="csY5" fmla="*/ 0 h 18288"/>
+              <a:gd name="csX6" fmla="*/ 3527527 w 10853928"/>
+              <a:gd name="csY6" fmla="*/ 0 h 18288"/>
+              <a:gd name="csX7" fmla="*/ 4205897 w 10853928"/>
+              <a:gd name="csY7" fmla="*/ 0 h 18288"/>
+              <a:gd name="csX8" fmla="*/ 4558650 w 10853928"/>
+              <a:gd name="csY8" fmla="*/ 0 h 18288"/>
+              <a:gd name="csX9" fmla="*/ 5237020 w 10853928"/>
+              <a:gd name="csY9" fmla="*/ 0 h 18288"/>
+              <a:gd name="csX10" fmla="*/ 6132469 w 10853928"/>
+              <a:gd name="csY10" fmla="*/ 0 h 18288"/>
+              <a:gd name="csX11" fmla="*/ 6702301 w 10853928"/>
+              <a:gd name="csY11" fmla="*/ 0 h 18288"/>
+              <a:gd name="csX12" fmla="*/ 7272132 w 10853928"/>
+              <a:gd name="csY12" fmla="*/ 0 h 18288"/>
+              <a:gd name="csX13" fmla="*/ 7950502 w 10853928"/>
+              <a:gd name="csY13" fmla="*/ 0 h 18288"/>
+              <a:gd name="csX14" fmla="*/ 8737412 w 10853928"/>
+              <a:gd name="csY14" fmla="*/ 0 h 18288"/>
+              <a:gd name="csX15" fmla="*/ 9524322 w 10853928"/>
+              <a:gd name="csY15" fmla="*/ 0 h 18288"/>
+              <a:gd name="csX16" fmla="*/ 10853928 w 10853928"/>
+              <a:gd name="csY16" fmla="*/ 0 h 18288"/>
+              <a:gd name="csX17" fmla="*/ 10853928 w 10853928"/>
+              <a:gd name="csY17" fmla="*/ 18288 h 18288"/>
+              <a:gd name="csX18" fmla="*/ 10392636 w 10853928"/>
+              <a:gd name="csY18" fmla="*/ 18288 h 18288"/>
+              <a:gd name="csX19" fmla="*/ 9497187 w 10853928"/>
+              <a:gd name="csY19" fmla="*/ 18288 h 18288"/>
+              <a:gd name="csX20" fmla="*/ 8818817 w 10853928"/>
+              <a:gd name="csY20" fmla="*/ 18288 h 18288"/>
+              <a:gd name="csX21" fmla="*/ 8466064 w 10853928"/>
+              <a:gd name="csY21" fmla="*/ 18288 h 18288"/>
+              <a:gd name="csX22" fmla="*/ 7787693 w 10853928"/>
+              <a:gd name="csY22" fmla="*/ 18288 h 18288"/>
+              <a:gd name="csX23" fmla="*/ 7217862 w 10853928"/>
+              <a:gd name="csY23" fmla="*/ 18288 h 18288"/>
+              <a:gd name="csX24" fmla="*/ 6648031 w 10853928"/>
+              <a:gd name="csY24" fmla="*/ 18288 h 18288"/>
+              <a:gd name="csX25" fmla="*/ 6078200 w 10853928"/>
+              <a:gd name="csY25" fmla="*/ 18288 h 18288"/>
+              <a:gd name="csX26" fmla="*/ 5508368 w 10853928"/>
+              <a:gd name="csY26" fmla="*/ 18288 h 18288"/>
+              <a:gd name="csX27" fmla="*/ 4721459 w 10853928"/>
+              <a:gd name="csY27" fmla="*/ 18288 h 18288"/>
+              <a:gd name="csX28" fmla="*/ 4043088 w 10853928"/>
+              <a:gd name="csY28" fmla="*/ 18288 h 18288"/>
+              <a:gd name="csX29" fmla="*/ 3690336 w 10853928"/>
+              <a:gd name="csY29" fmla="*/ 18288 h 18288"/>
+              <a:gd name="csX30" fmla="*/ 3120504 w 10853928"/>
+              <a:gd name="csY30" fmla="*/ 18288 h 18288"/>
+              <a:gd name="csX31" fmla="*/ 2333595 w 10853928"/>
+              <a:gd name="csY31" fmla="*/ 18288 h 18288"/>
+              <a:gd name="csX32" fmla="*/ 1872303 w 10853928"/>
+              <a:gd name="csY32" fmla="*/ 18288 h 18288"/>
+              <a:gd name="csX33" fmla="*/ 976854 w 10853928"/>
+              <a:gd name="csY33" fmla="*/ 18288 h 18288"/>
+              <a:gd name="csX34" fmla="*/ 0 w 10853928"/>
+              <a:gd name="csY34" fmla="*/ 18288 h 18288"/>
+              <a:gd name="csX35" fmla="*/ 0 w 10853928"/>
+              <a:gd name="csY35" fmla="*/ 0 h 18288"/>
             </a:gdLst>
             <a:ahLst/>
             <a:cxnLst>
               <a:cxn ang="0">
-                <a:pos x="connsiteX0" y="connsiteY0"/>
+                <a:pos x="csX0" y="csY0"/>
               </a:cxn>
               <a:cxn ang="0">
-                <a:pos x="connsiteX1" y="connsiteY1"/>
+                <a:pos x="csX1" y="csY1"/>
               </a:cxn>
               <a:cxn ang="0">
-                <a:pos x="connsiteX2" y="connsiteY2"/>
+                <a:pos x="csX2" y="csY2"/>
               </a:cxn>
               <a:cxn ang="0">
-                <a:pos x="connsiteX3" y="connsiteY3"/>
+                <a:pos x="csX3" y="csY3"/>
               </a:cxn>
               <a:cxn ang="0">
-                <a:pos x="connsiteX4" y="connsiteY4"/>
+                <a:pos x="csX4" y="csY4"/>
               </a:cxn>
               <a:cxn ang="0">
-                <a:pos x="connsiteX5" y="connsiteY5"/>
+                <a:pos x="csX5" y="csY5"/>
               </a:cxn>
               <a:cxn ang="0">
-                <a:pos x="connsiteX6" y="connsiteY6"/>
+                <a:pos x="csX6" y="csY6"/>
               </a:cxn>
               <a:cxn ang="0">
-                <a:pos x="connsiteX7" y="connsiteY7"/>
+                <a:pos x="csX7" y="csY7"/>
               </a:cxn>
               <a:cxn ang="0">
-                <a:pos x="connsiteX8" y="connsiteY8"/>
+                <a:pos x="csX8" y="csY8"/>
               </a:cxn>
               <a:cxn ang="0">
-                <a:pos x="connsiteX9" y="connsiteY9"/>
+                <a:pos x="csX9" y="csY9"/>
               </a:cxn>
               <a:cxn ang="0">
-                <a:pos x="connsiteX10" y="connsiteY10"/>
+                <a:pos x="csX10" y="csY10"/>
               </a:cxn>
               <a:cxn ang="0">
-                <a:pos x="connsiteX11" y="connsiteY11"/>
+                <a:pos x="csX11" y="csY11"/>
               </a:cxn>
               <a:cxn ang="0">
-                <a:pos x="connsiteX12" y="connsiteY12"/>
+                <a:pos x="csX12" y="csY12"/>
               </a:cxn>
               <a:cxn ang="0">
-                <a:pos x="connsiteX13" y="connsiteY13"/>
+                <a:pos x="csX13" y="csY13"/>
               </a:cxn>
               <a:cxn ang="0">
-                <a:pos x="connsiteX14" y="connsiteY14"/>
+                <a:pos x="csX14" y="csY14"/>
               </a:cxn>
               <a:cxn ang="0">
-                <a:pos x="connsiteX15" y="connsiteY15"/>
+                <a:pos x="csX15" y="csY15"/>
               </a:cxn>
               <a:cxn ang="0">
-                <a:pos x="connsiteX16" y="connsiteY16"/>
+                <a:pos x="csX16" y="csY16"/>
               </a:cxn>
               <a:cxn ang="0">
-                <a:pos x="connsiteX17" y="connsiteY17"/>
+                <a:pos x="csX17" y="csY17"/>
               </a:cxn>
               <a:cxn ang="0">
-                <a:pos x="connsiteX18" y="connsiteY18"/>
+                <a:pos x="csX18" y="csY18"/>
               </a:cxn>
               <a:cxn ang="0">
-                <a:pos x="connsiteX19" y="connsiteY19"/>
+                <a:pos x="csX19" y="csY19"/>
               </a:cxn>
               <a:cxn ang="0">
-                <a:pos x="connsiteX20" y="connsiteY20"/>
+                <a:pos x="csX20" y="csY20"/>
               </a:cxn>
               <a:cxn ang="0">
-                <a:pos x="connsiteX21" y="connsiteY21"/>
+                <a:pos x="csX21" y="csY21"/>
               </a:cxn>
               <a:cxn ang="0">
-                <a:pos x="connsiteX22" y="connsiteY22"/>
+                <a:pos x="csX22" y="csY22"/>
               </a:cxn>
               <a:cxn ang="0">
-                <a:pos x="connsiteX23" y="connsiteY23"/>
+                <a:pos x="csX23" y="csY23"/>
               </a:cxn>
               <a:cxn ang="0">
-                <a:pos x="connsiteX24" y="connsiteY24"/>
+                <a:pos x="csX24" y="csY24"/>
               </a:cxn>
               <a:cxn ang="0">
-                <a:pos x="connsiteX25" y="connsiteY25"/>
+                <a:pos x="csX25" y="csY25"/>
               </a:cxn>
               <a:cxn ang="0">
-                <a:pos x="connsiteX26" y="connsiteY26"/>
+                <a:pos x="csX26" y="csY26"/>
               </a:cxn>
               <a:cxn ang="0">
-                <a:pos x="connsiteX27" y="connsiteY27"/>
+                <a:pos x="csX27" y="csY27"/>
               </a:cxn>
               <a:cxn ang="0">
-                <a:pos x="connsiteX28" y="connsiteY28"/>
+                <a:pos x="csX28" y="csY28"/>
               </a:cxn>
               <a:cxn ang="0">
-                <a:pos x="connsiteX29" y="connsiteY29"/>
+                <a:pos x="csX29" y="csY29"/>
               </a:cxn>
               <a:cxn ang="0">
-                <a:pos x="connsiteX30" y="connsiteY30"/>
+                <a:pos x="csX30" y="csY30"/>
               </a:cxn>
               <a:cxn ang="0">
-                <a:pos x="connsiteX31" y="connsiteY31"/>
+                <a:pos x="csX31" y="csY31"/>
               </a:cxn>
               <a:cxn ang="0">
-                <a:pos x="connsiteX32" y="connsiteY32"/>
+                <a:pos x="csX32" y="csY32"/>
               </a:cxn>
               <a:cxn ang="0">
-                <a:pos x="connsiteX33" y="connsiteY33"/>
+                <a:pos x="csX33" y="csY33"/>
               </a:cxn>
               <a:cxn ang="0">
-                <a:pos x="connsiteX34" y="connsiteY34"/>
+                <a:pos x="csX34" y="csY34"/>
               </a:cxn>
               <a:cxn ang="0">
-                <a:pos x="connsiteX35" y="connsiteY35"/>
+                <a:pos x="csX35" y="csY35"/>
               </a:cxn>
             </a:cxnLst>
             <a:rect l="l" t="t" r="r" b="b"/>
@@ -34173,13 +34410,11 @@
               <a:rPr lang="en-US" sz="3600" dirty="0">
                 <a:sym typeface="Wingdings" pitchFamily="2" charset="2"/>
               </a:rPr>
-              <a:t> CPU time/</a:t>
-            </a:r>
-            <a:r>
-              <a:rPr lang="en-US" sz="3600" dirty="0" err="1">
-                <a:sym typeface="Wingdings" pitchFamily="2" charset="2"/>
-              </a:rPr>
-              <a:t>qu</a:t>
+              <a:t> </a:t>
+            </a:r>
+            <a:r>
+              <a:rPr lang="en-US" sz="3600" dirty="0"/>
+              <a:t>CPU bandwidth or relative CPU weight</a:t>
             </a:r>
             <a:endParaRPr lang="en-US" sz="3600" dirty="0">
               <a:sym typeface="Wingdings" pitchFamily="2" charset="2"/>
@@ -34238,13 +34473,11 @@
               <a:rPr lang="en-US" sz="3600" dirty="0">
                 <a:sym typeface="Wingdings" pitchFamily="2" charset="2"/>
               </a:rPr>
-              <a:t>  limits on </a:t>
-            </a:r>
-            <a:r>
-              <a:rPr lang="en-US" sz="3600" dirty="0" err="1">
-                <a:sym typeface="Wingdings" pitchFamily="2" charset="2"/>
-              </a:rPr>
-              <a:t>pids</a:t>
+              <a:t>  </a:t>
+            </a:r>
+            <a:r>
+              <a:rPr lang="en-US" sz="3600" dirty="0"/>
+              <a:t>limits the number of processes/tasks</a:t>
             </a:r>
             <a:endParaRPr lang="en-US" sz="3600" dirty="0">
               <a:sym typeface="Wingdings" pitchFamily="2" charset="2"/>
@@ -34255,9 +34488,12 @@
               <a:rPr lang="en-US" sz="3600" dirty="0">
                 <a:sym typeface="Wingdings" pitchFamily="2" charset="2"/>
               </a:rPr>
-              <a:t>devices  which devices to use</a:t>
-            </a:r>
-            <a:endParaRPr lang="en-US" sz="3200" dirty="0"/>
+              <a:t>devices  </a:t>
+            </a:r>
+            <a:r>
+              <a:rPr lang="en-US" sz="3600" dirty="0"/>
+              <a:t>access to devices</a:t>
+            </a:r>
           </a:p>
         </p:txBody>
       </p:sp>
@@ -34541,6 +34777,234 @@
 </file>
 
 <file path=ppt/slides/slide45.xml><?xml version="1.0" encoding="utf-8"?>
+<p:sld xmlns:a="http://schemas.openxmlformats.org/drawingml/2006/main" xmlns:r="http://schemas.openxmlformats.org/officeDocument/2006/relationships" xmlns:p="http://schemas.openxmlformats.org/presentationml/2006/main">
+  <p:cSld>
+    <p:spTree>
+      <p:nvGrpSpPr>
+        <p:cNvPr id="1" name=""/>
+        <p:cNvGrpSpPr/>
+        <p:nvPr/>
+      </p:nvGrpSpPr>
+      <p:grpSpPr>
+        <a:xfrm>
+          <a:off x="0" y="0"/>
+          <a:ext cx="0" cy="0"/>
+          <a:chOff x="0" y="0"/>
+          <a:chExt cx="0" cy="0"/>
+        </a:xfrm>
+      </p:grpSpPr>
+      <p:sp>
+        <p:nvSpPr>
+          <p:cNvPr id="2" name="Title 1">
+            <a:extLst>
+              <a:ext uri="{FF2B5EF4-FFF2-40B4-BE49-F238E27FC236}">
+                <a16:creationId xmlns:a16="http://schemas.microsoft.com/office/drawing/2014/main" id="{781D39F3-6C19-7679-3EC7-4988B2903355}"/>
+              </a:ext>
+            </a:extLst>
+          </p:cNvPr>
+          <p:cNvSpPr>
+            <a:spLocks noGrp="1"/>
+          </p:cNvSpPr>
+          <p:nvPr>
+            <p:ph type="title"/>
+          </p:nvPr>
+        </p:nvSpPr>
+        <p:spPr/>
+        <p:txBody>
+          <a:bodyPr/>
+          <a:lstStyle/>
+          <a:p>
+            <a:r>
+              <a:rPr lang="en-US" b="1" dirty="0"/>
+              <a:t>cgroup v1 and cgroup v2</a:t>
+            </a:r>
+            <a:endParaRPr lang="en-US" dirty="0"/>
+          </a:p>
+        </p:txBody>
+      </p:sp>
+      <p:sp>
+        <p:nvSpPr>
+          <p:cNvPr id="3" name="Content Placeholder 2">
+            <a:extLst>
+              <a:ext uri="{FF2B5EF4-FFF2-40B4-BE49-F238E27FC236}">
+                <a16:creationId xmlns:a16="http://schemas.microsoft.com/office/drawing/2014/main" id="{0B0E9515-B320-FAB4-01A3-6DB580930E22}"/>
+              </a:ext>
+            </a:extLst>
+          </p:cNvPr>
+          <p:cNvSpPr>
+            <a:spLocks noGrp="1"/>
+          </p:cNvSpPr>
+          <p:nvPr>
+            <p:ph idx="1"/>
+          </p:nvPr>
+        </p:nvSpPr>
+        <p:spPr/>
+        <p:txBody>
+          <a:bodyPr>
+            <a:normAutofit/>
+          </a:bodyPr>
+          <a:lstStyle/>
+          <a:p>
+            <a:r>
+              <a:rPr lang="en-US" dirty="0"/>
+              <a:t>Please note, the following examples mix v1 and v2 of cgroup</a:t>
+            </a:r>
+          </a:p>
+          <a:p>
+            <a:r>
+              <a:rPr lang="en-US" b="1" dirty="0"/>
+              <a:t>cgroup v1</a:t>
+            </a:r>
+            <a:endParaRPr lang="en-US" dirty="0"/>
+          </a:p>
+          <a:p>
+            <a:pPr lvl="1"/>
+            <a:r>
+              <a:rPr lang="en-US" dirty="0"/>
+              <a:t>Separate hierarchies may be used for different controllers</a:t>
+            </a:r>
+          </a:p>
+          <a:p>
+            <a:pPr lvl="1"/>
+            <a:r>
+              <a:rPr lang="en-US" dirty="0"/>
+              <a:t>A process can belong to different cgroups for different controllers</a:t>
+            </a:r>
+          </a:p>
+          <a:p>
+            <a:r>
+              <a:rPr lang="en-US" b="1" dirty="0"/>
+              <a:t>cgroup v2</a:t>
+            </a:r>
+            <a:endParaRPr lang="en-US" dirty="0"/>
+          </a:p>
+          <a:p>
+            <a:pPr lvl="1"/>
+            <a:r>
+              <a:rPr lang="en-US" dirty="0"/>
+              <a:t>One unified cgroup hierarchy</a:t>
+            </a:r>
+          </a:p>
+          <a:p>
+            <a:pPr lvl="1"/>
+            <a:r>
+              <a:rPr lang="en-US" dirty="0"/>
+              <a:t>A process belongs to one cgroup in that hierarchy</a:t>
+            </a:r>
+          </a:p>
+          <a:p>
+            <a:pPr lvl="1"/>
+            <a:r>
+              <a:rPr lang="en-US" dirty="0"/>
+              <a:t>Controllers are enabled within the hierarchy</a:t>
+            </a:r>
+          </a:p>
+          <a:p>
+            <a:endParaRPr lang="en-US" dirty="0"/>
+          </a:p>
+        </p:txBody>
+      </p:sp>
+      <p:sp>
+        <p:nvSpPr>
+          <p:cNvPr id="4" name="Date Placeholder 3">
+            <a:extLst>
+              <a:ext uri="{FF2B5EF4-FFF2-40B4-BE49-F238E27FC236}">
+                <a16:creationId xmlns:a16="http://schemas.microsoft.com/office/drawing/2014/main" id="{693B7DE0-CED3-32B4-72FA-0D39049D9246}"/>
+              </a:ext>
+            </a:extLst>
+          </p:cNvPr>
+          <p:cNvSpPr>
+            <a:spLocks noGrp="1"/>
+          </p:cNvSpPr>
+          <p:nvPr>
+            <p:ph type="dt" sz="half" idx="10"/>
+          </p:nvPr>
+        </p:nvSpPr>
+        <p:spPr/>
+        <p:txBody>
+          <a:bodyPr/>
+          <a:lstStyle/>
+          <a:p>
+            <a:r>
+              <a:rPr lang="sv-SE"/>
+              <a:t>Vincenzo Gulisano</a:t>
+            </a:r>
+            <a:endParaRPr lang="en-SE"/>
+          </a:p>
+        </p:txBody>
+      </p:sp>
+      <p:sp>
+        <p:nvSpPr>
+          <p:cNvPr id="5" name="Footer Placeholder 4">
+            <a:extLst>
+              <a:ext uri="{FF2B5EF4-FFF2-40B4-BE49-F238E27FC236}">
+                <a16:creationId xmlns:a16="http://schemas.microsoft.com/office/drawing/2014/main" id="{17135621-FAF6-56FD-2290-C944CDFB5898}"/>
+              </a:ext>
+            </a:extLst>
+          </p:cNvPr>
+          <p:cNvSpPr>
+            <a:spLocks noGrp="1"/>
+          </p:cNvSpPr>
+          <p:nvPr>
+            <p:ph type="ftr" sz="quarter" idx="11"/>
+          </p:nvPr>
+        </p:nvSpPr>
+        <p:spPr/>
+        <p:txBody>
+          <a:bodyPr/>
+          <a:lstStyle/>
+          <a:p>
+            <a:r>
+              <a:rPr lang="en-GB"/>
+              <a:t>Operating Systems - Virtualization</a:t>
+            </a:r>
+            <a:endParaRPr lang="en-SE"/>
+          </a:p>
+        </p:txBody>
+      </p:sp>
+      <p:sp>
+        <p:nvSpPr>
+          <p:cNvPr id="6" name="Slide Number Placeholder 5">
+            <a:extLst>
+              <a:ext uri="{FF2B5EF4-FFF2-40B4-BE49-F238E27FC236}">
+                <a16:creationId xmlns:a16="http://schemas.microsoft.com/office/drawing/2014/main" id="{79E60809-C354-A878-6368-7B6313C1A7C7}"/>
+              </a:ext>
+            </a:extLst>
+          </p:cNvPr>
+          <p:cNvSpPr>
+            <a:spLocks noGrp="1"/>
+          </p:cNvSpPr>
+          <p:nvPr>
+            <p:ph type="sldNum" sz="quarter" idx="12"/>
+          </p:nvPr>
+        </p:nvSpPr>
+        <p:spPr/>
+        <p:txBody>
+          <a:bodyPr/>
+          <a:lstStyle/>
+          <a:p>
+            <a:fld id="{C92894D7-1DF0-2544-A605-B97A2B84F4F8}" type="slidenum">
+              <a:rPr lang="en-SE" smtClean="0"/>
+              <a:t>45</a:t>
+            </a:fld>
+            <a:endParaRPr lang="en-SE"/>
+          </a:p>
+        </p:txBody>
+      </p:sp>
+    </p:spTree>
+    <p:extLst>
+      <p:ext uri="{BB962C8B-B14F-4D97-AF65-F5344CB8AC3E}">
+        <p14:creationId xmlns:p14="http://schemas.microsoft.com/office/powerpoint/2010/main" val="2901525482"/>
+      </p:ext>
+    </p:extLst>
+  </p:cSld>
+  <p:clrMapOvr>
+    <a:masterClrMapping/>
+  </p:clrMapOvr>
+</p:sld>
+</file>
+
+<file path=ppt/slides/slide46.xml><?xml version="1.0" encoding="utf-8"?>
 <p:sld xmlns:a="http://schemas.openxmlformats.org/drawingml/2006/main" xmlns:r="http://schemas.openxmlformats.org/officeDocument/2006/relationships" xmlns:p="http://schemas.openxmlformats.org/presentationml/2006/main">
   <p:cSld>
     <p:bg>
@@ -34726,188 +35190,188 @@
           <a:custGeom>
             <a:avLst/>
             <a:gdLst>
-              <a:gd name="connsiteX0" fmla="*/ 0 w 10853928"/>
-              <a:gd name="connsiteY0" fmla="*/ 0 h 18288"/>
-              <a:gd name="connsiteX1" fmla="*/ 461292 w 10853928"/>
-              <a:gd name="connsiteY1" fmla="*/ 0 h 18288"/>
-              <a:gd name="connsiteX2" fmla="*/ 1139662 w 10853928"/>
-              <a:gd name="connsiteY2" fmla="*/ 0 h 18288"/>
-              <a:gd name="connsiteX3" fmla="*/ 1926572 w 10853928"/>
-              <a:gd name="connsiteY3" fmla="*/ 0 h 18288"/>
-              <a:gd name="connsiteX4" fmla="*/ 2279325 w 10853928"/>
-              <a:gd name="connsiteY4" fmla="*/ 0 h 18288"/>
-              <a:gd name="connsiteX5" fmla="*/ 2632078 w 10853928"/>
-              <a:gd name="connsiteY5" fmla="*/ 0 h 18288"/>
-              <a:gd name="connsiteX6" fmla="*/ 3527527 w 10853928"/>
-              <a:gd name="connsiteY6" fmla="*/ 0 h 18288"/>
-              <a:gd name="connsiteX7" fmla="*/ 4205897 w 10853928"/>
-              <a:gd name="connsiteY7" fmla="*/ 0 h 18288"/>
-              <a:gd name="connsiteX8" fmla="*/ 4558650 w 10853928"/>
-              <a:gd name="connsiteY8" fmla="*/ 0 h 18288"/>
-              <a:gd name="connsiteX9" fmla="*/ 5237020 w 10853928"/>
-              <a:gd name="connsiteY9" fmla="*/ 0 h 18288"/>
-              <a:gd name="connsiteX10" fmla="*/ 6132469 w 10853928"/>
-              <a:gd name="connsiteY10" fmla="*/ 0 h 18288"/>
-              <a:gd name="connsiteX11" fmla="*/ 6702301 w 10853928"/>
-              <a:gd name="connsiteY11" fmla="*/ 0 h 18288"/>
-              <a:gd name="connsiteX12" fmla="*/ 7272132 w 10853928"/>
-              <a:gd name="connsiteY12" fmla="*/ 0 h 18288"/>
-              <a:gd name="connsiteX13" fmla="*/ 7950502 w 10853928"/>
-              <a:gd name="connsiteY13" fmla="*/ 0 h 18288"/>
-              <a:gd name="connsiteX14" fmla="*/ 8737412 w 10853928"/>
-              <a:gd name="connsiteY14" fmla="*/ 0 h 18288"/>
-              <a:gd name="connsiteX15" fmla="*/ 9524322 w 10853928"/>
-              <a:gd name="connsiteY15" fmla="*/ 0 h 18288"/>
-              <a:gd name="connsiteX16" fmla="*/ 10853928 w 10853928"/>
-              <a:gd name="connsiteY16" fmla="*/ 0 h 18288"/>
-              <a:gd name="connsiteX17" fmla="*/ 10853928 w 10853928"/>
-              <a:gd name="connsiteY17" fmla="*/ 18288 h 18288"/>
-              <a:gd name="connsiteX18" fmla="*/ 10392636 w 10853928"/>
-              <a:gd name="connsiteY18" fmla="*/ 18288 h 18288"/>
-              <a:gd name="connsiteX19" fmla="*/ 9497187 w 10853928"/>
-              <a:gd name="connsiteY19" fmla="*/ 18288 h 18288"/>
-              <a:gd name="connsiteX20" fmla="*/ 8818817 w 10853928"/>
-              <a:gd name="connsiteY20" fmla="*/ 18288 h 18288"/>
-              <a:gd name="connsiteX21" fmla="*/ 8466064 w 10853928"/>
-              <a:gd name="connsiteY21" fmla="*/ 18288 h 18288"/>
-              <a:gd name="connsiteX22" fmla="*/ 7787693 w 10853928"/>
-              <a:gd name="connsiteY22" fmla="*/ 18288 h 18288"/>
-              <a:gd name="connsiteX23" fmla="*/ 7217862 w 10853928"/>
-              <a:gd name="connsiteY23" fmla="*/ 18288 h 18288"/>
-              <a:gd name="connsiteX24" fmla="*/ 6648031 w 10853928"/>
-              <a:gd name="connsiteY24" fmla="*/ 18288 h 18288"/>
-              <a:gd name="connsiteX25" fmla="*/ 6078200 w 10853928"/>
-              <a:gd name="connsiteY25" fmla="*/ 18288 h 18288"/>
-              <a:gd name="connsiteX26" fmla="*/ 5508368 w 10853928"/>
-              <a:gd name="connsiteY26" fmla="*/ 18288 h 18288"/>
-              <a:gd name="connsiteX27" fmla="*/ 4721459 w 10853928"/>
-              <a:gd name="connsiteY27" fmla="*/ 18288 h 18288"/>
-              <a:gd name="connsiteX28" fmla="*/ 4043088 w 10853928"/>
-              <a:gd name="connsiteY28" fmla="*/ 18288 h 18288"/>
-              <a:gd name="connsiteX29" fmla="*/ 3690336 w 10853928"/>
-              <a:gd name="connsiteY29" fmla="*/ 18288 h 18288"/>
-              <a:gd name="connsiteX30" fmla="*/ 3120504 w 10853928"/>
-              <a:gd name="connsiteY30" fmla="*/ 18288 h 18288"/>
-              <a:gd name="connsiteX31" fmla="*/ 2333595 w 10853928"/>
-              <a:gd name="connsiteY31" fmla="*/ 18288 h 18288"/>
-              <a:gd name="connsiteX32" fmla="*/ 1872303 w 10853928"/>
-              <a:gd name="connsiteY32" fmla="*/ 18288 h 18288"/>
-              <a:gd name="connsiteX33" fmla="*/ 976854 w 10853928"/>
-              <a:gd name="connsiteY33" fmla="*/ 18288 h 18288"/>
-              <a:gd name="connsiteX34" fmla="*/ 0 w 10853928"/>
-              <a:gd name="connsiteY34" fmla="*/ 18288 h 18288"/>
-              <a:gd name="connsiteX35" fmla="*/ 0 w 10853928"/>
-              <a:gd name="connsiteY35" fmla="*/ 0 h 18288"/>
+              <a:gd name="csX0" fmla="*/ 0 w 10853928"/>
+              <a:gd name="csY0" fmla="*/ 0 h 18288"/>
+              <a:gd name="csX1" fmla="*/ 461292 w 10853928"/>
+              <a:gd name="csY1" fmla="*/ 0 h 18288"/>
+              <a:gd name="csX2" fmla="*/ 1139662 w 10853928"/>
+              <a:gd name="csY2" fmla="*/ 0 h 18288"/>
+              <a:gd name="csX3" fmla="*/ 1926572 w 10853928"/>
+              <a:gd name="csY3" fmla="*/ 0 h 18288"/>
+              <a:gd name="csX4" fmla="*/ 2279325 w 10853928"/>
+              <a:gd name="csY4" fmla="*/ 0 h 18288"/>
+              <a:gd name="csX5" fmla="*/ 2632078 w 10853928"/>
+              <a:gd name="csY5" fmla="*/ 0 h 18288"/>
+              <a:gd name="csX6" fmla="*/ 3527527 w 10853928"/>
+              <a:gd name="csY6" fmla="*/ 0 h 18288"/>
+              <a:gd name="csX7" fmla="*/ 4205897 w 10853928"/>
+              <a:gd name="csY7" fmla="*/ 0 h 18288"/>
+              <a:gd name="csX8" fmla="*/ 4558650 w 10853928"/>
+              <a:gd name="csY8" fmla="*/ 0 h 18288"/>
+              <a:gd name="csX9" fmla="*/ 5237020 w 10853928"/>
+              <a:gd name="csY9" fmla="*/ 0 h 18288"/>
+              <a:gd name="csX10" fmla="*/ 6132469 w 10853928"/>
+              <a:gd name="csY10" fmla="*/ 0 h 18288"/>
+              <a:gd name="csX11" fmla="*/ 6702301 w 10853928"/>
+              <a:gd name="csY11" fmla="*/ 0 h 18288"/>
+              <a:gd name="csX12" fmla="*/ 7272132 w 10853928"/>
+              <a:gd name="csY12" fmla="*/ 0 h 18288"/>
+              <a:gd name="csX13" fmla="*/ 7950502 w 10853928"/>
+              <a:gd name="csY13" fmla="*/ 0 h 18288"/>
+              <a:gd name="csX14" fmla="*/ 8737412 w 10853928"/>
+              <a:gd name="csY14" fmla="*/ 0 h 18288"/>
+              <a:gd name="csX15" fmla="*/ 9524322 w 10853928"/>
+              <a:gd name="csY15" fmla="*/ 0 h 18288"/>
+              <a:gd name="csX16" fmla="*/ 10853928 w 10853928"/>
+              <a:gd name="csY16" fmla="*/ 0 h 18288"/>
+              <a:gd name="csX17" fmla="*/ 10853928 w 10853928"/>
+              <a:gd name="csY17" fmla="*/ 18288 h 18288"/>
+              <a:gd name="csX18" fmla="*/ 10392636 w 10853928"/>
+              <a:gd name="csY18" fmla="*/ 18288 h 18288"/>
+              <a:gd name="csX19" fmla="*/ 9497187 w 10853928"/>
+              <a:gd name="csY19" fmla="*/ 18288 h 18288"/>
+              <a:gd name="csX20" fmla="*/ 8818817 w 10853928"/>
+              <a:gd name="csY20" fmla="*/ 18288 h 18288"/>
+              <a:gd name="csX21" fmla="*/ 8466064 w 10853928"/>
+              <a:gd name="csY21" fmla="*/ 18288 h 18288"/>
+              <a:gd name="csX22" fmla="*/ 7787693 w 10853928"/>
+              <a:gd name="csY22" fmla="*/ 18288 h 18288"/>
+              <a:gd name="csX23" fmla="*/ 7217862 w 10853928"/>
+              <a:gd name="csY23" fmla="*/ 18288 h 18288"/>
+              <a:gd name="csX24" fmla="*/ 6648031 w 10853928"/>
+              <a:gd name="csY24" fmla="*/ 18288 h 18288"/>
+              <a:gd name="csX25" fmla="*/ 6078200 w 10853928"/>
+              <a:gd name="csY25" fmla="*/ 18288 h 18288"/>
+              <a:gd name="csX26" fmla="*/ 5508368 w 10853928"/>
+              <a:gd name="csY26" fmla="*/ 18288 h 18288"/>
+              <a:gd name="csX27" fmla="*/ 4721459 w 10853928"/>
+              <a:gd name="csY27" fmla="*/ 18288 h 18288"/>
+              <a:gd name="csX28" fmla="*/ 4043088 w 10853928"/>
+              <a:gd name="csY28" fmla="*/ 18288 h 18288"/>
+              <a:gd name="csX29" fmla="*/ 3690336 w 10853928"/>
+              <a:gd name="csY29" fmla="*/ 18288 h 18288"/>
+              <a:gd name="csX30" fmla="*/ 3120504 w 10853928"/>
+              <a:gd name="csY30" fmla="*/ 18288 h 18288"/>
+              <a:gd name="csX31" fmla="*/ 2333595 w 10853928"/>
+              <a:gd name="csY31" fmla="*/ 18288 h 18288"/>
+              <a:gd name="csX32" fmla="*/ 1872303 w 10853928"/>
+              <a:gd name="csY32" fmla="*/ 18288 h 18288"/>
+              <a:gd name="csX33" fmla="*/ 976854 w 10853928"/>
+              <a:gd name="csY33" fmla="*/ 18288 h 18288"/>
+              <a:gd name="csX34" fmla="*/ 0 w 10853928"/>
+              <a:gd name="csY34" fmla="*/ 18288 h 18288"/>
+              <a:gd name="csX35" fmla="*/ 0 w 10853928"/>
+              <a:gd name="csY35" fmla="*/ 0 h 18288"/>
             </a:gdLst>
             <a:ahLst/>
             <a:cxnLst>
               <a:cxn ang="0">
-                <a:pos x="connsiteX0" y="connsiteY0"/>
+                <a:pos x="csX0" y="csY0"/>
               </a:cxn>
               <a:cxn ang="0">
-                <a:pos x="connsiteX1" y="connsiteY1"/>
+                <a:pos x="csX1" y="csY1"/>
               </a:cxn>
               <a:cxn ang="0">
-                <a:pos x="connsiteX2" y="connsiteY2"/>
+                <a:pos x="csX2" y="csY2"/>
               </a:cxn>
               <a:cxn ang="0">
-                <a:pos x="connsiteX3" y="connsiteY3"/>
+                <a:pos x="csX3" y="csY3"/>
               </a:cxn>
               <a:cxn ang="0">
-                <a:pos x="connsiteX4" y="connsiteY4"/>
+                <a:pos x="csX4" y="csY4"/>
               </a:cxn>
               <a:cxn ang="0">
-                <a:pos x="connsiteX5" y="connsiteY5"/>
+                <a:pos x="csX5" y="csY5"/>
               </a:cxn>
               <a:cxn ang="0">
-                <a:pos x="connsiteX6" y="connsiteY6"/>
+                <a:pos x="csX6" y="csY6"/>
               </a:cxn>
               <a:cxn ang="0">
-                <a:pos x="connsiteX7" y="connsiteY7"/>
+                <a:pos x="csX7" y="csY7"/>
               </a:cxn>
               <a:cxn ang="0">
-                <a:pos x="connsiteX8" y="connsiteY8"/>
+                <a:pos x="csX8" y="csY8"/>
               </a:cxn>
               <a:cxn ang="0">
-                <a:pos x="connsiteX9" y="connsiteY9"/>
+                <a:pos x="csX9" y="csY9"/>
               </a:cxn>
               <a:cxn ang="0">
-                <a:pos x="connsiteX10" y="connsiteY10"/>
+                <a:pos x="csX10" y="csY10"/>
               </a:cxn>
               <a:cxn ang="0">
-                <a:pos x="connsiteX11" y="connsiteY11"/>
+                <a:pos x="csX11" y="csY11"/>
               </a:cxn>
               <a:cxn ang="0">
-                <a:pos x="connsiteX12" y="connsiteY12"/>
+                <a:pos x="csX12" y="csY12"/>
               </a:cxn>
               <a:cxn ang="0">
-                <a:pos x="connsiteX13" y="connsiteY13"/>
+                <a:pos x="csX13" y="csY13"/>
               </a:cxn>
               <a:cxn ang="0">
-                <a:pos x="connsiteX14" y="connsiteY14"/>
+                <a:pos x="csX14" y="csY14"/>
               </a:cxn>
               <a:cxn ang="0">
-                <a:pos x="connsiteX15" y="connsiteY15"/>
+                <a:pos x="csX15" y="csY15"/>
               </a:cxn>
               <a:cxn ang="0">
-                <a:pos x="connsiteX16" y="connsiteY16"/>
+                <a:pos x="csX16" y="csY16"/>
               </a:cxn>
               <a:cxn ang="0">
-                <a:pos x="connsiteX17" y="connsiteY17"/>
+                <a:pos x="csX17" y="csY17"/>
               </a:cxn>
               <a:cxn ang="0">
-                <a:pos x="connsiteX18" y="connsiteY18"/>
+                <a:pos x="csX18" y="csY18"/>
               </a:cxn>
               <a:cxn ang="0">
-                <a:pos x="connsiteX19" y="connsiteY19"/>
+                <a:pos x="csX19" y="csY19"/>
               </a:cxn>
               <a:cxn ang="0">
-                <a:pos x="connsiteX20" y="connsiteY20"/>
+                <a:pos x="csX20" y="csY20"/>
               </a:cxn>
               <a:cxn ang="0">
-                <a:pos x="connsiteX21" y="connsiteY21"/>
+                <a:pos x="csX21" y="csY21"/>
               </a:cxn>
               <a:cxn ang="0">
-                <a:pos x="connsiteX22" y="connsiteY22"/>
+                <a:pos x="csX22" y="csY22"/>
               </a:cxn>
               <a:cxn ang="0">
-                <a:pos x="connsiteX23" y="connsiteY23"/>
+                <a:pos x="csX23" y="csY23"/>
               </a:cxn>
               <a:cxn ang="0">
-                <a:pos x="connsiteX24" y="connsiteY24"/>
+                <a:pos x="csX24" y="csY24"/>
               </a:cxn>
               <a:cxn ang="0">
-                <a:pos x="connsiteX25" y="connsiteY25"/>
+                <a:pos x="csX25" y="csY25"/>
               </a:cxn>
               <a:cxn ang="0">
-                <a:pos x="connsiteX26" y="connsiteY26"/>
+                <a:pos x="csX26" y="csY26"/>
               </a:cxn>
               <a:cxn ang="0">
-                <a:pos x="connsiteX27" y="connsiteY27"/>
+                <a:pos x="csX27" y="csY27"/>
               </a:cxn>
               <a:cxn ang="0">
-                <a:pos x="connsiteX28" y="connsiteY28"/>
+                <a:pos x="csX28" y="csY28"/>
               </a:cxn>
               <a:cxn ang="0">
-                <a:pos x="connsiteX29" y="connsiteY29"/>
+                <a:pos x="csX29" y="csY29"/>
               </a:cxn>
               <a:cxn ang="0">
-                <a:pos x="connsiteX30" y="connsiteY30"/>
+                <a:pos x="csX30" y="csY30"/>
               </a:cxn>
               <a:cxn ang="0">
-                <a:pos x="connsiteX31" y="connsiteY31"/>
+                <a:pos x="csX31" y="csY31"/>
               </a:cxn>
               <a:cxn ang="0">
-                <a:pos x="connsiteX32" y="connsiteY32"/>
+                <a:pos x="csX32" y="csY32"/>
               </a:cxn>
               <a:cxn ang="0">
-                <a:pos x="connsiteX33" y="connsiteY33"/>
+                <a:pos x="csX33" y="csY33"/>
               </a:cxn>
               <a:cxn ang="0">
-                <a:pos x="connsiteX34" y="connsiteY34"/>
+                <a:pos x="csX34" y="csY34"/>
               </a:cxn>
               <a:cxn ang="0">
-                <a:pos x="connsiteX35" y="connsiteY35"/>
+                <a:pos x="csX35" y="csY35"/>
               </a:cxn>
             </a:cxnLst>
             <a:rect l="l" t="t" r="r" b="b"/>
@@ -35607,7 +36071,7 @@
                 <a:tabLst/>
                 <a:defRPr/>
               </a:pPr>
-              <a:t>45</a:t>
+              <a:t>46</a:t>
             </a:fld>
             <a:endParaRPr kumimoji="0" lang="en-SE" sz="1200" b="0" i="0" u="none" strike="noStrike" kern="1200" cap="none" spc="0" normalizeH="0" baseline="0" noProof="0">
               <a:ln>
@@ -35675,8 +36139,8 @@
         </p:nvSpPr>
         <p:spPr>
           <a:xfrm>
-            <a:off x="7384473" y="1929384"/>
-            <a:ext cx="4307654" cy="4251960"/>
+            <a:off x="7384472" y="1929384"/>
+            <a:ext cx="4639887" cy="4251960"/>
           </a:xfrm>
           <a:prstGeom prst="rect">
             <a:avLst/>
@@ -35684,7 +36148,7 @@
         </p:spPr>
         <p:txBody>
           <a:bodyPr vert="horz" lIns="91440" tIns="45720" rIns="91440" bIns="45720" rtlCol="0">
-            <a:normAutofit fontScale="77500" lnSpcReduction="20000"/>
+            <a:normAutofit fontScale="92500" lnSpcReduction="10000"/>
           </a:bodyPr>
           <a:lstStyle>
             <a:lvl1pPr marL="228600" indent="-228600" algn="l" defTabSz="914400" rtl="0" eaLnBrk="1" latinLnBrk="0" hangingPunct="1">
@@ -35852,44 +36316,44 @@
           </a:lstStyle>
           <a:p>
             <a:r>
-              <a:rPr lang="en-US" sz="3600" dirty="0" err="1"/>
+              <a:rPr lang="en-US" dirty="0" err="1"/>
               <a:t>cpu</a:t>
             </a:r>
             <a:r>
-              <a:rPr lang="en-US" sz="3600" dirty="0"/>
+              <a:rPr lang="en-US" dirty="0"/>
               <a:t> is defined by means of shares</a:t>
             </a:r>
           </a:p>
           <a:p>
             <a:r>
-              <a:rPr lang="en-US" sz="3600" dirty="0"/>
+              <a:rPr lang="en-US" dirty="0"/>
               <a:t>Usually:</a:t>
             </a:r>
           </a:p>
           <a:p>
             <a:pPr lvl="1"/>
             <a:r>
-              <a:rPr lang="en-US" sz="3200" dirty="0" err="1"/>
+              <a:rPr lang="en-US" dirty="0" err="1"/>
               <a:t>system.slice</a:t>
             </a:r>
             <a:r>
-              <a:rPr lang="en-US" sz="3200" dirty="0"/>
-              <a:t> for kernel/OS processes</a:t>
-            </a:r>
-            <a:endParaRPr lang="en-US" sz="3200" dirty="0">
+              <a:rPr lang="en-US" dirty="0"/>
+              <a:t> for system services</a:t>
+            </a:r>
+            <a:endParaRPr lang="en-US" dirty="0">
               <a:sym typeface="Wingdings" pitchFamily="2" charset="2"/>
             </a:endParaRPr>
           </a:p>
           <a:p>
             <a:pPr lvl="1"/>
             <a:r>
-              <a:rPr lang="en-US" sz="3200" dirty="0" err="1">
+              <a:rPr lang="en-US" dirty="0" err="1">
                 <a:sym typeface="Wingdings" pitchFamily="2" charset="2"/>
               </a:rPr>
               <a:t>user.slice</a:t>
             </a:r>
             <a:r>
-              <a:rPr lang="en-US" sz="3200" dirty="0">
+              <a:rPr lang="en-US" dirty="0">
                 <a:sym typeface="Wingdings" pitchFamily="2" charset="2"/>
               </a:rPr>
               <a:t> for user processes</a:t>
@@ -35898,13 +36362,13 @@
           <a:p>
             <a:pPr lvl="1"/>
             <a:r>
-              <a:rPr lang="en-US" sz="3200" dirty="0" err="1">
+              <a:rPr lang="en-US" dirty="0" err="1">
                 <a:sym typeface="Wingdings" pitchFamily="2" charset="2"/>
               </a:rPr>
               <a:t>machine.slice</a:t>
             </a:r>
             <a:r>
-              <a:rPr lang="en-US" sz="3200" dirty="0">
+              <a:rPr lang="en-US" dirty="0">
                 <a:sym typeface="Wingdings" pitchFamily="2" charset="2"/>
               </a:rPr>
               <a:t> for VMs/Containers</a:t>
@@ -35912,12 +36376,22 @@
           </a:p>
           <a:p>
             <a:r>
-              <a:rPr lang="en-US" sz="3200" dirty="0">
+              <a:rPr lang="en-US" sz="2400" dirty="0">
                 <a:sym typeface="Wingdings" pitchFamily="2" charset="2"/>
               </a:rPr>
-              <a:t>In the example, G1 gets 0.25 of resources, G1.A gets 1/11*0.25=0.02 of resources</a:t>
-            </a:r>
-            <a:endParaRPr lang="en-US" sz="3200" dirty="0"/>
+              <a:t>In the example, u</a:t>
+            </a:r>
+            <a:r>
+              <a:rPr lang="en-US" sz="2400" dirty="0"/>
+              <a:t>nder full contention, G1 receives approximately 0.25 of the CPU time</a:t>
+            </a:r>
+            <a:r>
+              <a:rPr lang="en-US" sz="2400" dirty="0">
+                <a:sym typeface="Wingdings" pitchFamily="2" charset="2"/>
+              </a:rPr>
+              <a:t>, G1.A gets 1/11*0.25=0.02 of resources</a:t>
+            </a:r>
+            <a:endParaRPr lang="en-US" sz="2400" dirty="0"/>
           </a:p>
         </p:txBody>
       </p:sp>
@@ -35934,7 +36408,7 @@
 </p:sld>
 </file>
 
-<file path=ppt/slides/slide46.xml><?xml version="1.0" encoding="utf-8"?>
+<file path=ppt/slides/slide47.xml><?xml version="1.0" encoding="utf-8"?>
 <p:sld xmlns:a="http://schemas.openxmlformats.org/drawingml/2006/main" xmlns:r="http://schemas.openxmlformats.org/officeDocument/2006/relationships" xmlns:p="http://schemas.openxmlformats.org/presentationml/2006/main">
   <p:cSld>
     <p:bg>
@@ -36120,188 +36594,188 @@
           <a:custGeom>
             <a:avLst/>
             <a:gdLst>
-              <a:gd name="connsiteX0" fmla="*/ 0 w 10853928"/>
-              <a:gd name="connsiteY0" fmla="*/ 0 h 18288"/>
-              <a:gd name="connsiteX1" fmla="*/ 461292 w 10853928"/>
-              <a:gd name="connsiteY1" fmla="*/ 0 h 18288"/>
-              <a:gd name="connsiteX2" fmla="*/ 1139662 w 10853928"/>
-              <a:gd name="connsiteY2" fmla="*/ 0 h 18288"/>
-              <a:gd name="connsiteX3" fmla="*/ 1926572 w 10853928"/>
-              <a:gd name="connsiteY3" fmla="*/ 0 h 18288"/>
-              <a:gd name="connsiteX4" fmla="*/ 2279325 w 10853928"/>
-              <a:gd name="connsiteY4" fmla="*/ 0 h 18288"/>
-              <a:gd name="connsiteX5" fmla="*/ 2632078 w 10853928"/>
-              <a:gd name="connsiteY5" fmla="*/ 0 h 18288"/>
-              <a:gd name="connsiteX6" fmla="*/ 3527527 w 10853928"/>
-              <a:gd name="connsiteY6" fmla="*/ 0 h 18288"/>
-              <a:gd name="connsiteX7" fmla="*/ 4205897 w 10853928"/>
-              <a:gd name="connsiteY7" fmla="*/ 0 h 18288"/>
-              <a:gd name="connsiteX8" fmla="*/ 4558650 w 10853928"/>
-              <a:gd name="connsiteY8" fmla="*/ 0 h 18288"/>
-              <a:gd name="connsiteX9" fmla="*/ 5237020 w 10853928"/>
-              <a:gd name="connsiteY9" fmla="*/ 0 h 18288"/>
-              <a:gd name="connsiteX10" fmla="*/ 6132469 w 10853928"/>
-              <a:gd name="connsiteY10" fmla="*/ 0 h 18288"/>
-              <a:gd name="connsiteX11" fmla="*/ 6702301 w 10853928"/>
-              <a:gd name="connsiteY11" fmla="*/ 0 h 18288"/>
-              <a:gd name="connsiteX12" fmla="*/ 7272132 w 10853928"/>
-              <a:gd name="connsiteY12" fmla="*/ 0 h 18288"/>
-              <a:gd name="connsiteX13" fmla="*/ 7950502 w 10853928"/>
-              <a:gd name="connsiteY13" fmla="*/ 0 h 18288"/>
-              <a:gd name="connsiteX14" fmla="*/ 8737412 w 10853928"/>
-              <a:gd name="connsiteY14" fmla="*/ 0 h 18288"/>
-              <a:gd name="connsiteX15" fmla="*/ 9524322 w 10853928"/>
-              <a:gd name="connsiteY15" fmla="*/ 0 h 18288"/>
-              <a:gd name="connsiteX16" fmla="*/ 10853928 w 10853928"/>
-              <a:gd name="connsiteY16" fmla="*/ 0 h 18288"/>
-              <a:gd name="connsiteX17" fmla="*/ 10853928 w 10853928"/>
-              <a:gd name="connsiteY17" fmla="*/ 18288 h 18288"/>
-              <a:gd name="connsiteX18" fmla="*/ 10392636 w 10853928"/>
-              <a:gd name="connsiteY18" fmla="*/ 18288 h 18288"/>
-              <a:gd name="connsiteX19" fmla="*/ 9497187 w 10853928"/>
-              <a:gd name="connsiteY19" fmla="*/ 18288 h 18288"/>
-              <a:gd name="connsiteX20" fmla="*/ 8818817 w 10853928"/>
-              <a:gd name="connsiteY20" fmla="*/ 18288 h 18288"/>
-              <a:gd name="connsiteX21" fmla="*/ 8466064 w 10853928"/>
-              <a:gd name="connsiteY21" fmla="*/ 18288 h 18288"/>
-              <a:gd name="connsiteX22" fmla="*/ 7787693 w 10853928"/>
-              <a:gd name="connsiteY22" fmla="*/ 18288 h 18288"/>
-              <a:gd name="connsiteX23" fmla="*/ 7217862 w 10853928"/>
-              <a:gd name="connsiteY23" fmla="*/ 18288 h 18288"/>
-              <a:gd name="connsiteX24" fmla="*/ 6648031 w 10853928"/>
-              <a:gd name="connsiteY24" fmla="*/ 18288 h 18288"/>
-              <a:gd name="connsiteX25" fmla="*/ 6078200 w 10853928"/>
-              <a:gd name="connsiteY25" fmla="*/ 18288 h 18288"/>
-              <a:gd name="connsiteX26" fmla="*/ 5508368 w 10853928"/>
-              <a:gd name="connsiteY26" fmla="*/ 18288 h 18288"/>
-              <a:gd name="connsiteX27" fmla="*/ 4721459 w 10853928"/>
-              <a:gd name="connsiteY27" fmla="*/ 18288 h 18288"/>
-              <a:gd name="connsiteX28" fmla="*/ 4043088 w 10853928"/>
-              <a:gd name="connsiteY28" fmla="*/ 18288 h 18288"/>
-              <a:gd name="connsiteX29" fmla="*/ 3690336 w 10853928"/>
-              <a:gd name="connsiteY29" fmla="*/ 18288 h 18288"/>
-              <a:gd name="connsiteX30" fmla="*/ 3120504 w 10853928"/>
-              <a:gd name="connsiteY30" fmla="*/ 18288 h 18288"/>
-              <a:gd name="connsiteX31" fmla="*/ 2333595 w 10853928"/>
-              <a:gd name="connsiteY31" fmla="*/ 18288 h 18288"/>
-              <a:gd name="connsiteX32" fmla="*/ 1872303 w 10853928"/>
-              <a:gd name="connsiteY32" fmla="*/ 18288 h 18288"/>
-              <a:gd name="connsiteX33" fmla="*/ 976854 w 10853928"/>
-              <a:gd name="connsiteY33" fmla="*/ 18288 h 18288"/>
-              <a:gd name="connsiteX34" fmla="*/ 0 w 10853928"/>
-              <a:gd name="connsiteY34" fmla="*/ 18288 h 18288"/>
-              <a:gd name="connsiteX35" fmla="*/ 0 w 10853928"/>
-              <a:gd name="connsiteY35" fmla="*/ 0 h 18288"/>
+              <a:gd name="csX0" fmla="*/ 0 w 10853928"/>
+              <a:gd name="csY0" fmla="*/ 0 h 18288"/>
+              <a:gd name="csX1" fmla="*/ 461292 w 10853928"/>
+              <a:gd name="csY1" fmla="*/ 0 h 18288"/>
+              <a:gd name="csX2" fmla="*/ 1139662 w 10853928"/>
+              <a:gd name="csY2" fmla="*/ 0 h 18288"/>
+              <a:gd name="csX3" fmla="*/ 1926572 w 10853928"/>
+              <a:gd name="csY3" fmla="*/ 0 h 18288"/>
+              <a:gd name="csX4" fmla="*/ 2279325 w 10853928"/>
+              <a:gd name="csY4" fmla="*/ 0 h 18288"/>
+              <a:gd name="csX5" fmla="*/ 2632078 w 10853928"/>
+              <a:gd name="csY5" fmla="*/ 0 h 18288"/>
+              <a:gd name="csX6" fmla="*/ 3527527 w 10853928"/>
+              <a:gd name="csY6" fmla="*/ 0 h 18288"/>
+              <a:gd name="csX7" fmla="*/ 4205897 w 10853928"/>
+              <a:gd name="csY7" fmla="*/ 0 h 18288"/>
+              <a:gd name="csX8" fmla="*/ 4558650 w 10853928"/>
+              <a:gd name="csY8" fmla="*/ 0 h 18288"/>
+              <a:gd name="csX9" fmla="*/ 5237020 w 10853928"/>
+              <a:gd name="csY9" fmla="*/ 0 h 18288"/>
+              <a:gd name="csX10" fmla="*/ 6132469 w 10853928"/>
+              <a:gd name="csY10" fmla="*/ 0 h 18288"/>
+              <a:gd name="csX11" fmla="*/ 6702301 w 10853928"/>
+              <a:gd name="csY11" fmla="*/ 0 h 18288"/>
+              <a:gd name="csX12" fmla="*/ 7272132 w 10853928"/>
+              <a:gd name="csY12" fmla="*/ 0 h 18288"/>
+              <a:gd name="csX13" fmla="*/ 7950502 w 10853928"/>
+              <a:gd name="csY13" fmla="*/ 0 h 18288"/>
+              <a:gd name="csX14" fmla="*/ 8737412 w 10853928"/>
+              <a:gd name="csY14" fmla="*/ 0 h 18288"/>
+              <a:gd name="csX15" fmla="*/ 9524322 w 10853928"/>
+              <a:gd name="csY15" fmla="*/ 0 h 18288"/>
+              <a:gd name="csX16" fmla="*/ 10853928 w 10853928"/>
+              <a:gd name="csY16" fmla="*/ 0 h 18288"/>
+              <a:gd name="csX17" fmla="*/ 10853928 w 10853928"/>
+              <a:gd name="csY17" fmla="*/ 18288 h 18288"/>
+              <a:gd name="csX18" fmla="*/ 10392636 w 10853928"/>
+              <a:gd name="csY18" fmla="*/ 18288 h 18288"/>
+              <a:gd name="csX19" fmla="*/ 9497187 w 10853928"/>
+              <a:gd name="csY19" fmla="*/ 18288 h 18288"/>
+              <a:gd name="csX20" fmla="*/ 8818817 w 10853928"/>
+              <a:gd name="csY20" fmla="*/ 18288 h 18288"/>
+              <a:gd name="csX21" fmla="*/ 8466064 w 10853928"/>
+              <a:gd name="csY21" fmla="*/ 18288 h 18288"/>
+              <a:gd name="csX22" fmla="*/ 7787693 w 10853928"/>
+              <a:gd name="csY22" fmla="*/ 18288 h 18288"/>
+              <a:gd name="csX23" fmla="*/ 7217862 w 10853928"/>
+              <a:gd name="csY23" fmla="*/ 18288 h 18288"/>
+              <a:gd name="csX24" fmla="*/ 6648031 w 10853928"/>
+              <a:gd name="csY24" fmla="*/ 18288 h 18288"/>
+              <a:gd name="csX25" fmla="*/ 6078200 w 10853928"/>
+              <a:gd name="csY25" fmla="*/ 18288 h 18288"/>
+              <a:gd name="csX26" fmla="*/ 5508368 w 10853928"/>
+              <a:gd name="csY26" fmla="*/ 18288 h 18288"/>
+              <a:gd name="csX27" fmla="*/ 4721459 w 10853928"/>
+              <a:gd name="csY27" fmla="*/ 18288 h 18288"/>
+              <a:gd name="csX28" fmla="*/ 4043088 w 10853928"/>
+              <a:gd name="csY28" fmla="*/ 18288 h 18288"/>
+              <a:gd name="csX29" fmla="*/ 3690336 w 10853928"/>
+              <a:gd name="csY29" fmla="*/ 18288 h 18288"/>
+              <a:gd name="csX30" fmla="*/ 3120504 w 10853928"/>
+              <a:gd name="csY30" fmla="*/ 18288 h 18288"/>
+              <a:gd name="csX31" fmla="*/ 2333595 w 10853928"/>
+              <a:gd name="csY31" fmla="*/ 18288 h 18288"/>
+              <a:gd name="csX32" fmla="*/ 1872303 w 10853928"/>
+              <a:gd name="csY32" fmla="*/ 18288 h 18288"/>
+              <a:gd name="csX33" fmla="*/ 976854 w 10853928"/>
+              <a:gd name="csY33" fmla="*/ 18288 h 18288"/>
+              <a:gd name="csX34" fmla="*/ 0 w 10853928"/>
+              <a:gd name="csY34" fmla="*/ 18288 h 18288"/>
+              <a:gd name="csX35" fmla="*/ 0 w 10853928"/>
+              <a:gd name="csY35" fmla="*/ 0 h 18288"/>
             </a:gdLst>
             <a:ahLst/>
             <a:cxnLst>
               <a:cxn ang="0">
-                <a:pos x="connsiteX0" y="connsiteY0"/>
+                <a:pos x="csX0" y="csY0"/>
               </a:cxn>
               <a:cxn ang="0">
-                <a:pos x="connsiteX1" y="connsiteY1"/>
+                <a:pos x="csX1" y="csY1"/>
               </a:cxn>
               <a:cxn ang="0">
-                <a:pos x="connsiteX2" y="connsiteY2"/>
+                <a:pos x="csX2" y="csY2"/>
               </a:cxn>
               <a:cxn ang="0">
-                <a:pos x="connsiteX3" y="connsiteY3"/>
+                <a:pos x="csX3" y="csY3"/>
               </a:cxn>
               <a:cxn ang="0">
-                <a:pos x="connsiteX4" y="connsiteY4"/>
+                <a:pos x="csX4" y="csY4"/>
               </a:cxn>
               <a:cxn ang="0">
-                <a:pos x="connsiteX5" y="connsiteY5"/>
+                <a:pos x="csX5" y="csY5"/>
               </a:cxn>
               <a:cxn ang="0">
-                <a:pos x="connsiteX6" y="connsiteY6"/>
+                <a:pos x="csX6" y="csY6"/>
               </a:cxn>
               <a:cxn ang="0">
-                <a:pos x="connsiteX7" y="connsiteY7"/>
+                <a:pos x="csX7" y="csY7"/>
               </a:cxn>
               <a:cxn ang="0">
-                <a:pos x="connsiteX8" y="connsiteY8"/>
+                <a:pos x="csX8" y="csY8"/>
               </a:cxn>
               <a:cxn ang="0">
-                <a:pos x="connsiteX9" y="connsiteY9"/>
+                <a:pos x="csX9" y="csY9"/>
               </a:cxn>
               <a:cxn ang="0">
-                <a:pos x="connsiteX10" y="connsiteY10"/>
+                <a:pos x="csX10" y="csY10"/>
               </a:cxn>
               <a:cxn ang="0">
-                <a:pos x="connsiteX11" y="connsiteY11"/>
+                <a:pos x="csX11" y="csY11"/>
               </a:cxn>
               <a:cxn ang="0">
-                <a:pos x="connsiteX12" y="connsiteY12"/>
+                <a:pos x="csX12" y="csY12"/>
               </a:cxn>
               <a:cxn ang="0">
-                <a:pos x="connsiteX13" y="connsiteY13"/>
+                <a:pos x="csX13" y="csY13"/>
               </a:cxn>
               <a:cxn ang="0">
-                <a:pos x="connsiteX14" y="connsiteY14"/>
+                <a:pos x="csX14" y="csY14"/>
               </a:cxn>
               <a:cxn ang="0">
-                <a:pos x="connsiteX15" y="connsiteY15"/>
+                <a:pos x="csX15" y="csY15"/>
               </a:cxn>
               <a:cxn ang="0">
-                <a:pos x="connsiteX16" y="connsiteY16"/>
+                <a:pos x="csX16" y="csY16"/>
               </a:cxn>
               <a:cxn ang="0">
-                <a:pos x="connsiteX17" y="connsiteY17"/>
+                <a:pos x="csX17" y="csY17"/>
               </a:cxn>
               <a:cxn ang="0">
-                <a:pos x="connsiteX18" y="connsiteY18"/>
+                <a:pos x="csX18" y="csY18"/>
               </a:cxn>
               <a:cxn ang="0">
-                <a:pos x="connsiteX19" y="connsiteY19"/>
+                <a:pos x="csX19" y="csY19"/>
               </a:cxn>
               <a:cxn ang="0">
-                <a:pos x="connsiteX20" y="connsiteY20"/>
+                <a:pos x="csX20" y="csY20"/>
               </a:cxn>
               <a:cxn ang="0">
-                <a:pos x="connsiteX21" y="connsiteY21"/>
+                <a:pos x="csX21" y="csY21"/>
               </a:cxn>
               <a:cxn ang="0">
-                <a:pos x="connsiteX22" y="connsiteY22"/>
+                <a:pos x="csX22" y="csY22"/>
               </a:cxn>
               <a:cxn ang="0">
-                <a:pos x="connsiteX23" y="connsiteY23"/>
+                <a:pos x="csX23" y="csY23"/>
               </a:cxn>
               <a:cxn ang="0">
-                <a:pos x="connsiteX24" y="connsiteY24"/>
+                <a:pos x="csX24" y="csY24"/>
               </a:cxn>
               <a:cxn ang="0">
-                <a:pos x="connsiteX25" y="connsiteY25"/>
+                <a:pos x="csX25" y="csY25"/>
               </a:cxn>
               <a:cxn ang="0">
-                <a:pos x="connsiteX26" y="connsiteY26"/>
+                <a:pos x="csX26" y="csY26"/>
               </a:cxn>
               <a:cxn ang="0">
-                <a:pos x="connsiteX27" y="connsiteY27"/>
+                <a:pos x="csX27" y="csY27"/>
               </a:cxn>
               <a:cxn ang="0">
-                <a:pos x="connsiteX28" y="connsiteY28"/>
+                <a:pos x="csX28" y="csY28"/>
               </a:cxn>
               <a:cxn ang="0">
-                <a:pos x="connsiteX29" y="connsiteY29"/>
+                <a:pos x="csX29" y="csY29"/>
               </a:cxn>
               <a:cxn ang="0">
-                <a:pos x="connsiteX30" y="connsiteY30"/>
+                <a:pos x="csX30" y="csY30"/>
               </a:cxn>
               <a:cxn ang="0">
-                <a:pos x="connsiteX31" y="connsiteY31"/>
+                <a:pos x="csX31" y="csY31"/>
               </a:cxn>
               <a:cxn ang="0">
-                <a:pos x="connsiteX32" y="connsiteY32"/>
+                <a:pos x="csX32" y="csY32"/>
               </a:cxn>
               <a:cxn ang="0">
-                <a:pos x="connsiteX33" y="connsiteY33"/>
+                <a:pos x="csX33" y="csY33"/>
               </a:cxn>
               <a:cxn ang="0">
-                <a:pos x="connsiteX34" y="connsiteY34"/>
+                <a:pos x="csX34" y="csY34"/>
               </a:cxn>
               <a:cxn ang="0">
-                <a:pos x="connsiteX35" y="connsiteY35"/>
+                <a:pos x="csX35" y="csY35"/>
               </a:cxn>
             </a:cxnLst>
             <a:rect l="l" t="t" r="r" b="b"/>
@@ -37001,7 +37475,7 @@
                 <a:tabLst/>
                 <a:defRPr/>
               </a:pPr>
-              <a:t>46</a:t>
+              <a:t>47</a:t>
             </a:fld>
             <a:endParaRPr kumimoji="0" lang="en-SE" sz="1200" b="0" i="0" u="none" strike="noStrike" kern="1200" cap="none" spc="0" normalizeH="0" baseline="0" noProof="0">
               <a:ln>
@@ -37284,7 +37758,7 @@
 </p:sld>
 </file>
 
-<file path=ppt/slides/slide47.xml><?xml version="1.0" encoding="utf-8"?>
+<file path=ppt/slides/slide48.xml><?xml version="1.0" encoding="utf-8"?>
 <p:sld xmlns:a="http://schemas.openxmlformats.org/drawingml/2006/main" xmlns:r="http://schemas.openxmlformats.org/officeDocument/2006/relationships" xmlns:p="http://schemas.openxmlformats.org/presentationml/2006/main">
   <p:cSld>
     <p:bg>
@@ -37433,8 +37907,8 @@
           <a:lstStyle/>
           <a:p>
             <a:r>
-              <a:rPr lang="en-US" sz="4000" dirty="0"/>
-              <a:t>Each process belongs to 1 cgroup per controller</a:t>
+              <a:rPr lang="en-US" sz="3600" dirty="0"/>
+              <a:t>Each process belongs to one cgroup in each hierarchy</a:t>
             </a:r>
           </a:p>
         </p:txBody>
@@ -37470,188 +37944,188 @@
           <a:custGeom>
             <a:avLst/>
             <a:gdLst>
-              <a:gd name="connsiteX0" fmla="*/ 0 w 10853928"/>
-              <a:gd name="connsiteY0" fmla="*/ 0 h 18288"/>
-              <a:gd name="connsiteX1" fmla="*/ 461292 w 10853928"/>
-              <a:gd name="connsiteY1" fmla="*/ 0 h 18288"/>
-              <a:gd name="connsiteX2" fmla="*/ 1139662 w 10853928"/>
-              <a:gd name="connsiteY2" fmla="*/ 0 h 18288"/>
-              <a:gd name="connsiteX3" fmla="*/ 1926572 w 10853928"/>
-              <a:gd name="connsiteY3" fmla="*/ 0 h 18288"/>
-              <a:gd name="connsiteX4" fmla="*/ 2279325 w 10853928"/>
-              <a:gd name="connsiteY4" fmla="*/ 0 h 18288"/>
-              <a:gd name="connsiteX5" fmla="*/ 2632078 w 10853928"/>
-              <a:gd name="connsiteY5" fmla="*/ 0 h 18288"/>
-              <a:gd name="connsiteX6" fmla="*/ 3527527 w 10853928"/>
-              <a:gd name="connsiteY6" fmla="*/ 0 h 18288"/>
-              <a:gd name="connsiteX7" fmla="*/ 4205897 w 10853928"/>
-              <a:gd name="connsiteY7" fmla="*/ 0 h 18288"/>
-              <a:gd name="connsiteX8" fmla="*/ 4558650 w 10853928"/>
-              <a:gd name="connsiteY8" fmla="*/ 0 h 18288"/>
-              <a:gd name="connsiteX9" fmla="*/ 5237020 w 10853928"/>
-              <a:gd name="connsiteY9" fmla="*/ 0 h 18288"/>
-              <a:gd name="connsiteX10" fmla="*/ 6132469 w 10853928"/>
-              <a:gd name="connsiteY10" fmla="*/ 0 h 18288"/>
-              <a:gd name="connsiteX11" fmla="*/ 6702301 w 10853928"/>
-              <a:gd name="connsiteY11" fmla="*/ 0 h 18288"/>
-              <a:gd name="connsiteX12" fmla="*/ 7272132 w 10853928"/>
-              <a:gd name="connsiteY12" fmla="*/ 0 h 18288"/>
-              <a:gd name="connsiteX13" fmla="*/ 7950502 w 10853928"/>
-              <a:gd name="connsiteY13" fmla="*/ 0 h 18288"/>
-              <a:gd name="connsiteX14" fmla="*/ 8737412 w 10853928"/>
-              <a:gd name="connsiteY14" fmla="*/ 0 h 18288"/>
-              <a:gd name="connsiteX15" fmla="*/ 9524322 w 10853928"/>
-              <a:gd name="connsiteY15" fmla="*/ 0 h 18288"/>
-              <a:gd name="connsiteX16" fmla="*/ 10853928 w 10853928"/>
-              <a:gd name="connsiteY16" fmla="*/ 0 h 18288"/>
-              <a:gd name="connsiteX17" fmla="*/ 10853928 w 10853928"/>
-              <a:gd name="connsiteY17" fmla="*/ 18288 h 18288"/>
-              <a:gd name="connsiteX18" fmla="*/ 10392636 w 10853928"/>
-              <a:gd name="connsiteY18" fmla="*/ 18288 h 18288"/>
-              <a:gd name="connsiteX19" fmla="*/ 9497187 w 10853928"/>
-              <a:gd name="connsiteY19" fmla="*/ 18288 h 18288"/>
-              <a:gd name="connsiteX20" fmla="*/ 8818817 w 10853928"/>
-              <a:gd name="connsiteY20" fmla="*/ 18288 h 18288"/>
-              <a:gd name="connsiteX21" fmla="*/ 8466064 w 10853928"/>
-              <a:gd name="connsiteY21" fmla="*/ 18288 h 18288"/>
-              <a:gd name="connsiteX22" fmla="*/ 7787693 w 10853928"/>
-              <a:gd name="connsiteY22" fmla="*/ 18288 h 18288"/>
-              <a:gd name="connsiteX23" fmla="*/ 7217862 w 10853928"/>
-              <a:gd name="connsiteY23" fmla="*/ 18288 h 18288"/>
-              <a:gd name="connsiteX24" fmla="*/ 6648031 w 10853928"/>
-              <a:gd name="connsiteY24" fmla="*/ 18288 h 18288"/>
-              <a:gd name="connsiteX25" fmla="*/ 6078200 w 10853928"/>
-              <a:gd name="connsiteY25" fmla="*/ 18288 h 18288"/>
-              <a:gd name="connsiteX26" fmla="*/ 5508368 w 10853928"/>
-              <a:gd name="connsiteY26" fmla="*/ 18288 h 18288"/>
-              <a:gd name="connsiteX27" fmla="*/ 4721459 w 10853928"/>
-              <a:gd name="connsiteY27" fmla="*/ 18288 h 18288"/>
-              <a:gd name="connsiteX28" fmla="*/ 4043088 w 10853928"/>
-              <a:gd name="connsiteY28" fmla="*/ 18288 h 18288"/>
-              <a:gd name="connsiteX29" fmla="*/ 3690336 w 10853928"/>
-              <a:gd name="connsiteY29" fmla="*/ 18288 h 18288"/>
-              <a:gd name="connsiteX30" fmla="*/ 3120504 w 10853928"/>
-              <a:gd name="connsiteY30" fmla="*/ 18288 h 18288"/>
-              <a:gd name="connsiteX31" fmla="*/ 2333595 w 10853928"/>
-              <a:gd name="connsiteY31" fmla="*/ 18288 h 18288"/>
-              <a:gd name="connsiteX32" fmla="*/ 1872303 w 10853928"/>
-              <a:gd name="connsiteY32" fmla="*/ 18288 h 18288"/>
-              <a:gd name="connsiteX33" fmla="*/ 976854 w 10853928"/>
-              <a:gd name="connsiteY33" fmla="*/ 18288 h 18288"/>
-              <a:gd name="connsiteX34" fmla="*/ 0 w 10853928"/>
-              <a:gd name="connsiteY34" fmla="*/ 18288 h 18288"/>
-              <a:gd name="connsiteX35" fmla="*/ 0 w 10853928"/>
-              <a:gd name="connsiteY35" fmla="*/ 0 h 18288"/>
+              <a:gd name="csX0" fmla="*/ 0 w 10853928"/>
+              <a:gd name="csY0" fmla="*/ 0 h 18288"/>
+              <a:gd name="csX1" fmla="*/ 461292 w 10853928"/>
+              <a:gd name="csY1" fmla="*/ 0 h 18288"/>
+              <a:gd name="csX2" fmla="*/ 1139662 w 10853928"/>
+              <a:gd name="csY2" fmla="*/ 0 h 18288"/>
+              <a:gd name="csX3" fmla="*/ 1926572 w 10853928"/>
+              <a:gd name="csY3" fmla="*/ 0 h 18288"/>
+              <a:gd name="csX4" fmla="*/ 2279325 w 10853928"/>
+              <a:gd name="csY4" fmla="*/ 0 h 18288"/>
+              <a:gd name="csX5" fmla="*/ 2632078 w 10853928"/>
+              <a:gd name="csY5" fmla="*/ 0 h 18288"/>
+              <a:gd name="csX6" fmla="*/ 3527527 w 10853928"/>
+              <a:gd name="csY6" fmla="*/ 0 h 18288"/>
+              <a:gd name="csX7" fmla="*/ 4205897 w 10853928"/>
+              <a:gd name="csY7" fmla="*/ 0 h 18288"/>
+              <a:gd name="csX8" fmla="*/ 4558650 w 10853928"/>
+              <a:gd name="csY8" fmla="*/ 0 h 18288"/>
+              <a:gd name="csX9" fmla="*/ 5237020 w 10853928"/>
+              <a:gd name="csY9" fmla="*/ 0 h 18288"/>
+              <a:gd name="csX10" fmla="*/ 6132469 w 10853928"/>
+              <a:gd name="csY10" fmla="*/ 0 h 18288"/>
+              <a:gd name="csX11" fmla="*/ 6702301 w 10853928"/>
+              <a:gd name="csY11" fmla="*/ 0 h 18288"/>
+              <a:gd name="csX12" fmla="*/ 7272132 w 10853928"/>
+              <a:gd name="csY12" fmla="*/ 0 h 18288"/>
+              <a:gd name="csX13" fmla="*/ 7950502 w 10853928"/>
+              <a:gd name="csY13" fmla="*/ 0 h 18288"/>
+              <a:gd name="csX14" fmla="*/ 8737412 w 10853928"/>
+              <a:gd name="csY14" fmla="*/ 0 h 18288"/>
+              <a:gd name="csX15" fmla="*/ 9524322 w 10853928"/>
+              <a:gd name="csY15" fmla="*/ 0 h 18288"/>
+              <a:gd name="csX16" fmla="*/ 10853928 w 10853928"/>
+              <a:gd name="csY16" fmla="*/ 0 h 18288"/>
+              <a:gd name="csX17" fmla="*/ 10853928 w 10853928"/>
+              <a:gd name="csY17" fmla="*/ 18288 h 18288"/>
+              <a:gd name="csX18" fmla="*/ 10392636 w 10853928"/>
+              <a:gd name="csY18" fmla="*/ 18288 h 18288"/>
+              <a:gd name="csX19" fmla="*/ 9497187 w 10853928"/>
+              <a:gd name="csY19" fmla="*/ 18288 h 18288"/>
+              <a:gd name="csX20" fmla="*/ 8818817 w 10853928"/>
+              <a:gd name="csY20" fmla="*/ 18288 h 18288"/>
+              <a:gd name="csX21" fmla="*/ 8466064 w 10853928"/>
+              <a:gd name="csY21" fmla="*/ 18288 h 18288"/>
+              <a:gd name="csX22" fmla="*/ 7787693 w 10853928"/>
+              <a:gd name="csY22" fmla="*/ 18288 h 18288"/>
+              <a:gd name="csX23" fmla="*/ 7217862 w 10853928"/>
+              <a:gd name="csY23" fmla="*/ 18288 h 18288"/>
+              <a:gd name="csX24" fmla="*/ 6648031 w 10853928"/>
+              <a:gd name="csY24" fmla="*/ 18288 h 18288"/>
+              <a:gd name="csX25" fmla="*/ 6078200 w 10853928"/>
+              <a:gd name="csY25" fmla="*/ 18288 h 18288"/>
+              <a:gd name="csX26" fmla="*/ 5508368 w 10853928"/>
+              <a:gd name="csY26" fmla="*/ 18288 h 18288"/>
+              <a:gd name="csX27" fmla="*/ 4721459 w 10853928"/>
+              <a:gd name="csY27" fmla="*/ 18288 h 18288"/>
+              <a:gd name="csX28" fmla="*/ 4043088 w 10853928"/>
+              <a:gd name="csY28" fmla="*/ 18288 h 18288"/>
+              <a:gd name="csX29" fmla="*/ 3690336 w 10853928"/>
+              <a:gd name="csY29" fmla="*/ 18288 h 18288"/>
+              <a:gd name="csX30" fmla="*/ 3120504 w 10853928"/>
+              <a:gd name="csY30" fmla="*/ 18288 h 18288"/>
+              <a:gd name="csX31" fmla="*/ 2333595 w 10853928"/>
+              <a:gd name="csY31" fmla="*/ 18288 h 18288"/>
+              <a:gd name="csX32" fmla="*/ 1872303 w 10853928"/>
+              <a:gd name="csY32" fmla="*/ 18288 h 18288"/>
+              <a:gd name="csX33" fmla="*/ 976854 w 10853928"/>
+              <a:gd name="csY33" fmla="*/ 18288 h 18288"/>
+              <a:gd name="csX34" fmla="*/ 0 w 10853928"/>
+              <a:gd name="csY34" fmla="*/ 18288 h 18288"/>
+              <a:gd name="csX35" fmla="*/ 0 w 10853928"/>
+              <a:gd name="csY35" fmla="*/ 0 h 18288"/>
             </a:gdLst>
             <a:ahLst/>
             <a:cxnLst>
               <a:cxn ang="0">
-                <a:pos x="connsiteX0" y="connsiteY0"/>
+                <a:pos x="csX0" y="csY0"/>
               </a:cxn>
               <a:cxn ang="0">
-                <a:pos x="connsiteX1" y="connsiteY1"/>
+                <a:pos x="csX1" y="csY1"/>
               </a:cxn>
               <a:cxn ang="0">
-                <a:pos x="connsiteX2" y="connsiteY2"/>
+                <a:pos x="csX2" y="csY2"/>
               </a:cxn>
               <a:cxn ang="0">
-                <a:pos x="connsiteX3" y="connsiteY3"/>
+                <a:pos x="csX3" y="csY3"/>
               </a:cxn>
               <a:cxn ang="0">
-                <a:pos x="connsiteX4" y="connsiteY4"/>
+                <a:pos x="csX4" y="csY4"/>
               </a:cxn>
               <a:cxn ang="0">
-                <a:pos x="connsiteX5" y="connsiteY5"/>
+                <a:pos x="csX5" y="csY5"/>
               </a:cxn>
               <a:cxn ang="0">
-                <a:pos x="connsiteX6" y="connsiteY6"/>
+                <a:pos x="csX6" y="csY6"/>
               </a:cxn>
               <a:cxn ang="0">
-                <a:pos x="connsiteX7" y="connsiteY7"/>
+                <a:pos x="csX7" y="csY7"/>
               </a:cxn>
               <a:cxn ang="0">
-                <a:pos x="connsiteX8" y="connsiteY8"/>
+                <a:pos x="csX8" y="csY8"/>
               </a:cxn>
               <a:cxn ang="0">
-                <a:pos x="connsiteX9" y="connsiteY9"/>
+                <a:pos x="csX9" y="csY9"/>
               </a:cxn>
               <a:cxn ang="0">
-                <a:pos x="connsiteX10" y="connsiteY10"/>
+                <a:pos x="csX10" y="csY10"/>
               </a:cxn>
               <a:cxn ang="0">
-                <a:pos x="connsiteX11" y="connsiteY11"/>
+                <a:pos x="csX11" y="csY11"/>
               </a:cxn>
               <a:cxn ang="0">
-                <a:pos x="connsiteX12" y="connsiteY12"/>
+                <a:pos x="csX12" y="csY12"/>
               </a:cxn>
               <a:cxn ang="0">
-                <a:pos x="connsiteX13" y="connsiteY13"/>
+                <a:pos x="csX13" y="csY13"/>
               </a:cxn>
               <a:cxn ang="0">
-                <a:pos x="connsiteX14" y="connsiteY14"/>
+                <a:pos x="csX14" y="csY14"/>
               </a:cxn>
               <a:cxn ang="0">
-                <a:pos x="connsiteX15" y="connsiteY15"/>
+                <a:pos x="csX15" y="csY15"/>
               </a:cxn>
               <a:cxn ang="0">
-                <a:pos x="connsiteX16" y="connsiteY16"/>
+                <a:pos x="csX16" y="csY16"/>
               </a:cxn>
               <a:cxn ang="0">
-                <a:pos x="connsiteX17" y="connsiteY17"/>
+                <a:pos x="csX17" y="csY17"/>
               </a:cxn>
               <a:cxn ang="0">
-                <a:pos x="connsiteX18" y="connsiteY18"/>
+                <a:pos x="csX18" y="csY18"/>
               </a:cxn>
               <a:cxn ang="0">
-                <a:pos x="connsiteX19" y="connsiteY19"/>
+                <a:pos x="csX19" y="csY19"/>
               </a:cxn>
               <a:cxn ang="0">
-                <a:pos x="connsiteX20" y="connsiteY20"/>
+                <a:pos x="csX20" y="csY20"/>
               </a:cxn>
               <a:cxn ang="0">
-                <a:pos x="connsiteX21" y="connsiteY21"/>
+                <a:pos x="csX21" y="csY21"/>
               </a:cxn>
               <a:cxn ang="0">
-                <a:pos x="connsiteX22" y="connsiteY22"/>
+                <a:pos x="csX22" y="csY22"/>
               </a:cxn>
               <a:cxn ang="0">
-                <a:pos x="connsiteX23" y="connsiteY23"/>
+                <a:pos x="csX23" y="csY23"/>
               </a:cxn>
               <a:cxn ang="0">
-                <a:pos x="connsiteX24" y="connsiteY24"/>
+                <a:pos x="csX24" y="csY24"/>
               </a:cxn>
               <a:cxn ang="0">
-                <a:pos x="connsiteX25" y="connsiteY25"/>
+                <a:pos x="csX25" y="csY25"/>
               </a:cxn>
               <a:cxn ang="0">
-                <a:pos x="connsiteX26" y="connsiteY26"/>
+                <a:pos x="csX26" y="csY26"/>
               </a:cxn>
               <a:cxn ang="0">
-                <a:pos x="connsiteX27" y="connsiteY27"/>
+                <a:pos x="csX27" y="csY27"/>
               </a:cxn>
               <a:cxn ang="0">
-                <a:pos x="connsiteX28" y="connsiteY28"/>
+                <a:pos x="csX28" y="csY28"/>
               </a:cxn>
               <a:cxn ang="0">
-                <a:pos x="connsiteX29" y="connsiteY29"/>
+                <a:pos x="csX29" y="csY29"/>
               </a:cxn>
               <a:cxn ang="0">
-                <a:pos x="connsiteX30" y="connsiteY30"/>
+                <a:pos x="csX30" y="csY30"/>
               </a:cxn>
               <a:cxn ang="0">
-                <a:pos x="connsiteX31" y="connsiteY31"/>
+                <a:pos x="csX31" y="csY31"/>
               </a:cxn>
               <a:cxn ang="0">
-                <a:pos x="connsiteX32" y="connsiteY32"/>
+                <a:pos x="csX32" y="csY32"/>
               </a:cxn>
               <a:cxn ang="0">
-                <a:pos x="connsiteX33" y="connsiteY33"/>
+                <a:pos x="csX33" y="csY33"/>
               </a:cxn>
               <a:cxn ang="0">
-                <a:pos x="connsiteX34" y="connsiteY34"/>
+                <a:pos x="csX34" y="csY34"/>
               </a:cxn>
               <a:cxn ang="0">
-                <a:pos x="connsiteX35" y="connsiteY35"/>
+                <a:pos x="csX35" y="csY35"/>
               </a:cxn>
             </a:cxnLst>
             <a:rect l="l" t="t" r="r" b="b"/>
@@ -38351,7 +38825,7 @@
                 <a:tabLst/>
                 <a:defRPr/>
               </a:pPr>
-              <a:t>47</a:t>
+              <a:t>48</a:t>
             </a:fld>
             <a:endParaRPr kumimoji="0" lang="en-SE" sz="1200" b="0" i="0" u="none" strike="noStrike" kern="1200" cap="none" spc="0" normalizeH="0" baseline="0" noProof="0">
               <a:ln>
@@ -38673,7 +39147,7 @@
 </p:sld>
 </file>
 
-<file path=ppt/slides/slide48.xml><?xml version="1.0" encoding="utf-8"?>
+<file path=ppt/slides/slide49.xml><?xml version="1.0" encoding="utf-8"?>
 <p:sld xmlns:a="http://schemas.openxmlformats.org/drawingml/2006/main" xmlns:r="http://schemas.openxmlformats.org/officeDocument/2006/relationships" xmlns:p="http://schemas.openxmlformats.org/presentationml/2006/main">
   <p:cSld>
     <p:bg>
@@ -38864,188 +39338,188 @@
           <a:custGeom>
             <a:avLst/>
             <a:gdLst>
-              <a:gd name="connsiteX0" fmla="*/ 0 w 10853928"/>
-              <a:gd name="connsiteY0" fmla="*/ 0 h 18288"/>
-              <a:gd name="connsiteX1" fmla="*/ 461292 w 10853928"/>
-              <a:gd name="connsiteY1" fmla="*/ 0 h 18288"/>
-              <a:gd name="connsiteX2" fmla="*/ 1139662 w 10853928"/>
-              <a:gd name="connsiteY2" fmla="*/ 0 h 18288"/>
-              <a:gd name="connsiteX3" fmla="*/ 1926572 w 10853928"/>
-              <a:gd name="connsiteY3" fmla="*/ 0 h 18288"/>
-              <a:gd name="connsiteX4" fmla="*/ 2279325 w 10853928"/>
-              <a:gd name="connsiteY4" fmla="*/ 0 h 18288"/>
-              <a:gd name="connsiteX5" fmla="*/ 2632078 w 10853928"/>
-              <a:gd name="connsiteY5" fmla="*/ 0 h 18288"/>
-              <a:gd name="connsiteX6" fmla="*/ 3527527 w 10853928"/>
-              <a:gd name="connsiteY6" fmla="*/ 0 h 18288"/>
-              <a:gd name="connsiteX7" fmla="*/ 4205897 w 10853928"/>
-              <a:gd name="connsiteY7" fmla="*/ 0 h 18288"/>
-              <a:gd name="connsiteX8" fmla="*/ 4558650 w 10853928"/>
-              <a:gd name="connsiteY8" fmla="*/ 0 h 18288"/>
-              <a:gd name="connsiteX9" fmla="*/ 5237020 w 10853928"/>
-              <a:gd name="connsiteY9" fmla="*/ 0 h 18288"/>
-              <a:gd name="connsiteX10" fmla="*/ 6132469 w 10853928"/>
-              <a:gd name="connsiteY10" fmla="*/ 0 h 18288"/>
-              <a:gd name="connsiteX11" fmla="*/ 6702301 w 10853928"/>
-              <a:gd name="connsiteY11" fmla="*/ 0 h 18288"/>
-              <a:gd name="connsiteX12" fmla="*/ 7272132 w 10853928"/>
-              <a:gd name="connsiteY12" fmla="*/ 0 h 18288"/>
-              <a:gd name="connsiteX13" fmla="*/ 7950502 w 10853928"/>
-              <a:gd name="connsiteY13" fmla="*/ 0 h 18288"/>
-              <a:gd name="connsiteX14" fmla="*/ 8737412 w 10853928"/>
-              <a:gd name="connsiteY14" fmla="*/ 0 h 18288"/>
-              <a:gd name="connsiteX15" fmla="*/ 9524322 w 10853928"/>
-              <a:gd name="connsiteY15" fmla="*/ 0 h 18288"/>
-              <a:gd name="connsiteX16" fmla="*/ 10853928 w 10853928"/>
-              <a:gd name="connsiteY16" fmla="*/ 0 h 18288"/>
-              <a:gd name="connsiteX17" fmla="*/ 10853928 w 10853928"/>
-              <a:gd name="connsiteY17" fmla="*/ 18288 h 18288"/>
-              <a:gd name="connsiteX18" fmla="*/ 10392636 w 10853928"/>
-              <a:gd name="connsiteY18" fmla="*/ 18288 h 18288"/>
-              <a:gd name="connsiteX19" fmla="*/ 9497187 w 10853928"/>
-              <a:gd name="connsiteY19" fmla="*/ 18288 h 18288"/>
-              <a:gd name="connsiteX20" fmla="*/ 8818817 w 10853928"/>
-              <a:gd name="connsiteY20" fmla="*/ 18288 h 18288"/>
-              <a:gd name="connsiteX21" fmla="*/ 8466064 w 10853928"/>
-              <a:gd name="connsiteY21" fmla="*/ 18288 h 18288"/>
-              <a:gd name="connsiteX22" fmla="*/ 7787693 w 10853928"/>
-              <a:gd name="connsiteY22" fmla="*/ 18288 h 18288"/>
-              <a:gd name="connsiteX23" fmla="*/ 7217862 w 10853928"/>
-              <a:gd name="connsiteY23" fmla="*/ 18288 h 18288"/>
-              <a:gd name="connsiteX24" fmla="*/ 6648031 w 10853928"/>
-              <a:gd name="connsiteY24" fmla="*/ 18288 h 18288"/>
-              <a:gd name="connsiteX25" fmla="*/ 6078200 w 10853928"/>
-              <a:gd name="connsiteY25" fmla="*/ 18288 h 18288"/>
-              <a:gd name="connsiteX26" fmla="*/ 5508368 w 10853928"/>
-              <a:gd name="connsiteY26" fmla="*/ 18288 h 18288"/>
-              <a:gd name="connsiteX27" fmla="*/ 4721459 w 10853928"/>
-              <a:gd name="connsiteY27" fmla="*/ 18288 h 18288"/>
-              <a:gd name="connsiteX28" fmla="*/ 4043088 w 10853928"/>
-              <a:gd name="connsiteY28" fmla="*/ 18288 h 18288"/>
-              <a:gd name="connsiteX29" fmla="*/ 3690336 w 10853928"/>
-              <a:gd name="connsiteY29" fmla="*/ 18288 h 18288"/>
-              <a:gd name="connsiteX30" fmla="*/ 3120504 w 10853928"/>
-              <a:gd name="connsiteY30" fmla="*/ 18288 h 18288"/>
-              <a:gd name="connsiteX31" fmla="*/ 2333595 w 10853928"/>
-              <a:gd name="connsiteY31" fmla="*/ 18288 h 18288"/>
-              <a:gd name="connsiteX32" fmla="*/ 1872303 w 10853928"/>
-              <a:gd name="connsiteY32" fmla="*/ 18288 h 18288"/>
-              <a:gd name="connsiteX33" fmla="*/ 976854 w 10853928"/>
-              <a:gd name="connsiteY33" fmla="*/ 18288 h 18288"/>
-              <a:gd name="connsiteX34" fmla="*/ 0 w 10853928"/>
-              <a:gd name="connsiteY34" fmla="*/ 18288 h 18288"/>
-              <a:gd name="connsiteX35" fmla="*/ 0 w 10853928"/>
-              <a:gd name="connsiteY35" fmla="*/ 0 h 18288"/>
+              <a:gd name="csX0" fmla="*/ 0 w 10853928"/>
+              <a:gd name="csY0" fmla="*/ 0 h 18288"/>
+              <a:gd name="csX1" fmla="*/ 461292 w 10853928"/>
+              <a:gd name="csY1" fmla="*/ 0 h 18288"/>
+              <a:gd name="csX2" fmla="*/ 1139662 w 10853928"/>
+              <a:gd name="csY2" fmla="*/ 0 h 18288"/>
+              <a:gd name="csX3" fmla="*/ 1926572 w 10853928"/>
+              <a:gd name="csY3" fmla="*/ 0 h 18288"/>
+              <a:gd name="csX4" fmla="*/ 2279325 w 10853928"/>
+              <a:gd name="csY4" fmla="*/ 0 h 18288"/>
+              <a:gd name="csX5" fmla="*/ 2632078 w 10853928"/>
+              <a:gd name="csY5" fmla="*/ 0 h 18288"/>
+              <a:gd name="csX6" fmla="*/ 3527527 w 10853928"/>
+              <a:gd name="csY6" fmla="*/ 0 h 18288"/>
+              <a:gd name="csX7" fmla="*/ 4205897 w 10853928"/>
+              <a:gd name="csY7" fmla="*/ 0 h 18288"/>
+              <a:gd name="csX8" fmla="*/ 4558650 w 10853928"/>
+              <a:gd name="csY8" fmla="*/ 0 h 18288"/>
+              <a:gd name="csX9" fmla="*/ 5237020 w 10853928"/>
+              <a:gd name="csY9" fmla="*/ 0 h 18288"/>
+              <a:gd name="csX10" fmla="*/ 6132469 w 10853928"/>
+              <a:gd name="csY10" fmla="*/ 0 h 18288"/>
+              <a:gd name="csX11" fmla="*/ 6702301 w 10853928"/>
+              <a:gd name="csY11" fmla="*/ 0 h 18288"/>
+              <a:gd name="csX12" fmla="*/ 7272132 w 10853928"/>
+              <a:gd name="csY12" fmla="*/ 0 h 18288"/>
+              <a:gd name="csX13" fmla="*/ 7950502 w 10853928"/>
+              <a:gd name="csY13" fmla="*/ 0 h 18288"/>
+              <a:gd name="csX14" fmla="*/ 8737412 w 10853928"/>
+              <a:gd name="csY14" fmla="*/ 0 h 18288"/>
+              <a:gd name="csX15" fmla="*/ 9524322 w 10853928"/>
+              <a:gd name="csY15" fmla="*/ 0 h 18288"/>
+              <a:gd name="csX16" fmla="*/ 10853928 w 10853928"/>
+              <a:gd name="csY16" fmla="*/ 0 h 18288"/>
+              <a:gd name="csX17" fmla="*/ 10853928 w 10853928"/>
+              <a:gd name="csY17" fmla="*/ 18288 h 18288"/>
+              <a:gd name="csX18" fmla="*/ 10392636 w 10853928"/>
+              <a:gd name="csY18" fmla="*/ 18288 h 18288"/>
+              <a:gd name="csX19" fmla="*/ 9497187 w 10853928"/>
+              <a:gd name="csY19" fmla="*/ 18288 h 18288"/>
+              <a:gd name="csX20" fmla="*/ 8818817 w 10853928"/>
+              <a:gd name="csY20" fmla="*/ 18288 h 18288"/>
+              <a:gd name="csX21" fmla="*/ 8466064 w 10853928"/>
+              <a:gd name="csY21" fmla="*/ 18288 h 18288"/>
+              <a:gd name="csX22" fmla="*/ 7787693 w 10853928"/>
+              <a:gd name="csY22" fmla="*/ 18288 h 18288"/>
+              <a:gd name="csX23" fmla="*/ 7217862 w 10853928"/>
+              <a:gd name="csY23" fmla="*/ 18288 h 18288"/>
+              <a:gd name="csX24" fmla="*/ 6648031 w 10853928"/>
+              <a:gd name="csY24" fmla="*/ 18288 h 18288"/>
+              <a:gd name="csX25" fmla="*/ 6078200 w 10853928"/>
+              <a:gd name="csY25" fmla="*/ 18288 h 18288"/>
+              <a:gd name="csX26" fmla="*/ 5508368 w 10853928"/>
+              <a:gd name="csY26" fmla="*/ 18288 h 18288"/>
+              <a:gd name="csX27" fmla="*/ 4721459 w 10853928"/>
+              <a:gd name="csY27" fmla="*/ 18288 h 18288"/>
+              <a:gd name="csX28" fmla="*/ 4043088 w 10853928"/>
+              <a:gd name="csY28" fmla="*/ 18288 h 18288"/>
+              <a:gd name="csX29" fmla="*/ 3690336 w 10853928"/>
+              <a:gd name="csY29" fmla="*/ 18288 h 18288"/>
+              <a:gd name="csX30" fmla="*/ 3120504 w 10853928"/>
+              <a:gd name="csY30" fmla="*/ 18288 h 18288"/>
+              <a:gd name="csX31" fmla="*/ 2333595 w 10853928"/>
+              <a:gd name="csY31" fmla="*/ 18288 h 18288"/>
+              <a:gd name="csX32" fmla="*/ 1872303 w 10853928"/>
+              <a:gd name="csY32" fmla="*/ 18288 h 18288"/>
+              <a:gd name="csX33" fmla="*/ 976854 w 10853928"/>
+              <a:gd name="csY33" fmla="*/ 18288 h 18288"/>
+              <a:gd name="csX34" fmla="*/ 0 w 10853928"/>
+              <a:gd name="csY34" fmla="*/ 18288 h 18288"/>
+              <a:gd name="csX35" fmla="*/ 0 w 10853928"/>
+              <a:gd name="csY35" fmla="*/ 0 h 18288"/>
             </a:gdLst>
             <a:ahLst/>
             <a:cxnLst>
               <a:cxn ang="0">
-                <a:pos x="connsiteX0" y="connsiteY0"/>
+                <a:pos x="csX0" y="csY0"/>
               </a:cxn>
               <a:cxn ang="0">
-                <a:pos x="connsiteX1" y="connsiteY1"/>
+                <a:pos x="csX1" y="csY1"/>
               </a:cxn>
               <a:cxn ang="0">
-                <a:pos x="connsiteX2" y="connsiteY2"/>
+                <a:pos x="csX2" y="csY2"/>
               </a:cxn>
               <a:cxn ang="0">
-                <a:pos x="connsiteX3" y="connsiteY3"/>
+                <a:pos x="csX3" y="csY3"/>
               </a:cxn>
               <a:cxn ang="0">
-                <a:pos x="connsiteX4" y="connsiteY4"/>
+                <a:pos x="csX4" y="csY4"/>
               </a:cxn>
               <a:cxn ang="0">
-                <a:pos x="connsiteX5" y="connsiteY5"/>
+                <a:pos x="csX5" y="csY5"/>
               </a:cxn>
               <a:cxn ang="0">
-                <a:pos x="connsiteX6" y="connsiteY6"/>
+                <a:pos x="csX6" y="csY6"/>
               </a:cxn>
               <a:cxn ang="0">
-                <a:pos x="connsiteX7" y="connsiteY7"/>
+                <a:pos x="csX7" y="csY7"/>
               </a:cxn>
               <a:cxn ang="0">
-                <a:pos x="connsiteX8" y="connsiteY8"/>
+                <a:pos x="csX8" y="csY8"/>
               </a:cxn>
               <a:cxn ang="0">
-                <a:pos x="connsiteX9" y="connsiteY9"/>
+                <a:pos x="csX9" y="csY9"/>
               </a:cxn>
               <a:cxn ang="0">
-                <a:pos x="connsiteX10" y="connsiteY10"/>
+                <a:pos x="csX10" y="csY10"/>
               </a:cxn>
               <a:cxn ang="0">
-                <a:pos x="connsiteX11" y="connsiteY11"/>
+                <a:pos x="csX11" y="csY11"/>
               </a:cxn>
               <a:cxn ang="0">
-                <a:pos x="connsiteX12" y="connsiteY12"/>
+                <a:pos x="csX12" y="csY12"/>
               </a:cxn>
               <a:cxn ang="0">
-                <a:pos x="connsiteX13" y="connsiteY13"/>
+                <a:pos x="csX13" y="csY13"/>
               </a:cxn>
               <a:cxn ang="0">
-                <a:pos x="connsiteX14" y="connsiteY14"/>
+                <a:pos x="csX14" y="csY14"/>
               </a:cxn>
               <a:cxn ang="0">
-                <a:pos x="connsiteX15" y="connsiteY15"/>
+                <a:pos x="csX15" y="csY15"/>
               </a:cxn>
               <a:cxn ang="0">
-                <a:pos x="connsiteX16" y="connsiteY16"/>
+                <a:pos x="csX16" y="csY16"/>
               </a:cxn>
               <a:cxn ang="0">
-                <a:pos x="connsiteX17" y="connsiteY17"/>
+                <a:pos x="csX17" y="csY17"/>
               </a:cxn>
               <a:cxn ang="0">
-                <a:pos x="connsiteX18" y="connsiteY18"/>
+                <a:pos x="csX18" y="csY18"/>
               </a:cxn>
               <a:cxn ang="0">
-                <a:pos x="connsiteX19" y="connsiteY19"/>
+                <a:pos x="csX19" y="csY19"/>
               </a:cxn>
               <a:cxn ang="0">
-                <a:pos x="connsiteX20" y="connsiteY20"/>
+                <a:pos x="csX20" y="csY20"/>
               </a:cxn>
               <a:cxn ang="0">
-                <a:pos x="connsiteX21" y="connsiteY21"/>
+                <a:pos x="csX21" y="csY21"/>
               </a:cxn>
               <a:cxn ang="0">
-                <a:pos x="connsiteX22" y="connsiteY22"/>
+                <a:pos x="csX22" y="csY22"/>
               </a:cxn>
               <a:cxn ang="0">
-                <a:pos x="connsiteX23" y="connsiteY23"/>
+                <a:pos x="csX23" y="csY23"/>
               </a:cxn>
               <a:cxn ang="0">
-                <a:pos x="connsiteX24" y="connsiteY24"/>
+                <a:pos x="csX24" y="csY24"/>
               </a:cxn>
               <a:cxn ang="0">
-                <a:pos x="connsiteX25" y="connsiteY25"/>
+                <a:pos x="csX25" y="csY25"/>
               </a:cxn>
               <a:cxn ang="0">
-                <a:pos x="connsiteX26" y="connsiteY26"/>
+                <a:pos x="csX26" y="csY26"/>
               </a:cxn>
               <a:cxn ang="0">
-                <a:pos x="connsiteX27" y="connsiteY27"/>
+                <a:pos x="csX27" y="csY27"/>
               </a:cxn>
               <a:cxn ang="0">
-                <a:pos x="connsiteX28" y="connsiteY28"/>
+                <a:pos x="csX28" y="csY28"/>
               </a:cxn>
               <a:cxn ang="0">
-                <a:pos x="connsiteX29" y="connsiteY29"/>
+                <a:pos x="csX29" y="csY29"/>
               </a:cxn>
               <a:cxn ang="0">
-                <a:pos x="connsiteX30" y="connsiteY30"/>
+                <a:pos x="csX30" y="csY30"/>
               </a:cxn>
               <a:cxn ang="0">
-                <a:pos x="connsiteX31" y="connsiteY31"/>
+                <a:pos x="csX31" y="csY31"/>
               </a:cxn>
               <a:cxn ang="0">
-                <a:pos x="connsiteX32" y="connsiteY32"/>
+                <a:pos x="csX32" y="csY32"/>
               </a:cxn>
               <a:cxn ang="0">
-                <a:pos x="connsiteX33" y="connsiteY33"/>
+                <a:pos x="csX33" y="csY33"/>
               </a:cxn>
               <a:cxn ang="0">
-                <a:pos x="connsiteX34" y="connsiteY34"/>
+                <a:pos x="csX34" y="csY34"/>
               </a:cxn>
               <a:cxn ang="0">
-                <a:pos x="connsiteX35" y="connsiteY35"/>
+                <a:pos x="csX35" y="csY35"/>
               </a:cxn>
             </a:cxnLst>
             <a:rect l="l" t="t" r="r" b="b"/>
@@ -39745,7 +40219,7 @@
                 <a:tabLst/>
                 <a:defRPr/>
               </a:pPr>
-              <a:t>48</a:t>
+              <a:t>49</a:t>
             </a:fld>
             <a:endParaRPr kumimoji="0" lang="en-SE" sz="1200" b="0" i="0" u="none" strike="noStrike" kern="1200" cap="none" spc="0" normalizeH="0" baseline="0" noProof="0">
               <a:ln>
@@ -40090,7 +40564,7 @@
           <p:nvPr>
             <p:extLst>
               <p:ext uri="{D42A27DB-BD31-4B8C-83A1-F6EECF244321}">
-                <p14:modId xmlns:p14="http://schemas.microsoft.com/office/powerpoint/2010/main" val="2457324612"/>
+                <p14:modId xmlns:p14="http://schemas.microsoft.com/office/powerpoint/2010/main" val="300356466"/>
               </p:ext>
             </p:extLst>
           </p:nvPr>
@@ -40121,10 +40595,7 @@
                       <a:pPr>
                         <a:buNone/>
                       </a:pPr>
-                      <a:r>
-                        <a:rPr lang="en-US" dirty="0"/>
-                        <a:t>Accumulated bytes read/written by this cgroup.</a:t>
-                      </a:r>
+                      <a:endParaRPr lang="en-US" dirty="0"/>
                     </a:p>
                   </a:txBody>
                   <a:tcPr anchor="ctr">
@@ -40195,6 +40666,65 @@
           </a:fontRef>
         </p:style>
       </p:cxnSp>
+      <p:sp>
+        <p:nvSpPr>
+          <p:cNvPr id="12" name="TextBox 11">
+            <a:extLst>
+              <a:ext uri="{FF2B5EF4-FFF2-40B4-BE49-F238E27FC236}">
+                <a16:creationId xmlns:a16="http://schemas.microsoft.com/office/drawing/2014/main" id="{71ACBAEF-896E-8F5B-3805-34DD1795D2E9}"/>
+              </a:ext>
+            </a:extLst>
+          </p:cNvPr>
+          <p:cNvSpPr txBox="1"/>
+          <p:nvPr/>
+        </p:nvSpPr>
+        <p:spPr>
+          <a:xfrm>
+            <a:off x="5029200" y="1986560"/>
+            <a:ext cx="6766421" cy="646331"/>
+          </a:xfrm>
+          <a:prstGeom prst="rect">
+            <a:avLst/>
+          </a:prstGeom>
+          <a:noFill/>
+        </p:spPr>
+        <p:txBody>
+          <a:bodyPr wrap="square">
+            <a:spAutoFit/>
+          </a:bodyPr>
+          <a:lstStyle/>
+          <a:p>
+            <a:r>
+              <a:rPr lang="en-US" dirty="0"/>
+              <a:t>cat /sys/fs/cgroup/</a:t>
+            </a:r>
+            <a:r>
+              <a:rPr lang="en-US" dirty="0" err="1"/>
+              <a:t>blkio</a:t>
+            </a:r>
+            <a:r>
+              <a:rPr lang="en-US" dirty="0"/>
+              <a:t>/</a:t>
+            </a:r>
+            <a:r>
+              <a:rPr lang="en-US" dirty="0" err="1"/>
+              <a:t>user.slice</a:t>
+            </a:r>
+            <a:r>
+              <a:rPr lang="en-US" dirty="0"/>
+              <a:t>/</a:t>
+            </a:r>
+            <a:r>
+              <a:rPr lang="en-US" dirty="0" err="1"/>
+              <a:t>blkio.throttle.io_service_bytes</a:t>
+            </a:r>
+            <a:r>
+              <a:rPr lang="en-US" dirty="0"/>
+              <a:t> would show the accumulated bytes read/written by this cgroup.</a:t>
+            </a:r>
+          </a:p>
+        </p:txBody>
+      </p:sp>
     </p:spTree>
     <p:extLst>
       <p:ext uri="{BB962C8B-B14F-4D97-AF65-F5344CB8AC3E}">

--- a/slides/virtualization.pptx
+++ b/slides/virtualization.pptx
@@ -9762,7 +9762,7 @@
           <a:p>
             <a:fld id="{F5CA1724-FE87-D744-AEFA-DF7E2B83349C}" type="datetimeFigureOut">
               <a:rPr lang="en-SE" smtClean="0"/>
-              <a:t>7/12/26</a:t>
+              <a:t>7/14/26</a:t>
             </a:fld>
             <a:endParaRPr lang="en-SE"/>
           </a:p>
@@ -17075,114 +17075,104 @@
           </a:p>
         </p:txBody>
       </p:sp>
-      <p:pic>
-        <p:nvPicPr>
-          <p:cNvPr id="5123" name="Picture 6" descr="http://upload.wikimedia.org/wikipedia/en/5/5c/Chalmers_logo.png"/>
-          <p:cNvPicPr>
-            <a:picLocks noChangeAspect="1" noChangeArrowheads="1"/>
-          </p:cNvPicPr>
-          <p:nvPr/>
-        </p:nvPicPr>
-        <p:blipFill>
-          <a:blip r:embed="rId3" cstate="screen">
+      <p:grpSp>
+        <p:nvGrpSpPr>
+          <p:cNvPr id="2" name="Group 1">
             <a:extLst>
-              <a:ext uri="{28A0092B-C50C-407E-A947-70E740481C1C}">
-                <a14:useLocalDpi xmlns:a14="http://schemas.microsoft.com/office/drawing/2010/main"/>
+              <a:ext uri="{FF2B5EF4-FFF2-40B4-BE49-F238E27FC236}">
+                <a16:creationId xmlns:a16="http://schemas.microsoft.com/office/drawing/2014/main" id="{4C4701C0-5203-16A1-0C12-B3CC7D54FD55}"/>
               </a:ext>
             </a:extLst>
-          </a:blip>
-          <a:srcRect/>
-          <a:stretch>
-            <a:fillRect/>
-          </a:stretch>
-        </p:blipFill>
-        <p:spPr bwMode="auto">
+          </p:cNvPr>
+          <p:cNvGrpSpPr/>
+          <p:nvPr/>
+        </p:nvGrpSpPr>
+        <p:grpSpPr>
           <a:xfrm>
-            <a:off x="4322234" y="4392085"/>
-            <a:ext cx="1672167" cy="1553633"/>
+            <a:off x="2495989" y="4734746"/>
+            <a:ext cx="7104771" cy="1547400"/>
+            <a:chOff x="777241" y="4793437"/>
+            <a:chExt cx="7104771" cy="1547400"/>
           </a:xfrm>
-          <a:prstGeom prst="rect">
-            <a:avLst/>
-          </a:prstGeom>
-          <a:noFill/>
-          <a:ln>
+        </p:grpSpPr>
+        <p:pic>
+          <p:nvPicPr>
+            <p:cNvPr id="3" name="Picture 2">
+              <a:extLst>
+                <a:ext uri="{FF2B5EF4-FFF2-40B4-BE49-F238E27FC236}">
+                  <a16:creationId xmlns:a16="http://schemas.microsoft.com/office/drawing/2014/main" id="{3BBE0694-08F4-B895-E9AF-2AFC62B4F9EC}"/>
+                </a:ext>
+              </a:extLst>
+            </p:cNvPr>
+            <p:cNvPicPr>
+              <a:picLocks noChangeAspect="1" noChangeArrowheads="1"/>
+            </p:cNvPicPr>
+            <p:nvPr/>
+          </p:nvPicPr>
+          <p:blipFill>
+            <a:blip r:embed="rId3">
+              <a:extLst>
+                <a:ext uri="{28A0092B-C50C-407E-A947-70E740481C1C}">
+                  <a14:useLocalDpi xmlns:a14="http://schemas.microsoft.com/office/drawing/2010/main" val="0"/>
+                </a:ext>
+              </a:extLst>
+            </a:blip>
+            <a:srcRect/>
+            <a:stretch>
+              <a:fillRect/>
+            </a:stretch>
+          </p:blipFill>
+          <p:spPr bwMode="auto">
+            <a:xfrm>
+              <a:off x="5803022" y="4793437"/>
+              <a:ext cx="2078990" cy="1547400"/>
+            </a:xfrm>
+            <a:prstGeom prst="rect">
+              <a:avLst/>
+            </a:prstGeom>
             <a:noFill/>
-          </a:ln>
-          <a:extLst>
-            <a:ext uri="{909E8E84-426E-40DD-AFC4-6F175D3DCCD1}">
-              <a14:hiddenFill xmlns:a14="http://schemas.microsoft.com/office/drawing/2010/main">
-                <a:solidFill>
-                  <a:srgbClr val="FFFFFF"/>
-                </a:solidFill>
-              </a14:hiddenFill>
-            </a:ext>
-            <a:ext uri="{91240B29-F687-4F45-9708-019B960494DF}">
-              <a14:hiddenLine xmlns:a14="http://schemas.microsoft.com/office/drawing/2010/main" w="9525">
-                <a:solidFill>
-                  <a:srgbClr val="000000"/>
-                </a:solidFill>
-                <a:miter lim="800000"/>
-                <a:headEnd/>
-                <a:tailEnd/>
-              </a14:hiddenLine>
-            </a:ext>
-          </a:extLst>
-        </p:spPr>
-      </p:pic>
-      <p:pic>
-        <p:nvPicPr>
-          <p:cNvPr id="5124" name="Picture 8" descr="http://sgroup.be/sites/default/files/LOGUeng_cen2r.gif"/>
-          <p:cNvPicPr>
-            <a:picLocks noChangeAspect="1" noChangeArrowheads="1"/>
-          </p:cNvPicPr>
-          <p:nvPr/>
-        </p:nvPicPr>
-        <p:blipFill>
-          <a:blip r:embed="rId4" cstate="screen">
             <a:extLst>
-              <a:ext uri="{28A0092B-C50C-407E-A947-70E740481C1C}">
-                <a14:useLocalDpi xmlns:a14="http://schemas.microsoft.com/office/drawing/2010/main"/>
+              <a:ext uri="{909E8E84-426E-40DD-AFC4-6F175D3DCCD1}">
+                <a14:hiddenFill xmlns:a14="http://schemas.microsoft.com/office/drawing/2010/main">
+                  <a:solidFill>
+                    <a:srgbClr val="FFFFFF"/>
+                  </a:solidFill>
+                </a14:hiddenFill>
               </a:ext>
             </a:extLst>
-          </a:blip>
-          <a:srcRect/>
-          <a:stretch>
-            <a:fillRect/>
-          </a:stretch>
-        </p:blipFill>
-        <p:spPr bwMode="auto">
-          <a:xfrm>
-            <a:off x="6164792" y="4480985"/>
-            <a:ext cx="1847850" cy="1375833"/>
-          </a:xfrm>
-          <a:prstGeom prst="rect">
-            <a:avLst/>
-          </a:prstGeom>
-          <a:noFill/>
-          <a:ln>
-            <a:noFill/>
-          </a:ln>
-          <a:extLst>
-            <a:ext uri="{909E8E84-426E-40DD-AFC4-6F175D3DCCD1}">
-              <a14:hiddenFill xmlns:a14="http://schemas.microsoft.com/office/drawing/2010/main">
-                <a:solidFill>
-                  <a:srgbClr val="FFFFFF"/>
-                </a:solidFill>
-              </a14:hiddenFill>
-            </a:ext>
-            <a:ext uri="{91240B29-F687-4F45-9708-019B960494DF}">
-              <a14:hiddenLine xmlns:a14="http://schemas.microsoft.com/office/drawing/2010/main" w="9525">
-                <a:solidFill>
-                  <a:srgbClr val="000000"/>
-                </a:solidFill>
-                <a:miter lim="800000"/>
-                <a:headEnd/>
-                <a:tailEnd/>
-              </a14:hiddenLine>
-            </a:ext>
-          </a:extLst>
-        </p:spPr>
-      </p:pic>
+          </p:spPr>
+        </p:pic>
+        <p:pic>
+          <p:nvPicPr>
+            <p:cNvPr id="5" name="Picture 4">
+              <a:extLst>
+                <a:ext uri="{FF2B5EF4-FFF2-40B4-BE49-F238E27FC236}">
+                  <a16:creationId xmlns:a16="http://schemas.microsoft.com/office/drawing/2014/main" id="{9ABB56D5-8A33-D4C0-B0A1-119BF1987104}"/>
+                </a:ext>
+              </a:extLst>
+            </p:cNvPr>
+            <p:cNvPicPr>
+              <a:picLocks noChangeAspect="1"/>
+            </p:cNvPicPr>
+            <p:nvPr/>
+          </p:nvPicPr>
+          <p:blipFill>
+            <a:blip r:embed="rId4"/>
+            <a:stretch>
+              <a:fillRect/>
+            </a:stretch>
+          </p:blipFill>
+          <p:spPr>
+            <a:xfrm>
+              <a:off x="777241" y="4973870"/>
+              <a:ext cx="4724632" cy="1186535"/>
+            </a:xfrm>
+            <a:prstGeom prst="rect">
+              <a:avLst/>
+            </a:prstGeom>
+          </p:spPr>
+        </p:pic>
+      </p:grpSp>
     </p:spTree>
     <p:extLst>
       <p:ext uri="{BB962C8B-B14F-4D97-AF65-F5344CB8AC3E}">
@@ -20239,32 +20229,7 @@
             </a:pPr>
             <a:r>
               <a:rPr lang="en-US" altLang="en-US" sz="2400" dirty="0"/>
-              <a:t>4</a:t>
-            </a:r>
-            <a:r>
-              <a:rPr lang="en-US" altLang="en-US" sz="2400" baseline="30000" dirty="0"/>
-              <a:t>th</a:t>
-            </a:r>
-            <a:r>
-              <a:rPr lang="en-US" altLang="en-US" sz="2400" dirty="0"/>
-              <a:t> Edition: Chapter 7, 7.1-7.7 and 7.9-7.11 (included)</a:t>
-            </a:r>
-            <a:endParaRPr lang="en-US" altLang="en-US" sz="2000" dirty="0"/>
-          </a:p>
-          <a:p>
-            <a:pPr marL="228600" lvl="1">
-              <a:spcBef>
-                <a:spcPts val="1000"/>
-              </a:spcBef>
-              <a:defRPr/>
-            </a:pPr>
-            <a:r>
-              <a:rPr lang="en-US" altLang="en-US" dirty="0"/>
-              <a:t>5th</a:t>
-            </a:r>
-            <a:r>
-              <a:rPr lang="en-US" altLang="en-US" sz="2400" dirty="0"/>
-              <a:t> Edition: Chapter 7, 7.1-7.</a:t>
+              <a:t>Chapter 7, 7.1-7.</a:t>
             </a:r>
             <a:r>
               <a:rPr lang="en-US" altLang="en-US" dirty="0"/>
@@ -20274,43 +20239,6 @@
               <a:rPr lang="en-US" altLang="en-US" sz="2400" dirty="0"/>
               <a:t> (included)</a:t>
             </a:r>
-          </a:p>
-          <a:p>
-            <a:pPr marL="685800" lvl="2">
-              <a:spcBef>
-                <a:spcPts val="1000"/>
-              </a:spcBef>
-              <a:defRPr/>
-            </a:pPr>
-            <a:r>
-              <a:rPr lang="en-US" altLang="en-US" dirty="0"/>
-              <a:t>Note: part on Containers only in 5</a:t>
-            </a:r>
-            <a:r>
-              <a:rPr lang="en-US" altLang="en-US" baseline="30000" dirty="0"/>
-              <a:t>th</a:t>
-            </a:r>
-            <a:r>
-              <a:rPr lang="en-US" altLang="en-US" dirty="0"/>
-              <a:t> edition. Slides are enough if you do not have the 5</a:t>
-            </a:r>
-            <a:r>
-              <a:rPr lang="en-US" altLang="en-US" baseline="30000" dirty="0"/>
-              <a:t>th</a:t>
-            </a:r>
-            <a:r>
-              <a:rPr lang="en-US" altLang="en-US" dirty="0"/>
-              <a:t> edition</a:t>
-            </a:r>
-          </a:p>
-          <a:p>
-            <a:pPr marL="228600" lvl="1">
-              <a:spcBef>
-                <a:spcPts val="1000"/>
-              </a:spcBef>
-              <a:defRPr/>
-            </a:pPr>
-            <a:endParaRPr lang="en-US" altLang="en-US" sz="2400" dirty="0"/>
           </a:p>
           <a:p>
             <a:pPr marL="228600" lvl="1">

--- a/slides/virtualization.pptx
+++ b/slides/virtualization.pptx
@@ -9762,7 +9762,7 @@
           <a:p>
             <a:fld id="{F5CA1724-FE87-D744-AEFA-DF7E2B83349C}" type="datetimeFigureOut">
               <a:rPr lang="en-SE" smtClean="0"/>
-              <a:t>7/14/26</a:t>
+              <a:t>8/18/26</a:t>
             </a:fld>
             <a:endParaRPr lang="en-SE"/>
           </a:p>
@@ -10547,29 +10547,6 @@
           <a:bodyPr/>
           <a:lstStyle/>
           <a:p>
-            <a:pPr marL="0" marR="0" lvl="0" indent="0" algn="l" defTabSz="914400" rtl="0" eaLnBrk="1" fontAlgn="auto" latinLnBrk="0" hangingPunct="1">
-              <a:lnSpc>
-                <a:spcPct val="100000"/>
-              </a:lnSpc>
-              <a:spcBef>
-                <a:spcPts val="0"/>
-              </a:spcBef>
-              <a:spcAft>
-                <a:spcPts val="0"/>
-              </a:spcAft>
-              <a:buClrTx/>
-              <a:buSzTx/>
-              <a:buFontTx/>
-              <a:buNone/>
-              <a:tabLst/>
-              <a:defRPr/>
-            </a:pPr>
-            <a:r>
-              <a:rPr lang="en-US" dirty="0"/>
-              <a:t>Containers became widely popular around 2013–2015, following Docker’s launch in 2013 and Kubernetes’ introduction in 2014. We can say that if a VM virtualizes hardware and runs a complete guest OS, then a container isolates one or more processes while sharing the host OS kernel. These processes are isolated from other processes, but their performance can still be affected by other workloads, as with VMs. The key difference is that containers also share the same kernel.</a:t>
-            </a:r>
-          </a:p>
-          <a:p>
             <a:endParaRPr lang="en-US" dirty="0"/>
           </a:p>
         </p:txBody>
@@ -10591,7 +10568,7 @@
           <a:p>
             <a:fld id="{C55E3DE0-5E9E-8947-9DAA-E91C371FD659}" type="slidenum">
               <a:rPr lang="en-SE" smtClean="0"/>
-              <a:t>37</a:t>
+              <a:t>36</a:t>
             </a:fld>
             <a:endParaRPr lang="en-SE"/>
           </a:p>
@@ -10600,7 +10577,7 @@
     </p:spTree>
     <p:extLst>
       <p:ext uri="{BB962C8B-B14F-4D97-AF65-F5344CB8AC3E}">
-        <p14:creationId xmlns:p14="http://schemas.microsoft.com/office/powerpoint/2010/main" val="3695974222"/>
+        <p14:creationId xmlns:p14="http://schemas.microsoft.com/office/powerpoint/2010/main" val="1799306669"/>
       </p:ext>
     </p:extLst>
   </p:cSld>
@@ -10673,7 +10650,7 @@
             </a:pPr>
             <a:r>
               <a:rPr lang="en-US" dirty="0"/>
-              <a:t>To isolate a set of processes, we must isolate resources and system views such as the filesystem, process IDs, user IDs, network interfaces, and IPC endpoints. For example, processes in different containers can have the same process ID. We may also define limits, quotas, or priorities for memory, CPU, and I/O. All in all, namespaces isolate what processes can see, while cgroups control or account for the resources they use.</a:t>
+              <a:t>Containers became widely popular around 2013–2015, following Docker’s launch in 2013 and Kubernetes’ introduction in 2014. We can say that if a VM virtualizes hardware and runs a complete guest OS, then a container isolates one or more processes while sharing the host OS kernel. These processes are isolated from other processes, but their performance can still be affected by other workloads, as with VMs. The key difference is that containers also share the same kernel.</a:t>
             </a:r>
           </a:p>
           <a:p>
@@ -10698,7 +10675,7 @@
           <a:p>
             <a:fld id="{C55E3DE0-5E9E-8947-9DAA-E91C371FD659}" type="slidenum">
               <a:rPr lang="en-SE" smtClean="0"/>
-              <a:t>38</a:t>
+              <a:t>37</a:t>
             </a:fld>
             <a:endParaRPr lang="en-SE"/>
           </a:p>
@@ -10707,7 +10684,7 @@
     </p:spTree>
     <p:extLst>
       <p:ext uri="{BB962C8B-B14F-4D97-AF65-F5344CB8AC3E}">
-        <p14:creationId xmlns:p14="http://schemas.microsoft.com/office/powerpoint/2010/main" val="831354887"/>
+        <p14:creationId xmlns:p14="http://schemas.microsoft.com/office/powerpoint/2010/main" val="3695974222"/>
       </p:ext>
     </p:extLst>
   </p:cSld>
@@ -10780,27 +10757,10 @@
             </a:pPr>
             <a:r>
               <a:rPr lang="en-US" dirty="0"/>
-              <a:t>Some of these features are handled through namespaces. A namespace is a kernel feature that limits or isolates what a process can see and access. A process belongs to one namespace of each type. New namespaces can be created when a process starts, and a process can also join an existing namespace. Memory, CPU, and I/O controls instead require the kernel to account for resource usage and enforce limits or priorities.</a:t>
-            </a:r>
-          </a:p>
-          <a:p>
-            <a:pPr marL="0" marR="0" lvl="0" indent="0" algn="l" defTabSz="914400" rtl="0" eaLnBrk="1" fontAlgn="auto" latinLnBrk="0" hangingPunct="1">
-              <a:lnSpc>
-                <a:spcPct val="100000"/>
-              </a:lnSpc>
-              <a:spcBef>
-                <a:spcPts val="0"/>
-              </a:spcBef>
-              <a:spcAft>
-                <a:spcPts val="0"/>
-              </a:spcAft>
-              <a:buClrTx/>
-              <a:buSzTx/>
-              <a:buFontTx/>
-              <a:buNone/>
-              <a:tabLst/>
-              <a:defRPr/>
-            </a:pPr>
+              <a:t>To isolate a set of processes, we must isolate resources and system views such as the filesystem, process IDs, user IDs, network interfaces, and IPC endpoints. That, as an example, allows for processes in different containers to have the same process ID. We may also define limits, quotas, or priorities for memory, CPU, and I/O. To do all this, we either use namespaces or cgroups. Namespaces isolate what processes can see, while cgroups control or account for the resources they use.</a:t>
+            </a:r>
+          </a:p>
+          <a:p>
             <a:endParaRPr lang="en-US" dirty="0"/>
           </a:p>
         </p:txBody>
@@ -10822,7 +10782,7 @@
           <a:p>
             <a:fld id="{C55E3DE0-5E9E-8947-9DAA-E91C371FD659}" type="slidenum">
               <a:rPr lang="en-SE" smtClean="0"/>
-              <a:t>39</a:t>
+              <a:t>38</a:t>
             </a:fld>
             <a:endParaRPr lang="en-SE"/>
           </a:p>
@@ -10831,7 +10791,7 @@
     </p:spTree>
     <p:extLst>
       <p:ext uri="{BB962C8B-B14F-4D97-AF65-F5344CB8AC3E}">
-        <p14:creationId xmlns:p14="http://schemas.microsoft.com/office/powerpoint/2010/main" val="615113770"/>
+        <p14:creationId xmlns:p14="http://schemas.microsoft.com/office/powerpoint/2010/main" val="831354887"/>
       </p:ext>
     </p:extLst>
   </p:cSld>
@@ -10885,14 +10845,89 @@
           <a:bodyPr/>
           <a:lstStyle/>
           <a:p>
+            <a:pPr marL="0" marR="0" lvl="0" indent="0" algn="l" defTabSz="914400" rtl="0" eaLnBrk="1" fontAlgn="auto" latinLnBrk="0" hangingPunct="1">
+              <a:lnSpc>
+                <a:spcPct val="100000"/>
+              </a:lnSpc>
+              <a:spcBef>
+                <a:spcPts val="0"/>
+              </a:spcBef>
+              <a:spcAft>
+                <a:spcPts val="0"/>
+              </a:spcAft>
+              <a:buClrTx/>
+              <a:buSzTx/>
+              <a:buFontTx/>
+              <a:buNone/>
+              <a:tabLst/>
+              <a:defRPr/>
+            </a:pPr>
             <a:r>
               <a:rPr lang="en-US" dirty="0"/>
-              <a:t>A mount namespace isolates the set of filesystem mounts visible to a process. Two processes in different mount namespaces may see different filesystems or different directory trees, even though they run on the same host. Container runtimes use mount namespaces together with other filesystem mechanisms to give each container its own root </a:t>
-            </a:r>
-            <a:r>
-              <a:rPr lang="en-US"/>
-              <a:t>filesystem.</a:t>
-            </a:r>
+              <a:t>More concretely, if we focus on namespaces, a namespace is a kernel feature that limits or isolates what a process can see and access. A process belongs to one namespace of each type. New namespaces can be created when a process starts. As an example, I might want to start a process and associate it with a new mount namespace, so that the process gets a restricted view of the filesystem, for example only a specific folder and its subfolders. In that case, I can create a new mount namespace and start the process in that namespace. A process can also join an existing namespace, of course, we do not need to create a new namespace for each new process. </a:t>
+            </a:r>
+          </a:p>
+          <a:p>
+            <a:pPr marL="0" marR="0" lvl="0" indent="0" algn="l" defTabSz="914400" rtl="0" eaLnBrk="1" fontAlgn="auto" latinLnBrk="0" hangingPunct="1">
+              <a:lnSpc>
+                <a:spcPct val="100000"/>
+              </a:lnSpc>
+              <a:spcBef>
+                <a:spcPts val="0"/>
+              </a:spcBef>
+              <a:spcAft>
+                <a:spcPts val="0"/>
+              </a:spcAft>
+              <a:buClrTx/>
+              <a:buSzTx/>
+              <a:buFontTx/>
+              <a:buNone/>
+              <a:tabLst/>
+              <a:defRPr/>
+            </a:pPr>
+            <a:endParaRPr lang="en-US" dirty="0"/>
+          </a:p>
+          <a:p>
+            <a:pPr marL="0" marR="0" lvl="0" indent="0" algn="l" defTabSz="914400" rtl="0" eaLnBrk="1" fontAlgn="auto" latinLnBrk="0" hangingPunct="1">
+              <a:lnSpc>
+                <a:spcPct val="100000"/>
+              </a:lnSpc>
+              <a:spcBef>
+                <a:spcPts val="0"/>
+              </a:spcBef>
+              <a:spcAft>
+                <a:spcPts val="0"/>
+              </a:spcAft>
+              <a:buClrTx/>
+              <a:buSzTx/>
+              <a:buFontTx/>
+              <a:buNone/>
+              <a:tabLst/>
+              <a:defRPr/>
+            </a:pPr>
+            <a:r>
+              <a:rPr lang="en-US" dirty="0"/>
+              <a:t>Nonetheless, as said before, for memory, CPU, and I/O a namespace is not enough because we need a mechanism for the kernel to account for resource usage and enforce limits or priorities.</a:t>
+            </a:r>
+          </a:p>
+          <a:p>
+            <a:pPr marL="0" marR="0" lvl="0" indent="0" algn="l" defTabSz="914400" rtl="0" eaLnBrk="1" fontAlgn="auto" latinLnBrk="0" hangingPunct="1">
+              <a:lnSpc>
+                <a:spcPct val="100000"/>
+              </a:lnSpc>
+              <a:spcBef>
+                <a:spcPts val="0"/>
+              </a:spcBef>
+              <a:spcAft>
+                <a:spcPts val="0"/>
+              </a:spcAft>
+              <a:buClrTx/>
+              <a:buSzTx/>
+              <a:buFontTx/>
+              <a:buNone/>
+              <a:tabLst/>
+              <a:defRPr/>
+            </a:pPr>
             <a:endParaRPr lang="en-US" dirty="0"/>
           </a:p>
         </p:txBody>
@@ -10914,7 +10949,7 @@
           <a:p>
             <a:fld id="{C55E3DE0-5E9E-8947-9DAA-E91C371FD659}" type="slidenum">
               <a:rPr lang="en-SE" smtClean="0"/>
-              <a:t>40</a:t>
+              <a:t>39</a:t>
             </a:fld>
             <a:endParaRPr lang="en-SE"/>
           </a:p>
@@ -10923,7 +10958,7 @@
     </p:spTree>
     <p:extLst>
       <p:ext uri="{BB962C8B-B14F-4D97-AF65-F5344CB8AC3E}">
-        <p14:creationId xmlns:p14="http://schemas.microsoft.com/office/powerpoint/2010/main" val="587956505"/>
+        <p14:creationId xmlns:p14="http://schemas.microsoft.com/office/powerpoint/2010/main" val="615113770"/>
       </p:ext>
     </p:extLst>
   </p:cSld>
@@ -10961,6 +10996,93 @@
           </p:nvPr>
         </p:nvSpPr>
         <p:spPr/>
+      </p:sp>
+      <p:sp>
+        <p:nvSpPr>
+          <p:cNvPr id="3" name="Notes Placeholder 2"/>
+          <p:cNvSpPr>
+            <a:spLocks noGrp="1"/>
+          </p:cNvSpPr>
+          <p:nvPr>
+            <p:ph type="body" idx="1"/>
+          </p:nvPr>
+        </p:nvSpPr>
+        <p:spPr/>
+        <p:txBody>
+          <a:bodyPr/>
+          <a:lstStyle/>
+          <a:p>
+            <a:r>
+              <a:rPr lang="en-US" dirty="0"/>
+              <a:t>Going back to the file system example, a mount namespace isolates the set of filesystem mounts visible to a process. Two processes in different mount namespaces may see different filesystems or different directory trees, even though they run on the same host. Container runtimes use mount namespaces together with other filesystem mechanisms to give each container its own root filesystem.</a:t>
+            </a:r>
+          </a:p>
+        </p:txBody>
+      </p:sp>
+      <p:sp>
+        <p:nvSpPr>
+          <p:cNvPr id="4" name="Slide Number Placeholder 3"/>
+          <p:cNvSpPr>
+            <a:spLocks noGrp="1"/>
+          </p:cNvSpPr>
+          <p:nvPr>
+            <p:ph type="sldNum" sz="quarter" idx="5"/>
+          </p:nvPr>
+        </p:nvSpPr>
+        <p:spPr/>
+        <p:txBody>
+          <a:bodyPr/>
+          <a:lstStyle/>
+          <a:p>
+            <a:fld id="{C55E3DE0-5E9E-8947-9DAA-E91C371FD659}" type="slidenum">
+              <a:rPr lang="en-SE" smtClean="0"/>
+              <a:t>40</a:t>
+            </a:fld>
+            <a:endParaRPr lang="en-SE"/>
+          </a:p>
+        </p:txBody>
+      </p:sp>
+    </p:spTree>
+    <p:extLst>
+      <p:ext uri="{BB962C8B-B14F-4D97-AF65-F5344CB8AC3E}">
+        <p14:creationId xmlns:p14="http://schemas.microsoft.com/office/powerpoint/2010/main" val="587956505"/>
+      </p:ext>
+    </p:extLst>
+  </p:cSld>
+  <p:clrMapOvr>
+    <a:masterClrMapping/>
+  </p:clrMapOvr>
+</p:notes>
+</file>
+
+<file path=ppt/notesSlides/notesSlide17.xml><?xml version="1.0" encoding="utf-8"?>
+<p:notes xmlns:a="http://schemas.openxmlformats.org/drawingml/2006/main" xmlns:r="http://schemas.openxmlformats.org/officeDocument/2006/relationships" xmlns:p="http://schemas.openxmlformats.org/presentationml/2006/main">
+  <p:cSld>
+    <p:spTree>
+      <p:nvGrpSpPr>
+        <p:cNvPr id="1" name=""/>
+        <p:cNvGrpSpPr/>
+        <p:nvPr/>
+      </p:nvGrpSpPr>
+      <p:grpSpPr>
+        <a:xfrm>
+          <a:off x="0" y="0"/>
+          <a:ext cx="0" cy="0"/>
+          <a:chOff x="0" y="0"/>
+          <a:chExt cx="0" cy="0"/>
+        </a:xfrm>
+      </p:grpSpPr>
+      <p:sp>
+        <p:nvSpPr>
+          <p:cNvPr id="2" name="Slide Image Placeholder 1"/>
+          <p:cNvSpPr>
+            <a:spLocks noGrp="1" noRot="1" noChangeAspect="1"/>
+          </p:cNvSpPr>
+          <p:nvPr>
+            <p:ph type="sldImg"/>
+          </p:nvPr>
+        </p:nvSpPr>
+        <p:spPr/>
         <p:txBody>
           <a:bodyPr/>
           <a:lstStyle/>
@@ -10986,7 +11108,7 @@
           <a:p>
             <a:r>
               <a:rPr lang="en-US" dirty="0"/>
-              <a:t>For resources that require monitoring, the kernel provides controllers for resource types such as CPU, memory, and I/O. For each resource, cgroups are organized in a tree and specify restrictions. A process can belong to one cgroup for each resource.</a:t>
+              <a:t>If we focus now on resources that require monitoring, what we have is that the kernel provides controllers for resource types such as CPU, memory, and I/O. For each resource, cgroups are organized in a tree and specify restrictions. A process can belong to one cgroup for each resource.</a:t>
             </a:r>
           </a:p>
           <a:p>
@@ -10995,7 +11117,7 @@
           <a:p>
             <a:r>
               <a:rPr lang="en-US" dirty="0"/>
-              <a:t>For example, we could have a CPU controller with a cgroup representing a 50% CPU limit—using percentages only as a simplification—and a memory controller with a cgroup limiting usage to 2 GB. To limit processes A and B together to 50% of the CPU, we place both in cgroup c1. To also limit B to 2 GB of memory, we place B in memory cgroup m1.</a:t>
+              <a:t>For example, we could have a CPU controller with a cgroup called c1 representing a 50% CPU limit—I am using percentages here only as a simplification—and a memory controller with a cgroup called m1 limiting usage to 2 GB. To limit processes A and B together to 50% of the CPU, we place both A and B in cgroup c1. To also limit process B to 2 GB of memory, we place B in memory cgroup m1.</a:t>
             </a:r>
           </a:p>
           <a:p>
@@ -11039,7 +11161,7 @@
 </p:notes>
 </file>
 
-<file path=ppt/notesSlides/notesSlide17.xml><?xml version="1.0" encoding="utf-8"?>
+<file path=ppt/notesSlides/notesSlide18.xml><?xml version="1.0" encoding="utf-8"?>
 <p:notes xmlns:a="http://schemas.openxmlformats.org/drawingml/2006/main" xmlns:r="http://schemas.openxmlformats.org/officeDocument/2006/relationships" xmlns:p="http://schemas.openxmlformats.org/presentationml/2006/main">
   <p:cSld>
     <p:spTree>
@@ -11137,7 +11259,7 @@
           <a:p>
             <a:r>
               <a:rPr lang="en-US" dirty="0"/>
-              <a:t>Some controllers affect related aspects of execution. The CPU controller manages CPU time, while the </a:t>
+              <a:t>Note that some controllers affect aspects of execution that are related. For instance, the CPU controller manages CPU time, while the </a:t>
             </a:r>
             <a:r>
               <a:rPr lang="en-US" dirty="0" err="1"/>
@@ -11145,7 +11267,7 @@
             </a:r>
             <a:r>
               <a:rPr lang="en-US" dirty="0"/>
-              <a:t> controller determines which CPUs a process may use. On a four-core system, restricting A and B to two cores prevents them from using more than two cores simultaneously.</a:t>
+              <a:t> controller determines which CPUs a process may use. On a four-core system, restricting A and B to two cores prevents them from using more than two cores simultaneously, so in a sense, that also limits A and B to maximum 50% of the CPU.</a:t>
             </a:r>
           </a:p>
           <a:p>
@@ -11255,7 +11377,7 @@
 </p:notes>
 </file>
 
-<file path=ppt/notesSlides/notesSlide18.xml><?xml version="1.0" encoding="utf-8"?>
+<file path=ppt/notesSlides/notesSlide19.xml><?xml version="1.0" encoding="utf-8"?>
 <p:notes xmlns:a="http://schemas.openxmlformats.org/drawingml/2006/main" xmlns:r="http://schemas.openxmlformats.org/officeDocument/2006/relationships" xmlns:p="http://schemas.openxmlformats.org/presentationml/2006/main">
   <p:cSld>
     <p:spTree>
@@ -11326,7 +11448,7 @@
           <a:p>
             <a:r>
               <a:rPr lang="en-US" dirty="0"/>
-              <a:t>Different restrictions may conflict. For example, a process may belong to a </a:t>
+              <a:t>Note also that different restrictions may conflict. For example, a process may belong to a </a:t>
             </a:r>
             <a:r>
               <a:rPr lang="en-US" dirty="0" err="1"/>
@@ -11334,7 +11456,7 @@
             </a:r>
             <a:r>
               <a:rPr lang="en-US" dirty="0"/>
-              <a:t> cgroup that permits only core 1, while one of its threads is pinned to core 2. The OS enforces the intersection of these restrictions. Since the thread has no eligible CPU, it cannot be scheduled until one restriction changes.</a:t>
+              <a:t> cgroup that permits only core 1, while one of its threads is pinned to core 2. The OS enforces the intersection of these restrictions. Since the thread has no eligible CPU, it cannot be scheduled until one of the restrictions changes.</a:t>
             </a:r>
           </a:p>
         </p:txBody>
@@ -11441,7 +11563,99 @@
 </p:notes>
 </file>
 
-<file path=ppt/notesSlides/notesSlide19.xml><?xml version="1.0" encoding="utf-8"?>
+<file path=ppt/notesSlides/notesSlide2.xml><?xml version="1.0" encoding="utf-8"?>
+<p:notes xmlns:a="http://schemas.openxmlformats.org/drawingml/2006/main" xmlns:r="http://schemas.openxmlformats.org/officeDocument/2006/relationships" xmlns:p="http://schemas.openxmlformats.org/presentationml/2006/main">
+  <p:cSld>
+    <p:spTree>
+      <p:nvGrpSpPr>
+        <p:cNvPr id="1" name=""/>
+        <p:cNvGrpSpPr/>
+        <p:nvPr/>
+      </p:nvGrpSpPr>
+      <p:grpSpPr>
+        <a:xfrm>
+          <a:off x="0" y="0"/>
+          <a:ext cx="0" cy="0"/>
+          <a:chOff x="0" y="0"/>
+          <a:chExt cx="0" cy="0"/>
+        </a:xfrm>
+      </p:grpSpPr>
+      <p:sp>
+        <p:nvSpPr>
+          <p:cNvPr id="2" name="Slide Image Placeholder 1"/>
+          <p:cNvSpPr>
+            <a:spLocks noGrp="1" noRot="1" noChangeAspect="1"/>
+          </p:cNvSpPr>
+          <p:nvPr>
+            <p:ph type="sldImg"/>
+          </p:nvPr>
+        </p:nvSpPr>
+        <p:spPr/>
+        <p:txBody>
+          <a:bodyPr/>
+          <a:lstStyle/>
+          <a:p>
+            <a:endParaRPr lang="en-US"/>
+          </a:p>
+        </p:txBody>
+      </p:sp>
+      <p:sp>
+        <p:nvSpPr>
+          <p:cNvPr id="3" name="Notes Placeholder 2"/>
+          <p:cNvSpPr>
+            <a:spLocks noGrp="1"/>
+          </p:cNvSpPr>
+          <p:nvPr>
+            <p:ph type="body" idx="1"/>
+          </p:nvPr>
+        </p:nvSpPr>
+        <p:spPr/>
+        <p:txBody>
+          <a:bodyPr/>
+          <a:lstStyle/>
+          <a:p>
+            <a:endParaRPr lang="en-US"/>
+          </a:p>
+        </p:txBody>
+      </p:sp>
+      <p:sp>
+        <p:nvSpPr>
+          <p:cNvPr id="4" name="Slide Number Placeholder 3"/>
+          <p:cNvSpPr>
+            <a:spLocks noGrp="1"/>
+          </p:cNvSpPr>
+          <p:nvPr>
+            <p:ph type="sldNum" sz="quarter" idx="10"/>
+          </p:nvPr>
+        </p:nvSpPr>
+        <p:spPr/>
+        <p:txBody>
+          <a:bodyPr/>
+          <a:lstStyle/>
+          <a:p>
+            <a:fld id="{CAE0ABF5-7690-4623-B971-046A51D617CD}" type="slidenum">
+              <a:rPr lang="en-US" altLang="en-US" smtClean="0"/>
+              <a:pPr/>
+              <a:t>2</a:t>
+            </a:fld>
+            <a:endParaRPr lang="en-US" altLang="en-US"/>
+          </a:p>
+        </p:txBody>
+      </p:sp>
+    </p:spTree>
+    <p:extLst>
+      <p:ext uri="{BB962C8B-B14F-4D97-AF65-F5344CB8AC3E}">
+        <p14:creationId xmlns:p14="http://schemas.microsoft.com/office/powerpoint/2010/main" val="704346850"/>
+      </p:ext>
+    </p:extLst>
+  </p:cSld>
+  <p:clrMapOvr>
+    <a:masterClrMapping/>
+  </p:clrMapOvr>
+</p:notes>
+</file>
+
+<file path=ppt/notesSlides/notesSlide20.xml><?xml version="1.0" encoding="utf-8"?>
 <p:notes xmlns:a="http://schemas.openxmlformats.org/drawingml/2006/main" xmlns:r="http://schemas.openxmlformats.org/officeDocument/2006/relationships" xmlns:p="http://schemas.openxmlformats.org/presentationml/2006/main">
   <p:cSld>
     <p:spTree>
@@ -11512,7 +11726,7 @@
           <a:p>
             <a:r>
               <a:rPr lang="en-US" dirty="0"/>
-              <a:t>Different controllers manage different resources. For example, the CPU controller manages CPU bandwidth or relative weight, </a:t>
+              <a:t>As we said, different controllers manage different resources. For example, the CPU controller manages CPU bandwidth or relative weight, </a:t>
             </a:r>
             <a:r>
               <a:rPr lang="en-US" dirty="0" err="1"/>
@@ -11528,37 +11742,7 @@
             </a:r>
             <a:r>
               <a:rPr lang="en-US" dirty="0"/>
-              <a:t> limits the number of processes or tasks. The devices controller manages device access. For disk I/O, </a:t>
-            </a:r>
-            <a:r>
-              <a:rPr lang="en-US" sz="1200" kern="1200" dirty="0" err="1">
-                <a:solidFill>
-                  <a:schemeClr val="tx1"/>
-                </a:solidFill>
-                <a:latin typeface="+mn-lt"/>
-                <a:ea typeface="+mn-ea"/>
-                <a:cs typeface="+mn-cs"/>
-              </a:rPr>
-              <a:t>blkio</a:t>
-            </a:r>
-            <a:r>
-              <a:rPr lang="en-US" dirty="0"/>
-              <a:t> is the cgroup v1 controller, while </a:t>
-            </a:r>
-            <a:r>
-              <a:rPr lang="en-US" sz="1200" kern="1200" dirty="0">
-                <a:solidFill>
-                  <a:schemeClr val="tx1"/>
-                </a:solidFill>
-                <a:latin typeface="+mn-lt"/>
-                <a:ea typeface="+mn-ea"/>
-                <a:cs typeface="+mn-cs"/>
-              </a:rPr>
-              <a:t>io</a:t>
-            </a:r>
-            <a:r>
-              <a:rPr lang="en-US" dirty="0"/>
-              <a:t> is the corresponding cgroup v2 controller.</a:t>
+              <a:t> limits the number of processes or tasks. The devices controller manages device access.</a:t>
             </a:r>
           </a:p>
         </p:txBody>
@@ -11665,99 +11849,7 @@
 </p:notes>
 </file>
 
-<file path=ppt/notesSlides/notesSlide2.xml><?xml version="1.0" encoding="utf-8"?>
-<p:notes xmlns:a="http://schemas.openxmlformats.org/drawingml/2006/main" xmlns:r="http://schemas.openxmlformats.org/officeDocument/2006/relationships" xmlns:p="http://schemas.openxmlformats.org/presentationml/2006/main">
-  <p:cSld>
-    <p:spTree>
-      <p:nvGrpSpPr>
-        <p:cNvPr id="1" name=""/>
-        <p:cNvGrpSpPr/>
-        <p:nvPr/>
-      </p:nvGrpSpPr>
-      <p:grpSpPr>
-        <a:xfrm>
-          <a:off x="0" y="0"/>
-          <a:ext cx="0" cy="0"/>
-          <a:chOff x="0" y="0"/>
-          <a:chExt cx="0" cy="0"/>
-        </a:xfrm>
-      </p:grpSpPr>
-      <p:sp>
-        <p:nvSpPr>
-          <p:cNvPr id="2" name="Slide Image Placeholder 1"/>
-          <p:cNvSpPr>
-            <a:spLocks noGrp="1" noRot="1" noChangeAspect="1"/>
-          </p:cNvSpPr>
-          <p:nvPr>
-            <p:ph type="sldImg"/>
-          </p:nvPr>
-        </p:nvSpPr>
-        <p:spPr/>
-        <p:txBody>
-          <a:bodyPr/>
-          <a:lstStyle/>
-          <a:p>
-            <a:endParaRPr lang="en-US"/>
-          </a:p>
-        </p:txBody>
-      </p:sp>
-      <p:sp>
-        <p:nvSpPr>
-          <p:cNvPr id="3" name="Notes Placeholder 2"/>
-          <p:cNvSpPr>
-            <a:spLocks noGrp="1"/>
-          </p:cNvSpPr>
-          <p:nvPr>
-            <p:ph type="body" idx="1"/>
-          </p:nvPr>
-        </p:nvSpPr>
-        <p:spPr/>
-        <p:txBody>
-          <a:bodyPr/>
-          <a:lstStyle/>
-          <a:p>
-            <a:endParaRPr lang="en-US"/>
-          </a:p>
-        </p:txBody>
-      </p:sp>
-      <p:sp>
-        <p:nvSpPr>
-          <p:cNvPr id="4" name="Slide Number Placeholder 3"/>
-          <p:cNvSpPr>
-            <a:spLocks noGrp="1"/>
-          </p:cNvSpPr>
-          <p:nvPr>
-            <p:ph type="sldNum" sz="quarter" idx="10"/>
-          </p:nvPr>
-        </p:nvSpPr>
-        <p:spPr/>
-        <p:txBody>
-          <a:bodyPr/>
-          <a:lstStyle/>
-          <a:p>
-            <a:fld id="{CAE0ABF5-7690-4623-B971-046A51D617CD}" type="slidenum">
-              <a:rPr lang="en-US" altLang="en-US" smtClean="0"/>
-              <a:pPr/>
-              <a:t>2</a:t>
-            </a:fld>
-            <a:endParaRPr lang="en-US" altLang="en-US"/>
-          </a:p>
-        </p:txBody>
-      </p:sp>
-    </p:spTree>
-    <p:extLst>
-      <p:ext uri="{BB962C8B-B14F-4D97-AF65-F5344CB8AC3E}">
-        <p14:creationId xmlns:p14="http://schemas.microsoft.com/office/powerpoint/2010/main" val="704346850"/>
-      </p:ext>
-    </p:extLst>
-  </p:cSld>
-  <p:clrMapOvr>
-    <a:masterClrMapping/>
-  </p:clrMapOvr>
-</p:notes>
-</file>
-
-<file path=ppt/notesSlides/notesSlide20.xml><?xml version="1.0" encoding="utf-8"?>
+<file path=ppt/notesSlides/notesSlide21.xml><?xml version="1.0" encoding="utf-8"?>
 <p:notes xmlns:a="http://schemas.openxmlformats.org/drawingml/2006/main" xmlns:r="http://schemas.openxmlformats.org/officeDocument/2006/relationships" xmlns:p="http://schemas.openxmlformats.org/presentationml/2006/main">
   <p:cSld>
     <p:spTree>
@@ -11812,7 +11904,7 @@
           <a:p>
             <a:r>
               <a:rPr lang="en-US" dirty="0"/>
-              <a:t>In cgroup v1, controllers can use separate hierarchies, so a process may belong to one cgroup for CPU control and another for memory control. This is flexible but can be difficult to manage.</a:t>
+              <a:t>In cgroup v1, controllers can use separate hierarchies, so a process may belong to one cgroup for CPU control and another for memory control.</a:t>
             </a:r>
           </a:p>
           <a:p>
@@ -11871,7 +11963,7 @@
 </p:notes>
 </file>
 
-<file path=ppt/notesSlides/notesSlide21.xml><?xml version="1.0" encoding="utf-8"?>
+<file path=ppt/notesSlides/notesSlide22.xml><?xml version="1.0" encoding="utf-8"?>
 <p:notes xmlns:a="http://schemas.openxmlformats.org/drawingml/2006/main" xmlns:r="http://schemas.openxmlformats.org/officeDocument/2006/relationships" xmlns:p="http://schemas.openxmlformats.org/presentationml/2006/main">
   <p:cSld>
     <p:spTree>
@@ -11996,7 +12088,7 @@
           <a:p>
             <a:r>
               <a:rPr lang="en-US" dirty="0"/>
-              <a:t>In this example, these three groups and G1 have equal shares. Under contention, G1 therefore receives approximately one quarter of the available CPU time. Shares matter only during contention: they define relative fairness, not fixed limits.</a:t>
+              <a:t>In this example, these three groups and G1 have equal shares. Note that shares matter only during contention, because they define relative fairness, not fixed limits. Under contention, G1 therefore receives approximately one quarter of the available CPU time.</a:t>
             </a:r>
           </a:p>
           <a:p>
@@ -12014,7 +12106,7 @@
           <a:p>
             <a:r>
               <a:rPr lang="en-US" dirty="0"/>
-              <a:t>A strict maximum instead can be for instance enforced with </a:t>
+              <a:t>If you want to enforce a strict max, you can do that instead with </a:t>
             </a:r>
             <a:r>
               <a:rPr lang="en-US" sz="1200" kern="1200" dirty="0" err="1">
@@ -12029,13 +12121,8 @@
             </a:r>
             <a:r>
               <a:rPr lang="en-US" dirty="0"/>
-              <a:t> in </a:t>
-            </a:r>
-            <a:r>
-              <a:rPr lang="en-US"/>
-              <a:t>cgroup v2.</a:t>
-            </a:r>
-            <a:endParaRPr lang="en-US" dirty="0"/>
+              <a:t> in cgroup v2.</a:t>
+            </a:r>
           </a:p>
           <a:p>
             <a:endParaRPr lang="en-US" dirty="0"/>
@@ -12144,7 +12231,7 @@
 </p:notes>
 </file>
 
-<file path=ppt/notesSlides/notesSlide22.xml><?xml version="1.0" encoding="utf-8"?>
+<file path=ppt/notesSlides/notesSlide23.xml><?xml version="1.0" encoding="utf-8"?>
 <p:notes xmlns:a="http://schemas.openxmlformats.org/drawingml/2006/main" xmlns:r="http://schemas.openxmlformats.org/officeDocument/2006/relationships" xmlns:p="http://schemas.openxmlformats.org/presentationml/2006/main">
   <p:cSld>
     <p:spTree>
@@ -12221,7 +12308,16 @@
           <a:p>
             <a:r>
               <a:rPr lang="en-US" dirty="0"/>
-              <a:t>Here, G2.1 is limited to 1 GB and G2.2 to 1.5 GB. Together, however, they cannot use more than the 2 GB limit of their parent, G2. A child cgroup is constrained by both its own limit and its ancestors’ limits.</a:t>
+              <a:t>Here, G2.1 is limited to 1 GB and G2.2 to 1.5 GB. Together, however, they cannot use more than the 2 GB limit of their parent, G2. </a:t>
+            </a:r>
+          </a:p>
+          <a:p>
+            <a:endParaRPr lang="en-US" dirty="0"/>
+          </a:p>
+          <a:p>
+            <a:r>
+              <a:rPr lang="en-US" dirty="0"/>
+              <a:t>A child cgroup is constrained by both its own limit and its ancestors’ limits.</a:t>
             </a:r>
           </a:p>
           <a:p>
@@ -12348,7 +12444,7 @@
 </p:notes>
 </file>
 
-<file path=ppt/notesSlides/notesSlide23.xml><?xml version="1.0" encoding="utf-8"?>
+<file path=ppt/notesSlides/notesSlide24.xml><?xml version="1.0" encoding="utf-8"?>
 <p:notes xmlns:a="http://schemas.openxmlformats.org/drawingml/2006/main" xmlns:r="http://schemas.openxmlformats.org/officeDocument/2006/relationships" xmlns:p="http://schemas.openxmlformats.org/presentationml/2006/main">
   <p:cSld>
     <p:spTree>
@@ -12416,6 +12512,15 @@
         <p:txBody>
           <a:bodyPr/>
           <a:lstStyle/>
+          <a:p>
+            <a:r>
+              <a:rPr lang="en-US" dirty="0"/>
+              <a:t>If you want, you can check the membership of each process.</a:t>
+            </a:r>
+          </a:p>
+          <a:p>
+            <a:endParaRPr lang="en-US" dirty="0"/>
+          </a:p>
           <a:p>
             <a:r>
               <a:rPr lang="en-US" dirty="0"/>
@@ -12526,7 +12631,7 @@
 </p:notes>
 </file>
 
-<file path=ppt/notesSlides/notesSlide24.xml><?xml version="1.0" encoding="utf-8"?>
+<file path=ppt/notesSlides/notesSlide25.xml><?xml version="1.0" encoding="utf-8"?>
 <p:notes xmlns:a="http://schemas.openxmlformats.org/drawingml/2006/main" xmlns:r="http://schemas.openxmlformats.org/officeDocument/2006/relationships" xmlns:p="http://schemas.openxmlformats.org/presentationml/2006/main">
   <p:cSld>
     <p:spTree>
@@ -12597,7 +12702,15 @@
           <a:p>
             <a:r>
               <a:rPr lang="en-US" dirty="0"/>
-              <a:t>This directory contains the cgroup v1 </a:t>
+              <a:t>If you want to check the cgroup user-slice for </a:t>
+            </a:r>
+            <a:r>
+              <a:rPr lang="en-US" dirty="0" err="1"/>
+              <a:t>blkio</a:t>
+            </a:r>
+            <a:r>
+              <a:rPr lang="en-US" dirty="0"/>
+              <a:t>, then this directory contains the cgroup v1 </a:t>
             </a:r>
             <a:r>
               <a:rPr lang="en-US" sz="1200" kern="1200" dirty="0" err="1">
@@ -12630,7 +12743,7 @@
               <a:t>. For example, reading </a:t>
             </a:r>
             <a:r>
-              <a:rPr lang="en-US" sz="1200" kern="1200" dirty="0" err="1">
+              <a:rPr lang="en-US" sz="1200" kern="1200" dirty="0">
                 <a:solidFill>
                   <a:schemeClr val="tx1"/>
                 </a:solidFill>
@@ -12638,11 +12751,11 @@
                 <a:ea typeface="+mn-ea"/>
                 <a:cs typeface="+mn-cs"/>
               </a:rPr>
-              <a:t>blkio.throttle.io_service_bytes</a:t>
+              <a:t>the highlighted file </a:t>
             </a:r>
             <a:r>
               <a:rPr lang="en-US" dirty="0"/>
-              <a:t> shows the accumulated bytes transferred by devices for this cgroup.</a:t>
+              <a:t>shows the accumulated bytes transferred by devices for this cgroup.</a:t>
             </a:r>
           </a:p>
         </p:txBody>

--- a/slides/virtualization.pptx
+++ b/slides/virtualization.pptx
@@ -3,60 +3,67 @@
 <p:presentation xmlns:a="http://schemas.openxmlformats.org/drawingml/2006/main" xmlns:r="http://schemas.openxmlformats.org/officeDocument/2006/relationships" xmlns:p="http://schemas.openxmlformats.org/presentationml/2006/main" saveSubsetFonts="1" autoCompressPictures="0">
   <p:sldMasterIdLst>
     <p:sldMasterId id="2147483648" r:id="rId1"/>
+    <p:sldMasterId id="2147483661" r:id="rId2"/>
   </p:sldMasterIdLst>
   <p:notesMasterIdLst>
-    <p:notesMasterId r:id="rId51"/>
+    <p:notesMasterId r:id="rId58"/>
   </p:notesMasterIdLst>
   <p:sldIdLst>
-    <p:sldId id="302" r:id="rId2"/>
-    <p:sldId id="323" r:id="rId3"/>
-    <p:sldId id="259" r:id="rId4"/>
-    <p:sldId id="496" r:id="rId5"/>
-    <p:sldId id="257" r:id="rId6"/>
-    <p:sldId id="258" r:id="rId7"/>
-    <p:sldId id="497" r:id="rId8"/>
-    <p:sldId id="325" r:id="rId9"/>
-    <p:sldId id="326" r:id="rId10"/>
-    <p:sldId id="327" r:id="rId11"/>
-    <p:sldId id="328" r:id="rId12"/>
-    <p:sldId id="498" r:id="rId13"/>
-    <p:sldId id="330" r:id="rId14"/>
-    <p:sldId id="499" r:id="rId15"/>
-    <p:sldId id="332" r:id="rId16"/>
-    <p:sldId id="333" r:id="rId17"/>
-    <p:sldId id="334" r:id="rId18"/>
-    <p:sldId id="335" r:id="rId19"/>
-    <p:sldId id="500" r:id="rId20"/>
-    <p:sldId id="337" r:id="rId21"/>
-    <p:sldId id="338" r:id="rId22"/>
-    <p:sldId id="339" r:id="rId23"/>
-    <p:sldId id="340" r:id="rId24"/>
-    <p:sldId id="341" r:id="rId25"/>
-    <p:sldId id="501" r:id="rId26"/>
-    <p:sldId id="490" r:id="rId27"/>
-    <p:sldId id="492" r:id="rId28"/>
-    <p:sldId id="502" r:id="rId29"/>
-    <p:sldId id="494" r:id="rId30"/>
-    <p:sldId id="495" r:id="rId31"/>
-    <p:sldId id="503" r:id="rId32"/>
-    <p:sldId id="343" r:id="rId33"/>
-    <p:sldId id="344" r:id="rId34"/>
-    <p:sldId id="345" r:id="rId35"/>
-    <p:sldId id="346" r:id="rId36"/>
-    <p:sldId id="516" r:id="rId37"/>
-    <p:sldId id="504" r:id="rId38"/>
-    <p:sldId id="506" r:id="rId39"/>
-    <p:sldId id="507" r:id="rId40"/>
-    <p:sldId id="508" r:id="rId41"/>
-    <p:sldId id="509" r:id="rId42"/>
-    <p:sldId id="511" r:id="rId43"/>
-    <p:sldId id="518" r:id="rId44"/>
-    <p:sldId id="512" r:id="rId45"/>
-    <p:sldId id="520" r:id="rId46"/>
-    <p:sldId id="514" r:id="rId47"/>
-    <p:sldId id="513" r:id="rId48"/>
-    <p:sldId id="515" r:id="rId49"/>
-    <p:sldId id="519" r:id="rId50"/>
+    <p:sldId id="302" r:id="rId3"/>
+    <p:sldId id="323" r:id="rId4"/>
+    <p:sldId id="259" r:id="rId5"/>
+    <p:sldId id="496" r:id="rId6"/>
+    <p:sldId id="257" r:id="rId7"/>
+    <p:sldId id="258" r:id="rId8"/>
+    <p:sldId id="497" r:id="rId9"/>
+    <p:sldId id="325" r:id="rId10"/>
+    <p:sldId id="326" r:id="rId11"/>
+    <p:sldId id="327" r:id="rId12"/>
+    <p:sldId id="328" r:id="rId13"/>
+    <p:sldId id="498" r:id="rId14"/>
+    <p:sldId id="330" r:id="rId15"/>
+    <p:sldId id="499" r:id="rId16"/>
+    <p:sldId id="332" r:id="rId17"/>
+    <p:sldId id="333" r:id="rId18"/>
+    <p:sldId id="334" r:id="rId19"/>
+    <p:sldId id="335" r:id="rId20"/>
+    <p:sldId id="500" r:id="rId21"/>
+    <p:sldId id="337" r:id="rId22"/>
+    <p:sldId id="338" r:id="rId23"/>
+    <p:sldId id="339" r:id="rId24"/>
+    <p:sldId id="340" r:id="rId25"/>
+    <p:sldId id="341" r:id="rId26"/>
+    <p:sldId id="501" r:id="rId27"/>
+    <p:sldId id="490" r:id="rId28"/>
+    <p:sldId id="492" r:id="rId29"/>
+    <p:sldId id="502" r:id="rId30"/>
+    <p:sldId id="494" r:id="rId31"/>
+    <p:sldId id="495" r:id="rId32"/>
+    <p:sldId id="503" r:id="rId33"/>
+    <p:sldId id="343" r:id="rId34"/>
+    <p:sldId id="344" r:id="rId35"/>
+    <p:sldId id="345" r:id="rId36"/>
+    <p:sldId id="346" r:id="rId37"/>
+    <p:sldId id="516" r:id="rId38"/>
+    <p:sldId id="504" r:id="rId39"/>
+    <p:sldId id="506" r:id="rId40"/>
+    <p:sldId id="507" r:id="rId41"/>
+    <p:sldId id="508" r:id="rId42"/>
+    <p:sldId id="509" r:id="rId43"/>
+    <p:sldId id="511" r:id="rId44"/>
+    <p:sldId id="518" r:id="rId45"/>
+    <p:sldId id="512" r:id="rId46"/>
+    <p:sldId id="520" r:id="rId47"/>
+    <p:sldId id="514" r:id="rId48"/>
+    <p:sldId id="513" r:id="rId49"/>
+    <p:sldId id="515" r:id="rId50"/>
+    <p:sldId id="519" r:id="rId51"/>
+    <p:sldId id="261" r:id="rId52"/>
+    <p:sldId id="521" r:id="rId53"/>
+    <p:sldId id="522" r:id="rId54"/>
+    <p:sldId id="523" r:id="rId55"/>
+    <p:sldId id="524" r:id="rId56"/>
+    <p:sldId id="525" r:id="rId57"/>
   </p:sldIdLst>
   <p:sldSz cx="12192000" cy="6858000"/>
   <p:notesSz cx="6858000" cy="9144000"/>
@@ -9762,7 +9769,7 @@
           <a:p>
             <a:fld id="{F5CA1724-FE87-D744-AEFA-DF7E2B83349C}" type="datetimeFigureOut">
               <a:rPr lang="en-SE" smtClean="0"/>
-              <a:t>8/18/26</a:t>
+              <a:t>8/23/26</a:t>
             </a:fld>
             <a:endParaRPr lang="en-SE"/>
           </a:p>
@@ -10399,22 +10406,76 @@
           </p:nvPr>
         </p:nvSpPr>
         <p:spPr/>
+      </p:sp>
+      <p:sp>
+        <p:nvSpPr>
+          <p:cNvPr id="3" name="Notes Placeholder 2"/>
+          <p:cNvSpPr>
+            <a:spLocks noGrp="1"/>
+          </p:cNvSpPr>
+          <p:nvPr>
+            <p:ph type="body" idx="1"/>
+          </p:nvPr>
+        </p:nvSpPr>
+        <p:spPr/>
         <p:txBody>
           <a:bodyPr/>
           <a:lstStyle/>
           <a:p>
-            <a:endParaRPr lang="en-US"/>
-          </a:p>
-        </p:txBody>
-      </p:sp>
-      <p:sp>
-        <p:nvSpPr>
-          <p:cNvPr id="3" name="Notes Placeholder 2"/>
+            <a:r>
+              <a:rPr lang="en-US" dirty="0"/>
+              <a:t>The hypervisor is keeping it's own page tables, and those are not the shadow page table, the shadow page table is what it maintains for the guests to be able to translate correctly.</a:t>
+            </a:r>
+          </a:p>
+          <a:p>
+            <a:endParaRPr lang="en-US" dirty="0"/>
+          </a:p>
+          <a:p>
+            <a:r>
+              <a:rPr lang="en-US" dirty="0"/>
+              <a:t>The guest OS page table maps guest virtual addresses → guest physical frames. These frames are virtualized, not necessarily actual RAM frames.</a:t>
+            </a:r>
+          </a:p>
+          <a:p>
+            <a:r>
+              <a:rPr lang="en-US" dirty="0"/>
+              <a:t>The hypervisor maps guest physical frames → machine physical frames.</a:t>
+            </a:r>
+          </a:p>
+          <a:p>
+            <a:r>
+              <a:rPr lang="en-US" dirty="0"/>
+              <a:t>With shadow paging, the hypervisor maintains a shadow page table mapping guest virtual addresses → machine physical frames directly.</a:t>
+            </a:r>
+          </a:p>
+          <a:p>
+            <a:r>
+              <a:rPr lang="en-US" dirty="0"/>
+              <a:t>The CPU uses the shadow page table while running the guest; the guest does not know it exists.</a:t>
+            </a:r>
+          </a:p>
+          <a:p>
+            <a:r>
+              <a:rPr lang="en-US" dirty="0"/>
+              <a:t>The hypervisor also has its own page tables for mapping its own virtual addresses to machine memory. These are separate from the shadow page tables.</a:t>
+            </a:r>
+          </a:p>
+          <a:p>
+            <a:r>
+              <a:rPr lang="en-US" dirty="0"/>
+              <a:t>When the guest changes its page tables, the hypervisor detects the change and updates the shadow tables accordingly.</a:t>
+            </a:r>
+          </a:p>
+        </p:txBody>
+      </p:sp>
+      <p:sp>
+        <p:nvSpPr>
+          <p:cNvPr id="4" name="Slide Number Placeholder 3"/>
           <p:cNvSpPr>
             <a:spLocks noGrp="1"/>
           </p:cNvSpPr>
           <p:nvPr>
-            <p:ph type="body" idx="1"/>
+            <p:ph type="sldNum" sz="quarter" idx="5"/>
           </p:nvPr>
         </p:nvSpPr>
         <p:spPr/>
@@ -10422,69 +10483,9 @@
           <a:bodyPr/>
           <a:lstStyle/>
           <a:p>
-            <a:r>
-              <a:rPr lang="en-US" dirty="0"/>
-              <a:t>Yet another example of cooperation between OS and hardware…</a:t>
-            </a:r>
-          </a:p>
-          <a:p>
-            <a:r>
-              <a:rPr lang="en-US" dirty="0"/>
-              <a:t>Example: NIC Network Interface Card</a:t>
-            </a:r>
-          </a:p>
-          <a:p>
-            <a:endParaRPr lang="en-US" dirty="0"/>
-          </a:p>
-          <a:p>
-            <a:r>
-              <a:rPr lang="en-US" dirty="0"/>
-              <a:t>The NIC exposes:</a:t>
-            </a:r>
-          </a:p>
-          <a:p>
-            <a:r>
-              <a:rPr lang="en-US" b="1" dirty="0"/>
-              <a:t>One Physical Function (PF):</a:t>
-            </a:r>
-            <a:r>
-              <a:rPr lang="en-US" dirty="0"/>
-              <a:t> the full-featured PCIe function managed by the hypervisor or host OS.</a:t>
-            </a:r>
-          </a:p>
-          <a:p>
-            <a:r>
-              <a:rPr lang="en-US" b="1" dirty="0"/>
-              <a:t>Multiple Virtual Functions (VFs):</a:t>
-            </a:r>
-            <a:r>
-              <a:rPr lang="en-US" dirty="0"/>
-              <a:t> lightweight “virtual” PCIe devices that share the same physical hardware but appear as independent NICs to the VMs.</a:t>
-            </a:r>
-          </a:p>
-          <a:p>
-            <a:endParaRPr lang="en-US" dirty="0"/>
-          </a:p>
-        </p:txBody>
-      </p:sp>
-      <p:sp>
-        <p:nvSpPr>
-          <p:cNvPr id="4" name="Slide Number Placeholder 3"/>
-          <p:cNvSpPr>
-            <a:spLocks noGrp="1"/>
-          </p:cNvSpPr>
-          <p:nvPr>
-            <p:ph type="sldNum" sz="quarter" idx="5"/>
-          </p:nvPr>
-        </p:nvSpPr>
-        <p:spPr/>
-        <p:txBody>
-          <a:bodyPr/>
-          <a:lstStyle/>
-          <a:p>
             <a:fld id="{C55E3DE0-5E9E-8947-9DAA-E91C371FD659}" type="slidenum">
               <a:rPr lang="en-SE" smtClean="0"/>
-              <a:t>27</a:t>
+              <a:t>21</a:t>
             </a:fld>
             <a:endParaRPr lang="en-SE"/>
           </a:p>
@@ -10493,7 +10494,7 @@
     </p:spTree>
     <p:extLst>
       <p:ext uri="{BB962C8B-B14F-4D97-AF65-F5344CB8AC3E}">
-        <p14:creationId xmlns:p14="http://schemas.microsoft.com/office/powerpoint/2010/main" val="802518484"/>
+        <p14:creationId xmlns:p14="http://schemas.microsoft.com/office/powerpoint/2010/main" val="1206913823"/>
       </p:ext>
     </p:extLst>
   </p:cSld>
@@ -10531,34 +10532,22 @@
           </p:nvPr>
         </p:nvSpPr>
         <p:spPr/>
-      </p:sp>
-      <p:sp>
-        <p:nvSpPr>
-          <p:cNvPr id="3" name="Notes Placeholder 2"/>
-          <p:cNvSpPr>
-            <a:spLocks noGrp="1"/>
-          </p:cNvSpPr>
-          <p:nvPr>
-            <p:ph type="body" idx="1"/>
-          </p:nvPr>
-        </p:nvSpPr>
-        <p:spPr/>
         <p:txBody>
           <a:bodyPr/>
           <a:lstStyle/>
           <a:p>
-            <a:endParaRPr lang="en-US" dirty="0"/>
-          </a:p>
-        </p:txBody>
-      </p:sp>
-      <p:sp>
-        <p:nvSpPr>
-          <p:cNvPr id="4" name="Slide Number Placeholder 3"/>
+            <a:endParaRPr lang="en-US"/>
+          </a:p>
+        </p:txBody>
+      </p:sp>
+      <p:sp>
+        <p:nvSpPr>
+          <p:cNvPr id="3" name="Notes Placeholder 2"/>
           <p:cNvSpPr>
             <a:spLocks noGrp="1"/>
           </p:cNvSpPr>
           <p:nvPr>
-            <p:ph type="sldNum" sz="quarter" idx="5"/>
+            <p:ph type="body" idx="1"/>
           </p:nvPr>
         </p:nvSpPr>
         <p:spPr/>
@@ -10566,9 +10555,69 @@
           <a:bodyPr/>
           <a:lstStyle/>
           <a:p>
+            <a:r>
+              <a:rPr lang="en-US" dirty="0"/>
+              <a:t>Yet another example of cooperation between OS and hardware…</a:t>
+            </a:r>
+          </a:p>
+          <a:p>
+            <a:r>
+              <a:rPr lang="en-US" dirty="0"/>
+              <a:t>Example: NIC Network Interface Card</a:t>
+            </a:r>
+          </a:p>
+          <a:p>
+            <a:endParaRPr lang="en-US" dirty="0"/>
+          </a:p>
+          <a:p>
+            <a:r>
+              <a:rPr lang="en-US" dirty="0"/>
+              <a:t>The NIC exposes:</a:t>
+            </a:r>
+          </a:p>
+          <a:p>
+            <a:r>
+              <a:rPr lang="en-US" b="1" dirty="0"/>
+              <a:t>One Physical Function (PF):</a:t>
+            </a:r>
+            <a:r>
+              <a:rPr lang="en-US" dirty="0"/>
+              <a:t> the full-featured PCIe function managed by the hypervisor or host OS.</a:t>
+            </a:r>
+          </a:p>
+          <a:p>
+            <a:r>
+              <a:rPr lang="en-US" b="1" dirty="0"/>
+              <a:t>Multiple Virtual Functions (VFs):</a:t>
+            </a:r>
+            <a:r>
+              <a:rPr lang="en-US" dirty="0"/>
+              <a:t> lightweight “virtual” PCIe devices that share the same physical hardware but appear as independent NICs to the VMs.</a:t>
+            </a:r>
+          </a:p>
+          <a:p>
+            <a:endParaRPr lang="en-US" dirty="0"/>
+          </a:p>
+        </p:txBody>
+      </p:sp>
+      <p:sp>
+        <p:nvSpPr>
+          <p:cNvPr id="4" name="Slide Number Placeholder 3"/>
+          <p:cNvSpPr>
+            <a:spLocks noGrp="1"/>
+          </p:cNvSpPr>
+          <p:nvPr>
+            <p:ph type="sldNum" sz="quarter" idx="5"/>
+          </p:nvPr>
+        </p:nvSpPr>
+        <p:spPr/>
+        <p:txBody>
+          <a:bodyPr/>
+          <a:lstStyle/>
+          <a:p>
             <a:fld id="{C55E3DE0-5E9E-8947-9DAA-E91C371FD659}" type="slidenum">
               <a:rPr lang="en-SE" smtClean="0"/>
-              <a:t>36</a:t>
+              <a:t>27</a:t>
             </a:fld>
             <a:endParaRPr lang="en-SE"/>
           </a:p>
@@ -10577,7 +10626,7 @@
     </p:spTree>
     <p:extLst>
       <p:ext uri="{BB962C8B-B14F-4D97-AF65-F5344CB8AC3E}">
-        <p14:creationId xmlns:p14="http://schemas.microsoft.com/office/powerpoint/2010/main" val="1799306669"/>
+        <p14:creationId xmlns:p14="http://schemas.microsoft.com/office/powerpoint/2010/main" val="802518484"/>
       </p:ext>
     </p:extLst>
   </p:cSld>
@@ -10631,29 +10680,6 @@
           <a:bodyPr/>
           <a:lstStyle/>
           <a:p>
-            <a:pPr marL="0" marR="0" lvl="0" indent="0" algn="l" defTabSz="914400" rtl="0" eaLnBrk="1" fontAlgn="auto" latinLnBrk="0" hangingPunct="1">
-              <a:lnSpc>
-                <a:spcPct val="100000"/>
-              </a:lnSpc>
-              <a:spcBef>
-                <a:spcPts val="0"/>
-              </a:spcBef>
-              <a:spcAft>
-                <a:spcPts val="0"/>
-              </a:spcAft>
-              <a:buClrTx/>
-              <a:buSzTx/>
-              <a:buFontTx/>
-              <a:buNone/>
-              <a:tabLst/>
-              <a:defRPr/>
-            </a:pPr>
-            <a:r>
-              <a:rPr lang="en-US" dirty="0"/>
-              <a:t>Containers became widely popular around 2013–2015, following Docker’s launch in 2013 and Kubernetes’ introduction in 2014. We can say that if a VM virtualizes hardware and runs a complete guest OS, then a container isolates one or more processes while sharing the host OS kernel. These processes are isolated from other processes, but their performance can still be affected by other workloads, as with VMs. The key difference is that containers also share the same kernel.</a:t>
-            </a:r>
-          </a:p>
-          <a:p>
             <a:endParaRPr lang="en-US" dirty="0"/>
           </a:p>
         </p:txBody>
@@ -10675,7 +10701,7 @@
           <a:p>
             <a:fld id="{C55E3DE0-5E9E-8947-9DAA-E91C371FD659}" type="slidenum">
               <a:rPr lang="en-SE" smtClean="0"/>
-              <a:t>37</a:t>
+              <a:t>36</a:t>
             </a:fld>
             <a:endParaRPr lang="en-SE"/>
           </a:p>
@@ -10684,7 +10710,7 @@
     </p:spTree>
     <p:extLst>
       <p:ext uri="{BB962C8B-B14F-4D97-AF65-F5344CB8AC3E}">
-        <p14:creationId xmlns:p14="http://schemas.microsoft.com/office/powerpoint/2010/main" val="3695974222"/>
+        <p14:creationId xmlns:p14="http://schemas.microsoft.com/office/powerpoint/2010/main" val="1799306669"/>
       </p:ext>
     </p:extLst>
   </p:cSld>
@@ -10757,7 +10783,7 @@
             </a:pPr>
             <a:r>
               <a:rPr lang="en-US" dirty="0"/>
-              <a:t>To isolate a set of processes, we must isolate resources and system views such as the filesystem, process IDs, user IDs, network interfaces, and IPC endpoints. That, as an example, allows for processes in different containers to have the same process ID. We may also define limits, quotas, or priorities for memory, CPU, and I/O. To do all this, we either use namespaces or cgroups. Namespaces isolate what processes can see, while cgroups control or account for the resources they use.</a:t>
+              <a:t>Containers became widely popular around 2013–2015, following Docker’s launch in 2013 and Kubernetes’ introduction in 2014. We can say that if a VM virtualizes hardware and runs a complete guest OS, then a container isolates one or more processes while sharing the host OS kernel. These processes are isolated from other processes, but their performance can still be affected by other workloads, as with VMs. The key difference is that containers also share the same kernel.</a:t>
             </a:r>
           </a:p>
           <a:p>
@@ -10782,7 +10808,7 @@
           <a:p>
             <a:fld id="{C55E3DE0-5E9E-8947-9DAA-E91C371FD659}" type="slidenum">
               <a:rPr lang="en-SE" smtClean="0"/>
-              <a:t>38</a:t>
+              <a:t>37</a:t>
             </a:fld>
             <a:endParaRPr lang="en-SE"/>
           </a:p>
@@ -10791,7 +10817,7 @@
     </p:spTree>
     <p:extLst>
       <p:ext uri="{BB962C8B-B14F-4D97-AF65-F5344CB8AC3E}">
-        <p14:creationId xmlns:p14="http://schemas.microsoft.com/office/powerpoint/2010/main" val="831354887"/>
+        <p14:creationId xmlns:p14="http://schemas.microsoft.com/office/powerpoint/2010/main" val="3695974222"/>
       </p:ext>
     </p:extLst>
   </p:cSld>
@@ -10864,70 +10890,10 @@
             </a:pPr>
             <a:r>
               <a:rPr lang="en-US" dirty="0"/>
-              <a:t>More concretely, if we focus on namespaces, a namespace is a kernel feature that limits or isolates what a process can see and access. A process belongs to one namespace of each type. New namespaces can be created when a process starts. As an example, I might want to start a process and associate it with a new mount namespace, so that the process gets a restricted view of the filesystem, for example only a specific folder and its subfolders. In that case, I can create a new mount namespace and start the process in that namespace. A process can also join an existing namespace, of course, we do not need to create a new namespace for each new process. </a:t>
-            </a:r>
-          </a:p>
-          <a:p>
-            <a:pPr marL="0" marR="0" lvl="0" indent="0" algn="l" defTabSz="914400" rtl="0" eaLnBrk="1" fontAlgn="auto" latinLnBrk="0" hangingPunct="1">
-              <a:lnSpc>
-                <a:spcPct val="100000"/>
-              </a:lnSpc>
-              <a:spcBef>
-                <a:spcPts val="0"/>
-              </a:spcBef>
-              <a:spcAft>
-                <a:spcPts val="0"/>
-              </a:spcAft>
-              <a:buClrTx/>
-              <a:buSzTx/>
-              <a:buFontTx/>
-              <a:buNone/>
-              <a:tabLst/>
-              <a:defRPr/>
-            </a:pPr>
-            <a:endParaRPr lang="en-US" dirty="0"/>
-          </a:p>
-          <a:p>
-            <a:pPr marL="0" marR="0" lvl="0" indent="0" algn="l" defTabSz="914400" rtl="0" eaLnBrk="1" fontAlgn="auto" latinLnBrk="0" hangingPunct="1">
-              <a:lnSpc>
-                <a:spcPct val="100000"/>
-              </a:lnSpc>
-              <a:spcBef>
-                <a:spcPts val="0"/>
-              </a:spcBef>
-              <a:spcAft>
-                <a:spcPts val="0"/>
-              </a:spcAft>
-              <a:buClrTx/>
-              <a:buSzTx/>
-              <a:buFontTx/>
-              <a:buNone/>
-              <a:tabLst/>
-              <a:defRPr/>
-            </a:pPr>
-            <a:r>
-              <a:rPr lang="en-US" dirty="0"/>
-              <a:t>Nonetheless, as said before, for memory, CPU, and I/O a namespace is not enough because we need a mechanism for the kernel to account for resource usage and enforce limits or priorities.</a:t>
-            </a:r>
-          </a:p>
-          <a:p>
-            <a:pPr marL="0" marR="0" lvl="0" indent="0" algn="l" defTabSz="914400" rtl="0" eaLnBrk="1" fontAlgn="auto" latinLnBrk="0" hangingPunct="1">
-              <a:lnSpc>
-                <a:spcPct val="100000"/>
-              </a:lnSpc>
-              <a:spcBef>
-                <a:spcPts val="0"/>
-              </a:spcBef>
-              <a:spcAft>
-                <a:spcPts val="0"/>
-              </a:spcAft>
-              <a:buClrTx/>
-              <a:buSzTx/>
-              <a:buFontTx/>
-              <a:buNone/>
-              <a:tabLst/>
-              <a:defRPr/>
-            </a:pPr>
+              <a:t>To isolate a set of processes, we must isolate resources and system views such as the filesystem, process IDs, user IDs, network interfaces, and IPC endpoints. That, as an example, allows for processes in different containers to have the same process ID. We may also define limits, quotas, or priorities for memory, CPU, and I/O. To do all this, we either use namespaces or cgroups. Namespaces isolate what processes can see, while cgroups control or account for the resources they use.</a:t>
+            </a:r>
+          </a:p>
+          <a:p>
             <a:endParaRPr lang="en-US" dirty="0"/>
           </a:p>
         </p:txBody>
@@ -10949,7 +10915,7 @@
           <a:p>
             <a:fld id="{C55E3DE0-5E9E-8947-9DAA-E91C371FD659}" type="slidenum">
               <a:rPr lang="en-SE" smtClean="0"/>
-              <a:t>39</a:t>
+              <a:t>38</a:t>
             </a:fld>
             <a:endParaRPr lang="en-SE"/>
           </a:p>
@@ -10958,7 +10924,7 @@
     </p:spTree>
     <p:extLst>
       <p:ext uri="{BB962C8B-B14F-4D97-AF65-F5344CB8AC3E}">
-        <p14:creationId xmlns:p14="http://schemas.microsoft.com/office/powerpoint/2010/main" val="615113770"/>
+        <p14:creationId xmlns:p14="http://schemas.microsoft.com/office/powerpoint/2010/main" val="831354887"/>
       </p:ext>
     </p:extLst>
   </p:cSld>
@@ -11012,10 +10978,90 @@
           <a:bodyPr/>
           <a:lstStyle/>
           <a:p>
+            <a:pPr marL="0" marR="0" lvl="0" indent="0" algn="l" defTabSz="914400" rtl="0" eaLnBrk="1" fontAlgn="auto" latinLnBrk="0" hangingPunct="1">
+              <a:lnSpc>
+                <a:spcPct val="100000"/>
+              </a:lnSpc>
+              <a:spcBef>
+                <a:spcPts val="0"/>
+              </a:spcBef>
+              <a:spcAft>
+                <a:spcPts val="0"/>
+              </a:spcAft>
+              <a:buClrTx/>
+              <a:buSzTx/>
+              <a:buFontTx/>
+              <a:buNone/>
+              <a:tabLst/>
+              <a:defRPr/>
+            </a:pPr>
             <a:r>
               <a:rPr lang="en-US" dirty="0"/>
-              <a:t>Going back to the file system example, a mount namespace isolates the set of filesystem mounts visible to a process. Two processes in different mount namespaces may see different filesystems or different directory trees, even though they run on the same host. Container runtimes use mount namespaces together with other filesystem mechanisms to give each container its own root filesystem.</a:t>
-            </a:r>
+              <a:t>More concretely, if we focus on namespaces, a namespace is a kernel feature that limits or isolates what a process can see and access. A process belongs to one namespace of each type. New namespaces can be created when a process starts. As an example, I might want to start a process and associate it with a new mount namespace, so that the process gets a restricted view of the filesystem, for example only a specific folder and its subfolders. In that case, I can create a new mount namespace and start the process in that namespace. A process can also join an existing namespace, of course, we do not need to create a new namespace for each new process. </a:t>
+            </a:r>
+          </a:p>
+          <a:p>
+            <a:pPr marL="0" marR="0" lvl="0" indent="0" algn="l" defTabSz="914400" rtl="0" eaLnBrk="1" fontAlgn="auto" latinLnBrk="0" hangingPunct="1">
+              <a:lnSpc>
+                <a:spcPct val="100000"/>
+              </a:lnSpc>
+              <a:spcBef>
+                <a:spcPts val="0"/>
+              </a:spcBef>
+              <a:spcAft>
+                <a:spcPts val="0"/>
+              </a:spcAft>
+              <a:buClrTx/>
+              <a:buSzTx/>
+              <a:buFontTx/>
+              <a:buNone/>
+              <a:tabLst/>
+              <a:defRPr/>
+            </a:pPr>
+            <a:endParaRPr lang="en-US" dirty="0"/>
+          </a:p>
+          <a:p>
+            <a:pPr marL="0" marR="0" lvl="0" indent="0" algn="l" defTabSz="914400" rtl="0" eaLnBrk="1" fontAlgn="auto" latinLnBrk="0" hangingPunct="1">
+              <a:lnSpc>
+                <a:spcPct val="100000"/>
+              </a:lnSpc>
+              <a:spcBef>
+                <a:spcPts val="0"/>
+              </a:spcBef>
+              <a:spcAft>
+                <a:spcPts val="0"/>
+              </a:spcAft>
+              <a:buClrTx/>
+              <a:buSzTx/>
+              <a:buFontTx/>
+              <a:buNone/>
+              <a:tabLst/>
+              <a:defRPr/>
+            </a:pPr>
+            <a:r>
+              <a:rPr lang="en-US" dirty="0"/>
+              <a:t>Nonetheless, as said before, for memory, CPU, and I/O a namespace is not enough because we need a mechanism for the kernel to account for resource usage and enforce limits or priorities.</a:t>
+            </a:r>
+          </a:p>
+          <a:p>
+            <a:pPr marL="0" marR="0" lvl="0" indent="0" algn="l" defTabSz="914400" rtl="0" eaLnBrk="1" fontAlgn="auto" latinLnBrk="0" hangingPunct="1">
+              <a:lnSpc>
+                <a:spcPct val="100000"/>
+              </a:lnSpc>
+              <a:spcBef>
+                <a:spcPts val="0"/>
+              </a:spcBef>
+              <a:spcAft>
+                <a:spcPts val="0"/>
+              </a:spcAft>
+              <a:buClrTx/>
+              <a:buSzTx/>
+              <a:buFontTx/>
+              <a:buNone/>
+              <a:tabLst/>
+              <a:defRPr/>
+            </a:pPr>
+            <a:endParaRPr lang="en-US" dirty="0"/>
           </a:p>
         </p:txBody>
       </p:sp>
@@ -11036,7 +11082,7 @@
           <a:p>
             <a:fld id="{C55E3DE0-5E9E-8947-9DAA-E91C371FD659}" type="slidenum">
               <a:rPr lang="en-SE" smtClean="0"/>
-              <a:t>40</a:t>
+              <a:t>39</a:t>
             </a:fld>
             <a:endParaRPr lang="en-SE"/>
           </a:p>
@@ -11045,7 +11091,7 @@
     </p:spTree>
     <p:extLst>
       <p:ext uri="{BB962C8B-B14F-4D97-AF65-F5344CB8AC3E}">
-        <p14:creationId xmlns:p14="http://schemas.microsoft.com/office/powerpoint/2010/main" val="587956505"/>
+        <p14:creationId xmlns:p14="http://schemas.microsoft.com/office/powerpoint/2010/main" val="615113770"/>
       </p:ext>
     </p:extLst>
   </p:cSld>
@@ -11083,6 +11129,93 @@
           </p:nvPr>
         </p:nvSpPr>
         <p:spPr/>
+      </p:sp>
+      <p:sp>
+        <p:nvSpPr>
+          <p:cNvPr id="3" name="Notes Placeholder 2"/>
+          <p:cNvSpPr>
+            <a:spLocks noGrp="1"/>
+          </p:cNvSpPr>
+          <p:nvPr>
+            <p:ph type="body" idx="1"/>
+          </p:nvPr>
+        </p:nvSpPr>
+        <p:spPr/>
+        <p:txBody>
+          <a:bodyPr/>
+          <a:lstStyle/>
+          <a:p>
+            <a:r>
+              <a:rPr lang="en-US" dirty="0"/>
+              <a:t>Going back to the file system example, a mount namespace isolates the set of filesystem mounts visible to a process. Two processes in different mount namespaces may see different filesystems or different directory trees, even though they run on the same host. Container runtimes use mount namespaces together with other filesystem mechanisms to give each container its own root filesystem.</a:t>
+            </a:r>
+          </a:p>
+        </p:txBody>
+      </p:sp>
+      <p:sp>
+        <p:nvSpPr>
+          <p:cNvPr id="4" name="Slide Number Placeholder 3"/>
+          <p:cNvSpPr>
+            <a:spLocks noGrp="1"/>
+          </p:cNvSpPr>
+          <p:nvPr>
+            <p:ph type="sldNum" sz="quarter" idx="5"/>
+          </p:nvPr>
+        </p:nvSpPr>
+        <p:spPr/>
+        <p:txBody>
+          <a:bodyPr/>
+          <a:lstStyle/>
+          <a:p>
+            <a:fld id="{C55E3DE0-5E9E-8947-9DAA-E91C371FD659}" type="slidenum">
+              <a:rPr lang="en-SE" smtClean="0"/>
+              <a:t>40</a:t>
+            </a:fld>
+            <a:endParaRPr lang="en-SE"/>
+          </a:p>
+        </p:txBody>
+      </p:sp>
+    </p:spTree>
+    <p:extLst>
+      <p:ext uri="{BB962C8B-B14F-4D97-AF65-F5344CB8AC3E}">
+        <p14:creationId xmlns:p14="http://schemas.microsoft.com/office/powerpoint/2010/main" val="587956505"/>
+      </p:ext>
+    </p:extLst>
+  </p:cSld>
+  <p:clrMapOvr>
+    <a:masterClrMapping/>
+  </p:clrMapOvr>
+</p:notes>
+</file>
+
+<file path=ppt/notesSlides/notesSlide18.xml><?xml version="1.0" encoding="utf-8"?>
+<p:notes xmlns:a="http://schemas.openxmlformats.org/drawingml/2006/main" xmlns:r="http://schemas.openxmlformats.org/officeDocument/2006/relationships" xmlns:p="http://schemas.openxmlformats.org/presentationml/2006/main">
+  <p:cSld>
+    <p:spTree>
+      <p:nvGrpSpPr>
+        <p:cNvPr id="1" name=""/>
+        <p:cNvGrpSpPr/>
+        <p:nvPr/>
+      </p:nvGrpSpPr>
+      <p:grpSpPr>
+        <a:xfrm>
+          <a:off x="0" y="0"/>
+          <a:ext cx="0" cy="0"/>
+          <a:chOff x="0" y="0"/>
+          <a:chExt cx="0" cy="0"/>
+        </a:xfrm>
+      </p:grpSpPr>
+      <p:sp>
+        <p:nvSpPr>
+          <p:cNvPr id="2" name="Slide Image Placeholder 1"/>
+          <p:cNvSpPr>
+            <a:spLocks noGrp="1" noRot="1" noChangeAspect="1"/>
+          </p:cNvSpPr>
+          <p:nvPr>
+            <p:ph type="sldImg"/>
+          </p:nvPr>
+        </p:nvSpPr>
+        <p:spPr/>
         <p:txBody>
           <a:bodyPr/>
           <a:lstStyle/>
@@ -11161,7 +11294,7 @@
 </p:notes>
 </file>
 
-<file path=ppt/notesSlides/notesSlide18.xml><?xml version="1.0" encoding="utf-8"?>
+<file path=ppt/notesSlides/notesSlide19.xml><?xml version="1.0" encoding="utf-8"?>
 <p:notes xmlns:a="http://schemas.openxmlformats.org/drawingml/2006/main" xmlns:r="http://schemas.openxmlformats.org/officeDocument/2006/relationships" xmlns:p="http://schemas.openxmlformats.org/presentationml/2006/main">
   <p:cSld>
     <p:spTree>
@@ -11377,7 +11510,99 @@
 </p:notes>
 </file>
 
-<file path=ppt/notesSlides/notesSlide19.xml><?xml version="1.0" encoding="utf-8"?>
+<file path=ppt/notesSlides/notesSlide2.xml><?xml version="1.0" encoding="utf-8"?>
+<p:notes xmlns:a="http://schemas.openxmlformats.org/drawingml/2006/main" xmlns:r="http://schemas.openxmlformats.org/officeDocument/2006/relationships" xmlns:p="http://schemas.openxmlformats.org/presentationml/2006/main">
+  <p:cSld>
+    <p:spTree>
+      <p:nvGrpSpPr>
+        <p:cNvPr id="1" name=""/>
+        <p:cNvGrpSpPr/>
+        <p:nvPr/>
+      </p:nvGrpSpPr>
+      <p:grpSpPr>
+        <a:xfrm>
+          <a:off x="0" y="0"/>
+          <a:ext cx="0" cy="0"/>
+          <a:chOff x="0" y="0"/>
+          <a:chExt cx="0" cy="0"/>
+        </a:xfrm>
+      </p:grpSpPr>
+      <p:sp>
+        <p:nvSpPr>
+          <p:cNvPr id="2" name="Slide Image Placeholder 1"/>
+          <p:cNvSpPr>
+            <a:spLocks noGrp="1" noRot="1" noChangeAspect="1"/>
+          </p:cNvSpPr>
+          <p:nvPr>
+            <p:ph type="sldImg"/>
+          </p:nvPr>
+        </p:nvSpPr>
+        <p:spPr/>
+        <p:txBody>
+          <a:bodyPr/>
+          <a:lstStyle/>
+          <a:p>
+            <a:endParaRPr lang="en-US"/>
+          </a:p>
+        </p:txBody>
+      </p:sp>
+      <p:sp>
+        <p:nvSpPr>
+          <p:cNvPr id="3" name="Notes Placeholder 2"/>
+          <p:cNvSpPr>
+            <a:spLocks noGrp="1"/>
+          </p:cNvSpPr>
+          <p:nvPr>
+            <p:ph type="body" idx="1"/>
+          </p:nvPr>
+        </p:nvSpPr>
+        <p:spPr/>
+        <p:txBody>
+          <a:bodyPr/>
+          <a:lstStyle/>
+          <a:p>
+            <a:endParaRPr lang="en-US"/>
+          </a:p>
+        </p:txBody>
+      </p:sp>
+      <p:sp>
+        <p:nvSpPr>
+          <p:cNvPr id="4" name="Slide Number Placeholder 3"/>
+          <p:cNvSpPr>
+            <a:spLocks noGrp="1"/>
+          </p:cNvSpPr>
+          <p:nvPr>
+            <p:ph type="sldNum" sz="quarter" idx="10"/>
+          </p:nvPr>
+        </p:nvSpPr>
+        <p:spPr/>
+        <p:txBody>
+          <a:bodyPr/>
+          <a:lstStyle/>
+          <a:p>
+            <a:fld id="{CAE0ABF5-7690-4623-B971-046A51D617CD}" type="slidenum">
+              <a:rPr lang="en-US" altLang="en-US" smtClean="0"/>
+              <a:pPr/>
+              <a:t>2</a:t>
+            </a:fld>
+            <a:endParaRPr lang="en-US" altLang="en-US"/>
+          </a:p>
+        </p:txBody>
+      </p:sp>
+    </p:spTree>
+    <p:extLst>
+      <p:ext uri="{BB962C8B-B14F-4D97-AF65-F5344CB8AC3E}">
+        <p14:creationId xmlns:p14="http://schemas.microsoft.com/office/powerpoint/2010/main" val="704346850"/>
+      </p:ext>
+    </p:extLst>
+  </p:cSld>
+  <p:clrMapOvr>
+    <a:masterClrMapping/>
+  </p:clrMapOvr>
+</p:notes>
+</file>
+
+<file path=ppt/notesSlides/notesSlide20.xml><?xml version="1.0" encoding="utf-8"?>
 <p:notes xmlns:a="http://schemas.openxmlformats.org/drawingml/2006/main" xmlns:r="http://schemas.openxmlformats.org/officeDocument/2006/relationships" xmlns:p="http://schemas.openxmlformats.org/presentationml/2006/main">
   <p:cSld>
     <p:spTree>
@@ -11563,99 +11788,7 @@
 </p:notes>
 </file>
 
-<file path=ppt/notesSlides/notesSlide2.xml><?xml version="1.0" encoding="utf-8"?>
-<p:notes xmlns:a="http://schemas.openxmlformats.org/drawingml/2006/main" xmlns:r="http://schemas.openxmlformats.org/officeDocument/2006/relationships" xmlns:p="http://schemas.openxmlformats.org/presentationml/2006/main">
-  <p:cSld>
-    <p:spTree>
-      <p:nvGrpSpPr>
-        <p:cNvPr id="1" name=""/>
-        <p:cNvGrpSpPr/>
-        <p:nvPr/>
-      </p:nvGrpSpPr>
-      <p:grpSpPr>
-        <a:xfrm>
-          <a:off x="0" y="0"/>
-          <a:ext cx="0" cy="0"/>
-          <a:chOff x="0" y="0"/>
-          <a:chExt cx="0" cy="0"/>
-        </a:xfrm>
-      </p:grpSpPr>
-      <p:sp>
-        <p:nvSpPr>
-          <p:cNvPr id="2" name="Slide Image Placeholder 1"/>
-          <p:cNvSpPr>
-            <a:spLocks noGrp="1" noRot="1" noChangeAspect="1"/>
-          </p:cNvSpPr>
-          <p:nvPr>
-            <p:ph type="sldImg"/>
-          </p:nvPr>
-        </p:nvSpPr>
-        <p:spPr/>
-        <p:txBody>
-          <a:bodyPr/>
-          <a:lstStyle/>
-          <a:p>
-            <a:endParaRPr lang="en-US"/>
-          </a:p>
-        </p:txBody>
-      </p:sp>
-      <p:sp>
-        <p:nvSpPr>
-          <p:cNvPr id="3" name="Notes Placeholder 2"/>
-          <p:cNvSpPr>
-            <a:spLocks noGrp="1"/>
-          </p:cNvSpPr>
-          <p:nvPr>
-            <p:ph type="body" idx="1"/>
-          </p:nvPr>
-        </p:nvSpPr>
-        <p:spPr/>
-        <p:txBody>
-          <a:bodyPr/>
-          <a:lstStyle/>
-          <a:p>
-            <a:endParaRPr lang="en-US"/>
-          </a:p>
-        </p:txBody>
-      </p:sp>
-      <p:sp>
-        <p:nvSpPr>
-          <p:cNvPr id="4" name="Slide Number Placeholder 3"/>
-          <p:cNvSpPr>
-            <a:spLocks noGrp="1"/>
-          </p:cNvSpPr>
-          <p:nvPr>
-            <p:ph type="sldNum" sz="quarter" idx="10"/>
-          </p:nvPr>
-        </p:nvSpPr>
-        <p:spPr/>
-        <p:txBody>
-          <a:bodyPr/>
-          <a:lstStyle/>
-          <a:p>
-            <a:fld id="{CAE0ABF5-7690-4623-B971-046A51D617CD}" type="slidenum">
-              <a:rPr lang="en-US" altLang="en-US" smtClean="0"/>
-              <a:pPr/>
-              <a:t>2</a:t>
-            </a:fld>
-            <a:endParaRPr lang="en-US" altLang="en-US"/>
-          </a:p>
-        </p:txBody>
-      </p:sp>
-    </p:spTree>
-    <p:extLst>
-      <p:ext uri="{BB962C8B-B14F-4D97-AF65-F5344CB8AC3E}">
-        <p14:creationId xmlns:p14="http://schemas.microsoft.com/office/powerpoint/2010/main" val="704346850"/>
-      </p:ext>
-    </p:extLst>
-  </p:cSld>
-  <p:clrMapOvr>
-    <a:masterClrMapping/>
-  </p:clrMapOvr>
-</p:notes>
-</file>
-
-<file path=ppt/notesSlides/notesSlide20.xml><?xml version="1.0" encoding="utf-8"?>
+<file path=ppt/notesSlides/notesSlide21.xml><?xml version="1.0" encoding="utf-8"?>
 <p:notes xmlns:a="http://schemas.openxmlformats.org/drawingml/2006/main" xmlns:r="http://schemas.openxmlformats.org/officeDocument/2006/relationships" xmlns:p="http://schemas.openxmlformats.org/presentationml/2006/main">
   <p:cSld>
     <p:spTree>
@@ -11849,7 +11982,7 @@
 </p:notes>
 </file>
 
-<file path=ppt/notesSlides/notesSlide21.xml><?xml version="1.0" encoding="utf-8"?>
+<file path=ppt/notesSlides/notesSlide22.xml><?xml version="1.0" encoding="utf-8"?>
 <p:notes xmlns:a="http://schemas.openxmlformats.org/drawingml/2006/main" xmlns:r="http://schemas.openxmlformats.org/officeDocument/2006/relationships" xmlns:p="http://schemas.openxmlformats.org/presentationml/2006/main">
   <p:cSld>
     <p:spTree>
@@ -11963,7 +12096,7 @@
 </p:notes>
 </file>
 
-<file path=ppt/notesSlides/notesSlide22.xml><?xml version="1.0" encoding="utf-8"?>
+<file path=ppt/notesSlides/notesSlide23.xml><?xml version="1.0" encoding="utf-8"?>
 <p:notes xmlns:a="http://schemas.openxmlformats.org/drawingml/2006/main" xmlns:r="http://schemas.openxmlformats.org/officeDocument/2006/relationships" xmlns:p="http://schemas.openxmlformats.org/presentationml/2006/main">
   <p:cSld>
     <p:spTree>
@@ -12231,7 +12364,7 @@
 </p:notes>
 </file>
 
-<file path=ppt/notesSlides/notesSlide23.xml><?xml version="1.0" encoding="utf-8"?>
+<file path=ppt/notesSlides/notesSlide24.xml><?xml version="1.0" encoding="utf-8"?>
 <p:notes xmlns:a="http://schemas.openxmlformats.org/drawingml/2006/main" xmlns:r="http://schemas.openxmlformats.org/officeDocument/2006/relationships" xmlns:p="http://schemas.openxmlformats.org/presentationml/2006/main">
   <p:cSld>
     <p:spTree>
@@ -12444,7 +12577,7 @@
 </p:notes>
 </file>
 
-<file path=ppt/notesSlides/notesSlide24.xml><?xml version="1.0" encoding="utf-8"?>
+<file path=ppt/notesSlides/notesSlide25.xml><?xml version="1.0" encoding="utf-8"?>
 <p:notes xmlns:a="http://schemas.openxmlformats.org/drawingml/2006/main" xmlns:r="http://schemas.openxmlformats.org/officeDocument/2006/relationships" xmlns:p="http://schemas.openxmlformats.org/presentationml/2006/main">
   <p:cSld>
     <p:spTree>
@@ -12631,7 +12764,7 @@
 </p:notes>
 </file>
 
-<file path=ppt/notesSlides/notesSlide25.xml><?xml version="1.0" encoding="utf-8"?>
+<file path=ppt/notesSlides/notesSlide26.xml><?xml version="1.0" encoding="utf-8"?>
 <p:notes xmlns:a="http://schemas.openxmlformats.org/drawingml/2006/main" xmlns:r="http://schemas.openxmlformats.org/officeDocument/2006/relationships" xmlns:p="http://schemas.openxmlformats.org/presentationml/2006/main">
   <p:cSld>
     <p:spTree>
@@ -12862,6 +12995,267 @@
 </p:notes>
 </file>
 
+<file path=ppt/notesSlides/notesSlide27.xml><?xml version="1.0" encoding="utf-8"?>
+<p:notes xmlns:a="http://schemas.openxmlformats.org/drawingml/2006/main" xmlns:r="http://schemas.openxmlformats.org/officeDocument/2006/relationships" xmlns:p="http://schemas.openxmlformats.org/presentationml/2006/main">
+  <p:cSld>
+    <p:spTree>
+      <p:nvGrpSpPr>
+        <p:cNvPr id="1" name=""/>
+        <p:cNvGrpSpPr/>
+        <p:nvPr/>
+      </p:nvGrpSpPr>
+      <p:grpSpPr>
+        <a:xfrm>
+          <a:off x="0" y="0"/>
+          <a:ext cx="0" cy="0"/>
+          <a:chOff x="0" y="0"/>
+          <a:chExt cx="0" cy="0"/>
+        </a:xfrm>
+      </p:grpSpPr>
+      <p:sp>
+        <p:nvSpPr>
+          <p:cNvPr id="2" name="Slide Image Placeholder 1"/>
+          <p:cNvSpPr>
+            <a:spLocks noGrp="1" noRot="1" noChangeAspect="1"/>
+          </p:cNvSpPr>
+          <p:nvPr>
+            <p:ph type="sldImg"/>
+          </p:nvPr>
+        </p:nvSpPr>
+        <p:spPr/>
+      </p:sp>
+      <p:sp>
+        <p:nvSpPr>
+          <p:cNvPr id="3" name="Notes Placeholder 2"/>
+          <p:cNvSpPr>
+            <a:spLocks noGrp="1"/>
+          </p:cNvSpPr>
+          <p:nvPr>
+            <p:ph type="body" idx="1"/>
+          </p:nvPr>
+        </p:nvSpPr>
+        <p:spPr/>
+        <p:txBody>
+          <a:bodyPr/>
+          <a:lstStyle/>
+          <a:p>
+            <a:r>
+              <a:rPr lang="en-US" dirty="0"/>
+              <a:t>2</a:t>
+            </a:r>
+          </a:p>
+        </p:txBody>
+      </p:sp>
+      <p:sp>
+        <p:nvSpPr>
+          <p:cNvPr id="4" name="Slide Number Placeholder 3"/>
+          <p:cNvSpPr>
+            <a:spLocks noGrp="1"/>
+          </p:cNvSpPr>
+          <p:nvPr>
+            <p:ph type="sldNum" sz="quarter" idx="5"/>
+          </p:nvPr>
+        </p:nvSpPr>
+        <p:spPr/>
+        <p:txBody>
+          <a:bodyPr/>
+          <a:lstStyle/>
+          <a:p>
+            <a:fld id="{C55E3DE0-5E9E-8947-9DAA-E91C371FD659}" type="slidenum">
+              <a:rPr lang="en-SE" smtClean="0"/>
+              <a:t>51</a:t>
+            </a:fld>
+            <a:endParaRPr lang="en-SE"/>
+          </a:p>
+        </p:txBody>
+      </p:sp>
+    </p:spTree>
+    <p:extLst>
+      <p:ext uri="{BB962C8B-B14F-4D97-AF65-F5344CB8AC3E}">
+        <p14:creationId xmlns:p14="http://schemas.microsoft.com/office/powerpoint/2010/main" val="53391597"/>
+      </p:ext>
+    </p:extLst>
+  </p:cSld>
+  <p:clrMapOvr>
+    <a:masterClrMapping/>
+  </p:clrMapOvr>
+</p:notes>
+</file>
+
+<file path=ppt/notesSlides/notesSlide28.xml><?xml version="1.0" encoding="utf-8"?>
+<p:notes xmlns:a="http://schemas.openxmlformats.org/drawingml/2006/main" xmlns:r="http://schemas.openxmlformats.org/officeDocument/2006/relationships" xmlns:p="http://schemas.openxmlformats.org/presentationml/2006/main">
+  <p:cSld>
+    <p:spTree>
+      <p:nvGrpSpPr>
+        <p:cNvPr id="1" name=""/>
+        <p:cNvGrpSpPr/>
+        <p:nvPr/>
+      </p:nvGrpSpPr>
+      <p:grpSpPr>
+        <a:xfrm>
+          <a:off x="0" y="0"/>
+          <a:ext cx="0" cy="0"/>
+          <a:chOff x="0" y="0"/>
+          <a:chExt cx="0" cy="0"/>
+        </a:xfrm>
+      </p:grpSpPr>
+      <p:sp>
+        <p:nvSpPr>
+          <p:cNvPr id="2" name="Slide Image Placeholder 1"/>
+          <p:cNvSpPr>
+            <a:spLocks noGrp="1" noRot="1" noChangeAspect="1"/>
+          </p:cNvSpPr>
+          <p:nvPr>
+            <p:ph type="sldImg"/>
+          </p:nvPr>
+        </p:nvSpPr>
+        <p:spPr/>
+      </p:sp>
+      <p:sp>
+        <p:nvSpPr>
+          <p:cNvPr id="3" name="Notes Placeholder 2"/>
+          <p:cNvSpPr>
+            <a:spLocks noGrp="1"/>
+          </p:cNvSpPr>
+          <p:nvPr>
+            <p:ph type="body" idx="1"/>
+          </p:nvPr>
+        </p:nvSpPr>
+        <p:spPr/>
+        <p:txBody>
+          <a:bodyPr/>
+          <a:lstStyle/>
+          <a:p>
+            <a:r>
+              <a:rPr lang="en-US" dirty="0"/>
+              <a:t>2</a:t>
+            </a:r>
+          </a:p>
+        </p:txBody>
+      </p:sp>
+      <p:sp>
+        <p:nvSpPr>
+          <p:cNvPr id="4" name="Slide Number Placeholder 3"/>
+          <p:cNvSpPr>
+            <a:spLocks noGrp="1"/>
+          </p:cNvSpPr>
+          <p:nvPr>
+            <p:ph type="sldNum" sz="quarter" idx="5"/>
+          </p:nvPr>
+        </p:nvSpPr>
+        <p:spPr/>
+        <p:txBody>
+          <a:bodyPr/>
+          <a:lstStyle/>
+          <a:p>
+            <a:fld id="{C55E3DE0-5E9E-8947-9DAA-E91C371FD659}" type="slidenum">
+              <a:rPr lang="en-SE" smtClean="0"/>
+              <a:t>52</a:t>
+            </a:fld>
+            <a:endParaRPr lang="en-SE"/>
+          </a:p>
+        </p:txBody>
+      </p:sp>
+    </p:spTree>
+    <p:extLst>
+      <p:ext uri="{BB962C8B-B14F-4D97-AF65-F5344CB8AC3E}">
+        <p14:creationId xmlns:p14="http://schemas.microsoft.com/office/powerpoint/2010/main" val="3541048141"/>
+      </p:ext>
+    </p:extLst>
+  </p:cSld>
+  <p:clrMapOvr>
+    <a:masterClrMapping/>
+  </p:clrMapOvr>
+</p:notes>
+</file>
+
+<file path=ppt/notesSlides/notesSlide29.xml><?xml version="1.0" encoding="utf-8"?>
+<p:notes xmlns:a="http://schemas.openxmlformats.org/drawingml/2006/main" xmlns:r="http://schemas.openxmlformats.org/officeDocument/2006/relationships" xmlns:p="http://schemas.openxmlformats.org/presentationml/2006/main">
+  <p:cSld>
+    <p:spTree>
+      <p:nvGrpSpPr>
+        <p:cNvPr id="1" name=""/>
+        <p:cNvGrpSpPr/>
+        <p:nvPr/>
+      </p:nvGrpSpPr>
+      <p:grpSpPr>
+        <a:xfrm>
+          <a:off x="0" y="0"/>
+          <a:ext cx="0" cy="0"/>
+          <a:chOff x="0" y="0"/>
+          <a:chExt cx="0" cy="0"/>
+        </a:xfrm>
+      </p:grpSpPr>
+      <p:sp>
+        <p:nvSpPr>
+          <p:cNvPr id="2" name="Slide Image Placeholder 1"/>
+          <p:cNvSpPr>
+            <a:spLocks noGrp="1" noRot="1" noChangeAspect="1"/>
+          </p:cNvSpPr>
+          <p:nvPr>
+            <p:ph type="sldImg"/>
+          </p:nvPr>
+        </p:nvSpPr>
+        <p:spPr/>
+      </p:sp>
+      <p:sp>
+        <p:nvSpPr>
+          <p:cNvPr id="3" name="Notes Placeholder 2"/>
+          <p:cNvSpPr>
+            <a:spLocks noGrp="1"/>
+          </p:cNvSpPr>
+          <p:nvPr>
+            <p:ph type="body" idx="1"/>
+          </p:nvPr>
+        </p:nvSpPr>
+        <p:spPr/>
+        <p:txBody>
+          <a:bodyPr/>
+          <a:lstStyle/>
+          <a:p>
+            <a:r>
+              <a:rPr lang="en-US" dirty="0"/>
+              <a:t>2</a:t>
+            </a:r>
+          </a:p>
+        </p:txBody>
+      </p:sp>
+      <p:sp>
+        <p:nvSpPr>
+          <p:cNvPr id="4" name="Slide Number Placeholder 3"/>
+          <p:cNvSpPr>
+            <a:spLocks noGrp="1"/>
+          </p:cNvSpPr>
+          <p:nvPr>
+            <p:ph type="sldNum" sz="quarter" idx="5"/>
+          </p:nvPr>
+        </p:nvSpPr>
+        <p:spPr/>
+        <p:txBody>
+          <a:bodyPr/>
+          <a:lstStyle/>
+          <a:p>
+            <a:fld id="{C55E3DE0-5E9E-8947-9DAA-E91C371FD659}" type="slidenum">
+              <a:rPr lang="en-SE" smtClean="0"/>
+              <a:t>53</a:t>
+            </a:fld>
+            <a:endParaRPr lang="en-SE"/>
+          </a:p>
+        </p:txBody>
+      </p:sp>
+    </p:spTree>
+    <p:extLst>
+      <p:ext uri="{BB962C8B-B14F-4D97-AF65-F5344CB8AC3E}">
+        <p14:creationId xmlns:p14="http://schemas.microsoft.com/office/powerpoint/2010/main" val="1138491930"/>
+      </p:ext>
+    </p:extLst>
+  </p:cSld>
+  <p:clrMapOvr>
+    <a:masterClrMapping/>
+  </p:clrMapOvr>
+</p:notes>
+</file>
+
 <file path=ppt/notesSlides/notesSlide3.xml><?xml version="1.0" encoding="utf-8"?>
 <p:notes xmlns:a="http://schemas.openxmlformats.org/drawingml/2006/main" xmlns:r="http://schemas.openxmlformats.org/officeDocument/2006/relationships" xmlns:p="http://schemas.openxmlformats.org/presentationml/2006/main">
   <p:cSld>
@@ -12952,6 +13346,180 @@
     <p:extLst>
       <p:ext uri="{BB962C8B-B14F-4D97-AF65-F5344CB8AC3E}">
         <p14:creationId xmlns:p14="http://schemas.microsoft.com/office/powerpoint/2010/main" val="1457926998"/>
+      </p:ext>
+    </p:extLst>
+  </p:cSld>
+  <p:clrMapOvr>
+    <a:masterClrMapping/>
+  </p:clrMapOvr>
+</p:notes>
+</file>
+
+<file path=ppt/notesSlides/notesSlide30.xml><?xml version="1.0" encoding="utf-8"?>
+<p:notes xmlns:a="http://schemas.openxmlformats.org/drawingml/2006/main" xmlns:r="http://schemas.openxmlformats.org/officeDocument/2006/relationships" xmlns:p="http://schemas.openxmlformats.org/presentationml/2006/main">
+  <p:cSld>
+    <p:spTree>
+      <p:nvGrpSpPr>
+        <p:cNvPr id="1" name=""/>
+        <p:cNvGrpSpPr/>
+        <p:nvPr/>
+      </p:nvGrpSpPr>
+      <p:grpSpPr>
+        <a:xfrm>
+          <a:off x="0" y="0"/>
+          <a:ext cx="0" cy="0"/>
+          <a:chOff x="0" y="0"/>
+          <a:chExt cx="0" cy="0"/>
+        </a:xfrm>
+      </p:grpSpPr>
+      <p:sp>
+        <p:nvSpPr>
+          <p:cNvPr id="2" name="Slide Image Placeholder 1"/>
+          <p:cNvSpPr>
+            <a:spLocks noGrp="1" noRot="1" noChangeAspect="1"/>
+          </p:cNvSpPr>
+          <p:nvPr>
+            <p:ph type="sldImg"/>
+          </p:nvPr>
+        </p:nvSpPr>
+        <p:spPr/>
+      </p:sp>
+      <p:sp>
+        <p:nvSpPr>
+          <p:cNvPr id="3" name="Notes Placeholder 2"/>
+          <p:cNvSpPr>
+            <a:spLocks noGrp="1"/>
+          </p:cNvSpPr>
+          <p:nvPr>
+            <p:ph type="body" idx="1"/>
+          </p:nvPr>
+        </p:nvSpPr>
+        <p:spPr/>
+        <p:txBody>
+          <a:bodyPr/>
+          <a:lstStyle/>
+          <a:p>
+            <a:r>
+              <a:rPr lang="en-US" dirty="0"/>
+              <a:t>1</a:t>
+            </a:r>
+          </a:p>
+        </p:txBody>
+      </p:sp>
+      <p:sp>
+        <p:nvSpPr>
+          <p:cNvPr id="4" name="Slide Number Placeholder 3"/>
+          <p:cNvSpPr>
+            <a:spLocks noGrp="1"/>
+          </p:cNvSpPr>
+          <p:nvPr>
+            <p:ph type="sldNum" sz="quarter" idx="5"/>
+          </p:nvPr>
+        </p:nvSpPr>
+        <p:spPr/>
+        <p:txBody>
+          <a:bodyPr/>
+          <a:lstStyle/>
+          <a:p>
+            <a:fld id="{C55E3DE0-5E9E-8947-9DAA-E91C371FD659}" type="slidenum">
+              <a:rPr lang="en-SE" smtClean="0"/>
+              <a:t>54</a:t>
+            </a:fld>
+            <a:endParaRPr lang="en-SE"/>
+          </a:p>
+        </p:txBody>
+      </p:sp>
+    </p:spTree>
+    <p:extLst>
+      <p:ext uri="{BB962C8B-B14F-4D97-AF65-F5344CB8AC3E}">
+        <p14:creationId xmlns:p14="http://schemas.microsoft.com/office/powerpoint/2010/main" val="216258847"/>
+      </p:ext>
+    </p:extLst>
+  </p:cSld>
+  <p:clrMapOvr>
+    <a:masterClrMapping/>
+  </p:clrMapOvr>
+</p:notes>
+</file>
+
+<file path=ppt/notesSlides/notesSlide31.xml><?xml version="1.0" encoding="utf-8"?>
+<p:notes xmlns:a="http://schemas.openxmlformats.org/drawingml/2006/main" xmlns:r="http://schemas.openxmlformats.org/officeDocument/2006/relationships" xmlns:p="http://schemas.openxmlformats.org/presentationml/2006/main">
+  <p:cSld>
+    <p:spTree>
+      <p:nvGrpSpPr>
+        <p:cNvPr id="1" name=""/>
+        <p:cNvGrpSpPr/>
+        <p:nvPr/>
+      </p:nvGrpSpPr>
+      <p:grpSpPr>
+        <a:xfrm>
+          <a:off x="0" y="0"/>
+          <a:ext cx="0" cy="0"/>
+          <a:chOff x="0" y="0"/>
+          <a:chExt cx="0" cy="0"/>
+        </a:xfrm>
+      </p:grpSpPr>
+      <p:sp>
+        <p:nvSpPr>
+          <p:cNvPr id="2" name="Slide Image Placeholder 1"/>
+          <p:cNvSpPr>
+            <a:spLocks noGrp="1" noRot="1" noChangeAspect="1"/>
+          </p:cNvSpPr>
+          <p:nvPr>
+            <p:ph type="sldImg"/>
+          </p:nvPr>
+        </p:nvSpPr>
+        <p:spPr/>
+      </p:sp>
+      <p:sp>
+        <p:nvSpPr>
+          <p:cNvPr id="3" name="Notes Placeholder 2"/>
+          <p:cNvSpPr>
+            <a:spLocks noGrp="1"/>
+          </p:cNvSpPr>
+          <p:nvPr>
+            <p:ph type="body" idx="1"/>
+          </p:nvPr>
+        </p:nvSpPr>
+        <p:spPr/>
+        <p:txBody>
+          <a:bodyPr/>
+          <a:lstStyle/>
+          <a:p>
+            <a:r>
+              <a:rPr lang="en-US" dirty="0"/>
+              <a:t>3</a:t>
+            </a:r>
+          </a:p>
+        </p:txBody>
+      </p:sp>
+      <p:sp>
+        <p:nvSpPr>
+          <p:cNvPr id="4" name="Slide Number Placeholder 3"/>
+          <p:cNvSpPr>
+            <a:spLocks noGrp="1"/>
+          </p:cNvSpPr>
+          <p:nvPr>
+            <p:ph type="sldNum" sz="quarter" idx="5"/>
+          </p:nvPr>
+        </p:nvSpPr>
+        <p:spPr/>
+        <p:txBody>
+          <a:bodyPr/>
+          <a:lstStyle/>
+          <a:p>
+            <a:fld id="{C55E3DE0-5E9E-8947-9DAA-E91C371FD659}" type="slidenum">
+              <a:rPr lang="en-SE" smtClean="0"/>
+              <a:t>55</a:t>
+            </a:fld>
+            <a:endParaRPr lang="en-SE"/>
+          </a:p>
+        </p:txBody>
+      </p:sp>
+    </p:spTree>
+    <p:extLst>
+      <p:ext uri="{BB962C8B-B14F-4D97-AF65-F5344CB8AC3E}">
+        <p14:creationId xmlns:p14="http://schemas.microsoft.com/office/powerpoint/2010/main" val="929611102"/>
       </p:ext>
     </p:extLst>
   </p:cSld>
@@ -13242,6 +13810,41 @@
             <a:r>
               <a:rPr lang="en-US" dirty="0"/>
               <a:t> thinking it disabled interrupts, but the host CPU won’t actually do so, and no trap is generated — so the hypervisor can’t emulate the correct behavior.</a:t>
+            </a:r>
+          </a:p>
+          <a:p>
+            <a:endParaRPr lang="en-US" dirty="0"/>
+          </a:p>
+          <a:p>
+            <a:r>
+              <a:rPr lang="en-US" dirty="0"/>
+              <a:t>NOTICE</a:t>
+            </a:r>
+          </a:p>
+          <a:p>
+            <a:r>
+              <a:rPr lang="en-US" b="1" dirty="0"/>
+              <a:t>No</a:t>
+            </a:r>
+            <a:r>
+              <a:rPr lang="en-US" dirty="0"/>
+              <a:t>, modern hardware does not require every sensitive instruction to be privileged according to the traditional user/kernel definition.</a:t>
+            </a:r>
+          </a:p>
+          <a:p>
+            <a:r>
+              <a:rPr lang="en-US" b="1" dirty="0"/>
+              <a:t>Yes</a:t>
+            </a:r>
+            <a:r>
+              <a:rPr lang="en-US" dirty="0"/>
+              <a:t>, the underlying requirement remains: the guest must not perform a sensitive operation outside the control of either the hypervisor or virtualization-aware hardware.</a:t>
+            </a:r>
+          </a:p>
+          <a:p>
+            <a:r>
+              <a:rPr lang="en-US" dirty="0"/>
+              <a:t>So your concern is valid: the wording describes the historical requirement for virtualization without hardware assistance, not the ordinary modern implementation.</a:t>
             </a:r>
           </a:p>
           <a:p>
@@ -13914,7 +14517,7 @@
           <a:lstStyle/>
           <a:p>
             <a:r>
-              <a:rPr lang="sv-SE"/>
+              <a:rPr lang="en-US"/>
               <a:t>Vincenzo Gulisano</a:t>
             </a:r>
             <a:endParaRPr lang="en-SE"/>
@@ -14118,7 +14721,7 @@
           <a:lstStyle/>
           <a:p>
             <a:r>
-              <a:rPr lang="sv-SE"/>
+              <a:rPr lang="en-US"/>
               <a:t>Vincenzo Gulisano</a:t>
             </a:r>
             <a:endParaRPr lang="en-SE"/>
@@ -14332,7 +14935,7 @@
           <a:lstStyle/>
           <a:p>
             <a:r>
-              <a:rPr lang="sv-SE"/>
+              <a:rPr lang="en-US"/>
               <a:t>Vincenzo Gulisano</a:t>
             </a:r>
             <a:endParaRPr lang="en-SE"/>
@@ -14471,6 +15074,1428 @@
 </p:sldLayout>
 </file>
 
+<file path=ppt/slideLayouts/slideLayout13.xml><?xml version="1.0" encoding="utf-8"?>
+<p:sldLayout xmlns:a="http://schemas.openxmlformats.org/drawingml/2006/main" xmlns:r="http://schemas.openxmlformats.org/officeDocument/2006/relationships" xmlns:p="http://schemas.openxmlformats.org/presentationml/2006/main" type="title" preserve="1">
+  <p:cSld name="Title Slide">
+    <p:spTree>
+      <p:nvGrpSpPr>
+        <p:cNvPr id="1" name=""/>
+        <p:cNvGrpSpPr/>
+        <p:nvPr/>
+      </p:nvGrpSpPr>
+      <p:grpSpPr>
+        <a:xfrm>
+          <a:off x="0" y="0"/>
+          <a:ext cx="0" cy="0"/>
+          <a:chOff x="0" y="0"/>
+          <a:chExt cx="0" cy="0"/>
+        </a:xfrm>
+      </p:grpSpPr>
+      <p:sp>
+        <p:nvSpPr>
+          <p:cNvPr id="2" name="Title 1"/>
+          <p:cNvSpPr>
+            <a:spLocks noGrp="1"/>
+          </p:cNvSpPr>
+          <p:nvPr>
+            <p:ph type="ctrTitle"/>
+          </p:nvPr>
+        </p:nvSpPr>
+        <p:spPr>
+          <a:xfrm>
+            <a:off x="1524000" y="1122363"/>
+            <a:ext cx="9144000" cy="2387600"/>
+          </a:xfrm>
+        </p:spPr>
+        <p:txBody>
+          <a:bodyPr anchor="b"/>
+          <a:lstStyle>
+            <a:lvl1pPr algn="ctr">
+              <a:defRPr sz="4500"/>
+            </a:lvl1pPr>
+          </a:lstStyle>
+          <a:p>
+            <a:r>
+              <a:rPr lang="en-US"/>
+              <a:t>Click to edit Master title style</a:t>
+            </a:r>
+          </a:p>
+        </p:txBody>
+      </p:sp>
+      <p:sp>
+        <p:nvSpPr>
+          <p:cNvPr id="3" name="Subtitle 2"/>
+          <p:cNvSpPr>
+            <a:spLocks noGrp="1"/>
+          </p:cNvSpPr>
+          <p:nvPr>
+            <p:ph type="subTitle" idx="1"/>
+          </p:nvPr>
+        </p:nvSpPr>
+        <p:spPr>
+          <a:xfrm>
+            <a:off x="1524000" y="3602038"/>
+            <a:ext cx="9144000" cy="1655762"/>
+          </a:xfrm>
+        </p:spPr>
+        <p:txBody>
+          <a:bodyPr/>
+          <a:lstStyle>
+            <a:lvl1pPr marL="0" indent="0" algn="ctr">
+              <a:buNone/>
+              <a:defRPr sz="1800"/>
+            </a:lvl1pPr>
+            <a:lvl2pPr marL="342900" indent="0" algn="ctr">
+              <a:buNone/>
+              <a:defRPr sz="1500"/>
+            </a:lvl2pPr>
+            <a:lvl3pPr marL="685800" indent="0" algn="ctr">
+              <a:buNone/>
+              <a:defRPr sz="1350"/>
+            </a:lvl3pPr>
+            <a:lvl4pPr marL="1028700" indent="0" algn="ctr">
+              <a:buNone/>
+              <a:defRPr sz="1200"/>
+            </a:lvl4pPr>
+            <a:lvl5pPr marL="1371600" indent="0" algn="ctr">
+              <a:buNone/>
+              <a:defRPr sz="1200"/>
+            </a:lvl5pPr>
+            <a:lvl6pPr marL="1714500" indent="0" algn="ctr">
+              <a:buNone/>
+              <a:defRPr sz="1200"/>
+            </a:lvl6pPr>
+            <a:lvl7pPr marL="2057400" indent="0" algn="ctr">
+              <a:buNone/>
+              <a:defRPr sz="1200"/>
+            </a:lvl7pPr>
+            <a:lvl8pPr marL="2400300" indent="0" algn="ctr">
+              <a:buNone/>
+              <a:defRPr sz="1200"/>
+            </a:lvl8pPr>
+            <a:lvl9pPr marL="2743200" indent="0" algn="ctr">
+              <a:buNone/>
+              <a:defRPr sz="1200"/>
+            </a:lvl9pPr>
+          </a:lstStyle>
+          <a:p>
+            <a:r>
+              <a:rPr lang="en-US"/>
+              <a:t>Click to edit Master subtitle style</a:t>
+            </a:r>
+          </a:p>
+        </p:txBody>
+      </p:sp>
+      <p:sp>
+        <p:nvSpPr>
+          <p:cNvPr id="4" name="Date Placeholder 3"/>
+          <p:cNvSpPr>
+            <a:spLocks noGrp="1"/>
+          </p:cNvSpPr>
+          <p:nvPr>
+            <p:ph type="dt" sz="half" idx="10"/>
+          </p:nvPr>
+        </p:nvSpPr>
+        <p:spPr/>
+        <p:txBody>
+          <a:bodyPr/>
+          <a:lstStyle/>
+          <a:p>
+            <a:r>
+              <a:rPr lang="en-US"/>
+              <a:t>Vincenzo Gulisano</a:t>
+            </a:r>
+          </a:p>
+        </p:txBody>
+      </p:sp>
+      <p:sp>
+        <p:nvSpPr>
+          <p:cNvPr id="5" name="Footer Placeholder 4"/>
+          <p:cNvSpPr>
+            <a:spLocks noGrp="1"/>
+          </p:cNvSpPr>
+          <p:nvPr>
+            <p:ph type="ftr" sz="quarter" idx="11"/>
+          </p:nvPr>
+        </p:nvSpPr>
+        <p:spPr/>
+        <p:txBody>
+          <a:bodyPr/>
+          <a:lstStyle/>
+          <a:p>
+            <a:r>
+              <a:rPr lang="en-US"/>
+              <a:t>Operating Systems - Virtualization</a:t>
+            </a:r>
+          </a:p>
+        </p:txBody>
+      </p:sp>
+      <p:sp>
+        <p:nvSpPr>
+          <p:cNvPr id="6" name="Slide Number Placeholder 5"/>
+          <p:cNvSpPr>
+            <a:spLocks noGrp="1"/>
+          </p:cNvSpPr>
+          <p:nvPr>
+            <p:ph type="sldNum" sz="quarter" idx="12"/>
+          </p:nvPr>
+        </p:nvSpPr>
+        <p:spPr/>
+        <p:txBody>
+          <a:bodyPr/>
+          <a:lstStyle/>
+          <a:p>
+            <a:fld id="{95AAEEEC-DCEC-4178-AB14-E7254A15A296}" type="slidenum">
+              <a:rPr lang="en-US" smtClean="0"/>
+              <a:t>‹#›</a:t>
+            </a:fld>
+            <a:endParaRPr lang="en-US"/>
+          </a:p>
+        </p:txBody>
+      </p:sp>
+    </p:spTree>
+    <p:extLst>
+      <p:ext uri="{BB962C8B-B14F-4D97-AF65-F5344CB8AC3E}">
+        <p14:creationId xmlns:p14="http://schemas.microsoft.com/office/powerpoint/2010/main" val="3913968085"/>
+      </p:ext>
+    </p:extLst>
+  </p:cSld>
+  <p:clrMapOvr>
+    <a:masterClrMapping/>
+  </p:clrMapOvr>
+</p:sldLayout>
+</file>
+
+<file path=ppt/slideLayouts/slideLayout14.xml><?xml version="1.0" encoding="utf-8"?>
+<p:sldLayout xmlns:a="http://schemas.openxmlformats.org/drawingml/2006/main" xmlns:r="http://schemas.openxmlformats.org/officeDocument/2006/relationships" xmlns:p="http://schemas.openxmlformats.org/presentationml/2006/main" type="obj" preserve="1">
+  <p:cSld name="Title and Content">
+    <p:spTree>
+      <p:nvGrpSpPr>
+        <p:cNvPr id="1" name=""/>
+        <p:cNvGrpSpPr/>
+        <p:nvPr/>
+      </p:nvGrpSpPr>
+      <p:grpSpPr>
+        <a:xfrm>
+          <a:off x="0" y="0"/>
+          <a:ext cx="0" cy="0"/>
+          <a:chOff x="0" y="0"/>
+          <a:chExt cx="0" cy="0"/>
+        </a:xfrm>
+      </p:grpSpPr>
+      <p:sp>
+        <p:nvSpPr>
+          <p:cNvPr id="2" name="Title 1"/>
+          <p:cNvSpPr>
+            <a:spLocks noGrp="1"/>
+          </p:cNvSpPr>
+          <p:nvPr>
+            <p:ph type="title"/>
+          </p:nvPr>
+        </p:nvSpPr>
+        <p:spPr/>
+        <p:txBody>
+          <a:bodyPr/>
+          <a:lstStyle/>
+          <a:p>
+            <a:r>
+              <a:rPr lang="en-US"/>
+              <a:t>Click to edit Master title style</a:t>
+            </a:r>
+          </a:p>
+        </p:txBody>
+      </p:sp>
+      <p:sp>
+        <p:nvSpPr>
+          <p:cNvPr id="3" name="Content Placeholder 2"/>
+          <p:cNvSpPr>
+            <a:spLocks noGrp="1"/>
+          </p:cNvSpPr>
+          <p:nvPr>
+            <p:ph idx="1"/>
+          </p:nvPr>
+        </p:nvSpPr>
+        <p:spPr/>
+        <p:txBody>
+          <a:bodyPr/>
+          <a:lstStyle/>
+          <a:p>
+            <a:pPr lvl="0"/>
+            <a:r>
+              <a:rPr lang="en-US"/>
+              <a:t>Click to edit Master text styles</a:t>
+            </a:r>
+          </a:p>
+          <a:p>
+            <a:pPr lvl="1"/>
+            <a:r>
+              <a:rPr lang="en-US"/>
+              <a:t>Second level</a:t>
+            </a:r>
+          </a:p>
+          <a:p>
+            <a:pPr lvl="2"/>
+            <a:r>
+              <a:rPr lang="en-US"/>
+              <a:t>Third level</a:t>
+            </a:r>
+          </a:p>
+          <a:p>
+            <a:pPr lvl="3"/>
+            <a:r>
+              <a:rPr lang="en-US"/>
+              <a:t>Fourth level</a:t>
+            </a:r>
+          </a:p>
+          <a:p>
+            <a:pPr lvl="4"/>
+            <a:r>
+              <a:rPr lang="en-US"/>
+              <a:t>Fifth level</a:t>
+            </a:r>
+          </a:p>
+        </p:txBody>
+      </p:sp>
+      <p:sp>
+        <p:nvSpPr>
+          <p:cNvPr id="4" name="Date Placeholder 3"/>
+          <p:cNvSpPr>
+            <a:spLocks noGrp="1"/>
+          </p:cNvSpPr>
+          <p:nvPr>
+            <p:ph type="dt" sz="half" idx="10"/>
+          </p:nvPr>
+        </p:nvSpPr>
+        <p:spPr/>
+        <p:txBody>
+          <a:bodyPr/>
+          <a:lstStyle/>
+          <a:p>
+            <a:r>
+              <a:rPr lang="en-US"/>
+              <a:t>Vincenzo Gulisano</a:t>
+            </a:r>
+          </a:p>
+        </p:txBody>
+      </p:sp>
+      <p:sp>
+        <p:nvSpPr>
+          <p:cNvPr id="5" name="Footer Placeholder 4"/>
+          <p:cNvSpPr>
+            <a:spLocks noGrp="1"/>
+          </p:cNvSpPr>
+          <p:nvPr>
+            <p:ph type="ftr" sz="quarter" idx="11"/>
+          </p:nvPr>
+        </p:nvSpPr>
+        <p:spPr/>
+        <p:txBody>
+          <a:bodyPr/>
+          <a:lstStyle/>
+          <a:p>
+            <a:r>
+              <a:rPr lang="en-US"/>
+              <a:t>Operating Systems - Virtualization</a:t>
+            </a:r>
+          </a:p>
+        </p:txBody>
+      </p:sp>
+      <p:sp>
+        <p:nvSpPr>
+          <p:cNvPr id="6" name="Slide Number Placeholder 5"/>
+          <p:cNvSpPr>
+            <a:spLocks noGrp="1"/>
+          </p:cNvSpPr>
+          <p:nvPr>
+            <p:ph type="sldNum" sz="quarter" idx="12"/>
+          </p:nvPr>
+        </p:nvSpPr>
+        <p:spPr/>
+        <p:txBody>
+          <a:bodyPr/>
+          <a:lstStyle/>
+          <a:p>
+            <a:fld id="{95AAEEEC-DCEC-4178-AB14-E7254A15A296}" type="slidenum">
+              <a:rPr lang="en-US" smtClean="0"/>
+              <a:t>‹#›</a:t>
+            </a:fld>
+            <a:endParaRPr lang="en-US"/>
+          </a:p>
+        </p:txBody>
+      </p:sp>
+    </p:spTree>
+    <p:extLst>
+      <p:ext uri="{BB962C8B-B14F-4D97-AF65-F5344CB8AC3E}">
+        <p14:creationId xmlns:p14="http://schemas.microsoft.com/office/powerpoint/2010/main" val="2353441736"/>
+      </p:ext>
+    </p:extLst>
+  </p:cSld>
+  <p:clrMapOvr>
+    <a:masterClrMapping/>
+  </p:clrMapOvr>
+</p:sldLayout>
+</file>
+
+<file path=ppt/slideLayouts/slideLayout15.xml><?xml version="1.0" encoding="utf-8"?>
+<p:sldLayout xmlns:a="http://schemas.openxmlformats.org/drawingml/2006/main" xmlns:r="http://schemas.openxmlformats.org/officeDocument/2006/relationships" xmlns:p="http://schemas.openxmlformats.org/presentationml/2006/main" type="secHead" preserve="1">
+  <p:cSld name="Section Header">
+    <p:spTree>
+      <p:nvGrpSpPr>
+        <p:cNvPr id="1" name=""/>
+        <p:cNvGrpSpPr/>
+        <p:nvPr/>
+      </p:nvGrpSpPr>
+      <p:grpSpPr>
+        <a:xfrm>
+          <a:off x="0" y="0"/>
+          <a:ext cx="0" cy="0"/>
+          <a:chOff x="0" y="0"/>
+          <a:chExt cx="0" cy="0"/>
+        </a:xfrm>
+      </p:grpSpPr>
+      <p:sp>
+        <p:nvSpPr>
+          <p:cNvPr id="2" name="Title 1"/>
+          <p:cNvSpPr>
+            <a:spLocks noGrp="1"/>
+          </p:cNvSpPr>
+          <p:nvPr>
+            <p:ph type="title"/>
+          </p:nvPr>
+        </p:nvSpPr>
+        <p:spPr>
+          <a:xfrm>
+            <a:off x="831851" y="1709740"/>
+            <a:ext cx="10515600" cy="2852737"/>
+          </a:xfrm>
+        </p:spPr>
+        <p:txBody>
+          <a:bodyPr anchor="b"/>
+          <a:lstStyle>
+            <a:lvl1pPr>
+              <a:defRPr sz="4500"/>
+            </a:lvl1pPr>
+          </a:lstStyle>
+          <a:p>
+            <a:r>
+              <a:rPr lang="en-US"/>
+              <a:t>Click to edit Master title style</a:t>
+            </a:r>
+          </a:p>
+        </p:txBody>
+      </p:sp>
+      <p:sp>
+        <p:nvSpPr>
+          <p:cNvPr id="3" name="Text Placeholder 2"/>
+          <p:cNvSpPr>
+            <a:spLocks noGrp="1"/>
+          </p:cNvSpPr>
+          <p:nvPr>
+            <p:ph type="body" idx="1"/>
+          </p:nvPr>
+        </p:nvSpPr>
+        <p:spPr>
+          <a:xfrm>
+            <a:off x="831851" y="4589465"/>
+            <a:ext cx="10515600" cy="1500187"/>
+          </a:xfrm>
+        </p:spPr>
+        <p:txBody>
+          <a:bodyPr/>
+          <a:lstStyle>
+            <a:lvl1pPr marL="0" indent="0">
+              <a:buNone/>
+              <a:defRPr sz="1800">
+                <a:solidFill>
+                  <a:schemeClr val="tx1">
+                    <a:tint val="75000"/>
+                  </a:schemeClr>
+                </a:solidFill>
+              </a:defRPr>
+            </a:lvl1pPr>
+            <a:lvl2pPr marL="342900" indent="0">
+              <a:buNone/>
+              <a:defRPr sz="1500">
+                <a:solidFill>
+                  <a:schemeClr val="tx1">
+                    <a:tint val="75000"/>
+                  </a:schemeClr>
+                </a:solidFill>
+              </a:defRPr>
+            </a:lvl2pPr>
+            <a:lvl3pPr marL="685800" indent="0">
+              <a:buNone/>
+              <a:defRPr sz="1350">
+                <a:solidFill>
+                  <a:schemeClr val="tx1">
+                    <a:tint val="75000"/>
+                  </a:schemeClr>
+                </a:solidFill>
+              </a:defRPr>
+            </a:lvl3pPr>
+            <a:lvl4pPr marL="1028700" indent="0">
+              <a:buNone/>
+              <a:defRPr sz="1200">
+                <a:solidFill>
+                  <a:schemeClr val="tx1">
+                    <a:tint val="75000"/>
+                  </a:schemeClr>
+                </a:solidFill>
+              </a:defRPr>
+            </a:lvl4pPr>
+            <a:lvl5pPr marL="1371600" indent="0">
+              <a:buNone/>
+              <a:defRPr sz="1200">
+                <a:solidFill>
+                  <a:schemeClr val="tx1">
+                    <a:tint val="75000"/>
+                  </a:schemeClr>
+                </a:solidFill>
+              </a:defRPr>
+            </a:lvl5pPr>
+            <a:lvl6pPr marL="1714500" indent="0">
+              <a:buNone/>
+              <a:defRPr sz="1200">
+                <a:solidFill>
+                  <a:schemeClr val="tx1">
+                    <a:tint val="75000"/>
+                  </a:schemeClr>
+                </a:solidFill>
+              </a:defRPr>
+            </a:lvl6pPr>
+            <a:lvl7pPr marL="2057400" indent="0">
+              <a:buNone/>
+              <a:defRPr sz="1200">
+                <a:solidFill>
+                  <a:schemeClr val="tx1">
+                    <a:tint val="75000"/>
+                  </a:schemeClr>
+                </a:solidFill>
+              </a:defRPr>
+            </a:lvl7pPr>
+            <a:lvl8pPr marL="2400300" indent="0">
+              <a:buNone/>
+              <a:defRPr sz="1200">
+                <a:solidFill>
+                  <a:schemeClr val="tx1">
+                    <a:tint val="75000"/>
+                  </a:schemeClr>
+                </a:solidFill>
+              </a:defRPr>
+            </a:lvl8pPr>
+            <a:lvl9pPr marL="2743200" indent="0">
+              <a:buNone/>
+              <a:defRPr sz="1200">
+                <a:solidFill>
+                  <a:schemeClr val="tx1">
+                    <a:tint val="75000"/>
+                  </a:schemeClr>
+                </a:solidFill>
+              </a:defRPr>
+            </a:lvl9pPr>
+          </a:lstStyle>
+          <a:p>
+            <a:pPr lvl="0"/>
+            <a:r>
+              <a:rPr lang="en-US"/>
+              <a:t>Click to edit Master text styles</a:t>
+            </a:r>
+          </a:p>
+        </p:txBody>
+      </p:sp>
+      <p:sp>
+        <p:nvSpPr>
+          <p:cNvPr id="4" name="Date Placeholder 3"/>
+          <p:cNvSpPr>
+            <a:spLocks noGrp="1"/>
+          </p:cNvSpPr>
+          <p:nvPr>
+            <p:ph type="dt" sz="half" idx="10"/>
+          </p:nvPr>
+        </p:nvSpPr>
+        <p:spPr/>
+        <p:txBody>
+          <a:bodyPr/>
+          <a:lstStyle/>
+          <a:p>
+            <a:r>
+              <a:rPr lang="en-US"/>
+              <a:t>Vincenzo Gulisano</a:t>
+            </a:r>
+          </a:p>
+        </p:txBody>
+      </p:sp>
+      <p:sp>
+        <p:nvSpPr>
+          <p:cNvPr id="5" name="Footer Placeholder 4"/>
+          <p:cNvSpPr>
+            <a:spLocks noGrp="1"/>
+          </p:cNvSpPr>
+          <p:nvPr>
+            <p:ph type="ftr" sz="quarter" idx="11"/>
+          </p:nvPr>
+        </p:nvSpPr>
+        <p:spPr/>
+        <p:txBody>
+          <a:bodyPr/>
+          <a:lstStyle/>
+          <a:p>
+            <a:r>
+              <a:rPr lang="en-US"/>
+              <a:t>Operating Systems - Virtualization</a:t>
+            </a:r>
+          </a:p>
+        </p:txBody>
+      </p:sp>
+      <p:sp>
+        <p:nvSpPr>
+          <p:cNvPr id="6" name="Slide Number Placeholder 5"/>
+          <p:cNvSpPr>
+            <a:spLocks noGrp="1"/>
+          </p:cNvSpPr>
+          <p:nvPr>
+            <p:ph type="sldNum" sz="quarter" idx="12"/>
+          </p:nvPr>
+        </p:nvSpPr>
+        <p:spPr/>
+        <p:txBody>
+          <a:bodyPr/>
+          <a:lstStyle/>
+          <a:p>
+            <a:fld id="{95AAEEEC-DCEC-4178-AB14-E7254A15A296}" type="slidenum">
+              <a:rPr lang="en-US" smtClean="0"/>
+              <a:t>‹#›</a:t>
+            </a:fld>
+            <a:endParaRPr lang="en-US"/>
+          </a:p>
+        </p:txBody>
+      </p:sp>
+    </p:spTree>
+    <p:extLst>
+      <p:ext uri="{BB962C8B-B14F-4D97-AF65-F5344CB8AC3E}">
+        <p14:creationId xmlns:p14="http://schemas.microsoft.com/office/powerpoint/2010/main" val="1223365028"/>
+      </p:ext>
+    </p:extLst>
+  </p:cSld>
+  <p:clrMapOvr>
+    <a:masterClrMapping/>
+  </p:clrMapOvr>
+</p:sldLayout>
+</file>
+
+<file path=ppt/slideLayouts/slideLayout16.xml><?xml version="1.0" encoding="utf-8"?>
+<p:sldLayout xmlns:a="http://schemas.openxmlformats.org/drawingml/2006/main" xmlns:r="http://schemas.openxmlformats.org/officeDocument/2006/relationships" xmlns:p="http://schemas.openxmlformats.org/presentationml/2006/main" type="twoObj" preserve="1">
+  <p:cSld name="Two Content">
+    <p:spTree>
+      <p:nvGrpSpPr>
+        <p:cNvPr id="1" name=""/>
+        <p:cNvGrpSpPr/>
+        <p:nvPr/>
+      </p:nvGrpSpPr>
+      <p:grpSpPr>
+        <a:xfrm>
+          <a:off x="0" y="0"/>
+          <a:ext cx="0" cy="0"/>
+          <a:chOff x="0" y="0"/>
+          <a:chExt cx="0" cy="0"/>
+        </a:xfrm>
+      </p:grpSpPr>
+      <p:sp>
+        <p:nvSpPr>
+          <p:cNvPr id="2" name="Title 1"/>
+          <p:cNvSpPr>
+            <a:spLocks noGrp="1"/>
+          </p:cNvSpPr>
+          <p:nvPr>
+            <p:ph type="title"/>
+          </p:nvPr>
+        </p:nvSpPr>
+        <p:spPr/>
+        <p:txBody>
+          <a:bodyPr/>
+          <a:lstStyle/>
+          <a:p>
+            <a:r>
+              <a:rPr lang="en-US"/>
+              <a:t>Click to edit Master title style</a:t>
+            </a:r>
+          </a:p>
+        </p:txBody>
+      </p:sp>
+      <p:sp>
+        <p:nvSpPr>
+          <p:cNvPr id="3" name="Content Placeholder 2"/>
+          <p:cNvSpPr>
+            <a:spLocks noGrp="1"/>
+          </p:cNvSpPr>
+          <p:nvPr>
+            <p:ph sz="half" idx="1"/>
+          </p:nvPr>
+        </p:nvSpPr>
+        <p:spPr>
+          <a:xfrm>
+            <a:off x="838200" y="1825625"/>
+            <a:ext cx="5181600" cy="4351338"/>
+          </a:xfrm>
+        </p:spPr>
+        <p:txBody>
+          <a:bodyPr/>
+          <a:lstStyle/>
+          <a:p>
+            <a:pPr lvl="0"/>
+            <a:r>
+              <a:rPr lang="en-US"/>
+              <a:t>Click to edit Master text styles</a:t>
+            </a:r>
+          </a:p>
+          <a:p>
+            <a:pPr lvl="1"/>
+            <a:r>
+              <a:rPr lang="en-US"/>
+              <a:t>Second level</a:t>
+            </a:r>
+          </a:p>
+          <a:p>
+            <a:pPr lvl="2"/>
+            <a:r>
+              <a:rPr lang="en-US"/>
+              <a:t>Third level</a:t>
+            </a:r>
+          </a:p>
+          <a:p>
+            <a:pPr lvl="3"/>
+            <a:r>
+              <a:rPr lang="en-US"/>
+              <a:t>Fourth level</a:t>
+            </a:r>
+          </a:p>
+          <a:p>
+            <a:pPr lvl="4"/>
+            <a:r>
+              <a:rPr lang="en-US"/>
+              <a:t>Fifth level</a:t>
+            </a:r>
+          </a:p>
+        </p:txBody>
+      </p:sp>
+      <p:sp>
+        <p:nvSpPr>
+          <p:cNvPr id="4" name="Content Placeholder 3"/>
+          <p:cNvSpPr>
+            <a:spLocks noGrp="1"/>
+          </p:cNvSpPr>
+          <p:nvPr>
+            <p:ph sz="half" idx="2"/>
+          </p:nvPr>
+        </p:nvSpPr>
+        <p:spPr>
+          <a:xfrm>
+            <a:off x="6172200" y="1825625"/>
+            <a:ext cx="5181600" cy="4351338"/>
+          </a:xfrm>
+        </p:spPr>
+        <p:txBody>
+          <a:bodyPr/>
+          <a:lstStyle/>
+          <a:p>
+            <a:pPr lvl="0"/>
+            <a:r>
+              <a:rPr lang="en-US"/>
+              <a:t>Click to edit Master text styles</a:t>
+            </a:r>
+          </a:p>
+          <a:p>
+            <a:pPr lvl="1"/>
+            <a:r>
+              <a:rPr lang="en-US"/>
+              <a:t>Second level</a:t>
+            </a:r>
+          </a:p>
+          <a:p>
+            <a:pPr lvl="2"/>
+            <a:r>
+              <a:rPr lang="en-US"/>
+              <a:t>Third level</a:t>
+            </a:r>
+          </a:p>
+          <a:p>
+            <a:pPr lvl="3"/>
+            <a:r>
+              <a:rPr lang="en-US"/>
+              <a:t>Fourth level</a:t>
+            </a:r>
+          </a:p>
+          <a:p>
+            <a:pPr lvl="4"/>
+            <a:r>
+              <a:rPr lang="en-US"/>
+              <a:t>Fifth level</a:t>
+            </a:r>
+          </a:p>
+        </p:txBody>
+      </p:sp>
+      <p:sp>
+        <p:nvSpPr>
+          <p:cNvPr id="5" name="Date Placeholder 4"/>
+          <p:cNvSpPr>
+            <a:spLocks noGrp="1"/>
+          </p:cNvSpPr>
+          <p:nvPr>
+            <p:ph type="dt" sz="half" idx="10"/>
+          </p:nvPr>
+        </p:nvSpPr>
+        <p:spPr/>
+        <p:txBody>
+          <a:bodyPr/>
+          <a:lstStyle/>
+          <a:p>
+            <a:r>
+              <a:rPr lang="en-US"/>
+              <a:t>Vincenzo Gulisano</a:t>
+            </a:r>
+          </a:p>
+        </p:txBody>
+      </p:sp>
+      <p:sp>
+        <p:nvSpPr>
+          <p:cNvPr id="6" name="Footer Placeholder 5"/>
+          <p:cNvSpPr>
+            <a:spLocks noGrp="1"/>
+          </p:cNvSpPr>
+          <p:nvPr>
+            <p:ph type="ftr" sz="quarter" idx="11"/>
+          </p:nvPr>
+        </p:nvSpPr>
+        <p:spPr/>
+        <p:txBody>
+          <a:bodyPr/>
+          <a:lstStyle/>
+          <a:p>
+            <a:r>
+              <a:rPr lang="en-US"/>
+              <a:t>Operating Systems - Virtualization</a:t>
+            </a:r>
+          </a:p>
+        </p:txBody>
+      </p:sp>
+      <p:sp>
+        <p:nvSpPr>
+          <p:cNvPr id="7" name="Slide Number Placeholder 6"/>
+          <p:cNvSpPr>
+            <a:spLocks noGrp="1"/>
+          </p:cNvSpPr>
+          <p:nvPr>
+            <p:ph type="sldNum" sz="quarter" idx="12"/>
+          </p:nvPr>
+        </p:nvSpPr>
+        <p:spPr/>
+        <p:txBody>
+          <a:bodyPr/>
+          <a:lstStyle/>
+          <a:p>
+            <a:fld id="{95AAEEEC-DCEC-4178-AB14-E7254A15A296}" type="slidenum">
+              <a:rPr lang="en-US" smtClean="0"/>
+              <a:t>‹#›</a:t>
+            </a:fld>
+            <a:endParaRPr lang="en-US"/>
+          </a:p>
+        </p:txBody>
+      </p:sp>
+    </p:spTree>
+    <p:extLst>
+      <p:ext uri="{BB962C8B-B14F-4D97-AF65-F5344CB8AC3E}">
+        <p14:creationId xmlns:p14="http://schemas.microsoft.com/office/powerpoint/2010/main" val="3899652481"/>
+      </p:ext>
+    </p:extLst>
+  </p:cSld>
+  <p:clrMapOvr>
+    <a:masterClrMapping/>
+  </p:clrMapOvr>
+</p:sldLayout>
+</file>
+
+<file path=ppt/slideLayouts/slideLayout17.xml><?xml version="1.0" encoding="utf-8"?>
+<p:sldLayout xmlns:a="http://schemas.openxmlformats.org/drawingml/2006/main" xmlns:r="http://schemas.openxmlformats.org/officeDocument/2006/relationships" xmlns:p="http://schemas.openxmlformats.org/presentationml/2006/main" type="twoTxTwoObj" preserve="1">
+  <p:cSld name="Comparison">
+    <p:spTree>
+      <p:nvGrpSpPr>
+        <p:cNvPr id="1" name=""/>
+        <p:cNvGrpSpPr/>
+        <p:nvPr/>
+      </p:nvGrpSpPr>
+      <p:grpSpPr>
+        <a:xfrm>
+          <a:off x="0" y="0"/>
+          <a:ext cx="0" cy="0"/>
+          <a:chOff x="0" y="0"/>
+          <a:chExt cx="0" cy="0"/>
+        </a:xfrm>
+      </p:grpSpPr>
+      <p:sp>
+        <p:nvSpPr>
+          <p:cNvPr id="2" name="Title 1"/>
+          <p:cNvSpPr>
+            <a:spLocks noGrp="1"/>
+          </p:cNvSpPr>
+          <p:nvPr>
+            <p:ph type="title"/>
+          </p:nvPr>
+        </p:nvSpPr>
+        <p:spPr>
+          <a:xfrm>
+            <a:off x="839788" y="365126"/>
+            <a:ext cx="10515600" cy="1325563"/>
+          </a:xfrm>
+        </p:spPr>
+        <p:txBody>
+          <a:bodyPr/>
+          <a:lstStyle/>
+          <a:p>
+            <a:r>
+              <a:rPr lang="en-US"/>
+              <a:t>Click to edit Master title style</a:t>
+            </a:r>
+          </a:p>
+        </p:txBody>
+      </p:sp>
+      <p:sp>
+        <p:nvSpPr>
+          <p:cNvPr id="3" name="Text Placeholder 2"/>
+          <p:cNvSpPr>
+            <a:spLocks noGrp="1"/>
+          </p:cNvSpPr>
+          <p:nvPr>
+            <p:ph type="body" idx="1"/>
+          </p:nvPr>
+        </p:nvSpPr>
+        <p:spPr>
+          <a:xfrm>
+            <a:off x="839789" y="1681163"/>
+            <a:ext cx="5157787" cy="823912"/>
+          </a:xfrm>
+        </p:spPr>
+        <p:txBody>
+          <a:bodyPr anchor="b"/>
+          <a:lstStyle>
+            <a:lvl1pPr marL="0" indent="0">
+              <a:buNone/>
+              <a:defRPr sz="1800" b="1"/>
+            </a:lvl1pPr>
+            <a:lvl2pPr marL="342900" indent="0">
+              <a:buNone/>
+              <a:defRPr sz="1500" b="1"/>
+            </a:lvl2pPr>
+            <a:lvl3pPr marL="685800" indent="0">
+              <a:buNone/>
+              <a:defRPr sz="1350" b="1"/>
+            </a:lvl3pPr>
+            <a:lvl4pPr marL="1028700" indent="0">
+              <a:buNone/>
+              <a:defRPr sz="1200" b="1"/>
+            </a:lvl4pPr>
+            <a:lvl5pPr marL="1371600" indent="0">
+              <a:buNone/>
+              <a:defRPr sz="1200" b="1"/>
+            </a:lvl5pPr>
+            <a:lvl6pPr marL="1714500" indent="0">
+              <a:buNone/>
+              <a:defRPr sz="1200" b="1"/>
+            </a:lvl6pPr>
+            <a:lvl7pPr marL="2057400" indent="0">
+              <a:buNone/>
+              <a:defRPr sz="1200" b="1"/>
+            </a:lvl7pPr>
+            <a:lvl8pPr marL="2400300" indent="0">
+              <a:buNone/>
+              <a:defRPr sz="1200" b="1"/>
+            </a:lvl8pPr>
+            <a:lvl9pPr marL="2743200" indent="0">
+              <a:buNone/>
+              <a:defRPr sz="1200" b="1"/>
+            </a:lvl9pPr>
+          </a:lstStyle>
+          <a:p>
+            <a:pPr lvl="0"/>
+            <a:r>
+              <a:rPr lang="en-US"/>
+              <a:t>Click to edit Master text styles</a:t>
+            </a:r>
+          </a:p>
+        </p:txBody>
+      </p:sp>
+      <p:sp>
+        <p:nvSpPr>
+          <p:cNvPr id="4" name="Content Placeholder 3"/>
+          <p:cNvSpPr>
+            <a:spLocks noGrp="1"/>
+          </p:cNvSpPr>
+          <p:nvPr>
+            <p:ph sz="half" idx="2"/>
+          </p:nvPr>
+        </p:nvSpPr>
+        <p:spPr>
+          <a:xfrm>
+            <a:off x="839789" y="2505075"/>
+            <a:ext cx="5157787" cy="3684588"/>
+          </a:xfrm>
+        </p:spPr>
+        <p:txBody>
+          <a:bodyPr/>
+          <a:lstStyle/>
+          <a:p>
+            <a:pPr lvl="0"/>
+            <a:r>
+              <a:rPr lang="en-US"/>
+              <a:t>Click to edit Master text styles</a:t>
+            </a:r>
+          </a:p>
+          <a:p>
+            <a:pPr lvl="1"/>
+            <a:r>
+              <a:rPr lang="en-US"/>
+              <a:t>Second level</a:t>
+            </a:r>
+          </a:p>
+          <a:p>
+            <a:pPr lvl="2"/>
+            <a:r>
+              <a:rPr lang="en-US"/>
+              <a:t>Third level</a:t>
+            </a:r>
+          </a:p>
+          <a:p>
+            <a:pPr lvl="3"/>
+            <a:r>
+              <a:rPr lang="en-US"/>
+              <a:t>Fourth level</a:t>
+            </a:r>
+          </a:p>
+          <a:p>
+            <a:pPr lvl="4"/>
+            <a:r>
+              <a:rPr lang="en-US"/>
+              <a:t>Fifth level</a:t>
+            </a:r>
+          </a:p>
+        </p:txBody>
+      </p:sp>
+      <p:sp>
+        <p:nvSpPr>
+          <p:cNvPr id="5" name="Text Placeholder 4"/>
+          <p:cNvSpPr>
+            <a:spLocks noGrp="1"/>
+          </p:cNvSpPr>
+          <p:nvPr>
+            <p:ph type="body" sz="quarter" idx="3"/>
+          </p:nvPr>
+        </p:nvSpPr>
+        <p:spPr>
+          <a:xfrm>
+            <a:off x="6172201" y="1681163"/>
+            <a:ext cx="5183188" cy="823912"/>
+          </a:xfrm>
+        </p:spPr>
+        <p:txBody>
+          <a:bodyPr anchor="b"/>
+          <a:lstStyle>
+            <a:lvl1pPr marL="0" indent="0">
+              <a:buNone/>
+              <a:defRPr sz="1800" b="1"/>
+            </a:lvl1pPr>
+            <a:lvl2pPr marL="342900" indent="0">
+              <a:buNone/>
+              <a:defRPr sz="1500" b="1"/>
+            </a:lvl2pPr>
+            <a:lvl3pPr marL="685800" indent="0">
+              <a:buNone/>
+              <a:defRPr sz="1350" b="1"/>
+            </a:lvl3pPr>
+            <a:lvl4pPr marL="1028700" indent="0">
+              <a:buNone/>
+              <a:defRPr sz="1200" b="1"/>
+            </a:lvl4pPr>
+            <a:lvl5pPr marL="1371600" indent="0">
+              <a:buNone/>
+              <a:defRPr sz="1200" b="1"/>
+            </a:lvl5pPr>
+            <a:lvl6pPr marL="1714500" indent="0">
+              <a:buNone/>
+              <a:defRPr sz="1200" b="1"/>
+            </a:lvl6pPr>
+            <a:lvl7pPr marL="2057400" indent="0">
+              <a:buNone/>
+              <a:defRPr sz="1200" b="1"/>
+            </a:lvl7pPr>
+            <a:lvl8pPr marL="2400300" indent="0">
+              <a:buNone/>
+              <a:defRPr sz="1200" b="1"/>
+            </a:lvl8pPr>
+            <a:lvl9pPr marL="2743200" indent="0">
+              <a:buNone/>
+              <a:defRPr sz="1200" b="1"/>
+            </a:lvl9pPr>
+          </a:lstStyle>
+          <a:p>
+            <a:pPr lvl="0"/>
+            <a:r>
+              <a:rPr lang="en-US"/>
+              <a:t>Click to edit Master text styles</a:t>
+            </a:r>
+          </a:p>
+        </p:txBody>
+      </p:sp>
+      <p:sp>
+        <p:nvSpPr>
+          <p:cNvPr id="6" name="Content Placeholder 5"/>
+          <p:cNvSpPr>
+            <a:spLocks noGrp="1"/>
+          </p:cNvSpPr>
+          <p:nvPr>
+            <p:ph sz="quarter" idx="4"/>
+          </p:nvPr>
+        </p:nvSpPr>
+        <p:spPr>
+          <a:xfrm>
+            <a:off x="6172201" y="2505075"/>
+            <a:ext cx="5183188" cy="3684588"/>
+          </a:xfrm>
+        </p:spPr>
+        <p:txBody>
+          <a:bodyPr/>
+          <a:lstStyle/>
+          <a:p>
+            <a:pPr lvl="0"/>
+            <a:r>
+              <a:rPr lang="en-US"/>
+              <a:t>Click to edit Master text styles</a:t>
+            </a:r>
+          </a:p>
+          <a:p>
+            <a:pPr lvl="1"/>
+            <a:r>
+              <a:rPr lang="en-US"/>
+              <a:t>Second level</a:t>
+            </a:r>
+          </a:p>
+          <a:p>
+            <a:pPr lvl="2"/>
+            <a:r>
+              <a:rPr lang="en-US"/>
+              <a:t>Third level</a:t>
+            </a:r>
+          </a:p>
+          <a:p>
+            <a:pPr lvl="3"/>
+            <a:r>
+              <a:rPr lang="en-US"/>
+              <a:t>Fourth level</a:t>
+            </a:r>
+          </a:p>
+          <a:p>
+            <a:pPr lvl="4"/>
+            <a:r>
+              <a:rPr lang="en-US"/>
+              <a:t>Fifth level</a:t>
+            </a:r>
+          </a:p>
+        </p:txBody>
+      </p:sp>
+      <p:sp>
+        <p:nvSpPr>
+          <p:cNvPr id="7" name="Date Placeholder 6"/>
+          <p:cNvSpPr>
+            <a:spLocks noGrp="1"/>
+          </p:cNvSpPr>
+          <p:nvPr>
+            <p:ph type="dt" sz="half" idx="10"/>
+          </p:nvPr>
+        </p:nvSpPr>
+        <p:spPr/>
+        <p:txBody>
+          <a:bodyPr/>
+          <a:lstStyle/>
+          <a:p>
+            <a:r>
+              <a:rPr lang="en-US"/>
+              <a:t>Vincenzo Gulisano</a:t>
+            </a:r>
+          </a:p>
+        </p:txBody>
+      </p:sp>
+      <p:sp>
+        <p:nvSpPr>
+          <p:cNvPr id="8" name="Footer Placeholder 7"/>
+          <p:cNvSpPr>
+            <a:spLocks noGrp="1"/>
+          </p:cNvSpPr>
+          <p:nvPr>
+            <p:ph type="ftr" sz="quarter" idx="11"/>
+          </p:nvPr>
+        </p:nvSpPr>
+        <p:spPr/>
+        <p:txBody>
+          <a:bodyPr/>
+          <a:lstStyle/>
+          <a:p>
+            <a:r>
+              <a:rPr lang="en-US"/>
+              <a:t>Operating Systems - Virtualization</a:t>
+            </a:r>
+          </a:p>
+        </p:txBody>
+      </p:sp>
+      <p:sp>
+        <p:nvSpPr>
+          <p:cNvPr id="9" name="Slide Number Placeholder 8"/>
+          <p:cNvSpPr>
+            <a:spLocks noGrp="1"/>
+          </p:cNvSpPr>
+          <p:nvPr>
+            <p:ph type="sldNum" sz="quarter" idx="12"/>
+          </p:nvPr>
+        </p:nvSpPr>
+        <p:spPr/>
+        <p:txBody>
+          <a:bodyPr/>
+          <a:lstStyle/>
+          <a:p>
+            <a:fld id="{95AAEEEC-DCEC-4178-AB14-E7254A15A296}" type="slidenum">
+              <a:rPr lang="en-US" smtClean="0"/>
+              <a:t>‹#›</a:t>
+            </a:fld>
+            <a:endParaRPr lang="en-US"/>
+          </a:p>
+        </p:txBody>
+      </p:sp>
+    </p:spTree>
+    <p:extLst>
+      <p:ext uri="{BB962C8B-B14F-4D97-AF65-F5344CB8AC3E}">
+        <p14:creationId xmlns:p14="http://schemas.microsoft.com/office/powerpoint/2010/main" val="3845164833"/>
+      </p:ext>
+    </p:extLst>
+  </p:cSld>
+  <p:clrMapOvr>
+    <a:masterClrMapping/>
+  </p:clrMapOvr>
+</p:sldLayout>
+</file>
+
+<file path=ppt/slideLayouts/slideLayout18.xml><?xml version="1.0" encoding="utf-8"?>
+<p:sldLayout xmlns:a="http://schemas.openxmlformats.org/drawingml/2006/main" xmlns:r="http://schemas.openxmlformats.org/officeDocument/2006/relationships" xmlns:p="http://schemas.openxmlformats.org/presentationml/2006/main" type="titleOnly" preserve="1">
+  <p:cSld name="Title Only">
+    <p:spTree>
+      <p:nvGrpSpPr>
+        <p:cNvPr id="1" name=""/>
+        <p:cNvGrpSpPr/>
+        <p:nvPr/>
+      </p:nvGrpSpPr>
+      <p:grpSpPr>
+        <a:xfrm>
+          <a:off x="0" y="0"/>
+          <a:ext cx="0" cy="0"/>
+          <a:chOff x="0" y="0"/>
+          <a:chExt cx="0" cy="0"/>
+        </a:xfrm>
+      </p:grpSpPr>
+      <p:sp>
+        <p:nvSpPr>
+          <p:cNvPr id="2" name="Title 1"/>
+          <p:cNvSpPr>
+            <a:spLocks noGrp="1"/>
+          </p:cNvSpPr>
+          <p:nvPr>
+            <p:ph type="title"/>
+          </p:nvPr>
+        </p:nvSpPr>
+        <p:spPr/>
+        <p:txBody>
+          <a:bodyPr/>
+          <a:lstStyle/>
+          <a:p>
+            <a:r>
+              <a:rPr lang="en-US"/>
+              <a:t>Click to edit Master title style</a:t>
+            </a:r>
+          </a:p>
+        </p:txBody>
+      </p:sp>
+      <p:sp>
+        <p:nvSpPr>
+          <p:cNvPr id="3" name="Date Placeholder 2"/>
+          <p:cNvSpPr>
+            <a:spLocks noGrp="1"/>
+          </p:cNvSpPr>
+          <p:nvPr>
+            <p:ph type="dt" sz="half" idx="10"/>
+          </p:nvPr>
+        </p:nvSpPr>
+        <p:spPr/>
+        <p:txBody>
+          <a:bodyPr/>
+          <a:lstStyle/>
+          <a:p>
+            <a:r>
+              <a:rPr lang="en-US"/>
+              <a:t>Vincenzo Gulisano</a:t>
+            </a:r>
+          </a:p>
+        </p:txBody>
+      </p:sp>
+      <p:sp>
+        <p:nvSpPr>
+          <p:cNvPr id="4" name="Footer Placeholder 3"/>
+          <p:cNvSpPr>
+            <a:spLocks noGrp="1"/>
+          </p:cNvSpPr>
+          <p:nvPr>
+            <p:ph type="ftr" sz="quarter" idx="11"/>
+          </p:nvPr>
+        </p:nvSpPr>
+        <p:spPr/>
+        <p:txBody>
+          <a:bodyPr/>
+          <a:lstStyle/>
+          <a:p>
+            <a:r>
+              <a:rPr lang="en-US"/>
+              <a:t>Operating Systems - Virtualization</a:t>
+            </a:r>
+          </a:p>
+        </p:txBody>
+      </p:sp>
+      <p:sp>
+        <p:nvSpPr>
+          <p:cNvPr id="5" name="Slide Number Placeholder 4"/>
+          <p:cNvSpPr>
+            <a:spLocks noGrp="1"/>
+          </p:cNvSpPr>
+          <p:nvPr>
+            <p:ph type="sldNum" sz="quarter" idx="12"/>
+          </p:nvPr>
+        </p:nvSpPr>
+        <p:spPr/>
+        <p:txBody>
+          <a:bodyPr/>
+          <a:lstStyle/>
+          <a:p>
+            <a:fld id="{95AAEEEC-DCEC-4178-AB14-E7254A15A296}" type="slidenum">
+              <a:rPr lang="en-US" smtClean="0"/>
+              <a:t>‹#›</a:t>
+            </a:fld>
+            <a:endParaRPr lang="en-US"/>
+          </a:p>
+        </p:txBody>
+      </p:sp>
+    </p:spTree>
+    <p:extLst>
+      <p:ext uri="{BB962C8B-B14F-4D97-AF65-F5344CB8AC3E}">
+        <p14:creationId xmlns:p14="http://schemas.microsoft.com/office/powerpoint/2010/main" val="3548537334"/>
+      </p:ext>
+    </p:extLst>
+  </p:cSld>
+  <p:clrMapOvr>
+    <a:masterClrMapping/>
+  </p:clrMapOvr>
+</p:sldLayout>
+</file>
+
+<file path=ppt/slideLayouts/slideLayout19.xml><?xml version="1.0" encoding="utf-8"?>
+<p:sldLayout xmlns:a="http://schemas.openxmlformats.org/drawingml/2006/main" xmlns:r="http://schemas.openxmlformats.org/officeDocument/2006/relationships" xmlns:p="http://schemas.openxmlformats.org/presentationml/2006/main" type="blank" preserve="1">
+  <p:cSld name="Blank">
+    <p:spTree>
+      <p:nvGrpSpPr>
+        <p:cNvPr id="1" name=""/>
+        <p:cNvGrpSpPr/>
+        <p:nvPr/>
+      </p:nvGrpSpPr>
+      <p:grpSpPr>
+        <a:xfrm>
+          <a:off x="0" y="0"/>
+          <a:ext cx="0" cy="0"/>
+          <a:chOff x="0" y="0"/>
+          <a:chExt cx="0" cy="0"/>
+        </a:xfrm>
+      </p:grpSpPr>
+      <p:sp>
+        <p:nvSpPr>
+          <p:cNvPr id="2" name="Date Placeholder 1"/>
+          <p:cNvSpPr>
+            <a:spLocks noGrp="1"/>
+          </p:cNvSpPr>
+          <p:nvPr>
+            <p:ph type="dt" sz="half" idx="10"/>
+          </p:nvPr>
+        </p:nvSpPr>
+        <p:spPr/>
+        <p:txBody>
+          <a:bodyPr/>
+          <a:lstStyle/>
+          <a:p>
+            <a:r>
+              <a:rPr lang="en-US"/>
+              <a:t>Vincenzo Gulisano</a:t>
+            </a:r>
+          </a:p>
+        </p:txBody>
+      </p:sp>
+      <p:sp>
+        <p:nvSpPr>
+          <p:cNvPr id="3" name="Footer Placeholder 2"/>
+          <p:cNvSpPr>
+            <a:spLocks noGrp="1"/>
+          </p:cNvSpPr>
+          <p:nvPr>
+            <p:ph type="ftr" sz="quarter" idx="11"/>
+          </p:nvPr>
+        </p:nvSpPr>
+        <p:spPr/>
+        <p:txBody>
+          <a:bodyPr/>
+          <a:lstStyle/>
+          <a:p>
+            <a:r>
+              <a:rPr lang="en-US"/>
+              <a:t>Operating Systems - Virtualization</a:t>
+            </a:r>
+          </a:p>
+        </p:txBody>
+      </p:sp>
+      <p:sp>
+        <p:nvSpPr>
+          <p:cNvPr id="4" name="Slide Number Placeholder 3"/>
+          <p:cNvSpPr>
+            <a:spLocks noGrp="1"/>
+          </p:cNvSpPr>
+          <p:nvPr>
+            <p:ph type="sldNum" sz="quarter" idx="12"/>
+          </p:nvPr>
+        </p:nvSpPr>
+        <p:spPr/>
+        <p:txBody>
+          <a:bodyPr/>
+          <a:lstStyle/>
+          <a:p>
+            <a:fld id="{95AAEEEC-DCEC-4178-AB14-E7254A15A296}" type="slidenum">
+              <a:rPr lang="en-US" smtClean="0"/>
+              <a:t>‹#›</a:t>
+            </a:fld>
+            <a:endParaRPr lang="en-US"/>
+          </a:p>
+        </p:txBody>
+      </p:sp>
+    </p:spTree>
+    <p:extLst>
+      <p:ext uri="{BB962C8B-B14F-4D97-AF65-F5344CB8AC3E}">
+        <p14:creationId xmlns:p14="http://schemas.microsoft.com/office/powerpoint/2010/main" val="2037179053"/>
+      </p:ext>
+    </p:extLst>
+  </p:cSld>
+  <p:clrMapOvr>
+    <a:masterClrMapping/>
+  </p:clrMapOvr>
+</p:sldLayout>
+</file>
+
 <file path=ppt/slideLayouts/slideLayout2.xml><?xml version="1.0" encoding="utf-8"?>
 <p:sldLayout xmlns:a="http://schemas.openxmlformats.org/drawingml/2006/main" xmlns:r="http://schemas.openxmlformats.org/officeDocument/2006/relationships" xmlns:p="http://schemas.openxmlformats.org/presentationml/2006/main" type="obj" preserve="1">
   <p:cSld name="Title and Content">
@@ -14597,7 +16622,7 @@
           <a:lstStyle/>
           <a:p>
             <a:r>
-              <a:rPr lang="sv-SE"/>
+              <a:rPr lang="en-US"/>
               <a:t>Vincenzo Gulisano</a:t>
             </a:r>
             <a:endParaRPr lang="en-SE"/>
@@ -14666,6 +16691,949 @@
     <p:extLst>
       <p:ext uri="{BB962C8B-B14F-4D97-AF65-F5344CB8AC3E}">
         <p14:creationId xmlns:p14="http://schemas.microsoft.com/office/powerpoint/2010/main" val="1556232067"/>
+      </p:ext>
+    </p:extLst>
+  </p:cSld>
+  <p:clrMapOvr>
+    <a:masterClrMapping/>
+  </p:clrMapOvr>
+</p:sldLayout>
+</file>
+
+<file path=ppt/slideLayouts/slideLayout20.xml><?xml version="1.0" encoding="utf-8"?>
+<p:sldLayout xmlns:a="http://schemas.openxmlformats.org/drawingml/2006/main" xmlns:r="http://schemas.openxmlformats.org/officeDocument/2006/relationships" xmlns:p="http://schemas.openxmlformats.org/presentationml/2006/main" type="objTx" preserve="1">
+  <p:cSld name="Content with Caption">
+    <p:spTree>
+      <p:nvGrpSpPr>
+        <p:cNvPr id="1" name=""/>
+        <p:cNvGrpSpPr/>
+        <p:nvPr/>
+      </p:nvGrpSpPr>
+      <p:grpSpPr>
+        <a:xfrm>
+          <a:off x="0" y="0"/>
+          <a:ext cx="0" cy="0"/>
+          <a:chOff x="0" y="0"/>
+          <a:chExt cx="0" cy="0"/>
+        </a:xfrm>
+      </p:grpSpPr>
+      <p:sp>
+        <p:nvSpPr>
+          <p:cNvPr id="2" name="Title 1"/>
+          <p:cNvSpPr>
+            <a:spLocks noGrp="1"/>
+          </p:cNvSpPr>
+          <p:nvPr>
+            <p:ph type="title"/>
+          </p:nvPr>
+        </p:nvSpPr>
+        <p:spPr>
+          <a:xfrm>
+            <a:off x="839788" y="457200"/>
+            <a:ext cx="3932237" cy="1600200"/>
+          </a:xfrm>
+        </p:spPr>
+        <p:txBody>
+          <a:bodyPr anchor="b"/>
+          <a:lstStyle>
+            <a:lvl1pPr>
+              <a:defRPr sz="2400"/>
+            </a:lvl1pPr>
+          </a:lstStyle>
+          <a:p>
+            <a:r>
+              <a:rPr lang="en-US"/>
+              <a:t>Click to edit Master title style</a:t>
+            </a:r>
+          </a:p>
+        </p:txBody>
+      </p:sp>
+      <p:sp>
+        <p:nvSpPr>
+          <p:cNvPr id="3" name="Content Placeholder 2"/>
+          <p:cNvSpPr>
+            <a:spLocks noGrp="1"/>
+          </p:cNvSpPr>
+          <p:nvPr>
+            <p:ph idx="1"/>
+          </p:nvPr>
+        </p:nvSpPr>
+        <p:spPr>
+          <a:xfrm>
+            <a:off x="5183188" y="987426"/>
+            <a:ext cx="6172200" cy="4873625"/>
+          </a:xfrm>
+        </p:spPr>
+        <p:txBody>
+          <a:bodyPr/>
+          <a:lstStyle>
+            <a:lvl1pPr>
+              <a:defRPr sz="2400"/>
+            </a:lvl1pPr>
+            <a:lvl2pPr>
+              <a:defRPr sz="2100"/>
+            </a:lvl2pPr>
+            <a:lvl3pPr>
+              <a:defRPr sz="1800"/>
+            </a:lvl3pPr>
+            <a:lvl4pPr>
+              <a:defRPr sz="1500"/>
+            </a:lvl4pPr>
+            <a:lvl5pPr>
+              <a:defRPr sz="1500"/>
+            </a:lvl5pPr>
+            <a:lvl6pPr>
+              <a:defRPr sz="1500"/>
+            </a:lvl6pPr>
+            <a:lvl7pPr>
+              <a:defRPr sz="1500"/>
+            </a:lvl7pPr>
+            <a:lvl8pPr>
+              <a:defRPr sz="1500"/>
+            </a:lvl8pPr>
+            <a:lvl9pPr>
+              <a:defRPr sz="1500"/>
+            </a:lvl9pPr>
+          </a:lstStyle>
+          <a:p>
+            <a:pPr lvl="0"/>
+            <a:r>
+              <a:rPr lang="en-US"/>
+              <a:t>Click to edit Master text styles</a:t>
+            </a:r>
+          </a:p>
+          <a:p>
+            <a:pPr lvl="1"/>
+            <a:r>
+              <a:rPr lang="en-US"/>
+              <a:t>Second level</a:t>
+            </a:r>
+          </a:p>
+          <a:p>
+            <a:pPr lvl="2"/>
+            <a:r>
+              <a:rPr lang="en-US"/>
+              <a:t>Third level</a:t>
+            </a:r>
+          </a:p>
+          <a:p>
+            <a:pPr lvl="3"/>
+            <a:r>
+              <a:rPr lang="en-US"/>
+              <a:t>Fourth level</a:t>
+            </a:r>
+          </a:p>
+          <a:p>
+            <a:pPr lvl="4"/>
+            <a:r>
+              <a:rPr lang="en-US"/>
+              <a:t>Fifth level</a:t>
+            </a:r>
+          </a:p>
+        </p:txBody>
+      </p:sp>
+      <p:sp>
+        <p:nvSpPr>
+          <p:cNvPr id="4" name="Text Placeholder 3"/>
+          <p:cNvSpPr>
+            <a:spLocks noGrp="1"/>
+          </p:cNvSpPr>
+          <p:nvPr>
+            <p:ph type="body" sz="half" idx="2"/>
+          </p:nvPr>
+        </p:nvSpPr>
+        <p:spPr>
+          <a:xfrm>
+            <a:off x="839788" y="2057400"/>
+            <a:ext cx="3932237" cy="3811588"/>
+          </a:xfrm>
+        </p:spPr>
+        <p:txBody>
+          <a:bodyPr/>
+          <a:lstStyle>
+            <a:lvl1pPr marL="0" indent="0">
+              <a:buNone/>
+              <a:defRPr sz="1200"/>
+            </a:lvl1pPr>
+            <a:lvl2pPr marL="342900" indent="0">
+              <a:buNone/>
+              <a:defRPr sz="1050"/>
+            </a:lvl2pPr>
+            <a:lvl3pPr marL="685800" indent="0">
+              <a:buNone/>
+              <a:defRPr sz="900"/>
+            </a:lvl3pPr>
+            <a:lvl4pPr marL="1028700" indent="0">
+              <a:buNone/>
+              <a:defRPr sz="750"/>
+            </a:lvl4pPr>
+            <a:lvl5pPr marL="1371600" indent="0">
+              <a:buNone/>
+              <a:defRPr sz="750"/>
+            </a:lvl5pPr>
+            <a:lvl6pPr marL="1714500" indent="0">
+              <a:buNone/>
+              <a:defRPr sz="750"/>
+            </a:lvl6pPr>
+            <a:lvl7pPr marL="2057400" indent="0">
+              <a:buNone/>
+              <a:defRPr sz="750"/>
+            </a:lvl7pPr>
+            <a:lvl8pPr marL="2400300" indent="0">
+              <a:buNone/>
+              <a:defRPr sz="750"/>
+            </a:lvl8pPr>
+            <a:lvl9pPr marL="2743200" indent="0">
+              <a:buNone/>
+              <a:defRPr sz="750"/>
+            </a:lvl9pPr>
+          </a:lstStyle>
+          <a:p>
+            <a:pPr lvl="0"/>
+            <a:r>
+              <a:rPr lang="en-US"/>
+              <a:t>Click to edit Master text styles</a:t>
+            </a:r>
+          </a:p>
+        </p:txBody>
+      </p:sp>
+      <p:sp>
+        <p:nvSpPr>
+          <p:cNvPr id="5" name="Date Placeholder 4"/>
+          <p:cNvSpPr>
+            <a:spLocks noGrp="1"/>
+          </p:cNvSpPr>
+          <p:nvPr>
+            <p:ph type="dt" sz="half" idx="10"/>
+          </p:nvPr>
+        </p:nvSpPr>
+        <p:spPr/>
+        <p:txBody>
+          <a:bodyPr/>
+          <a:lstStyle/>
+          <a:p>
+            <a:r>
+              <a:rPr lang="en-US"/>
+              <a:t>Vincenzo Gulisano</a:t>
+            </a:r>
+          </a:p>
+        </p:txBody>
+      </p:sp>
+      <p:sp>
+        <p:nvSpPr>
+          <p:cNvPr id="6" name="Footer Placeholder 5"/>
+          <p:cNvSpPr>
+            <a:spLocks noGrp="1"/>
+          </p:cNvSpPr>
+          <p:nvPr>
+            <p:ph type="ftr" sz="quarter" idx="11"/>
+          </p:nvPr>
+        </p:nvSpPr>
+        <p:spPr/>
+        <p:txBody>
+          <a:bodyPr/>
+          <a:lstStyle/>
+          <a:p>
+            <a:r>
+              <a:rPr lang="en-US"/>
+              <a:t>Operating Systems - Virtualization</a:t>
+            </a:r>
+          </a:p>
+        </p:txBody>
+      </p:sp>
+      <p:sp>
+        <p:nvSpPr>
+          <p:cNvPr id="7" name="Slide Number Placeholder 6"/>
+          <p:cNvSpPr>
+            <a:spLocks noGrp="1"/>
+          </p:cNvSpPr>
+          <p:nvPr>
+            <p:ph type="sldNum" sz="quarter" idx="12"/>
+          </p:nvPr>
+        </p:nvSpPr>
+        <p:spPr/>
+        <p:txBody>
+          <a:bodyPr/>
+          <a:lstStyle/>
+          <a:p>
+            <a:fld id="{95AAEEEC-DCEC-4178-AB14-E7254A15A296}" type="slidenum">
+              <a:rPr lang="en-US" smtClean="0"/>
+              <a:t>‹#›</a:t>
+            </a:fld>
+            <a:endParaRPr lang="en-US"/>
+          </a:p>
+        </p:txBody>
+      </p:sp>
+    </p:spTree>
+    <p:extLst>
+      <p:ext uri="{BB962C8B-B14F-4D97-AF65-F5344CB8AC3E}">
+        <p14:creationId xmlns:p14="http://schemas.microsoft.com/office/powerpoint/2010/main" val="490285842"/>
+      </p:ext>
+    </p:extLst>
+  </p:cSld>
+  <p:clrMapOvr>
+    <a:masterClrMapping/>
+  </p:clrMapOvr>
+</p:sldLayout>
+</file>
+
+<file path=ppt/slideLayouts/slideLayout21.xml><?xml version="1.0" encoding="utf-8"?>
+<p:sldLayout xmlns:a="http://schemas.openxmlformats.org/drawingml/2006/main" xmlns:r="http://schemas.openxmlformats.org/officeDocument/2006/relationships" xmlns:p="http://schemas.openxmlformats.org/presentationml/2006/main" type="picTx" preserve="1">
+  <p:cSld name="Picture with Caption">
+    <p:spTree>
+      <p:nvGrpSpPr>
+        <p:cNvPr id="1" name=""/>
+        <p:cNvGrpSpPr/>
+        <p:nvPr/>
+      </p:nvGrpSpPr>
+      <p:grpSpPr>
+        <a:xfrm>
+          <a:off x="0" y="0"/>
+          <a:ext cx="0" cy="0"/>
+          <a:chOff x="0" y="0"/>
+          <a:chExt cx="0" cy="0"/>
+        </a:xfrm>
+      </p:grpSpPr>
+      <p:sp>
+        <p:nvSpPr>
+          <p:cNvPr id="2" name="Title 1"/>
+          <p:cNvSpPr>
+            <a:spLocks noGrp="1"/>
+          </p:cNvSpPr>
+          <p:nvPr>
+            <p:ph type="title"/>
+          </p:nvPr>
+        </p:nvSpPr>
+        <p:spPr>
+          <a:xfrm>
+            <a:off x="839788" y="457200"/>
+            <a:ext cx="3932237" cy="1600200"/>
+          </a:xfrm>
+        </p:spPr>
+        <p:txBody>
+          <a:bodyPr anchor="b"/>
+          <a:lstStyle>
+            <a:lvl1pPr>
+              <a:defRPr sz="2400"/>
+            </a:lvl1pPr>
+          </a:lstStyle>
+          <a:p>
+            <a:r>
+              <a:rPr lang="en-US"/>
+              <a:t>Click to edit Master title style</a:t>
+            </a:r>
+          </a:p>
+        </p:txBody>
+      </p:sp>
+      <p:sp>
+        <p:nvSpPr>
+          <p:cNvPr id="3" name="Picture Placeholder 2"/>
+          <p:cNvSpPr>
+            <a:spLocks noGrp="1"/>
+          </p:cNvSpPr>
+          <p:nvPr>
+            <p:ph type="pic" idx="1"/>
+          </p:nvPr>
+        </p:nvSpPr>
+        <p:spPr>
+          <a:xfrm>
+            <a:off x="5183188" y="987426"/>
+            <a:ext cx="6172200" cy="4873625"/>
+          </a:xfrm>
+        </p:spPr>
+        <p:txBody>
+          <a:bodyPr/>
+          <a:lstStyle>
+            <a:lvl1pPr marL="0" indent="0">
+              <a:buNone/>
+              <a:defRPr sz="2400"/>
+            </a:lvl1pPr>
+            <a:lvl2pPr marL="342900" indent="0">
+              <a:buNone/>
+              <a:defRPr sz="2100"/>
+            </a:lvl2pPr>
+            <a:lvl3pPr marL="685800" indent="0">
+              <a:buNone/>
+              <a:defRPr sz="1800"/>
+            </a:lvl3pPr>
+            <a:lvl4pPr marL="1028700" indent="0">
+              <a:buNone/>
+              <a:defRPr sz="1500"/>
+            </a:lvl4pPr>
+            <a:lvl5pPr marL="1371600" indent="0">
+              <a:buNone/>
+              <a:defRPr sz="1500"/>
+            </a:lvl5pPr>
+            <a:lvl6pPr marL="1714500" indent="0">
+              <a:buNone/>
+              <a:defRPr sz="1500"/>
+            </a:lvl6pPr>
+            <a:lvl7pPr marL="2057400" indent="0">
+              <a:buNone/>
+              <a:defRPr sz="1500"/>
+            </a:lvl7pPr>
+            <a:lvl8pPr marL="2400300" indent="0">
+              <a:buNone/>
+              <a:defRPr sz="1500"/>
+            </a:lvl8pPr>
+            <a:lvl9pPr marL="2743200" indent="0">
+              <a:buNone/>
+              <a:defRPr sz="1500"/>
+            </a:lvl9pPr>
+          </a:lstStyle>
+          <a:p>
+            <a:endParaRPr lang="en-US"/>
+          </a:p>
+        </p:txBody>
+      </p:sp>
+      <p:sp>
+        <p:nvSpPr>
+          <p:cNvPr id="4" name="Text Placeholder 3"/>
+          <p:cNvSpPr>
+            <a:spLocks noGrp="1"/>
+          </p:cNvSpPr>
+          <p:nvPr>
+            <p:ph type="body" sz="half" idx="2"/>
+          </p:nvPr>
+        </p:nvSpPr>
+        <p:spPr>
+          <a:xfrm>
+            <a:off x="839788" y="2057400"/>
+            <a:ext cx="3932237" cy="3811588"/>
+          </a:xfrm>
+        </p:spPr>
+        <p:txBody>
+          <a:bodyPr/>
+          <a:lstStyle>
+            <a:lvl1pPr marL="0" indent="0">
+              <a:buNone/>
+              <a:defRPr sz="1200"/>
+            </a:lvl1pPr>
+            <a:lvl2pPr marL="342900" indent="0">
+              <a:buNone/>
+              <a:defRPr sz="1050"/>
+            </a:lvl2pPr>
+            <a:lvl3pPr marL="685800" indent="0">
+              <a:buNone/>
+              <a:defRPr sz="900"/>
+            </a:lvl3pPr>
+            <a:lvl4pPr marL="1028700" indent="0">
+              <a:buNone/>
+              <a:defRPr sz="750"/>
+            </a:lvl4pPr>
+            <a:lvl5pPr marL="1371600" indent="0">
+              <a:buNone/>
+              <a:defRPr sz="750"/>
+            </a:lvl5pPr>
+            <a:lvl6pPr marL="1714500" indent="0">
+              <a:buNone/>
+              <a:defRPr sz="750"/>
+            </a:lvl6pPr>
+            <a:lvl7pPr marL="2057400" indent="0">
+              <a:buNone/>
+              <a:defRPr sz="750"/>
+            </a:lvl7pPr>
+            <a:lvl8pPr marL="2400300" indent="0">
+              <a:buNone/>
+              <a:defRPr sz="750"/>
+            </a:lvl8pPr>
+            <a:lvl9pPr marL="2743200" indent="0">
+              <a:buNone/>
+              <a:defRPr sz="750"/>
+            </a:lvl9pPr>
+          </a:lstStyle>
+          <a:p>
+            <a:pPr lvl="0"/>
+            <a:r>
+              <a:rPr lang="en-US"/>
+              <a:t>Click to edit Master text styles</a:t>
+            </a:r>
+          </a:p>
+        </p:txBody>
+      </p:sp>
+      <p:sp>
+        <p:nvSpPr>
+          <p:cNvPr id="5" name="Date Placeholder 4"/>
+          <p:cNvSpPr>
+            <a:spLocks noGrp="1"/>
+          </p:cNvSpPr>
+          <p:nvPr>
+            <p:ph type="dt" sz="half" idx="10"/>
+          </p:nvPr>
+        </p:nvSpPr>
+        <p:spPr/>
+        <p:txBody>
+          <a:bodyPr/>
+          <a:lstStyle/>
+          <a:p>
+            <a:r>
+              <a:rPr lang="en-US"/>
+              <a:t>Vincenzo Gulisano</a:t>
+            </a:r>
+          </a:p>
+        </p:txBody>
+      </p:sp>
+      <p:sp>
+        <p:nvSpPr>
+          <p:cNvPr id="6" name="Footer Placeholder 5"/>
+          <p:cNvSpPr>
+            <a:spLocks noGrp="1"/>
+          </p:cNvSpPr>
+          <p:nvPr>
+            <p:ph type="ftr" sz="quarter" idx="11"/>
+          </p:nvPr>
+        </p:nvSpPr>
+        <p:spPr/>
+        <p:txBody>
+          <a:bodyPr/>
+          <a:lstStyle/>
+          <a:p>
+            <a:r>
+              <a:rPr lang="en-US"/>
+              <a:t>Operating Systems - Virtualization</a:t>
+            </a:r>
+            <a:endParaRPr lang="en-US" dirty="0"/>
+          </a:p>
+        </p:txBody>
+      </p:sp>
+      <p:sp>
+        <p:nvSpPr>
+          <p:cNvPr id="7" name="Slide Number Placeholder 6"/>
+          <p:cNvSpPr>
+            <a:spLocks noGrp="1"/>
+          </p:cNvSpPr>
+          <p:nvPr>
+            <p:ph type="sldNum" sz="quarter" idx="12"/>
+          </p:nvPr>
+        </p:nvSpPr>
+        <p:spPr/>
+        <p:txBody>
+          <a:bodyPr/>
+          <a:lstStyle/>
+          <a:p>
+            <a:fld id="{95AAEEEC-DCEC-4178-AB14-E7254A15A296}" type="slidenum">
+              <a:rPr lang="en-US" smtClean="0"/>
+              <a:t>‹#›</a:t>
+            </a:fld>
+            <a:endParaRPr lang="en-US"/>
+          </a:p>
+        </p:txBody>
+      </p:sp>
+    </p:spTree>
+    <p:extLst>
+      <p:ext uri="{BB962C8B-B14F-4D97-AF65-F5344CB8AC3E}">
+        <p14:creationId xmlns:p14="http://schemas.microsoft.com/office/powerpoint/2010/main" val="3634815159"/>
+      </p:ext>
+    </p:extLst>
+  </p:cSld>
+  <p:clrMapOvr>
+    <a:masterClrMapping/>
+  </p:clrMapOvr>
+</p:sldLayout>
+</file>
+
+<file path=ppt/slideLayouts/slideLayout22.xml><?xml version="1.0" encoding="utf-8"?>
+<p:sldLayout xmlns:a="http://schemas.openxmlformats.org/drawingml/2006/main" xmlns:r="http://schemas.openxmlformats.org/officeDocument/2006/relationships" xmlns:p="http://schemas.openxmlformats.org/presentationml/2006/main" type="vertTx" preserve="1">
+  <p:cSld name="Title and Vertical Text">
+    <p:spTree>
+      <p:nvGrpSpPr>
+        <p:cNvPr id="1" name=""/>
+        <p:cNvGrpSpPr/>
+        <p:nvPr/>
+      </p:nvGrpSpPr>
+      <p:grpSpPr>
+        <a:xfrm>
+          <a:off x="0" y="0"/>
+          <a:ext cx="0" cy="0"/>
+          <a:chOff x="0" y="0"/>
+          <a:chExt cx="0" cy="0"/>
+        </a:xfrm>
+      </p:grpSpPr>
+      <p:sp>
+        <p:nvSpPr>
+          <p:cNvPr id="2" name="Title 1"/>
+          <p:cNvSpPr>
+            <a:spLocks noGrp="1"/>
+          </p:cNvSpPr>
+          <p:nvPr>
+            <p:ph type="title"/>
+          </p:nvPr>
+        </p:nvSpPr>
+        <p:spPr/>
+        <p:txBody>
+          <a:bodyPr/>
+          <a:lstStyle/>
+          <a:p>
+            <a:r>
+              <a:rPr lang="en-US"/>
+              <a:t>Click to edit Master title style</a:t>
+            </a:r>
+          </a:p>
+        </p:txBody>
+      </p:sp>
+      <p:sp>
+        <p:nvSpPr>
+          <p:cNvPr id="3" name="Vertical Text Placeholder 2"/>
+          <p:cNvSpPr>
+            <a:spLocks noGrp="1"/>
+          </p:cNvSpPr>
+          <p:nvPr>
+            <p:ph type="body" orient="vert" idx="1"/>
+          </p:nvPr>
+        </p:nvSpPr>
+        <p:spPr/>
+        <p:txBody>
+          <a:bodyPr vert="eaVert"/>
+          <a:lstStyle/>
+          <a:p>
+            <a:pPr lvl="0"/>
+            <a:r>
+              <a:rPr lang="en-US"/>
+              <a:t>Click to edit Master text styles</a:t>
+            </a:r>
+          </a:p>
+          <a:p>
+            <a:pPr lvl="1"/>
+            <a:r>
+              <a:rPr lang="en-US"/>
+              <a:t>Second level</a:t>
+            </a:r>
+          </a:p>
+          <a:p>
+            <a:pPr lvl="2"/>
+            <a:r>
+              <a:rPr lang="en-US"/>
+              <a:t>Third level</a:t>
+            </a:r>
+          </a:p>
+          <a:p>
+            <a:pPr lvl="3"/>
+            <a:r>
+              <a:rPr lang="en-US"/>
+              <a:t>Fourth level</a:t>
+            </a:r>
+          </a:p>
+          <a:p>
+            <a:pPr lvl="4"/>
+            <a:r>
+              <a:rPr lang="en-US"/>
+              <a:t>Fifth level</a:t>
+            </a:r>
+          </a:p>
+        </p:txBody>
+      </p:sp>
+      <p:sp>
+        <p:nvSpPr>
+          <p:cNvPr id="4" name="Date Placeholder 3"/>
+          <p:cNvSpPr>
+            <a:spLocks noGrp="1"/>
+          </p:cNvSpPr>
+          <p:nvPr>
+            <p:ph type="dt" sz="half" idx="10"/>
+          </p:nvPr>
+        </p:nvSpPr>
+        <p:spPr/>
+        <p:txBody>
+          <a:bodyPr/>
+          <a:lstStyle/>
+          <a:p>
+            <a:r>
+              <a:rPr lang="en-US"/>
+              <a:t>Vincenzo Gulisano</a:t>
+            </a:r>
+          </a:p>
+        </p:txBody>
+      </p:sp>
+      <p:sp>
+        <p:nvSpPr>
+          <p:cNvPr id="5" name="Footer Placeholder 4"/>
+          <p:cNvSpPr>
+            <a:spLocks noGrp="1"/>
+          </p:cNvSpPr>
+          <p:nvPr>
+            <p:ph type="ftr" sz="quarter" idx="11"/>
+          </p:nvPr>
+        </p:nvSpPr>
+        <p:spPr/>
+        <p:txBody>
+          <a:bodyPr/>
+          <a:lstStyle/>
+          <a:p>
+            <a:r>
+              <a:rPr lang="en-US"/>
+              <a:t>Operating Systems - Virtualization</a:t>
+            </a:r>
+          </a:p>
+        </p:txBody>
+      </p:sp>
+      <p:sp>
+        <p:nvSpPr>
+          <p:cNvPr id="6" name="Slide Number Placeholder 5"/>
+          <p:cNvSpPr>
+            <a:spLocks noGrp="1"/>
+          </p:cNvSpPr>
+          <p:nvPr>
+            <p:ph type="sldNum" sz="quarter" idx="12"/>
+          </p:nvPr>
+        </p:nvSpPr>
+        <p:spPr/>
+        <p:txBody>
+          <a:bodyPr/>
+          <a:lstStyle/>
+          <a:p>
+            <a:fld id="{95AAEEEC-DCEC-4178-AB14-E7254A15A296}" type="slidenum">
+              <a:rPr lang="en-US" smtClean="0"/>
+              <a:t>‹#›</a:t>
+            </a:fld>
+            <a:endParaRPr lang="en-US"/>
+          </a:p>
+        </p:txBody>
+      </p:sp>
+    </p:spTree>
+    <p:extLst>
+      <p:ext uri="{BB962C8B-B14F-4D97-AF65-F5344CB8AC3E}">
+        <p14:creationId xmlns:p14="http://schemas.microsoft.com/office/powerpoint/2010/main" val="3776010467"/>
+      </p:ext>
+    </p:extLst>
+  </p:cSld>
+  <p:clrMapOvr>
+    <a:masterClrMapping/>
+  </p:clrMapOvr>
+</p:sldLayout>
+</file>
+
+<file path=ppt/slideLayouts/slideLayout23.xml><?xml version="1.0" encoding="utf-8"?>
+<p:sldLayout xmlns:a="http://schemas.openxmlformats.org/drawingml/2006/main" xmlns:r="http://schemas.openxmlformats.org/officeDocument/2006/relationships" xmlns:p="http://schemas.openxmlformats.org/presentationml/2006/main" type="vertTitleAndTx" preserve="1">
+  <p:cSld name="Vertical Title and Text">
+    <p:spTree>
+      <p:nvGrpSpPr>
+        <p:cNvPr id="1" name=""/>
+        <p:cNvGrpSpPr/>
+        <p:nvPr/>
+      </p:nvGrpSpPr>
+      <p:grpSpPr>
+        <a:xfrm>
+          <a:off x="0" y="0"/>
+          <a:ext cx="0" cy="0"/>
+          <a:chOff x="0" y="0"/>
+          <a:chExt cx="0" cy="0"/>
+        </a:xfrm>
+      </p:grpSpPr>
+      <p:sp>
+        <p:nvSpPr>
+          <p:cNvPr id="2" name="Vertical Title 1"/>
+          <p:cNvSpPr>
+            <a:spLocks noGrp="1"/>
+          </p:cNvSpPr>
+          <p:nvPr>
+            <p:ph type="title" orient="vert"/>
+          </p:nvPr>
+        </p:nvSpPr>
+        <p:spPr>
+          <a:xfrm>
+            <a:off x="8724901" y="365125"/>
+            <a:ext cx="2628900" cy="5811838"/>
+          </a:xfrm>
+        </p:spPr>
+        <p:txBody>
+          <a:bodyPr vert="eaVert"/>
+          <a:lstStyle/>
+          <a:p>
+            <a:r>
+              <a:rPr lang="en-US"/>
+              <a:t>Click to edit Master title style</a:t>
+            </a:r>
+          </a:p>
+        </p:txBody>
+      </p:sp>
+      <p:sp>
+        <p:nvSpPr>
+          <p:cNvPr id="3" name="Vertical Text Placeholder 2"/>
+          <p:cNvSpPr>
+            <a:spLocks noGrp="1"/>
+          </p:cNvSpPr>
+          <p:nvPr>
+            <p:ph type="body" orient="vert" idx="1"/>
+          </p:nvPr>
+        </p:nvSpPr>
+        <p:spPr>
+          <a:xfrm>
+            <a:off x="838201" y="365125"/>
+            <a:ext cx="7734300" cy="5811838"/>
+          </a:xfrm>
+        </p:spPr>
+        <p:txBody>
+          <a:bodyPr vert="eaVert"/>
+          <a:lstStyle/>
+          <a:p>
+            <a:pPr lvl="0"/>
+            <a:r>
+              <a:rPr lang="en-US"/>
+              <a:t>Click to edit Master text styles</a:t>
+            </a:r>
+          </a:p>
+          <a:p>
+            <a:pPr lvl="1"/>
+            <a:r>
+              <a:rPr lang="en-US"/>
+              <a:t>Second level</a:t>
+            </a:r>
+          </a:p>
+          <a:p>
+            <a:pPr lvl="2"/>
+            <a:r>
+              <a:rPr lang="en-US"/>
+              <a:t>Third level</a:t>
+            </a:r>
+          </a:p>
+          <a:p>
+            <a:pPr lvl="3"/>
+            <a:r>
+              <a:rPr lang="en-US"/>
+              <a:t>Fourth level</a:t>
+            </a:r>
+          </a:p>
+          <a:p>
+            <a:pPr lvl="4"/>
+            <a:r>
+              <a:rPr lang="en-US"/>
+              <a:t>Fifth level</a:t>
+            </a:r>
+          </a:p>
+        </p:txBody>
+      </p:sp>
+      <p:sp>
+        <p:nvSpPr>
+          <p:cNvPr id="4" name="Date Placeholder 3"/>
+          <p:cNvSpPr>
+            <a:spLocks noGrp="1"/>
+          </p:cNvSpPr>
+          <p:nvPr>
+            <p:ph type="dt" sz="half" idx="10"/>
+          </p:nvPr>
+        </p:nvSpPr>
+        <p:spPr/>
+        <p:txBody>
+          <a:bodyPr/>
+          <a:lstStyle/>
+          <a:p>
+            <a:r>
+              <a:rPr lang="en-US"/>
+              <a:t>Vincenzo Gulisano</a:t>
+            </a:r>
+          </a:p>
+        </p:txBody>
+      </p:sp>
+      <p:sp>
+        <p:nvSpPr>
+          <p:cNvPr id="5" name="Footer Placeholder 4"/>
+          <p:cNvSpPr>
+            <a:spLocks noGrp="1"/>
+          </p:cNvSpPr>
+          <p:nvPr>
+            <p:ph type="ftr" sz="quarter" idx="11"/>
+          </p:nvPr>
+        </p:nvSpPr>
+        <p:spPr/>
+        <p:txBody>
+          <a:bodyPr/>
+          <a:lstStyle/>
+          <a:p>
+            <a:r>
+              <a:rPr lang="en-US"/>
+              <a:t>Operating Systems - Virtualization</a:t>
+            </a:r>
+          </a:p>
+        </p:txBody>
+      </p:sp>
+      <p:sp>
+        <p:nvSpPr>
+          <p:cNvPr id="6" name="Slide Number Placeholder 5"/>
+          <p:cNvSpPr>
+            <a:spLocks noGrp="1"/>
+          </p:cNvSpPr>
+          <p:nvPr>
+            <p:ph type="sldNum" sz="quarter" idx="12"/>
+          </p:nvPr>
+        </p:nvSpPr>
+        <p:spPr/>
+        <p:txBody>
+          <a:bodyPr/>
+          <a:lstStyle/>
+          <a:p>
+            <a:fld id="{95AAEEEC-DCEC-4178-AB14-E7254A15A296}" type="slidenum">
+              <a:rPr lang="en-US" smtClean="0"/>
+              <a:t>‹#›</a:t>
+            </a:fld>
+            <a:endParaRPr lang="en-US"/>
+          </a:p>
+        </p:txBody>
+      </p:sp>
+    </p:spTree>
+    <p:extLst>
+      <p:ext uri="{BB962C8B-B14F-4D97-AF65-F5344CB8AC3E}">
+        <p14:creationId xmlns:p14="http://schemas.microsoft.com/office/powerpoint/2010/main" val="2000502961"/>
+      </p:ext>
+    </p:extLst>
+  </p:cSld>
+  <p:clrMapOvr>
+    <a:masterClrMapping/>
+  </p:clrMapOvr>
+</p:sldLayout>
+</file>
+
+<file path=ppt/slideLayouts/slideLayout24.xml><?xml version="1.0" encoding="utf-8"?>
+<p:sldLayout xmlns:a="http://schemas.openxmlformats.org/drawingml/2006/main" xmlns:r="http://schemas.openxmlformats.org/officeDocument/2006/relationships" xmlns:p="http://schemas.openxmlformats.org/presentationml/2006/main" type="title">
+  <p:cSld name="1_Title Slide">
+    <p:spTree>
+      <p:nvGrpSpPr>
+        <p:cNvPr id="1" name=""/>
+        <p:cNvGrpSpPr/>
+        <p:nvPr/>
+      </p:nvGrpSpPr>
+      <p:grpSpPr>
+        <a:xfrm>
+          <a:off x="0" y="0"/>
+          <a:ext cx="0" cy="0"/>
+          <a:chOff x="0" y="0"/>
+          <a:chExt cx="0" cy="0"/>
+        </a:xfrm>
+      </p:grpSpPr>
+      <p:sp>
+        <p:nvSpPr>
+          <p:cNvPr id="152578" name="Rectangle 2"/>
+          <p:cNvSpPr>
+            <a:spLocks noGrp="1" noChangeArrowheads="1"/>
+          </p:cNvSpPr>
+          <p:nvPr>
+            <p:ph type="ctrTitle"/>
+          </p:nvPr>
+        </p:nvSpPr>
+        <p:spPr>
+          <a:xfrm>
+            <a:off x="914400" y="685800"/>
+            <a:ext cx="10363200" cy="2127250"/>
+          </a:xfrm>
+        </p:spPr>
+        <p:txBody>
+          <a:bodyPr/>
+          <a:lstStyle>
+            <a:lvl1pPr>
+              <a:defRPr sz="4300"/>
+            </a:lvl1pPr>
+          </a:lstStyle>
+          <a:p>
+            <a:r>
+              <a:rPr lang="en-US" dirty="0"/>
+              <a:t>Click to edit Master title style</a:t>
+            </a:r>
+          </a:p>
+        </p:txBody>
+      </p:sp>
+    </p:spTree>
+    <p:extLst>
+      <p:ext uri="{BB962C8B-B14F-4D97-AF65-F5344CB8AC3E}">
+        <p14:creationId xmlns:p14="http://schemas.microsoft.com/office/powerpoint/2010/main" val="2904449477"/>
       </p:ext>
     </p:extLst>
   </p:cSld>
@@ -14877,7 +17845,7 @@
           <a:lstStyle/>
           <a:p>
             <a:r>
-              <a:rPr lang="sv-SE"/>
+              <a:rPr lang="en-US"/>
               <a:t>Vincenzo Gulisano</a:t>
             </a:r>
             <a:endParaRPr lang="en-SE"/>
@@ -15149,7 +18117,7 @@
           <a:lstStyle/>
           <a:p>
             <a:r>
-              <a:rPr lang="sv-SE"/>
+              <a:rPr lang="en-US"/>
               <a:t>Vincenzo Gulisano</a:t>
             </a:r>
             <a:endParaRPr lang="en-SE"/>
@@ -15568,7 +18536,7 @@
           <a:lstStyle/>
           <a:p>
             <a:r>
-              <a:rPr lang="sv-SE"/>
+              <a:rPr lang="en-US"/>
               <a:t>Vincenzo Gulisano</a:t>
             </a:r>
             <a:endParaRPr lang="en-SE"/>
@@ -15714,7 +18682,7 @@
           <a:lstStyle/>
           <a:p>
             <a:r>
-              <a:rPr lang="sv-SE"/>
+              <a:rPr lang="en-US"/>
               <a:t>Vincenzo Gulisano</a:t>
             </a:r>
             <a:endParaRPr lang="en-SE"/>
@@ -15831,7 +18799,7 @@
           <a:lstStyle/>
           <a:p>
             <a:r>
-              <a:rPr lang="sv-SE"/>
+              <a:rPr lang="en-US"/>
               <a:t>Vincenzo Gulisano</a:t>
             </a:r>
             <a:endParaRPr lang="en-SE"/>
@@ -16148,7 +19116,7 @@
           <a:lstStyle/>
           <a:p>
             <a:r>
-              <a:rPr lang="sv-SE"/>
+              <a:rPr lang="en-US"/>
               <a:t>Vincenzo Gulisano</a:t>
             </a:r>
             <a:endParaRPr lang="en-SE"/>
@@ -16441,7 +19409,7 @@
           <a:lstStyle/>
           <a:p>
             <a:r>
-              <a:rPr lang="sv-SE"/>
+              <a:rPr lang="en-US"/>
               <a:t>Vincenzo Gulisano</a:t>
             </a:r>
             <a:endParaRPr lang="en-SE"/>
@@ -16688,7 +19656,7 @@
           </a:lstStyle>
           <a:p>
             <a:r>
-              <a:rPr lang="sv-SE"/>
+              <a:rPr lang="en-US"/>
               <a:t>Vincenzo Gulisano</a:t>
             </a:r>
             <a:endParaRPr lang="en-SE"/>
@@ -17095,6 +20063,548 @@
 </p:sldMaster>
 </file>
 
+<file path=ppt/slideMasters/slideMaster2.xml><?xml version="1.0" encoding="utf-8"?>
+<p:sldMaster xmlns:a="http://schemas.openxmlformats.org/drawingml/2006/main" xmlns:r="http://schemas.openxmlformats.org/officeDocument/2006/relationships" xmlns:p="http://schemas.openxmlformats.org/presentationml/2006/main">
+  <p:cSld>
+    <p:bg>
+      <p:bgRef idx="1001">
+        <a:schemeClr val="bg1"/>
+      </p:bgRef>
+    </p:bg>
+    <p:spTree>
+      <p:nvGrpSpPr>
+        <p:cNvPr id="1" name=""/>
+        <p:cNvGrpSpPr/>
+        <p:nvPr/>
+      </p:nvGrpSpPr>
+      <p:grpSpPr>
+        <a:xfrm>
+          <a:off x="0" y="0"/>
+          <a:ext cx="0" cy="0"/>
+          <a:chOff x="0" y="0"/>
+          <a:chExt cx="0" cy="0"/>
+        </a:xfrm>
+      </p:grpSpPr>
+      <p:sp>
+        <p:nvSpPr>
+          <p:cNvPr id="2" name="Title Placeholder 1"/>
+          <p:cNvSpPr>
+            <a:spLocks noGrp="1"/>
+          </p:cNvSpPr>
+          <p:nvPr>
+            <p:ph type="title"/>
+          </p:nvPr>
+        </p:nvSpPr>
+        <p:spPr>
+          <a:xfrm>
+            <a:off x="838200" y="365126"/>
+            <a:ext cx="10515600" cy="1325563"/>
+          </a:xfrm>
+          <a:prstGeom prst="rect">
+            <a:avLst/>
+          </a:prstGeom>
+        </p:spPr>
+        <p:txBody>
+          <a:bodyPr vert="horz" lIns="91440" tIns="45720" rIns="91440" bIns="45720" rtlCol="0" anchor="ctr">
+            <a:normAutofit/>
+          </a:bodyPr>
+          <a:lstStyle/>
+          <a:p>
+            <a:r>
+              <a:rPr lang="en-US"/>
+              <a:t>Click to edit Master title style</a:t>
+            </a:r>
+          </a:p>
+        </p:txBody>
+      </p:sp>
+      <p:sp>
+        <p:nvSpPr>
+          <p:cNvPr id="3" name="Text Placeholder 2"/>
+          <p:cNvSpPr>
+            <a:spLocks noGrp="1"/>
+          </p:cNvSpPr>
+          <p:nvPr>
+            <p:ph type="body" idx="1"/>
+          </p:nvPr>
+        </p:nvSpPr>
+        <p:spPr>
+          <a:xfrm>
+            <a:off x="838200" y="1825625"/>
+            <a:ext cx="10515600" cy="4351338"/>
+          </a:xfrm>
+          <a:prstGeom prst="rect">
+            <a:avLst/>
+          </a:prstGeom>
+        </p:spPr>
+        <p:txBody>
+          <a:bodyPr vert="horz" lIns="91440" tIns="45720" rIns="91440" bIns="45720" rtlCol="0">
+            <a:normAutofit/>
+          </a:bodyPr>
+          <a:lstStyle/>
+          <a:p>
+            <a:pPr lvl="0"/>
+            <a:r>
+              <a:rPr lang="en-US"/>
+              <a:t>Click to edit Master text styles</a:t>
+            </a:r>
+          </a:p>
+          <a:p>
+            <a:pPr lvl="1"/>
+            <a:r>
+              <a:rPr lang="en-US"/>
+              <a:t>Second level</a:t>
+            </a:r>
+          </a:p>
+          <a:p>
+            <a:pPr lvl="2"/>
+            <a:r>
+              <a:rPr lang="en-US"/>
+              <a:t>Third level</a:t>
+            </a:r>
+          </a:p>
+          <a:p>
+            <a:pPr lvl="3"/>
+            <a:r>
+              <a:rPr lang="en-US"/>
+              <a:t>Fourth level</a:t>
+            </a:r>
+          </a:p>
+          <a:p>
+            <a:pPr lvl="4"/>
+            <a:r>
+              <a:rPr lang="en-US"/>
+              <a:t>Fifth level</a:t>
+            </a:r>
+          </a:p>
+        </p:txBody>
+      </p:sp>
+      <p:sp>
+        <p:nvSpPr>
+          <p:cNvPr id="4" name="Date Placeholder 3"/>
+          <p:cNvSpPr>
+            <a:spLocks noGrp="1"/>
+          </p:cNvSpPr>
+          <p:nvPr>
+            <p:ph type="dt" sz="half" idx="2"/>
+          </p:nvPr>
+        </p:nvSpPr>
+        <p:spPr>
+          <a:xfrm>
+            <a:off x="838200" y="6356352"/>
+            <a:ext cx="2743200" cy="365125"/>
+          </a:xfrm>
+          <a:prstGeom prst="rect">
+            <a:avLst/>
+          </a:prstGeom>
+        </p:spPr>
+        <p:txBody>
+          <a:bodyPr vert="horz" lIns="91440" tIns="45720" rIns="91440" bIns="45720" rtlCol="0" anchor="ctr"/>
+          <a:lstStyle>
+            <a:lvl1pPr algn="l">
+              <a:defRPr sz="900">
+                <a:solidFill>
+                  <a:schemeClr val="tx1">
+                    <a:tint val="75000"/>
+                  </a:schemeClr>
+                </a:solidFill>
+              </a:defRPr>
+            </a:lvl1pPr>
+          </a:lstStyle>
+          <a:p>
+            <a:r>
+              <a:rPr lang="en-US"/>
+              <a:t>Vincenzo Gulisano</a:t>
+            </a:r>
+          </a:p>
+        </p:txBody>
+      </p:sp>
+      <p:sp>
+        <p:nvSpPr>
+          <p:cNvPr id="5" name="Footer Placeholder 4"/>
+          <p:cNvSpPr>
+            <a:spLocks noGrp="1"/>
+          </p:cNvSpPr>
+          <p:nvPr>
+            <p:ph type="ftr" sz="quarter" idx="3"/>
+          </p:nvPr>
+        </p:nvSpPr>
+        <p:spPr>
+          <a:xfrm>
+            <a:off x="4038600" y="6356352"/>
+            <a:ext cx="4114800" cy="365125"/>
+          </a:xfrm>
+          <a:prstGeom prst="rect">
+            <a:avLst/>
+          </a:prstGeom>
+        </p:spPr>
+        <p:txBody>
+          <a:bodyPr vert="horz" lIns="91440" tIns="45720" rIns="91440" bIns="45720" rtlCol="0" anchor="ctr"/>
+          <a:lstStyle>
+            <a:lvl1pPr algn="ctr">
+              <a:defRPr sz="900">
+                <a:solidFill>
+                  <a:schemeClr val="tx1">
+                    <a:tint val="75000"/>
+                  </a:schemeClr>
+                </a:solidFill>
+              </a:defRPr>
+            </a:lvl1pPr>
+          </a:lstStyle>
+          <a:p>
+            <a:r>
+              <a:rPr lang="en-US"/>
+              <a:t>Operating Systems - Virtualization</a:t>
+            </a:r>
+          </a:p>
+        </p:txBody>
+      </p:sp>
+      <p:sp>
+        <p:nvSpPr>
+          <p:cNvPr id="6" name="Slide Number Placeholder 5"/>
+          <p:cNvSpPr>
+            <a:spLocks noGrp="1"/>
+          </p:cNvSpPr>
+          <p:nvPr>
+            <p:ph type="sldNum" sz="quarter" idx="4"/>
+          </p:nvPr>
+        </p:nvSpPr>
+        <p:spPr>
+          <a:xfrm>
+            <a:off x="8610600" y="6356352"/>
+            <a:ext cx="2743200" cy="365125"/>
+          </a:xfrm>
+          <a:prstGeom prst="rect">
+            <a:avLst/>
+          </a:prstGeom>
+        </p:spPr>
+        <p:txBody>
+          <a:bodyPr vert="horz" lIns="91440" tIns="45720" rIns="91440" bIns="45720" rtlCol="0" anchor="ctr"/>
+          <a:lstStyle>
+            <a:lvl1pPr algn="r">
+              <a:defRPr sz="900">
+                <a:solidFill>
+                  <a:schemeClr val="tx1">
+                    <a:tint val="75000"/>
+                  </a:schemeClr>
+                </a:solidFill>
+              </a:defRPr>
+            </a:lvl1pPr>
+          </a:lstStyle>
+          <a:p>
+            <a:fld id="{95AAEEEC-DCEC-4178-AB14-E7254A15A296}" type="slidenum">
+              <a:rPr lang="en-US" smtClean="0"/>
+              <a:t>‹#›</a:t>
+            </a:fld>
+            <a:endParaRPr lang="en-US"/>
+          </a:p>
+        </p:txBody>
+      </p:sp>
+    </p:spTree>
+    <p:extLst>
+      <p:ext uri="{BB962C8B-B14F-4D97-AF65-F5344CB8AC3E}">
+        <p14:creationId xmlns:p14="http://schemas.microsoft.com/office/powerpoint/2010/main" val="2935223667"/>
+      </p:ext>
+    </p:extLst>
+  </p:cSld>
+  <p:clrMap bg1="lt1" tx1="dk1" bg2="lt2" tx2="dk2" accent1="accent1" accent2="accent2" accent3="accent3" accent4="accent4" accent5="accent5" accent6="accent6" hlink="hlink" folHlink="folHlink"/>
+  <p:sldLayoutIdLst>
+    <p:sldLayoutId id="2147483662" r:id="rId1"/>
+    <p:sldLayoutId id="2147483663" r:id="rId2"/>
+    <p:sldLayoutId id="2147483664" r:id="rId3"/>
+    <p:sldLayoutId id="2147483665" r:id="rId4"/>
+    <p:sldLayoutId id="2147483666" r:id="rId5"/>
+    <p:sldLayoutId id="2147483667" r:id="rId6"/>
+    <p:sldLayoutId id="2147483668" r:id="rId7"/>
+    <p:sldLayoutId id="2147483669" r:id="rId8"/>
+    <p:sldLayoutId id="2147483670" r:id="rId9"/>
+    <p:sldLayoutId id="2147483671" r:id="rId10"/>
+    <p:sldLayoutId id="2147483672" r:id="rId11"/>
+    <p:sldLayoutId id="2147483673" r:id="rId12"/>
+  </p:sldLayoutIdLst>
+  <p:hf hdr="0"/>
+  <p:txStyles>
+    <p:titleStyle>
+      <a:lvl1pPr algn="l" defTabSz="685800" rtl="0" eaLnBrk="1" latinLnBrk="0" hangingPunct="1">
+        <a:lnSpc>
+          <a:spcPct val="90000"/>
+        </a:lnSpc>
+        <a:spcBef>
+          <a:spcPct val="0"/>
+        </a:spcBef>
+        <a:buNone/>
+        <a:defRPr sz="3300" kern="1200">
+          <a:solidFill>
+            <a:schemeClr val="tx1"/>
+          </a:solidFill>
+          <a:latin typeface="+mj-lt"/>
+          <a:ea typeface="+mj-ea"/>
+          <a:cs typeface="+mj-cs"/>
+        </a:defRPr>
+      </a:lvl1pPr>
+    </p:titleStyle>
+    <p:bodyStyle>
+      <a:lvl1pPr marL="171450" indent="-171450" algn="l" defTabSz="685800" rtl="0" eaLnBrk="1" latinLnBrk="0" hangingPunct="1">
+        <a:lnSpc>
+          <a:spcPct val="90000"/>
+        </a:lnSpc>
+        <a:spcBef>
+          <a:spcPts val="750"/>
+        </a:spcBef>
+        <a:buFont typeface="Arial" panose="020B0604020202020204" pitchFamily="34" charset="0"/>
+        <a:buChar char="•"/>
+        <a:defRPr sz="2100" kern="1200">
+          <a:solidFill>
+            <a:schemeClr val="tx1"/>
+          </a:solidFill>
+          <a:latin typeface="+mn-lt"/>
+          <a:ea typeface="+mn-ea"/>
+          <a:cs typeface="+mn-cs"/>
+        </a:defRPr>
+      </a:lvl1pPr>
+      <a:lvl2pPr marL="514350" indent="-171450" algn="l" defTabSz="685800" rtl="0" eaLnBrk="1" latinLnBrk="0" hangingPunct="1">
+        <a:lnSpc>
+          <a:spcPct val="90000"/>
+        </a:lnSpc>
+        <a:spcBef>
+          <a:spcPts val="375"/>
+        </a:spcBef>
+        <a:buFont typeface="Arial" panose="020B0604020202020204" pitchFamily="34" charset="0"/>
+        <a:buChar char="•"/>
+        <a:defRPr sz="1800" kern="1200">
+          <a:solidFill>
+            <a:schemeClr val="tx1"/>
+          </a:solidFill>
+          <a:latin typeface="+mn-lt"/>
+          <a:ea typeface="+mn-ea"/>
+          <a:cs typeface="+mn-cs"/>
+        </a:defRPr>
+      </a:lvl2pPr>
+      <a:lvl3pPr marL="857250" indent="-171450" algn="l" defTabSz="685800" rtl="0" eaLnBrk="1" latinLnBrk="0" hangingPunct="1">
+        <a:lnSpc>
+          <a:spcPct val="90000"/>
+        </a:lnSpc>
+        <a:spcBef>
+          <a:spcPts val="375"/>
+        </a:spcBef>
+        <a:buFont typeface="Arial" panose="020B0604020202020204" pitchFamily="34" charset="0"/>
+        <a:buChar char="•"/>
+        <a:defRPr sz="1500" kern="1200">
+          <a:solidFill>
+            <a:schemeClr val="tx1"/>
+          </a:solidFill>
+          <a:latin typeface="+mn-lt"/>
+          <a:ea typeface="+mn-ea"/>
+          <a:cs typeface="+mn-cs"/>
+        </a:defRPr>
+      </a:lvl3pPr>
+      <a:lvl4pPr marL="1200150" indent="-171450" algn="l" defTabSz="685800" rtl="0" eaLnBrk="1" latinLnBrk="0" hangingPunct="1">
+        <a:lnSpc>
+          <a:spcPct val="90000"/>
+        </a:lnSpc>
+        <a:spcBef>
+          <a:spcPts val="375"/>
+        </a:spcBef>
+        <a:buFont typeface="Arial" panose="020B0604020202020204" pitchFamily="34" charset="0"/>
+        <a:buChar char="•"/>
+        <a:defRPr sz="1350" kern="1200">
+          <a:solidFill>
+            <a:schemeClr val="tx1"/>
+          </a:solidFill>
+          <a:latin typeface="+mn-lt"/>
+          <a:ea typeface="+mn-ea"/>
+          <a:cs typeface="+mn-cs"/>
+        </a:defRPr>
+      </a:lvl4pPr>
+      <a:lvl5pPr marL="1543050" indent="-171450" algn="l" defTabSz="685800" rtl="0" eaLnBrk="1" latinLnBrk="0" hangingPunct="1">
+        <a:lnSpc>
+          <a:spcPct val="90000"/>
+        </a:lnSpc>
+        <a:spcBef>
+          <a:spcPts val="375"/>
+        </a:spcBef>
+        <a:buFont typeface="Arial" panose="020B0604020202020204" pitchFamily="34" charset="0"/>
+        <a:buChar char="•"/>
+        <a:defRPr sz="1350" kern="1200">
+          <a:solidFill>
+            <a:schemeClr val="tx1"/>
+          </a:solidFill>
+          <a:latin typeface="+mn-lt"/>
+          <a:ea typeface="+mn-ea"/>
+          <a:cs typeface="+mn-cs"/>
+        </a:defRPr>
+      </a:lvl5pPr>
+      <a:lvl6pPr marL="1885950" indent="-171450" algn="l" defTabSz="685800" rtl="0" eaLnBrk="1" latinLnBrk="0" hangingPunct="1">
+        <a:lnSpc>
+          <a:spcPct val="90000"/>
+        </a:lnSpc>
+        <a:spcBef>
+          <a:spcPts val="375"/>
+        </a:spcBef>
+        <a:buFont typeface="Arial" panose="020B0604020202020204" pitchFamily="34" charset="0"/>
+        <a:buChar char="•"/>
+        <a:defRPr sz="1350" kern="1200">
+          <a:solidFill>
+            <a:schemeClr val="tx1"/>
+          </a:solidFill>
+          <a:latin typeface="+mn-lt"/>
+          <a:ea typeface="+mn-ea"/>
+          <a:cs typeface="+mn-cs"/>
+        </a:defRPr>
+      </a:lvl6pPr>
+      <a:lvl7pPr marL="2228850" indent="-171450" algn="l" defTabSz="685800" rtl="0" eaLnBrk="1" latinLnBrk="0" hangingPunct="1">
+        <a:lnSpc>
+          <a:spcPct val="90000"/>
+        </a:lnSpc>
+        <a:spcBef>
+          <a:spcPts val="375"/>
+        </a:spcBef>
+        <a:buFont typeface="Arial" panose="020B0604020202020204" pitchFamily="34" charset="0"/>
+        <a:buChar char="•"/>
+        <a:defRPr sz="1350" kern="1200">
+          <a:solidFill>
+            <a:schemeClr val="tx1"/>
+          </a:solidFill>
+          <a:latin typeface="+mn-lt"/>
+          <a:ea typeface="+mn-ea"/>
+          <a:cs typeface="+mn-cs"/>
+        </a:defRPr>
+      </a:lvl7pPr>
+      <a:lvl8pPr marL="2571750" indent="-171450" algn="l" defTabSz="685800" rtl="0" eaLnBrk="1" latinLnBrk="0" hangingPunct="1">
+        <a:lnSpc>
+          <a:spcPct val="90000"/>
+        </a:lnSpc>
+        <a:spcBef>
+          <a:spcPts val="375"/>
+        </a:spcBef>
+        <a:buFont typeface="Arial" panose="020B0604020202020204" pitchFamily="34" charset="0"/>
+        <a:buChar char="•"/>
+        <a:defRPr sz="1350" kern="1200">
+          <a:solidFill>
+            <a:schemeClr val="tx1"/>
+          </a:solidFill>
+          <a:latin typeface="+mn-lt"/>
+          <a:ea typeface="+mn-ea"/>
+          <a:cs typeface="+mn-cs"/>
+        </a:defRPr>
+      </a:lvl8pPr>
+      <a:lvl9pPr marL="2914650" indent="-171450" algn="l" defTabSz="685800" rtl="0" eaLnBrk="1" latinLnBrk="0" hangingPunct="1">
+        <a:lnSpc>
+          <a:spcPct val="90000"/>
+        </a:lnSpc>
+        <a:spcBef>
+          <a:spcPts val="375"/>
+        </a:spcBef>
+        <a:buFont typeface="Arial" panose="020B0604020202020204" pitchFamily="34" charset="0"/>
+        <a:buChar char="•"/>
+        <a:defRPr sz="1350" kern="1200">
+          <a:solidFill>
+            <a:schemeClr val="tx1"/>
+          </a:solidFill>
+          <a:latin typeface="+mn-lt"/>
+          <a:ea typeface="+mn-ea"/>
+          <a:cs typeface="+mn-cs"/>
+        </a:defRPr>
+      </a:lvl9pPr>
+    </p:bodyStyle>
+    <p:otherStyle>
+      <a:defPPr>
+        <a:defRPr lang="en-US"/>
+      </a:defPPr>
+      <a:lvl1pPr marL="0" algn="l" defTabSz="685800" rtl="0" eaLnBrk="1" latinLnBrk="0" hangingPunct="1">
+        <a:defRPr sz="1350" kern="1200">
+          <a:solidFill>
+            <a:schemeClr val="tx1"/>
+          </a:solidFill>
+          <a:latin typeface="+mn-lt"/>
+          <a:ea typeface="+mn-ea"/>
+          <a:cs typeface="+mn-cs"/>
+        </a:defRPr>
+      </a:lvl1pPr>
+      <a:lvl2pPr marL="342900" algn="l" defTabSz="685800" rtl="0" eaLnBrk="1" latinLnBrk="0" hangingPunct="1">
+        <a:defRPr sz="1350" kern="1200">
+          <a:solidFill>
+            <a:schemeClr val="tx1"/>
+          </a:solidFill>
+          <a:latin typeface="+mn-lt"/>
+          <a:ea typeface="+mn-ea"/>
+          <a:cs typeface="+mn-cs"/>
+        </a:defRPr>
+      </a:lvl2pPr>
+      <a:lvl3pPr marL="685800" algn="l" defTabSz="685800" rtl="0" eaLnBrk="1" latinLnBrk="0" hangingPunct="1">
+        <a:defRPr sz="1350" kern="1200">
+          <a:solidFill>
+            <a:schemeClr val="tx1"/>
+          </a:solidFill>
+          <a:latin typeface="+mn-lt"/>
+          <a:ea typeface="+mn-ea"/>
+          <a:cs typeface="+mn-cs"/>
+        </a:defRPr>
+      </a:lvl3pPr>
+      <a:lvl4pPr marL="1028700" algn="l" defTabSz="685800" rtl="0" eaLnBrk="1" latinLnBrk="0" hangingPunct="1">
+        <a:defRPr sz="1350" kern="1200">
+          <a:solidFill>
+            <a:schemeClr val="tx1"/>
+          </a:solidFill>
+          <a:latin typeface="+mn-lt"/>
+          <a:ea typeface="+mn-ea"/>
+          <a:cs typeface="+mn-cs"/>
+        </a:defRPr>
+      </a:lvl4pPr>
+      <a:lvl5pPr marL="1371600" algn="l" defTabSz="685800" rtl="0" eaLnBrk="1" latinLnBrk="0" hangingPunct="1">
+        <a:defRPr sz="1350" kern="1200">
+          <a:solidFill>
+            <a:schemeClr val="tx1"/>
+          </a:solidFill>
+          <a:latin typeface="+mn-lt"/>
+          <a:ea typeface="+mn-ea"/>
+          <a:cs typeface="+mn-cs"/>
+        </a:defRPr>
+      </a:lvl5pPr>
+      <a:lvl6pPr marL="1714500" algn="l" defTabSz="685800" rtl="0" eaLnBrk="1" latinLnBrk="0" hangingPunct="1">
+        <a:defRPr sz="1350" kern="1200">
+          <a:solidFill>
+            <a:schemeClr val="tx1"/>
+          </a:solidFill>
+          <a:latin typeface="+mn-lt"/>
+          <a:ea typeface="+mn-ea"/>
+          <a:cs typeface="+mn-cs"/>
+        </a:defRPr>
+      </a:lvl6pPr>
+      <a:lvl7pPr marL="2057400" algn="l" defTabSz="685800" rtl="0" eaLnBrk="1" latinLnBrk="0" hangingPunct="1">
+        <a:defRPr sz="1350" kern="1200">
+          <a:solidFill>
+            <a:schemeClr val="tx1"/>
+          </a:solidFill>
+          <a:latin typeface="+mn-lt"/>
+          <a:ea typeface="+mn-ea"/>
+          <a:cs typeface="+mn-cs"/>
+        </a:defRPr>
+      </a:lvl7pPr>
+      <a:lvl8pPr marL="2400300" algn="l" defTabSz="685800" rtl="0" eaLnBrk="1" latinLnBrk="0" hangingPunct="1">
+        <a:defRPr sz="1350" kern="1200">
+          <a:solidFill>
+            <a:schemeClr val="tx1"/>
+          </a:solidFill>
+          <a:latin typeface="+mn-lt"/>
+          <a:ea typeface="+mn-ea"/>
+          <a:cs typeface="+mn-cs"/>
+        </a:defRPr>
+      </a:lvl8pPr>
+      <a:lvl9pPr marL="2743200" algn="l" defTabSz="685800" rtl="0" eaLnBrk="1" latinLnBrk="0" hangingPunct="1">
+        <a:defRPr sz="1350" kern="1200">
+          <a:solidFill>
+            <a:schemeClr val="tx1"/>
+          </a:solidFill>
+          <a:latin typeface="+mn-lt"/>
+          <a:ea typeface="+mn-ea"/>
+          <a:cs typeface="+mn-cs"/>
+        </a:defRPr>
+      </a:lvl9pPr>
+    </p:otherStyle>
+  </p:txStyles>
+</p:sldMaster>
+</file>
+
 <file path=ppt/slides/slide1.xml><?xml version="1.0" encoding="utf-8"?>
 <p:sld xmlns:a="http://schemas.openxmlformats.org/drawingml/2006/main" xmlns:r="http://schemas.openxmlformats.org/officeDocument/2006/relationships" xmlns:p="http://schemas.openxmlformats.org/presentationml/2006/main">
   <p:cSld>
@@ -17341,8 +20851,28 @@
           <a:p>
             <a:r>
               <a:rPr lang="en-SE" sz="4000" dirty="0"/>
-              <a:t>What is required for VMMs to run code directly?</a:t>
-            </a:r>
+              <a:t>What is required for VMMs to run </a:t>
+            </a:r>
+            <a:r>
+              <a:rPr lang="en-SE" sz="4000"/>
+              <a:t>code directly</a:t>
+            </a:r>
+            <a:r>
+              <a:rPr lang="en-US" sz="4000" dirty="0"/>
+              <a:t> </a:t>
+            </a:r>
+            <a:br>
+              <a:rPr lang="en-US" sz="4000" dirty="0"/>
+            </a:br>
+            <a:r>
+              <a:rPr lang="en-US" sz="4000" dirty="0"/>
+              <a:t>(in traditional trap-and-emulate)</a:t>
+            </a:r>
+            <a:r>
+              <a:rPr lang="en-SE" sz="4000"/>
+              <a:t>?</a:t>
+            </a:r>
+            <a:endParaRPr lang="en-SE" sz="4000" dirty="0"/>
           </a:p>
         </p:txBody>
       </p:sp>
@@ -17420,7 +20950,7 @@
           <a:lstStyle/>
           <a:p>
             <a:r>
-              <a:rPr lang="sv-SE"/>
+              <a:rPr lang="en-US"/>
               <a:t>Vincenzo Gulisano</a:t>
             </a:r>
             <a:endParaRPr lang="en-SE"/>
@@ -18072,7 +21602,7 @@
           <a:lstStyle/>
           <a:p>
             <a:r>
-              <a:rPr lang="sv-SE"/>
+              <a:rPr lang="en-US"/>
               <a:t>Vincenzo Gulisano</a:t>
             </a:r>
             <a:endParaRPr lang="en-SE"/>
@@ -18428,7 +21958,7 @@
           <a:lstStyle/>
           <a:p>
             <a:r>
-              <a:rPr lang="sv-SE"/>
+              <a:rPr lang="en-US"/>
               <a:t>Vincenzo Gulisano</a:t>
             </a:r>
             <a:endParaRPr lang="en-SE"/>
@@ -18574,7 +22104,7 @@
           <a:lstStyle/>
           <a:p>
             <a:r>
-              <a:rPr lang="sv-SE"/>
+              <a:rPr lang="en-US"/>
               <a:t>Vincenzo Gulisano</a:t>
             </a:r>
             <a:endParaRPr lang="en-SE"/>
@@ -18970,7 +22500,7 @@
           <a:lstStyle/>
           <a:p>
             <a:r>
-              <a:rPr lang="sv-SE"/>
+              <a:rPr lang="en-US"/>
               <a:t>Vincenzo Gulisano</a:t>
             </a:r>
             <a:endParaRPr lang="en-SE"/>
@@ -19115,7 +22645,7 @@
           <a:lstStyle/>
           <a:p>
             <a:r>
-              <a:rPr lang="sv-SE"/>
+              <a:rPr lang="en-US"/>
               <a:t>Vincenzo Gulisano</a:t>
             </a:r>
             <a:endParaRPr lang="en-SE"/>
@@ -19382,7 +22912,7 @@
           <a:lstStyle/>
           <a:p>
             <a:r>
-              <a:rPr lang="sv-SE"/>
+              <a:rPr lang="en-US"/>
               <a:t>Vincenzo Gulisano</a:t>
             </a:r>
             <a:endParaRPr lang="en-SE"/>
@@ -19645,7 +23175,7 @@
           <a:lstStyle/>
           <a:p>
             <a:r>
-              <a:rPr lang="sv-SE"/>
+              <a:rPr lang="en-US"/>
               <a:t>Vincenzo Gulisano</a:t>
             </a:r>
             <a:endParaRPr lang="en-SE"/>
@@ -19910,7 +23440,7 @@
           <a:lstStyle/>
           <a:p>
             <a:r>
-              <a:rPr lang="sv-SE"/>
+              <a:rPr lang="en-US"/>
               <a:t>Vincenzo Gulisano</a:t>
             </a:r>
             <a:endParaRPr lang="en-SE"/>
@@ -20195,7 +23725,7 @@
           <a:lstStyle/>
           <a:p>
             <a:r>
-              <a:rPr lang="sv-SE"/>
+              <a:rPr lang="en-US"/>
               <a:t>Vincenzo Gulisano</a:t>
             </a:r>
             <a:endParaRPr lang="en-SE"/>
@@ -20383,10 +23913,9 @@
               <a:defRPr/>
             </a:pPr>
             <a:r>
-              <a:rPr lang="sv-SE"/>
+              <a:rPr lang="en-US"/>
               <a:t>Vincenzo Gulisano</a:t>
             </a:r>
-            <a:endParaRPr lang="en-US"/>
           </a:p>
         </p:txBody>
       </p:sp>
@@ -20522,7 +24051,7 @@
           <a:lstStyle/>
           <a:p>
             <a:r>
-              <a:rPr lang="sv-SE"/>
+              <a:rPr lang="en-US"/>
               <a:t>Vincenzo Gulisano</a:t>
             </a:r>
             <a:endParaRPr lang="en-SE"/>
@@ -21496,7 +25025,7 @@
           <a:lstStyle/>
           <a:p>
             <a:r>
-              <a:rPr lang="sv-SE"/>
+              <a:rPr lang="en-US"/>
               <a:t>Vincenzo Gulisano</a:t>
             </a:r>
             <a:endParaRPr lang="en-SE"/>
@@ -21717,7 +25246,7 @@
           <a:lstStyle/>
           <a:p>
             <a:r>
-              <a:rPr lang="sv-SE"/>
+              <a:rPr lang="en-US"/>
               <a:t>Vincenzo Gulisano</a:t>
             </a:r>
             <a:endParaRPr lang="en-SE"/>
@@ -21911,7 +25440,7 @@
           <a:lstStyle/>
           <a:p>
             <a:r>
-              <a:rPr lang="sv-SE"/>
+              <a:rPr lang="en-US"/>
               <a:t>Vincenzo Gulisano</a:t>
             </a:r>
             <a:endParaRPr lang="en-SE"/>
@@ -22097,7 +25626,7 @@
           <a:lstStyle/>
           <a:p>
             <a:r>
-              <a:rPr lang="sv-SE"/>
+              <a:rPr lang="en-US"/>
               <a:t>Vincenzo Gulisano</a:t>
             </a:r>
             <a:endParaRPr lang="en-SE"/>
@@ -22382,7 +25911,7 @@
           <a:lstStyle/>
           <a:p>
             <a:r>
-              <a:rPr lang="sv-SE"/>
+              <a:rPr lang="en-US"/>
               <a:t>Vincenzo Gulisano</a:t>
             </a:r>
             <a:endParaRPr lang="en-SE"/>
@@ -22599,7 +26128,7 @@
           <a:lstStyle/>
           <a:p>
             <a:r>
-              <a:rPr lang="sv-SE"/>
+              <a:rPr lang="en-US"/>
               <a:t>Vincenzo Gulisano</a:t>
             </a:r>
             <a:endParaRPr lang="en-SE"/>
@@ -22798,7 +26327,7 @@
           <a:lstStyle/>
           <a:p>
             <a:r>
-              <a:rPr lang="sv-SE"/>
+              <a:rPr lang="en-US"/>
               <a:t>Vincenzo Gulisano</a:t>
             </a:r>
             <a:endParaRPr lang="en-SE"/>
@@ -23083,7 +26612,7 @@
           <a:lstStyle/>
           <a:p>
             <a:r>
-              <a:rPr lang="sv-SE"/>
+              <a:rPr lang="en-US"/>
               <a:t>Vincenzo Gulisano</a:t>
             </a:r>
             <a:endParaRPr lang="en-SE"/>
@@ -23275,7 +26804,7 @@
           <a:lstStyle/>
           <a:p>
             <a:r>
-              <a:rPr lang="sv-SE"/>
+              <a:rPr lang="en-US"/>
               <a:t>Vincenzo Gulisano</a:t>
             </a:r>
             <a:endParaRPr lang="en-SE"/>
@@ -23500,7 +27029,7 @@
           <a:lstStyle/>
           <a:p>
             <a:r>
-              <a:rPr lang="sv-SE"/>
+              <a:rPr lang="en-US"/>
               <a:t>Vincenzo Gulisano</a:t>
             </a:r>
             <a:endParaRPr lang="en-SE"/>
@@ -23700,7 +27229,7 @@
           <a:lstStyle/>
           <a:p>
             <a:r>
-              <a:rPr lang="sv-SE"/>
+              <a:rPr lang="en-US"/>
               <a:t>Vincenzo Gulisano</a:t>
             </a:r>
             <a:endParaRPr lang="en-SE"/>
@@ -23979,7 +27508,7 @@
           <a:lstStyle/>
           <a:p>
             <a:r>
-              <a:rPr lang="sv-SE"/>
+              <a:rPr lang="en-US"/>
               <a:t>Vincenzo Gulisano</a:t>
             </a:r>
             <a:endParaRPr lang="en-SE"/>
@@ -24207,7 +27736,7 @@
           <a:lstStyle/>
           <a:p>
             <a:r>
-              <a:rPr lang="sv-SE"/>
+              <a:rPr lang="en-US"/>
               <a:t>Vincenzo Gulisano</a:t>
             </a:r>
             <a:endParaRPr lang="en-SE"/>
@@ -24429,7 +27958,7 @@
           <a:lstStyle/>
           <a:p>
             <a:r>
-              <a:rPr lang="sv-SE"/>
+              <a:rPr lang="en-US"/>
               <a:t>Vincenzo Gulisano</a:t>
             </a:r>
             <a:endParaRPr lang="en-SE"/>
@@ -24648,7 +28177,7 @@
           <a:lstStyle/>
           <a:p>
             <a:r>
-              <a:rPr lang="sv-SE"/>
+              <a:rPr lang="en-US"/>
               <a:t>Vincenzo Gulisano</a:t>
             </a:r>
             <a:endParaRPr lang="en-SE"/>
@@ -24840,7 +28369,7 @@
           <a:lstStyle/>
           <a:p>
             <a:r>
-              <a:rPr lang="sv-SE"/>
+              <a:rPr lang="en-US"/>
               <a:t>Vincenzo Gulisano</a:t>
             </a:r>
             <a:endParaRPr lang="en-SE"/>
@@ -25125,7 +28654,7 @@
           <a:lstStyle/>
           <a:p>
             <a:r>
-              <a:rPr lang="sv-SE"/>
+              <a:rPr lang="en-US"/>
               <a:t>Vincenzo Gulisano</a:t>
             </a:r>
             <a:endParaRPr lang="en-SE"/>
@@ -26072,7 +29601,7 @@
               </a:spcAft>
             </a:pPr>
             <a:r>
-              <a:rPr lang="sv-SE"/>
+              <a:rPr lang="en-US"/>
               <a:t>Vincenzo Gulisano</a:t>
             </a:r>
             <a:endParaRPr lang="en-SE"/>
@@ -27063,7 +30592,7 @@
               </a:spcAft>
             </a:pPr>
             <a:r>
-              <a:rPr lang="sv-SE"/>
+              <a:rPr lang="en-US"/>
               <a:t>Vincenzo Gulisano</a:t>
             </a:r>
             <a:endParaRPr lang="en-SE"/>
@@ -28124,7 +31653,7 @@
               <a:defRPr/>
             </a:pPr>
             <a:r>
-              <a:rPr kumimoji="0" lang="sv-SE" sz="1200" b="0" i="0" u="none" strike="noStrike" kern="1200" cap="none" spc="0" normalizeH="0" baseline="0" noProof="0">
+              <a:rPr kumimoji="0" lang="en-US" sz="1200" b="0" i="0" u="none" strike="noStrike" kern="1200" cap="none" spc="0" normalizeH="0" baseline="0" noProof="0">
                 <a:ln>
                   <a:noFill/>
                 </a:ln>
@@ -28724,7 +32253,7 @@
           <a:lstStyle/>
           <a:p>
             <a:r>
-              <a:rPr lang="sv-SE"/>
+              <a:rPr lang="en-US"/>
               <a:t>Vincenzo Gulisano</a:t>
             </a:r>
             <a:endParaRPr lang="en-SE"/>
@@ -29773,7 +33302,7 @@
               <a:defRPr/>
             </a:pPr>
             <a:r>
-              <a:rPr kumimoji="0" lang="sv-SE" sz="1200" b="0" i="0" u="none" strike="noStrike" kern="1200" cap="none" spc="0" normalizeH="0" baseline="0" noProof="0">
+              <a:rPr kumimoji="0" lang="en-US" sz="1200" b="0" i="0" u="none" strike="noStrike" kern="1200" cap="none" spc="0" normalizeH="0" baseline="0" noProof="0">
                 <a:ln>
                   <a:noFill/>
                 </a:ln>
@@ -31015,7 +34544,7 @@
               <a:defRPr/>
             </a:pPr>
             <a:r>
-              <a:rPr kumimoji="0" lang="sv-SE" sz="1200" b="0" i="0" u="none" strike="noStrike" kern="1200" cap="none" spc="0" normalizeH="0" baseline="0" noProof="0">
+              <a:rPr kumimoji="0" lang="en-US" sz="1200" b="0" i="0" u="none" strike="noStrike" kern="1200" cap="none" spc="0" normalizeH="0" baseline="0" noProof="0">
                 <a:ln>
                   <a:noFill/>
                 </a:ln>
@@ -32181,7 +35710,7 @@
               <a:defRPr/>
             </a:pPr>
             <a:r>
-              <a:rPr kumimoji="0" lang="sv-SE" sz="1200" b="0" i="0" u="none" strike="noStrike" kern="1200" cap="none" spc="0" normalizeH="0" baseline="0" noProof="0">
+              <a:rPr kumimoji="0" lang="en-US" sz="1200" b="0" i="0" u="none" strike="noStrike" kern="1200" cap="none" spc="0" normalizeH="0" baseline="0" noProof="0">
                 <a:ln>
                   <a:noFill/>
                 </a:ln>
@@ -33356,7 +36885,7 @@
               <a:defRPr/>
             </a:pPr>
             <a:r>
-              <a:rPr kumimoji="0" lang="sv-SE" sz="1200" b="0" i="0" u="none" strike="noStrike" kern="1200" cap="none" spc="0" normalizeH="0" baseline="0" noProof="0">
+              <a:rPr kumimoji="0" lang="en-US" sz="1200" b="0" i="0" u="none" strike="noStrike" kern="1200" cap="none" spc="0" normalizeH="0" baseline="0" noProof="0">
                 <a:ln>
                   <a:noFill/>
                 </a:ln>
@@ -34584,7 +38113,7 @@
               <a:defRPr/>
             </a:pPr>
             <a:r>
-              <a:rPr kumimoji="0" lang="sv-SE" sz="1200" b="0" i="0" u="none" strike="noStrike" kern="1200" cap="none" spc="0" normalizeH="0" baseline="0" noProof="0">
+              <a:rPr kumimoji="0" lang="en-US" sz="1200" b="0" i="0" u="none" strike="noStrike" kern="1200" cap="none" spc="0" normalizeH="0" baseline="0" noProof="0">
                 <a:ln>
                   <a:noFill/>
                 </a:ln>
@@ -34967,7 +38496,7 @@
           <a:lstStyle/>
           <a:p>
             <a:r>
-              <a:rPr lang="sv-SE"/>
+              <a:rPr lang="en-US"/>
               <a:t>Vincenzo Gulisano</a:t>
             </a:r>
             <a:endParaRPr lang="en-SE"/>
@@ -35913,7 +39442,7 @@
               <a:defRPr/>
             </a:pPr>
             <a:r>
-              <a:rPr kumimoji="0" lang="sv-SE" sz="1200" b="0" i="0" u="none" strike="noStrike" kern="1200" cap="none" spc="0" normalizeH="0" baseline="0" noProof="0">
+              <a:rPr kumimoji="0" lang="en-US" sz="1200" b="0" i="0" u="none" strike="noStrike" kern="1200" cap="none" spc="0" normalizeH="0" baseline="0" noProof="0">
                 <a:ln>
                   <a:noFill/>
                 </a:ln>
@@ -37317,7 +40846,7 @@
               <a:defRPr/>
             </a:pPr>
             <a:r>
-              <a:rPr kumimoji="0" lang="sv-SE" sz="1200" b="0" i="0" u="none" strike="noStrike" kern="1200" cap="none" spc="0" normalizeH="0" baseline="0" noProof="0">
+              <a:rPr kumimoji="0" lang="en-US" sz="1200" b="0" i="0" u="none" strike="noStrike" kern="1200" cap="none" spc="0" normalizeH="0" baseline="0" noProof="0">
                 <a:ln>
                   <a:noFill/>
                 </a:ln>
@@ -38667,7 +42196,7 @@
               <a:defRPr/>
             </a:pPr>
             <a:r>
-              <a:rPr kumimoji="0" lang="sv-SE" sz="1200" b="0" i="0" u="none" strike="noStrike" kern="1200" cap="none" spc="0" normalizeH="0" baseline="0" noProof="0">
+              <a:rPr kumimoji="0" lang="en-US" sz="1200" b="0" i="0" u="none" strike="noStrike" kern="1200" cap="none" spc="0" normalizeH="0" baseline="0" noProof="0">
                 <a:ln>
                   <a:noFill/>
                 </a:ln>
@@ -40061,7 +43590,7 @@
               <a:defRPr/>
             </a:pPr>
             <a:r>
-              <a:rPr kumimoji="0" lang="sv-SE" sz="1200" b="0" i="0" u="none" strike="noStrike" kern="1200" cap="none" spc="0" normalizeH="0" baseline="0" noProof="0">
+              <a:rPr kumimoji="0" lang="en-US" sz="1200" b="0" i="0" u="none" strike="noStrike" kern="1200" cap="none" spc="0" normalizeH="0" baseline="0" noProof="0">
                 <a:ln>
                   <a:noFill/>
                 </a:ln>
@@ -41716,7 +45245,7 @@
           <a:lstStyle/>
           <a:p>
             <a:r>
-              <a:rPr lang="sv-SE"/>
+              <a:rPr lang="en-US"/>
               <a:t>Vincenzo Gulisano</a:t>
             </a:r>
             <a:endParaRPr lang="en-SE"/>
@@ -41785,6 +45314,1711 @@
     <p:extLst>
       <p:ext uri="{BB962C8B-B14F-4D97-AF65-F5344CB8AC3E}">
         <p14:creationId xmlns:p14="http://schemas.microsoft.com/office/powerpoint/2010/main" val="1290874825"/>
+      </p:ext>
+    </p:extLst>
+  </p:cSld>
+  <p:clrMapOvr>
+    <a:masterClrMapping/>
+  </p:clrMapOvr>
+</p:sld>
+</file>
+
+<file path=ppt/slides/slide50.xml><?xml version="1.0" encoding="utf-8"?>
+<p:sld xmlns:a="http://schemas.openxmlformats.org/drawingml/2006/main" xmlns:r="http://schemas.openxmlformats.org/officeDocument/2006/relationships" xmlns:p="http://schemas.openxmlformats.org/presentationml/2006/main">
+  <p:cSld>
+    <p:bg>
+      <p:bgPr>
+        <a:solidFill>
+          <a:schemeClr val="bg1"/>
+        </a:solidFill>
+        <a:effectLst/>
+      </p:bgPr>
+    </p:bg>
+    <p:spTree>
+      <p:nvGrpSpPr>
+        <p:cNvPr id="1" name=""/>
+        <p:cNvGrpSpPr/>
+        <p:nvPr/>
+      </p:nvGrpSpPr>
+      <p:grpSpPr>
+        <a:xfrm>
+          <a:off x="0" y="0"/>
+          <a:ext cx="0" cy="0"/>
+          <a:chOff x="0" y="0"/>
+          <a:chExt cx="0" cy="0"/>
+        </a:xfrm>
+      </p:grpSpPr>
+      <p:sp useBgFill="1">
+        <p:nvSpPr>
+          <p:cNvPr id="7" name="Rectangle 6">
+            <a:extLst>
+              <a:ext uri="{FF2B5EF4-FFF2-40B4-BE49-F238E27FC236}">
+                <a16:creationId xmlns:a16="http://schemas.microsoft.com/office/drawing/2014/main" id="{934F1179-B481-4F9E-BCA3-AFB972070F83}"/>
+              </a:ext>
+              <a:ext uri="{C183D7F6-B498-43B3-948B-1728B52AA6E4}">
+                <adec:decorative xmlns:adec="http://schemas.microsoft.com/office/drawing/2017/decorative" val="1"/>
+              </a:ext>
+            </a:extLst>
+          </p:cNvPr>
+          <p:cNvSpPr>
+            <a:spLocks noGrp="1" noRot="1" noChangeAspect="1" noMove="1" noResize="1" noEditPoints="1" noAdjustHandles="1" noChangeArrowheads="1" noChangeShapeType="1" noTextEdit="1"/>
+          </p:cNvSpPr>
+          <p:nvPr>
+            <p:extLst>
+              <p:ext uri="{386F3935-93C4-4BCD-93E2-E3B085C9AB24}">
+                <p16:designElem xmlns:p16="http://schemas.microsoft.com/office/powerpoint/2015/main" val="1"/>
+              </p:ext>
+            </p:extLst>
+          </p:nvPr>
+        </p:nvSpPr>
+        <p:spPr>
+          <a:xfrm>
+            <a:off x="1524000" y="0"/>
+            <a:ext cx="9144000" cy="6858000"/>
+          </a:xfrm>
+          <a:prstGeom prst="rect">
+            <a:avLst/>
+          </a:prstGeom>
+          <a:ln>
+            <a:noFill/>
+          </a:ln>
+        </p:spPr>
+        <p:style>
+          <a:lnRef idx="2">
+            <a:schemeClr val="accent1">
+              <a:shade val="50000"/>
+            </a:schemeClr>
+          </a:lnRef>
+          <a:fillRef idx="1">
+            <a:schemeClr val="accent1"/>
+          </a:fillRef>
+          <a:effectRef idx="0">
+            <a:schemeClr val="accent1"/>
+          </a:effectRef>
+          <a:fontRef idx="minor">
+            <a:schemeClr val="lt1"/>
+          </a:fontRef>
+        </p:style>
+        <p:txBody>
+          <a:bodyPr rtlCol="0" anchor="ctr"/>
+          <a:lstStyle/>
+          <a:p>
+            <a:pPr marL="0" marR="0" lvl="0" indent="0" algn="ctr" defTabSz="914400" rtl="0" eaLnBrk="0" fontAlgn="base" latinLnBrk="0" hangingPunct="0">
+              <a:lnSpc>
+                <a:spcPct val="100000"/>
+              </a:lnSpc>
+              <a:spcBef>
+                <a:spcPct val="0"/>
+              </a:spcBef>
+              <a:spcAft>
+                <a:spcPct val="0"/>
+              </a:spcAft>
+              <a:buClrTx/>
+              <a:buSzTx/>
+              <a:buFontTx/>
+              <a:buNone/>
+              <a:tabLst/>
+              <a:defRPr/>
+            </a:pPr>
+            <a:endParaRPr kumimoji="0" lang="en-US" sz="1800" b="0" i="0" u="none" strike="noStrike" kern="1200" cap="none" spc="0" normalizeH="0" baseline="0" noProof="0">
+              <a:ln>
+                <a:noFill/>
+              </a:ln>
+              <a:solidFill>
+                <a:prstClr val="white"/>
+              </a:solidFill>
+              <a:effectLst/>
+              <a:uLnTx/>
+              <a:uFillTx/>
+              <a:latin typeface="Garamond" panose="02020404030301010803"/>
+              <a:ea typeface="+mn-ea"/>
+              <a:cs typeface="+mn-cs"/>
+            </a:endParaRPr>
+          </a:p>
+        </p:txBody>
+      </p:sp>
+      <p:sp>
+        <p:nvSpPr>
+          <p:cNvPr id="9" name="Right Triangle 8">
+            <a:extLst>
+              <a:ext uri="{FF2B5EF4-FFF2-40B4-BE49-F238E27FC236}">
+                <a16:creationId xmlns:a16="http://schemas.microsoft.com/office/drawing/2014/main" id="{827DC2C4-B485-428A-BF4A-472D2967F47F}"/>
+              </a:ext>
+              <a:ext uri="{C183D7F6-B498-43B3-948B-1728B52AA6E4}">
+                <adec:decorative xmlns:adec="http://schemas.microsoft.com/office/drawing/2017/decorative" val="1"/>
+              </a:ext>
+            </a:extLst>
+          </p:cNvPr>
+          <p:cNvSpPr>
+            <a:spLocks noGrp="1" noRot="1" noChangeAspect="1" noMove="1" noResize="1" noEditPoints="1" noAdjustHandles="1" noChangeArrowheads="1" noChangeShapeType="1" noTextEdit="1"/>
+          </p:cNvSpPr>
+          <p:nvPr>
+            <p:extLst>
+              <p:ext uri="{386F3935-93C4-4BCD-93E2-E3B085C9AB24}">
+                <p16:designElem xmlns:p16="http://schemas.microsoft.com/office/powerpoint/2015/main" val="1"/>
+              </p:ext>
+            </p:extLst>
+          </p:nvPr>
+        </p:nvSpPr>
+        <p:spPr>
+          <a:xfrm flipH="1">
+            <a:off x="7956540" y="3335867"/>
+            <a:ext cx="2468880" cy="3200400"/>
+          </a:xfrm>
+          <a:prstGeom prst="rtTriangle">
+            <a:avLst/>
+          </a:prstGeom>
+          <a:solidFill>
+            <a:schemeClr val="accent4"/>
+          </a:solidFill>
+          <a:ln>
+            <a:noFill/>
+          </a:ln>
+        </p:spPr>
+        <p:style>
+          <a:lnRef idx="2">
+            <a:schemeClr val="accent1">
+              <a:shade val="50000"/>
+            </a:schemeClr>
+          </a:lnRef>
+          <a:fillRef idx="1">
+            <a:schemeClr val="accent1"/>
+          </a:fillRef>
+          <a:effectRef idx="0">
+            <a:schemeClr val="accent1"/>
+          </a:effectRef>
+          <a:fontRef idx="minor">
+            <a:schemeClr val="lt1"/>
+          </a:fontRef>
+        </p:style>
+        <p:txBody>
+          <a:bodyPr rtlCol="0" anchor="ctr"/>
+          <a:lstStyle/>
+          <a:p>
+            <a:pPr marL="0" marR="0" lvl="0" indent="0" algn="ctr" defTabSz="914400" rtl="0" eaLnBrk="0" fontAlgn="base" latinLnBrk="0" hangingPunct="0">
+              <a:lnSpc>
+                <a:spcPct val="100000"/>
+              </a:lnSpc>
+              <a:spcBef>
+                <a:spcPct val="0"/>
+              </a:spcBef>
+              <a:spcAft>
+                <a:spcPct val="0"/>
+              </a:spcAft>
+              <a:buClrTx/>
+              <a:buSzTx/>
+              <a:buFontTx/>
+              <a:buNone/>
+              <a:tabLst/>
+              <a:defRPr/>
+            </a:pPr>
+            <a:endParaRPr kumimoji="0" lang="en-US" sz="1800" b="0" i="0" u="none" strike="noStrike" kern="1200" cap="none" spc="0" normalizeH="0" baseline="0" noProof="0" dirty="0">
+              <a:ln>
+                <a:noFill/>
+              </a:ln>
+              <a:solidFill>
+                <a:prstClr val="white"/>
+              </a:solidFill>
+              <a:effectLst/>
+              <a:uLnTx/>
+              <a:uFillTx/>
+              <a:latin typeface="Garamond" panose="02020404030301010803"/>
+              <a:ea typeface="+mn-ea"/>
+              <a:cs typeface="+mn-cs"/>
+            </a:endParaRPr>
+          </a:p>
+        </p:txBody>
+      </p:sp>
+      <p:sp>
+        <p:nvSpPr>
+          <p:cNvPr id="11" name="Rectangle 10">
+            <a:extLst>
+              <a:ext uri="{FF2B5EF4-FFF2-40B4-BE49-F238E27FC236}">
+                <a16:creationId xmlns:a16="http://schemas.microsoft.com/office/drawing/2014/main" id="{EE04B5EB-F158-4507-90DD-BD23620C7CC9}"/>
+              </a:ext>
+              <a:ext uri="{C183D7F6-B498-43B3-948B-1728B52AA6E4}">
+                <adec:decorative xmlns:adec="http://schemas.microsoft.com/office/drawing/2017/decorative" val="1"/>
+              </a:ext>
+            </a:extLst>
+          </p:cNvPr>
+          <p:cNvSpPr>
+            <a:spLocks noGrp="1" noRot="1" noChangeAspect="1" noMove="1" noResize="1" noEditPoints="1" noAdjustHandles="1" noChangeArrowheads="1" noChangeShapeType="1" noTextEdit="1"/>
+          </p:cNvSpPr>
+          <p:nvPr>
+            <p:extLst>
+              <p:ext uri="{386F3935-93C4-4BCD-93E2-E3B085C9AB24}">
+                <p16:designElem xmlns:p16="http://schemas.microsoft.com/office/powerpoint/2015/main" val="1"/>
+              </p:ext>
+            </p:extLst>
+          </p:nvPr>
+        </p:nvSpPr>
+        <p:spPr>
+          <a:xfrm>
+            <a:off x="2005330" y="623275"/>
+            <a:ext cx="8178790" cy="5607882"/>
+          </a:xfrm>
+          <a:prstGeom prst="rect">
+            <a:avLst/>
+          </a:prstGeom>
+          <a:noFill/>
+          <a:ln w="19050">
+            <a:solidFill>
+              <a:schemeClr val="tx1">
+                <a:lumMod val="75000"/>
+                <a:lumOff val="25000"/>
+              </a:schemeClr>
+            </a:solidFill>
+          </a:ln>
+        </p:spPr>
+        <p:style>
+          <a:lnRef idx="2">
+            <a:schemeClr val="accent1">
+              <a:shade val="50000"/>
+            </a:schemeClr>
+          </a:lnRef>
+          <a:fillRef idx="1">
+            <a:schemeClr val="accent1"/>
+          </a:fillRef>
+          <a:effectRef idx="0">
+            <a:schemeClr val="accent1"/>
+          </a:effectRef>
+          <a:fontRef idx="minor">
+            <a:schemeClr val="lt1"/>
+          </a:fontRef>
+        </p:style>
+        <p:txBody>
+          <a:bodyPr rtlCol="0" anchor="ctr"/>
+          <a:lstStyle/>
+          <a:p>
+            <a:pPr marL="0" marR="0" lvl="0" indent="0" algn="ctr" defTabSz="914400" rtl="0" eaLnBrk="0" fontAlgn="base" latinLnBrk="0" hangingPunct="0">
+              <a:lnSpc>
+                <a:spcPct val="100000"/>
+              </a:lnSpc>
+              <a:spcBef>
+                <a:spcPct val="0"/>
+              </a:spcBef>
+              <a:spcAft>
+                <a:spcPct val="0"/>
+              </a:spcAft>
+              <a:buClrTx/>
+              <a:buSzTx/>
+              <a:buFontTx/>
+              <a:buNone/>
+              <a:tabLst/>
+              <a:defRPr/>
+            </a:pPr>
+            <a:endParaRPr kumimoji="0" lang="en-US" sz="1800" b="0" i="0" u="none" strike="noStrike" kern="1200" cap="none" spc="0" normalizeH="0" baseline="0" noProof="0">
+              <a:ln>
+                <a:noFill/>
+              </a:ln>
+              <a:solidFill>
+                <a:prstClr val="white"/>
+              </a:solidFill>
+              <a:effectLst/>
+              <a:uLnTx/>
+              <a:uFillTx/>
+              <a:latin typeface="Garamond" panose="02020404030301010803"/>
+              <a:ea typeface="+mn-ea"/>
+              <a:cs typeface="+mn-cs"/>
+            </a:endParaRPr>
+          </a:p>
+        </p:txBody>
+      </p:sp>
+      <p:sp>
+        <p:nvSpPr>
+          <p:cNvPr id="2" name="Title 1">
+            <a:extLst>
+              <a:ext uri="{FF2B5EF4-FFF2-40B4-BE49-F238E27FC236}">
+                <a16:creationId xmlns:a16="http://schemas.microsoft.com/office/drawing/2014/main" id="{9DE59AC3-12A8-FDCB-9131-00A43318B574}"/>
+              </a:ext>
+            </a:extLst>
+          </p:cNvPr>
+          <p:cNvSpPr>
+            <a:spLocks noGrp="1"/>
+          </p:cNvSpPr>
+          <p:nvPr>
+            <p:ph type="title"/>
+          </p:nvPr>
+        </p:nvSpPr>
+        <p:spPr>
+          <a:xfrm>
+            <a:off x="2487930" y="1008994"/>
+            <a:ext cx="6923558" cy="3542045"/>
+          </a:xfrm>
+        </p:spPr>
+        <p:txBody>
+          <a:bodyPr vert="horz" lIns="91440" tIns="45720" rIns="91440" bIns="45720" rtlCol="0" anchor="b">
+            <a:normAutofit/>
+          </a:bodyPr>
+          <a:lstStyle/>
+          <a:p>
+            <a:pPr defTabSz="914400"/>
+            <a:r>
+              <a:rPr lang="en-US" sz="10000"/>
+              <a:t>Questions</a:t>
+            </a:r>
+          </a:p>
+        </p:txBody>
+      </p:sp>
+      <p:sp>
+        <p:nvSpPr>
+          <p:cNvPr id="3" name="Date Placeholder 2">
+            <a:extLst>
+              <a:ext uri="{FF2B5EF4-FFF2-40B4-BE49-F238E27FC236}">
+                <a16:creationId xmlns:a16="http://schemas.microsoft.com/office/drawing/2014/main" id="{CBEB3DD1-3C6D-EC88-D98D-B9996992F81A}"/>
+              </a:ext>
+            </a:extLst>
+          </p:cNvPr>
+          <p:cNvSpPr>
+            <a:spLocks noGrp="1"/>
+          </p:cNvSpPr>
+          <p:nvPr>
+            <p:ph type="dt" sz="half" idx="10"/>
+          </p:nvPr>
+        </p:nvSpPr>
+        <p:spPr/>
+        <p:txBody>
+          <a:bodyPr/>
+          <a:lstStyle/>
+          <a:p>
+            <a:pPr marL="0" marR="0" lvl="0" indent="0" algn="l" defTabSz="914400" rtl="0" eaLnBrk="0" fontAlgn="base" latinLnBrk="0" hangingPunct="0">
+              <a:lnSpc>
+                <a:spcPct val="100000"/>
+              </a:lnSpc>
+              <a:spcBef>
+                <a:spcPct val="0"/>
+              </a:spcBef>
+              <a:spcAft>
+                <a:spcPct val="0"/>
+              </a:spcAft>
+              <a:buClrTx/>
+              <a:buSzTx/>
+              <a:buFontTx/>
+              <a:buNone/>
+              <a:tabLst/>
+              <a:defRPr/>
+            </a:pPr>
+            <a:r>
+              <a:rPr kumimoji="0" lang="en-US" sz="900" b="0" i="0" u="none" strike="noStrike" kern="1200" cap="none" spc="0" normalizeH="0" baseline="0" noProof="0">
+                <a:ln>
+                  <a:noFill/>
+                </a:ln>
+                <a:solidFill>
+                  <a:prstClr val="black">
+                    <a:tint val="75000"/>
+                  </a:prstClr>
+                </a:solidFill>
+                <a:effectLst/>
+                <a:uLnTx/>
+                <a:uFillTx/>
+                <a:latin typeface="Verdana" panose="020B0604030504040204" pitchFamily="34" charset="0"/>
+                <a:ea typeface="MS PGothic" panose="020B0600070205080204" pitchFamily="34" charset="-128"/>
+                <a:cs typeface="+mn-cs"/>
+              </a:rPr>
+              <a:t>Vincenzo Gulisano</a:t>
+            </a:r>
+          </a:p>
+        </p:txBody>
+      </p:sp>
+      <p:sp>
+        <p:nvSpPr>
+          <p:cNvPr id="4" name="Footer Placeholder 3">
+            <a:extLst>
+              <a:ext uri="{FF2B5EF4-FFF2-40B4-BE49-F238E27FC236}">
+                <a16:creationId xmlns:a16="http://schemas.microsoft.com/office/drawing/2014/main" id="{564DBAEA-6B43-ECC3-AD74-5067BCEEECDF}"/>
+              </a:ext>
+            </a:extLst>
+          </p:cNvPr>
+          <p:cNvSpPr>
+            <a:spLocks noGrp="1"/>
+          </p:cNvSpPr>
+          <p:nvPr>
+            <p:ph type="ftr" sz="quarter" idx="11"/>
+          </p:nvPr>
+        </p:nvSpPr>
+        <p:spPr/>
+        <p:txBody>
+          <a:bodyPr/>
+          <a:lstStyle/>
+          <a:p>
+            <a:pPr marL="0" marR="0" lvl="0" indent="0" algn="ctr" defTabSz="914400" rtl="0" eaLnBrk="0" fontAlgn="base" latinLnBrk="0" hangingPunct="0">
+              <a:lnSpc>
+                <a:spcPct val="100000"/>
+              </a:lnSpc>
+              <a:spcBef>
+                <a:spcPct val="0"/>
+              </a:spcBef>
+              <a:spcAft>
+                <a:spcPct val="0"/>
+              </a:spcAft>
+              <a:buClrTx/>
+              <a:buSzTx/>
+              <a:buFontTx/>
+              <a:buNone/>
+              <a:tabLst/>
+              <a:defRPr/>
+            </a:pPr>
+            <a:r>
+              <a:rPr kumimoji="0" lang="en-US" sz="900" b="0" i="0" u="none" strike="noStrike" kern="1200" cap="none" spc="0" normalizeH="0" baseline="0" noProof="0">
+                <a:ln>
+                  <a:noFill/>
+                </a:ln>
+                <a:solidFill>
+                  <a:prstClr val="black">
+                    <a:tint val="75000"/>
+                  </a:prstClr>
+                </a:solidFill>
+                <a:effectLst/>
+                <a:uLnTx/>
+                <a:uFillTx/>
+                <a:latin typeface="Verdana" panose="020B0604030504040204" pitchFamily="34" charset="0"/>
+                <a:ea typeface="MS PGothic" panose="020B0600070205080204" pitchFamily="34" charset="-128"/>
+                <a:cs typeface="+mn-cs"/>
+              </a:rPr>
+              <a:t>Operating Systems - Virtualization</a:t>
+            </a:r>
+            <a:endParaRPr kumimoji="0" lang="en-US" sz="900" b="0" i="0" u="none" strike="noStrike" kern="1200" cap="none" spc="0" normalizeH="0" baseline="0" noProof="0" dirty="0">
+              <a:ln>
+                <a:noFill/>
+              </a:ln>
+              <a:solidFill>
+                <a:prstClr val="black">
+                  <a:tint val="75000"/>
+                </a:prstClr>
+              </a:solidFill>
+              <a:effectLst/>
+              <a:uLnTx/>
+              <a:uFillTx/>
+              <a:latin typeface="Verdana" panose="020B0604030504040204" pitchFamily="34" charset="0"/>
+              <a:ea typeface="MS PGothic" panose="020B0600070205080204" pitchFamily="34" charset="-128"/>
+              <a:cs typeface="+mn-cs"/>
+            </a:endParaRPr>
+          </a:p>
+        </p:txBody>
+      </p:sp>
+      <p:sp>
+        <p:nvSpPr>
+          <p:cNvPr id="5" name="Slide Number Placeholder 4">
+            <a:extLst>
+              <a:ext uri="{FF2B5EF4-FFF2-40B4-BE49-F238E27FC236}">
+                <a16:creationId xmlns:a16="http://schemas.microsoft.com/office/drawing/2014/main" id="{6A6197B8-E5A9-12D1-240C-0B03B2DD07E2}"/>
+              </a:ext>
+            </a:extLst>
+          </p:cNvPr>
+          <p:cNvSpPr>
+            <a:spLocks noGrp="1"/>
+          </p:cNvSpPr>
+          <p:nvPr>
+            <p:ph type="sldNum" sz="quarter" idx="12"/>
+          </p:nvPr>
+        </p:nvSpPr>
+        <p:spPr/>
+        <p:txBody>
+          <a:bodyPr/>
+          <a:lstStyle/>
+          <a:p>
+            <a:pPr marL="0" marR="0" lvl="0" indent="0" algn="r" defTabSz="914400" rtl="0" eaLnBrk="0" fontAlgn="base" latinLnBrk="0" hangingPunct="0">
+              <a:lnSpc>
+                <a:spcPct val="100000"/>
+              </a:lnSpc>
+              <a:spcBef>
+                <a:spcPct val="0"/>
+              </a:spcBef>
+              <a:spcAft>
+                <a:spcPct val="0"/>
+              </a:spcAft>
+              <a:buClrTx/>
+              <a:buSzTx/>
+              <a:buFontTx/>
+              <a:buNone/>
+              <a:tabLst/>
+              <a:defRPr/>
+            </a:pPr>
+            <a:fld id="{95AAEEEC-DCEC-4178-AB14-E7254A15A296}" type="slidenum">
+              <a:rPr kumimoji="0" lang="en-US" sz="900" b="0" i="0" u="none" strike="noStrike" kern="1200" cap="none" spc="0" normalizeH="0" baseline="0" noProof="0">
+                <a:ln>
+                  <a:noFill/>
+                </a:ln>
+                <a:solidFill>
+                  <a:prstClr val="black">
+                    <a:tint val="75000"/>
+                  </a:prstClr>
+                </a:solidFill>
+                <a:effectLst/>
+                <a:uLnTx/>
+                <a:uFillTx/>
+                <a:latin typeface="Verdana" panose="020B0604030504040204" pitchFamily="34" charset="0"/>
+                <a:ea typeface="MS PGothic" panose="020B0600070205080204" pitchFamily="34" charset="-128"/>
+                <a:cs typeface="+mn-cs"/>
+              </a:rPr>
+              <a:pPr marL="0" marR="0" lvl="0" indent="0" algn="r" defTabSz="914400" rtl="0" eaLnBrk="0" fontAlgn="base" latinLnBrk="0" hangingPunct="0">
+                <a:lnSpc>
+                  <a:spcPct val="100000"/>
+                </a:lnSpc>
+                <a:spcBef>
+                  <a:spcPct val="0"/>
+                </a:spcBef>
+                <a:spcAft>
+                  <a:spcPct val="0"/>
+                </a:spcAft>
+                <a:buClrTx/>
+                <a:buSzTx/>
+                <a:buFontTx/>
+                <a:buNone/>
+                <a:tabLst/>
+                <a:defRPr/>
+              </a:pPr>
+              <a:t>50</a:t>
+            </a:fld>
+            <a:endParaRPr kumimoji="0" lang="en-US" sz="900" b="0" i="0" u="none" strike="noStrike" kern="1200" cap="none" spc="0" normalizeH="0" baseline="0" noProof="0">
+              <a:ln>
+                <a:noFill/>
+              </a:ln>
+              <a:solidFill>
+                <a:prstClr val="black">
+                  <a:tint val="75000"/>
+                </a:prstClr>
+              </a:solidFill>
+              <a:effectLst/>
+              <a:uLnTx/>
+              <a:uFillTx/>
+              <a:latin typeface="Verdana" panose="020B0604030504040204" pitchFamily="34" charset="0"/>
+              <a:ea typeface="MS PGothic" panose="020B0600070205080204" pitchFamily="34" charset="-128"/>
+              <a:cs typeface="+mn-cs"/>
+            </a:endParaRPr>
+          </a:p>
+        </p:txBody>
+      </p:sp>
+    </p:spTree>
+    <p:extLst>
+      <p:ext uri="{BB962C8B-B14F-4D97-AF65-F5344CB8AC3E}">
+        <p14:creationId xmlns:p14="http://schemas.microsoft.com/office/powerpoint/2010/main" val="3831187052"/>
+      </p:ext>
+    </p:extLst>
+  </p:cSld>
+  <p:clrMapOvr>
+    <a:masterClrMapping/>
+  </p:clrMapOvr>
+</p:sld>
+</file>
+
+<file path=ppt/slides/slide51.xml><?xml version="1.0" encoding="utf-8"?>
+<p:sld xmlns:a="http://schemas.openxmlformats.org/drawingml/2006/main" xmlns:r="http://schemas.openxmlformats.org/officeDocument/2006/relationships" xmlns:p="http://schemas.openxmlformats.org/presentationml/2006/main">
+  <p:cSld>
+    <p:spTree>
+      <p:nvGrpSpPr>
+        <p:cNvPr id="1" name=""/>
+        <p:cNvGrpSpPr/>
+        <p:nvPr/>
+      </p:nvGrpSpPr>
+      <p:grpSpPr>
+        <a:xfrm>
+          <a:off x="0" y="0"/>
+          <a:ext cx="0" cy="0"/>
+          <a:chOff x="0" y="0"/>
+          <a:chExt cx="0" cy="0"/>
+        </a:xfrm>
+      </p:grpSpPr>
+      <p:sp>
+        <p:nvSpPr>
+          <p:cNvPr id="2" name="Title 1">
+            <a:extLst>
+              <a:ext uri="{FF2B5EF4-FFF2-40B4-BE49-F238E27FC236}">
+                <a16:creationId xmlns:a16="http://schemas.microsoft.com/office/drawing/2014/main" id="{DF67868B-C2CA-21A0-1BEE-576E46908A8A}"/>
+              </a:ext>
+            </a:extLst>
+          </p:cNvPr>
+          <p:cNvSpPr>
+            <a:spLocks noGrp="1"/>
+          </p:cNvSpPr>
+          <p:nvPr>
+            <p:ph type="title"/>
+          </p:nvPr>
+        </p:nvSpPr>
+        <p:spPr/>
+        <p:txBody>
+          <a:bodyPr/>
+          <a:lstStyle/>
+          <a:p>
+            <a:r>
+              <a:rPr lang="en-US" dirty="0"/>
+              <a:t>For classic trap-and-emulate virtualization, why must every sensitive instruction also be privileged?</a:t>
+            </a:r>
+          </a:p>
+        </p:txBody>
+      </p:sp>
+      <p:sp>
+        <p:nvSpPr>
+          <p:cNvPr id="3" name="Content Placeholder 2">
+            <a:extLst>
+              <a:ext uri="{FF2B5EF4-FFF2-40B4-BE49-F238E27FC236}">
+                <a16:creationId xmlns:a16="http://schemas.microsoft.com/office/drawing/2014/main" id="{DE579815-9480-8757-B058-8B439D54BD1C}"/>
+              </a:ext>
+            </a:extLst>
+          </p:cNvPr>
+          <p:cNvSpPr>
+            <a:spLocks noGrp="1"/>
+          </p:cNvSpPr>
+          <p:nvPr>
+            <p:ph idx="1"/>
+          </p:nvPr>
+        </p:nvSpPr>
+        <p:spPr/>
+        <p:txBody>
+          <a:bodyPr>
+            <a:normAutofit/>
+          </a:bodyPr>
+          <a:lstStyle/>
+          <a:p>
+            <a:pPr marL="514350" indent="-514350">
+              <a:buFont typeface="+mj-lt"/>
+              <a:buAutoNum type="arabicPeriod"/>
+            </a:pPr>
+            <a:r>
+              <a:rPr lang="en-US" sz="3200" dirty="0"/>
+              <a:t>Otherwise, the guest OS cannot determine which process issued the instruction.</a:t>
+            </a:r>
+          </a:p>
+          <a:p>
+            <a:pPr marL="514350" indent="-514350">
+              <a:buFont typeface="+mj-lt"/>
+              <a:buAutoNum type="arabicPeriod"/>
+            </a:pPr>
+            <a:r>
+              <a:rPr lang="en-US" sz="3200" dirty="0"/>
+              <a:t>Otherwise, a guest OS could execute a sensitive instruction without trapping, so the hypervisor might not regain control.</a:t>
+            </a:r>
+          </a:p>
+          <a:p>
+            <a:pPr marL="514350" indent="-514350">
+              <a:buFont typeface="+mj-lt"/>
+              <a:buAutoNum type="arabicPeriod"/>
+            </a:pPr>
+            <a:r>
+              <a:rPr lang="en-US" sz="3200" dirty="0"/>
+              <a:t>Otherwise, the hardware cannot distinguish a host OS from a guest OS.</a:t>
+            </a:r>
+          </a:p>
+        </p:txBody>
+      </p:sp>
+      <p:sp>
+        <p:nvSpPr>
+          <p:cNvPr id="4" name="Date Placeholder 3">
+            <a:extLst>
+              <a:ext uri="{FF2B5EF4-FFF2-40B4-BE49-F238E27FC236}">
+                <a16:creationId xmlns:a16="http://schemas.microsoft.com/office/drawing/2014/main" id="{ECCBA8C7-6AAB-6B41-4F35-79E5C741FC31}"/>
+              </a:ext>
+            </a:extLst>
+          </p:cNvPr>
+          <p:cNvSpPr>
+            <a:spLocks noGrp="1"/>
+          </p:cNvSpPr>
+          <p:nvPr>
+            <p:ph type="dt" sz="half" idx="10"/>
+          </p:nvPr>
+        </p:nvSpPr>
+        <p:spPr/>
+        <p:txBody>
+          <a:bodyPr/>
+          <a:lstStyle/>
+          <a:p>
+            <a:r>
+              <a:rPr lang="en-US"/>
+              <a:t>Vincenzo Gulisano</a:t>
+            </a:r>
+          </a:p>
+        </p:txBody>
+      </p:sp>
+      <p:sp>
+        <p:nvSpPr>
+          <p:cNvPr id="5" name="Footer Placeholder 4">
+            <a:extLst>
+              <a:ext uri="{FF2B5EF4-FFF2-40B4-BE49-F238E27FC236}">
+                <a16:creationId xmlns:a16="http://schemas.microsoft.com/office/drawing/2014/main" id="{EE5B2EF1-ECD3-E388-193F-319E5599F077}"/>
+              </a:ext>
+            </a:extLst>
+          </p:cNvPr>
+          <p:cNvSpPr>
+            <a:spLocks noGrp="1"/>
+          </p:cNvSpPr>
+          <p:nvPr>
+            <p:ph type="ftr" sz="quarter" idx="11"/>
+          </p:nvPr>
+        </p:nvSpPr>
+        <p:spPr/>
+        <p:txBody>
+          <a:bodyPr/>
+          <a:lstStyle/>
+          <a:p>
+            <a:r>
+              <a:rPr lang="en-US"/>
+              <a:t>Operating Systems - Virtualization</a:t>
+            </a:r>
+          </a:p>
+        </p:txBody>
+      </p:sp>
+      <p:sp>
+        <p:nvSpPr>
+          <p:cNvPr id="6" name="Slide Number Placeholder 5">
+            <a:extLst>
+              <a:ext uri="{FF2B5EF4-FFF2-40B4-BE49-F238E27FC236}">
+                <a16:creationId xmlns:a16="http://schemas.microsoft.com/office/drawing/2014/main" id="{17F0DC32-71F3-B2DB-2E90-C93D3AC903E9}"/>
+              </a:ext>
+            </a:extLst>
+          </p:cNvPr>
+          <p:cNvSpPr>
+            <a:spLocks noGrp="1"/>
+          </p:cNvSpPr>
+          <p:nvPr>
+            <p:ph type="sldNum" sz="quarter" idx="12"/>
+          </p:nvPr>
+        </p:nvSpPr>
+        <p:spPr/>
+        <p:txBody>
+          <a:bodyPr/>
+          <a:lstStyle/>
+          <a:p>
+            <a:fld id="{95AAEEEC-DCEC-4178-AB14-E7254A15A296}" type="slidenum">
+              <a:rPr lang="en-US" smtClean="0"/>
+              <a:t>51</a:t>
+            </a:fld>
+            <a:endParaRPr lang="en-US"/>
+          </a:p>
+        </p:txBody>
+      </p:sp>
+    </p:spTree>
+    <p:extLst>
+      <p:ext uri="{BB962C8B-B14F-4D97-AF65-F5344CB8AC3E}">
+        <p14:creationId xmlns:p14="http://schemas.microsoft.com/office/powerpoint/2010/main" val="1013036161"/>
+      </p:ext>
+    </p:extLst>
+  </p:cSld>
+  <p:clrMapOvr>
+    <a:masterClrMapping/>
+  </p:clrMapOvr>
+</p:sld>
+</file>
+
+<file path=ppt/slides/slide52.xml><?xml version="1.0" encoding="utf-8"?>
+<p:sld xmlns:a="http://schemas.openxmlformats.org/drawingml/2006/main" xmlns:r="http://schemas.openxmlformats.org/officeDocument/2006/relationships" xmlns:p="http://schemas.openxmlformats.org/presentationml/2006/main">
+  <p:cSld>
+    <p:spTree>
+      <p:nvGrpSpPr>
+        <p:cNvPr id="1" name=""/>
+        <p:cNvGrpSpPr/>
+        <p:nvPr/>
+      </p:nvGrpSpPr>
+      <p:grpSpPr>
+        <a:xfrm>
+          <a:off x="0" y="0"/>
+          <a:ext cx="0" cy="0"/>
+          <a:chOff x="0" y="0"/>
+          <a:chExt cx="0" cy="0"/>
+        </a:xfrm>
+      </p:grpSpPr>
+      <p:sp>
+        <p:nvSpPr>
+          <p:cNvPr id="2" name="Title 1">
+            <a:extLst>
+              <a:ext uri="{FF2B5EF4-FFF2-40B4-BE49-F238E27FC236}">
+                <a16:creationId xmlns:a16="http://schemas.microsoft.com/office/drawing/2014/main" id="{2855C8B2-BB94-00DE-4BD4-82088694F04B}"/>
+              </a:ext>
+            </a:extLst>
+          </p:cNvPr>
+          <p:cNvSpPr>
+            <a:spLocks noGrp="1"/>
+          </p:cNvSpPr>
+          <p:nvPr>
+            <p:ph type="title"/>
+          </p:nvPr>
+        </p:nvSpPr>
+        <p:spPr/>
+        <p:txBody>
+          <a:bodyPr/>
+          <a:lstStyle/>
+          <a:p>
+            <a:r>
+              <a:rPr lang="en-US" dirty="0"/>
+              <a:t>What hypervisor type is shown in the figure?</a:t>
+            </a:r>
+          </a:p>
+        </p:txBody>
+      </p:sp>
+      <p:sp>
+        <p:nvSpPr>
+          <p:cNvPr id="3" name="Content Placeholder 2">
+            <a:extLst>
+              <a:ext uri="{FF2B5EF4-FFF2-40B4-BE49-F238E27FC236}">
+                <a16:creationId xmlns:a16="http://schemas.microsoft.com/office/drawing/2014/main" id="{026FCE81-B785-4D0D-B2BA-9194972970EF}"/>
+              </a:ext>
+            </a:extLst>
+          </p:cNvPr>
+          <p:cNvSpPr>
+            <a:spLocks noGrp="1"/>
+          </p:cNvSpPr>
+          <p:nvPr>
+            <p:ph idx="1"/>
+          </p:nvPr>
+        </p:nvSpPr>
+        <p:spPr>
+          <a:xfrm>
+            <a:off x="5108448" y="1825625"/>
+            <a:ext cx="6245352" cy="4351338"/>
+          </a:xfrm>
+        </p:spPr>
+        <p:txBody>
+          <a:bodyPr/>
+          <a:lstStyle/>
+          <a:p>
+            <a:pPr marL="457200" indent="-457200">
+              <a:buFont typeface="+mj-lt"/>
+              <a:buAutoNum type="arabicPeriod"/>
+            </a:pPr>
+            <a:r>
+              <a:rPr lang="en-US" sz="4000" dirty="0"/>
+              <a:t>Type 1</a:t>
+            </a:r>
+          </a:p>
+          <a:p>
+            <a:pPr marL="457200" indent="-457200">
+              <a:buFont typeface="+mj-lt"/>
+              <a:buAutoNum type="arabicPeriod"/>
+            </a:pPr>
+            <a:r>
+              <a:rPr lang="en-US" sz="4000" dirty="0"/>
+              <a:t>Type 2</a:t>
+            </a:r>
+          </a:p>
+          <a:p>
+            <a:pPr marL="457200" indent="-457200">
+              <a:buFont typeface="+mj-lt"/>
+              <a:buAutoNum type="arabicPeriod"/>
+            </a:pPr>
+            <a:r>
+              <a:rPr lang="en-US" sz="4000" dirty="0"/>
+              <a:t>Cannot say</a:t>
+            </a:r>
+            <a:endParaRPr lang="en-US" dirty="0"/>
+          </a:p>
+        </p:txBody>
+      </p:sp>
+      <p:sp>
+        <p:nvSpPr>
+          <p:cNvPr id="4" name="Date Placeholder 3">
+            <a:extLst>
+              <a:ext uri="{FF2B5EF4-FFF2-40B4-BE49-F238E27FC236}">
+                <a16:creationId xmlns:a16="http://schemas.microsoft.com/office/drawing/2014/main" id="{1A56B883-E33D-391A-CC85-EE1BB1DE9968}"/>
+              </a:ext>
+            </a:extLst>
+          </p:cNvPr>
+          <p:cNvSpPr>
+            <a:spLocks noGrp="1"/>
+          </p:cNvSpPr>
+          <p:nvPr>
+            <p:ph type="dt" sz="half" idx="10"/>
+          </p:nvPr>
+        </p:nvSpPr>
+        <p:spPr/>
+        <p:txBody>
+          <a:bodyPr/>
+          <a:lstStyle/>
+          <a:p>
+            <a:r>
+              <a:rPr lang="en-US"/>
+              <a:t>Vincenzo Gulisano</a:t>
+            </a:r>
+          </a:p>
+        </p:txBody>
+      </p:sp>
+      <p:sp>
+        <p:nvSpPr>
+          <p:cNvPr id="5" name="Footer Placeholder 4">
+            <a:extLst>
+              <a:ext uri="{FF2B5EF4-FFF2-40B4-BE49-F238E27FC236}">
+                <a16:creationId xmlns:a16="http://schemas.microsoft.com/office/drawing/2014/main" id="{046DE62C-7C0E-2BF5-0E0E-2C51712DD4F0}"/>
+              </a:ext>
+            </a:extLst>
+          </p:cNvPr>
+          <p:cNvSpPr>
+            <a:spLocks noGrp="1"/>
+          </p:cNvSpPr>
+          <p:nvPr>
+            <p:ph type="ftr" sz="quarter" idx="11"/>
+          </p:nvPr>
+        </p:nvSpPr>
+        <p:spPr/>
+        <p:txBody>
+          <a:bodyPr/>
+          <a:lstStyle/>
+          <a:p>
+            <a:r>
+              <a:rPr lang="en-US"/>
+              <a:t>Operating Systems - Virtualization</a:t>
+            </a:r>
+          </a:p>
+        </p:txBody>
+      </p:sp>
+      <p:sp>
+        <p:nvSpPr>
+          <p:cNvPr id="6" name="Slide Number Placeholder 5">
+            <a:extLst>
+              <a:ext uri="{FF2B5EF4-FFF2-40B4-BE49-F238E27FC236}">
+                <a16:creationId xmlns:a16="http://schemas.microsoft.com/office/drawing/2014/main" id="{D050802F-6405-E644-0849-BCA6AB316DDD}"/>
+              </a:ext>
+            </a:extLst>
+          </p:cNvPr>
+          <p:cNvSpPr>
+            <a:spLocks noGrp="1"/>
+          </p:cNvSpPr>
+          <p:nvPr>
+            <p:ph type="sldNum" sz="quarter" idx="12"/>
+          </p:nvPr>
+        </p:nvSpPr>
+        <p:spPr/>
+        <p:txBody>
+          <a:bodyPr/>
+          <a:lstStyle/>
+          <a:p>
+            <a:fld id="{95AAEEEC-DCEC-4178-AB14-E7254A15A296}" type="slidenum">
+              <a:rPr lang="en-US" smtClean="0"/>
+              <a:t>52</a:t>
+            </a:fld>
+            <a:endParaRPr lang="en-US"/>
+          </a:p>
+        </p:txBody>
+      </p:sp>
+      <p:grpSp>
+        <p:nvGrpSpPr>
+          <p:cNvPr id="9" name="Group 8">
+            <a:extLst>
+              <a:ext uri="{FF2B5EF4-FFF2-40B4-BE49-F238E27FC236}">
+                <a16:creationId xmlns:a16="http://schemas.microsoft.com/office/drawing/2014/main" id="{1E168AD5-D770-6488-9AAE-1CE28B192ECA}"/>
+              </a:ext>
+            </a:extLst>
+          </p:cNvPr>
+          <p:cNvGrpSpPr/>
+          <p:nvPr/>
+        </p:nvGrpSpPr>
+        <p:grpSpPr>
+          <a:xfrm>
+            <a:off x="1075406" y="2377755"/>
+            <a:ext cx="3671047" cy="3503989"/>
+            <a:chOff x="6427694" y="1646235"/>
+            <a:chExt cx="3671047" cy="3503989"/>
+          </a:xfrm>
+        </p:grpSpPr>
+        <p:pic>
+          <p:nvPicPr>
+            <p:cNvPr id="7" name="Picture 2">
+              <a:extLst>
+                <a:ext uri="{FF2B5EF4-FFF2-40B4-BE49-F238E27FC236}">
+                  <a16:creationId xmlns:a16="http://schemas.microsoft.com/office/drawing/2014/main" id="{D6662D0D-A21B-EFED-DD5B-01B7CC8F1B8B}"/>
+                </a:ext>
+              </a:extLst>
+            </p:cNvPr>
+            <p:cNvPicPr>
+              <a:picLocks noChangeAspect="1" noChangeArrowheads="1"/>
+            </p:cNvPicPr>
+            <p:nvPr/>
+          </p:nvPicPr>
+          <p:blipFill rotWithShape="1">
+            <a:blip r:embed="rId3">
+              <a:extLst>
+                <a:ext uri="{28A0092B-C50C-407E-A947-70E740481C1C}">
+                  <a14:useLocalDpi xmlns:a14="http://schemas.microsoft.com/office/drawing/2010/main" val="0"/>
+                </a:ext>
+              </a:extLst>
+            </a:blip>
+            <a:srcRect l="55062" t="1172" r="1388" b="10609"/>
+            <a:stretch>
+              <a:fillRect/>
+            </a:stretch>
+          </p:blipFill>
+          <p:spPr bwMode="auto">
+            <a:xfrm>
+              <a:off x="6427694" y="1646235"/>
+              <a:ext cx="3671047" cy="3503989"/>
+            </a:xfrm>
+            <a:prstGeom prst="rect">
+              <a:avLst/>
+            </a:prstGeom>
+            <a:noFill/>
+            <a:ln>
+              <a:noFill/>
+            </a:ln>
+            <a:extLst>
+              <a:ext uri="{909E8E84-426E-40DD-AFC4-6F175D3DCCD1}">
+                <a14:hiddenFill xmlns:a14="http://schemas.microsoft.com/office/drawing/2010/main">
+                  <a:solidFill>
+                    <a:schemeClr val="accent1"/>
+                  </a:solidFill>
+                </a14:hiddenFill>
+              </a:ext>
+              <a:ext uri="{91240B29-F687-4F45-9708-019B960494DF}">
+                <a14:hiddenLine xmlns:a14="http://schemas.microsoft.com/office/drawing/2010/main" w="9525">
+                  <a:solidFill>
+                    <a:schemeClr val="tx1"/>
+                  </a:solidFill>
+                  <a:miter lim="800000"/>
+                  <a:headEnd/>
+                  <a:tailEnd/>
+                </a14:hiddenLine>
+              </a:ext>
+            </a:extLst>
+          </p:spPr>
+        </p:pic>
+        <p:sp>
+          <p:nvSpPr>
+            <p:cNvPr id="8" name="Rectangle 7">
+              <a:extLst>
+                <a:ext uri="{FF2B5EF4-FFF2-40B4-BE49-F238E27FC236}">
+                  <a16:creationId xmlns:a16="http://schemas.microsoft.com/office/drawing/2014/main" id="{4241BEC2-3339-C197-2A18-29E93B42FBC7}"/>
+                </a:ext>
+              </a:extLst>
+            </p:cNvPr>
+            <p:cNvSpPr/>
+            <p:nvPr/>
+          </p:nvSpPr>
+          <p:spPr>
+            <a:xfrm>
+              <a:off x="6548718" y="3523129"/>
+              <a:ext cx="2061882" cy="403412"/>
+            </a:xfrm>
+            <a:prstGeom prst="rect">
+              <a:avLst/>
+            </a:prstGeom>
+            <a:solidFill>
+              <a:schemeClr val="bg1"/>
+            </a:solidFill>
+            <a:ln>
+              <a:solidFill>
+                <a:schemeClr val="bg1"/>
+              </a:solidFill>
+            </a:ln>
+          </p:spPr>
+          <p:style>
+            <a:lnRef idx="2">
+              <a:schemeClr val="accent1">
+                <a:shade val="15000"/>
+              </a:schemeClr>
+            </a:lnRef>
+            <a:fillRef idx="1">
+              <a:schemeClr val="accent1"/>
+            </a:fillRef>
+            <a:effectRef idx="0">
+              <a:schemeClr val="accent1"/>
+            </a:effectRef>
+            <a:fontRef idx="minor">
+              <a:schemeClr val="lt1"/>
+            </a:fontRef>
+          </p:style>
+          <p:txBody>
+            <a:bodyPr rtlCol="0" anchor="ctr"/>
+            <a:lstStyle/>
+            <a:p>
+              <a:pPr algn="ctr"/>
+              <a:endParaRPr lang="en-US"/>
+            </a:p>
+          </p:txBody>
+        </p:sp>
+      </p:grpSp>
+    </p:spTree>
+    <p:extLst>
+      <p:ext uri="{BB962C8B-B14F-4D97-AF65-F5344CB8AC3E}">
+        <p14:creationId xmlns:p14="http://schemas.microsoft.com/office/powerpoint/2010/main" val="1599985270"/>
+      </p:ext>
+    </p:extLst>
+  </p:cSld>
+  <p:clrMapOvr>
+    <a:masterClrMapping/>
+  </p:clrMapOvr>
+</p:sld>
+</file>
+
+<file path=ppt/slides/slide53.xml><?xml version="1.0" encoding="utf-8"?>
+<p:sld xmlns:a="http://schemas.openxmlformats.org/drawingml/2006/main" xmlns:r="http://schemas.openxmlformats.org/officeDocument/2006/relationships" xmlns:p="http://schemas.openxmlformats.org/presentationml/2006/main">
+  <p:cSld>
+    <p:spTree>
+      <p:nvGrpSpPr>
+        <p:cNvPr id="1" name=""/>
+        <p:cNvGrpSpPr/>
+        <p:nvPr/>
+      </p:nvGrpSpPr>
+      <p:grpSpPr>
+        <a:xfrm>
+          <a:off x="0" y="0"/>
+          <a:ext cx="0" cy="0"/>
+          <a:chOff x="0" y="0"/>
+          <a:chExt cx="0" cy="0"/>
+        </a:xfrm>
+      </p:grpSpPr>
+      <p:sp>
+        <p:nvSpPr>
+          <p:cNvPr id="2" name="Title 1">
+            <a:extLst>
+              <a:ext uri="{FF2B5EF4-FFF2-40B4-BE49-F238E27FC236}">
+                <a16:creationId xmlns:a16="http://schemas.microsoft.com/office/drawing/2014/main" id="{23E363FB-91E0-D105-66E6-BEF68A969634}"/>
+              </a:ext>
+            </a:extLst>
+          </p:cNvPr>
+          <p:cNvSpPr>
+            <a:spLocks noGrp="1"/>
+          </p:cNvSpPr>
+          <p:nvPr>
+            <p:ph type="title"/>
+          </p:nvPr>
+        </p:nvSpPr>
+        <p:spPr/>
+        <p:txBody>
+          <a:bodyPr>
+            <a:normAutofit/>
+          </a:bodyPr>
+          <a:lstStyle/>
+          <a:p>
+            <a:r>
+              <a:rPr lang="en-US" dirty="0"/>
+              <a:t>Which statement correctly describes a shadow page table?</a:t>
+            </a:r>
+          </a:p>
+        </p:txBody>
+      </p:sp>
+      <p:sp>
+        <p:nvSpPr>
+          <p:cNvPr id="3" name="Content Placeholder 2">
+            <a:extLst>
+              <a:ext uri="{FF2B5EF4-FFF2-40B4-BE49-F238E27FC236}">
+                <a16:creationId xmlns:a16="http://schemas.microsoft.com/office/drawing/2014/main" id="{13CB34EE-8ACE-99CB-C14F-38D7AF455FE3}"/>
+              </a:ext>
+            </a:extLst>
+          </p:cNvPr>
+          <p:cNvSpPr>
+            <a:spLocks noGrp="1"/>
+          </p:cNvSpPr>
+          <p:nvPr>
+            <p:ph idx="1"/>
+          </p:nvPr>
+        </p:nvSpPr>
+        <p:spPr/>
+        <p:txBody>
+          <a:bodyPr/>
+          <a:lstStyle/>
+          <a:p>
+            <a:pPr marL="457200" indent="-457200">
+              <a:buFont typeface="+mj-lt"/>
+              <a:buAutoNum type="arabicPeriod"/>
+            </a:pPr>
+            <a:r>
+              <a:rPr lang="en-US" sz="2800" dirty="0"/>
+              <a:t>It is the ordinary page table used by the hypervisor when the hypervisor executes its own code.</a:t>
+            </a:r>
+          </a:p>
+          <a:p>
+            <a:pPr marL="457200" indent="-457200">
+              <a:buFont typeface="+mj-lt"/>
+              <a:buAutoNum type="arabicPeriod"/>
+            </a:pPr>
+            <a:r>
+              <a:rPr lang="en-US" sz="2800" dirty="0"/>
+              <a:t>It is maintained by the hypervisor on behalf of a VM and maps the VM's view of memory to real physical frames.</a:t>
+            </a:r>
+          </a:p>
+          <a:p>
+            <a:pPr marL="457200" indent="-457200">
+              <a:buFont typeface="+mj-lt"/>
+              <a:buAutoNum type="arabicPeriod"/>
+            </a:pPr>
+            <a:r>
+              <a:rPr lang="en-US" sz="2800" dirty="0"/>
+              <a:t>It is maintained entirely by the guest OS and is never updated by the hypervisor.</a:t>
+            </a:r>
+            <a:endParaRPr lang="en-US" dirty="0"/>
+          </a:p>
+          <a:p>
+            <a:pPr marL="457200" indent="-457200">
+              <a:buFont typeface="+mj-lt"/>
+              <a:buAutoNum type="arabicPeriod"/>
+            </a:pPr>
+            <a:endParaRPr lang="en-US" dirty="0"/>
+          </a:p>
+        </p:txBody>
+      </p:sp>
+      <p:sp>
+        <p:nvSpPr>
+          <p:cNvPr id="4" name="Date Placeholder 3">
+            <a:extLst>
+              <a:ext uri="{FF2B5EF4-FFF2-40B4-BE49-F238E27FC236}">
+                <a16:creationId xmlns:a16="http://schemas.microsoft.com/office/drawing/2014/main" id="{8B18AC9A-3394-DFF8-004C-77BCA70DE1ED}"/>
+              </a:ext>
+            </a:extLst>
+          </p:cNvPr>
+          <p:cNvSpPr>
+            <a:spLocks noGrp="1"/>
+          </p:cNvSpPr>
+          <p:nvPr>
+            <p:ph type="dt" sz="half" idx="10"/>
+          </p:nvPr>
+        </p:nvSpPr>
+        <p:spPr/>
+        <p:txBody>
+          <a:bodyPr/>
+          <a:lstStyle/>
+          <a:p>
+            <a:r>
+              <a:rPr lang="en-US"/>
+              <a:t>Vincenzo Gulisano</a:t>
+            </a:r>
+          </a:p>
+        </p:txBody>
+      </p:sp>
+      <p:sp>
+        <p:nvSpPr>
+          <p:cNvPr id="5" name="Footer Placeholder 4">
+            <a:extLst>
+              <a:ext uri="{FF2B5EF4-FFF2-40B4-BE49-F238E27FC236}">
+                <a16:creationId xmlns:a16="http://schemas.microsoft.com/office/drawing/2014/main" id="{16E5E2DB-D28C-0468-8D0A-18876CC98FDA}"/>
+              </a:ext>
+            </a:extLst>
+          </p:cNvPr>
+          <p:cNvSpPr>
+            <a:spLocks noGrp="1"/>
+          </p:cNvSpPr>
+          <p:nvPr>
+            <p:ph type="ftr" sz="quarter" idx="11"/>
+          </p:nvPr>
+        </p:nvSpPr>
+        <p:spPr/>
+        <p:txBody>
+          <a:bodyPr/>
+          <a:lstStyle/>
+          <a:p>
+            <a:r>
+              <a:rPr lang="en-US"/>
+              <a:t>Operating Systems - Virtualization</a:t>
+            </a:r>
+          </a:p>
+        </p:txBody>
+      </p:sp>
+      <p:sp>
+        <p:nvSpPr>
+          <p:cNvPr id="6" name="Slide Number Placeholder 5">
+            <a:extLst>
+              <a:ext uri="{FF2B5EF4-FFF2-40B4-BE49-F238E27FC236}">
+                <a16:creationId xmlns:a16="http://schemas.microsoft.com/office/drawing/2014/main" id="{15F174ED-6923-D581-AD78-F0E888168F04}"/>
+              </a:ext>
+            </a:extLst>
+          </p:cNvPr>
+          <p:cNvSpPr>
+            <a:spLocks noGrp="1"/>
+          </p:cNvSpPr>
+          <p:nvPr>
+            <p:ph type="sldNum" sz="quarter" idx="12"/>
+          </p:nvPr>
+        </p:nvSpPr>
+        <p:spPr/>
+        <p:txBody>
+          <a:bodyPr/>
+          <a:lstStyle/>
+          <a:p>
+            <a:fld id="{95AAEEEC-DCEC-4178-AB14-E7254A15A296}" type="slidenum">
+              <a:rPr lang="en-US" smtClean="0"/>
+              <a:t>53</a:t>
+            </a:fld>
+            <a:endParaRPr lang="en-US"/>
+          </a:p>
+        </p:txBody>
+      </p:sp>
+    </p:spTree>
+    <p:extLst>
+      <p:ext uri="{BB962C8B-B14F-4D97-AF65-F5344CB8AC3E}">
+        <p14:creationId xmlns:p14="http://schemas.microsoft.com/office/powerpoint/2010/main" val="3459159719"/>
+      </p:ext>
+    </p:extLst>
+  </p:cSld>
+  <p:clrMapOvr>
+    <a:masterClrMapping/>
+  </p:clrMapOvr>
+</p:sld>
+</file>
+
+<file path=ppt/slides/slide54.xml><?xml version="1.0" encoding="utf-8"?>
+<p:sld xmlns:a="http://schemas.openxmlformats.org/drawingml/2006/main" xmlns:r="http://schemas.openxmlformats.org/officeDocument/2006/relationships" xmlns:p="http://schemas.openxmlformats.org/presentationml/2006/main">
+  <p:cSld>
+    <p:spTree>
+      <p:nvGrpSpPr>
+        <p:cNvPr id="1" name=""/>
+        <p:cNvGrpSpPr/>
+        <p:nvPr/>
+      </p:nvGrpSpPr>
+      <p:grpSpPr>
+        <a:xfrm>
+          <a:off x="0" y="0"/>
+          <a:ext cx="0" cy="0"/>
+          <a:chOff x="0" y="0"/>
+          <a:chExt cx="0" cy="0"/>
+        </a:xfrm>
+      </p:grpSpPr>
+      <p:sp>
+        <p:nvSpPr>
+          <p:cNvPr id="2" name="Title 1">
+            <a:extLst>
+              <a:ext uri="{FF2B5EF4-FFF2-40B4-BE49-F238E27FC236}">
+                <a16:creationId xmlns:a16="http://schemas.microsoft.com/office/drawing/2014/main" id="{A2994D97-2199-0B19-B3FA-B89317BC5F61}"/>
+              </a:ext>
+            </a:extLst>
+          </p:cNvPr>
+          <p:cNvSpPr>
+            <a:spLocks noGrp="1"/>
+          </p:cNvSpPr>
+          <p:nvPr>
+            <p:ph type="title"/>
+          </p:nvPr>
+        </p:nvSpPr>
+        <p:spPr/>
+        <p:txBody>
+          <a:bodyPr>
+            <a:normAutofit fontScale="90000"/>
+          </a:bodyPr>
+          <a:lstStyle/>
+          <a:p>
+            <a:r>
+              <a:rPr lang="en-US" dirty="0"/>
+              <a:t>A hypervisor can map the same physical memory page containing identical read-only operating-system code into two different guest VMs.</a:t>
+            </a:r>
+          </a:p>
+        </p:txBody>
+      </p:sp>
+      <p:sp>
+        <p:nvSpPr>
+          <p:cNvPr id="3" name="Content Placeholder 2">
+            <a:extLst>
+              <a:ext uri="{FF2B5EF4-FFF2-40B4-BE49-F238E27FC236}">
+                <a16:creationId xmlns:a16="http://schemas.microsoft.com/office/drawing/2014/main" id="{BE88C5B8-7D56-1E0B-94DE-E0D7DDEF2F67}"/>
+              </a:ext>
+            </a:extLst>
+          </p:cNvPr>
+          <p:cNvSpPr>
+            <a:spLocks noGrp="1"/>
+          </p:cNvSpPr>
+          <p:nvPr>
+            <p:ph idx="1"/>
+          </p:nvPr>
+        </p:nvSpPr>
+        <p:spPr/>
+        <p:txBody>
+          <a:bodyPr>
+            <a:normAutofit/>
+          </a:bodyPr>
+          <a:lstStyle/>
+          <a:p>
+            <a:pPr marL="742950" indent="-742950">
+              <a:buFont typeface="+mj-lt"/>
+              <a:buAutoNum type="arabicPeriod"/>
+            </a:pPr>
+            <a:r>
+              <a:rPr lang="en-US" sz="4000" dirty="0"/>
+              <a:t>True</a:t>
+            </a:r>
+          </a:p>
+          <a:p>
+            <a:pPr marL="742950" indent="-742950">
+              <a:buFont typeface="+mj-lt"/>
+              <a:buAutoNum type="arabicPeriod"/>
+            </a:pPr>
+            <a:r>
+              <a:rPr lang="en-US" sz="4000" dirty="0"/>
+              <a:t>False</a:t>
+            </a:r>
+          </a:p>
+        </p:txBody>
+      </p:sp>
+      <p:sp>
+        <p:nvSpPr>
+          <p:cNvPr id="4" name="Date Placeholder 3">
+            <a:extLst>
+              <a:ext uri="{FF2B5EF4-FFF2-40B4-BE49-F238E27FC236}">
+                <a16:creationId xmlns:a16="http://schemas.microsoft.com/office/drawing/2014/main" id="{4EB38ECC-2976-88C4-4D41-1AE9D061B4F3}"/>
+              </a:ext>
+            </a:extLst>
+          </p:cNvPr>
+          <p:cNvSpPr>
+            <a:spLocks noGrp="1"/>
+          </p:cNvSpPr>
+          <p:nvPr>
+            <p:ph type="dt" sz="half" idx="10"/>
+          </p:nvPr>
+        </p:nvSpPr>
+        <p:spPr/>
+        <p:txBody>
+          <a:bodyPr/>
+          <a:lstStyle/>
+          <a:p>
+            <a:r>
+              <a:rPr lang="en-US"/>
+              <a:t>Vincenzo Gulisano</a:t>
+            </a:r>
+          </a:p>
+        </p:txBody>
+      </p:sp>
+      <p:sp>
+        <p:nvSpPr>
+          <p:cNvPr id="5" name="Footer Placeholder 4">
+            <a:extLst>
+              <a:ext uri="{FF2B5EF4-FFF2-40B4-BE49-F238E27FC236}">
+                <a16:creationId xmlns:a16="http://schemas.microsoft.com/office/drawing/2014/main" id="{141C533A-D75D-3BEF-F2F5-8575C696326E}"/>
+              </a:ext>
+            </a:extLst>
+          </p:cNvPr>
+          <p:cNvSpPr>
+            <a:spLocks noGrp="1"/>
+          </p:cNvSpPr>
+          <p:nvPr>
+            <p:ph type="ftr" sz="quarter" idx="11"/>
+          </p:nvPr>
+        </p:nvSpPr>
+        <p:spPr/>
+        <p:txBody>
+          <a:bodyPr/>
+          <a:lstStyle/>
+          <a:p>
+            <a:r>
+              <a:rPr lang="en-US"/>
+              <a:t>Operating Systems - Virtualization</a:t>
+            </a:r>
+          </a:p>
+        </p:txBody>
+      </p:sp>
+      <p:sp>
+        <p:nvSpPr>
+          <p:cNvPr id="6" name="Slide Number Placeholder 5">
+            <a:extLst>
+              <a:ext uri="{FF2B5EF4-FFF2-40B4-BE49-F238E27FC236}">
+                <a16:creationId xmlns:a16="http://schemas.microsoft.com/office/drawing/2014/main" id="{2AC0F19D-F2F1-8DB9-78D8-0BB7B3E25698}"/>
+              </a:ext>
+            </a:extLst>
+          </p:cNvPr>
+          <p:cNvSpPr>
+            <a:spLocks noGrp="1"/>
+          </p:cNvSpPr>
+          <p:nvPr>
+            <p:ph type="sldNum" sz="quarter" idx="12"/>
+          </p:nvPr>
+        </p:nvSpPr>
+        <p:spPr/>
+        <p:txBody>
+          <a:bodyPr/>
+          <a:lstStyle/>
+          <a:p>
+            <a:fld id="{95AAEEEC-DCEC-4178-AB14-E7254A15A296}" type="slidenum">
+              <a:rPr lang="en-US" smtClean="0"/>
+              <a:t>54</a:t>
+            </a:fld>
+            <a:endParaRPr lang="en-US"/>
+          </a:p>
+        </p:txBody>
+      </p:sp>
+    </p:spTree>
+    <p:extLst>
+      <p:ext uri="{BB962C8B-B14F-4D97-AF65-F5344CB8AC3E}">
+        <p14:creationId xmlns:p14="http://schemas.microsoft.com/office/powerpoint/2010/main" val="2740404544"/>
+      </p:ext>
+    </p:extLst>
+  </p:cSld>
+  <p:clrMapOvr>
+    <a:masterClrMapping/>
+  </p:clrMapOvr>
+</p:sld>
+</file>
+
+<file path=ppt/slides/slide55.xml><?xml version="1.0" encoding="utf-8"?>
+<p:sld xmlns:a="http://schemas.openxmlformats.org/drawingml/2006/main" xmlns:r="http://schemas.openxmlformats.org/officeDocument/2006/relationships" xmlns:p="http://schemas.openxmlformats.org/presentationml/2006/main">
+  <p:cSld>
+    <p:spTree>
+      <p:nvGrpSpPr>
+        <p:cNvPr id="1" name=""/>
+        <p:cNvGrpSpPr/>
+        <p:nvPr/>
+      </p:nvGrpSpPr>
+      <p:grpSpPr>
+        <a:xfrm>
+          <a:off x="0" y="0"/>
+          <a:ext cx="0" cy="0"/>
+          <a:chOff x="0" y="0"/>
+          <a:chExt cx="0" cy="0"/>
+        </a:xfrm>
+      </p:grpSpPr>
+      <p:sp>
+        <p:nvSpPr>
+          <p:cNvPr id="2" name="Title 1">
+            <a:extLst>
+              <a:ext uri="{FF2B5EF4-FFF2-40B4-BE49-F238E27FC236}">
+                <a16:creationId xmlns:a16="http://schemas.microsoft.com/office/drawing/2014/main" id="{F6C7391A-AFA7-7116-1D08-F1CA513A34CB}"/>
+              </a:ext>
+            </a:extLst>
+          </p:cNvPr>
+          <p:cNvSpPr>
+            <a:spLocks noGrp="1"/>
+          </p:cNvSpPr>
+          <p:nvPr>
+            <p:ph type="title"/>
+          </p:nvPr>
+        </p:nvSpPr>
+        <p:spPr/>
+        <p:txBody>
+          <a:bodyPr/>
+          <a:lstStyle/>
+          <a:p>
+            <a:r>
+              <a:rPr lang="en-US" dirty="0"/>
+              <a:t>Which mechanisms are used by Containers to control process identifiers?</a:t>
+            </a:r>
+          </a:p>
+        </p:txBody>
+      </p:sp>
+      <p:sp>
+        <p:nvSpPr>
+          <p:cNvPr id="3" name="Content Placeholder 2">
+            <a:extLst>
+              <a:ext uri="{FF2B5EF4-FFF2-40B4-BE49-F238E27FC236}">
+                <a16:creationId xmlns:a16="http://schemas.microsoft.com/office/drawing/2014/main" id="{38248E06-D645-0AAF-5537-A3A8A9FE0CD0}"/>
+              </a:ext>
+            </a:extLst>
+          </p:cNvPr>
+          <p:cNvSpPr>
+            <a:spLocks noGrp="1"/>
+          </p:cNvSpPr>
+          <p:nvPr>
+            <p:ph idx="1"/>
+          </p:nvPr>
+        </p:nvSpPr>
+        <p:spPr/>
+        <p:txBody>
+          <a:bodyPr/>
+          <a:lstStyle/>
+          <a:p>
+            <a:pPr marL="457200" indent="-457200">
+              <a:buFont typeface="+mj-lt"/>
+              <a:buAutoNum type="arabicPeriod"/>
+            </a:pPr>
+            <a:r>
+              <a:rPr lang="en-US" sz="3200" dirty="0"/>
+              <a:t>Namespaces</a:t>
+            </a:r>
+          </a:p>
+          <a:p>
+            <a:pPr marL="457200" indent="-457200">
+              <a:buFont typeface="+mj-lt"/>
+              <a:buAutoNum type="arabicPeriod"/>
+            </a:pPr>
+            <a:r>
+              <a:rPr lang="en-US" sz="3200" dirty="0"/>
+              <a:t>Cgroups</a:t>
+            </a:r>
+          </a:p>
+          <a:p>
+            <a:pPr marL="457200" indent="-457200">
+              <a:buFont typeface="+mj-lt"/>
+              <a:buAutoNum type="arabicPeriod"/>
+            </a:pPr>
+            <a:r>
+              <a:rPr lang="en-US" sz="3200" dirty="0"/>
+              <a:t>Both namespaces and cgroups</a:t>
+            </a:r>
+            <a:endParaRPr lang="en-US" dirty="0"/>
+          </a:p>
+          <a:p>
+            <a:endParaRPr lang="en-US" dirty="0"/>
+          </a:p>
+        </p:txBody>
+      </p:sp>
+      <p:sp>
+        <p:nvSpPr>
+          <p:cNvPr id="4" name="Date Placeholder 3">
+            <a:extLst>
+              <a:ext uri="{FF2B5EF4-FFF2-40B4-BE49-F238E27FC236}">
+                <a16:creationId xmlns:a16="http://schemas.microsoft.com/office/drawing/2014/main" id="{80E4DA62-9A0E-CE10-C796-4A9FA88A8502}"/>
+              </a:ext>
+            </a:extLst>
+          </p:cNvPr>
+          <p:cNvSpPr>
+            <a:spLocks noGrp="1"/>
+          </p:cNvSpPr>
+          <p:nvPr>
+            <p:ph type="dt" sz="half" idx="10"/>
+          </p:nvPr>
+        </p:nvSpPr>
+        <p:spPr/>
+        <p:txBody>
+          <a:bodyPr/>
+          <a:lstStyle/>
+          <a:p>
+            <a:r>
+              <a:rPr lang="en-US"/>
+              <a:t>Vincenzo Gulisano</a:t>
+            </a:r>
+          </a:p>
+        </p:txBody>
+      </p:sp>
+      <p:sp>
+        <p:nvSpPr>
+          <p:cNvPr id="5" name="Footer Placeholder 4">
+            <a:extLst>
+              <a:ext uri="{FF2B5EF4-FFF2-40B4-BE49-F238E27FC236}">
+                <a16:creationId xmlns:a16="http://schemas.microsoft.com/office/drawing/2014/main" id="{F78B3CE0-3B3F-AC96-521C-90ADE1AC94DE}"/>
+              </a:ext>
+            </a:extLst>
+          </p:cNvPr>
+          <p:cNvSpPr>
+            <a:spLocks noGrp="1"/>
+          </p:cNvSpPr>
+          <p:nvPr>
+            <p:ph type="ftr" sz="quarter" idx="11"/>
+          </p:nvPr>
+        </p:nvSpPr>
+        <p:spPr/>
+        <p:txBody>
+          <a:bodyPr/>
+          <a:lstStyle/>
+          <a:p>
+            <a:r>
+              <a:rPr lang="en-US"/>
+              <a:t>Operating Systems - Virtualization</a:t>
+            </a:r>
+          </a:p>
+        </p:txBody>
+      </p:sp>
+      <p:sp>
+        <p:nvSpPr>
+          <p:cNvPr id="6" name="Slide Number Placeholder 5">
+            <a:extLst>
+              <a:ext uri="{FF2B5EF4-FFF2-40B4-BE49-F238E27FC236}">
+                <a16:creationId xmlns:a16="http://schemas.microsoft.com/office/drawing/2014/main" id="{C49FBA25-B8FB-350A-AF37-5310AB43D27C}"/>
+              </a:ext>
+            </a:extLst>
+          </p:cNvPr>
+          <p:cNvSpPr>
+            <a:spLocks noGrp="1"/>
+          </p:cNvSpPr>
+          <p:nvPr>
+            <p:ph type="sldNum" sz="quarter" idx="12"/>
+          </p:nvPr>
+        </p:nvSpPr>
+        <p:spPr/>
+        <p:txBody>
+          <a:bodyPr/>
+          <a:lstStyle/>
+          <a:p>
+            <a:fld id="{95AAEEEC-DCEC-4178-AB14-E7254A15A296}" type="slidenum">
+              <a:rPr lang="en-US" smtClean="0"/>
+              <a:t>55</a:t>
+            </a:fld>
+            <a:endParaRPr lang="en-US"/>
+          </a:p>
+        </p:txBody>
+      </p:sp>
+    </p:spTree>
+    <p:extLst>
+      <p:ext uri="{BB962C8B-B14F-4D97-AF65-F5344CB8AC3E}">
+        <p14:creationId xmlns:p14="http://schemas.microsoft.com/office/powerpoint/2010/main" val="557958145"/>
       </p:ext>
     </p:extLst>
   </p:cSld>
@@ -42385,7 +47619,7 @@
           <a:lstStyle/>
           <a:p>
             <a:r>
-              <a:rPr lang="sv-SE"/>
+              <a:rPr lang="en-US"/>
               <a:t>Vincenzo Gulisano</a:t>
             </a:r>
             <a:endParaRPr lang="en-SE"/>
@@ -42745,7 +47979,7 @@
           <a:lstStyle/>
           <a:p>
             <a:r>
-              <a:rPr lang="sv-SE"/>
+              <a:rPr lang="en-US"/>
               <a:t>Vincenzo Gulisano</a:t>
             </a:r>
             <a:endParaRPr lang="en-SE"/>
@@ -42936,7 +48170,7 @@
           <a:lstStyle/>
           <a:p>
             <a:r>
-              <a:rPr lang="sv-SE"/>
+              <a:rPr lang="en-US"/>
               <a:t>Vincenzo Gulisano</a:t>
             </a:r>
             <a:endParaRPr lang="en-SE"/>
@@ -43160,7 +48394,7 @@
           <a:lstStyle/>
           <a:p>
             <a:r>
-              <a:rPr lang="sv-SE"/>
+              <a:rPr lang="en-US"/>
               <a:t>Vincenzo Gulisano</a:t>
             </a:r>
             <a:endParaRPr lang="en-SE"/>
@@ -43846,6 +49080,267 @@
 </file>
 
 <file path=ppt/theme/theme2.xml><?xml version="1.0" encoding="utf-8"?>
+<a:theme xmlns:a="http://schemas.openxmlformats.org/drawingml/2006/main" name="1_Office Theme">
+  <a:themeElements>
+    <a:clrScheme name="Office">
+      <a:dk1>
+        <a:sysClr val="windowText" lastClr="000000"/>
+      </a:dk1>
+      <a:lt1>
+        <a:sysClr val="window" lastClr="FFFFFF"/>
+      </a:lt1>
+      <a:dk2>
+        <a:srgbClr val="44546A"/>
+      </a:dk2>
+      <a:lt2>
+        <a:srgbClr val="E7E6E6"/>
+      </a:lt2>
+      <a:accent1>
+        <a:srgbClr val="5B9BD5"/>
+      </a:accent1>
+      <a:accent2>
+        <a:srgbClr val="ED7D31"/>
+      </a:accent2>
+      <a:accent3>
+        <a:srgbClr val="A5A5A5"/>
+      </a:accent3>
+      <a:accent4>
+        <a:srgbClr val="FFC000"/>
+      </a:accent4>
+      <a:accent5>
+        <a:srgbClr val="4472C4"/>
+      </a:accent5>
+      <a:accent6>
+        <a:srgbClr val="70AD47"/>
+      </a:accent6>
+      <a:hlink>
+        <a:srgbClr val="0563C1"/>
+      </a:hlink>
+      <a:folHlink>
+        <a:srgbClr val="954F72"/>
+      </a:folHlink>
+    </a:clrScheme>
+    <a:fontScheme name="Garamond">
+      <a:majorFont>
+        <a:latin typeface="Garamond" panose="02020404030301010803"/>
+        <a:ea typeface=""/>
+        <a:cs typeface=""/>
+        <a:font script="Jpan" typeface="ＭＳ Ｐゴシック"/>
+        <a:font script="Hang" typeface="돋움"/>
+        <a:font script="Hans" typeface="方正舒体"/>
+        <a:font script="Hant" typeface="微軟正黑體"/>
+        <a:font script="Arab" typeface="Arial"/>
+        <a:font script="Hebr" typeface="Arial"/>
+        <a:font script="Thai" typeface="Cordia New"/>
+        <a:font script="Ethi" typeface="Nyala"/>
+        <a:font script="Beng" typeface="Vrinda"/>
+        <a:font script="Gujr" typeface="Shruti"/>
+        <a:font script="Khmr" typeface="DaunPenh"/>
+        <a:font script="Knda" typeface="Tunga"/>
+        <a:font script="Guru" typeface="Raavi"/>
+        <a:font script="Cans" typeface="Euphemia"/>
+        <a:font script="Cher" typeface="Plantagenet Cherokee"/>
+        <a:font script="Yiii" typeface="Microsoft Yi Baiti"/>
+        <a:font script="Tibt" typeface="Microsoft Himalaya"/>
+        <a:font script="Thaa" typeface="MV Boli"/>
+        <a:font script="Deva" typeface="Mangal"/>
+        <a:font script="Telu" typeface="Gautami"/>
+        <a:font script="Taml" typeface="Latha"/>
+        <a:font script="Syrc" typeface="Estrangelo Edessa"/>
+        <a:font script="Orya" typeface="Kalinga"/>
+        <a:font script="Mlym" typeface="Kartika"/>
+        <a:font script="Laoo" typeface="DokChampa"/>
+        <a:font script="Sinh" typeface="Iskoola Pota"/>
+        <a:font script="Mong" typeface="Mongolian Baiti"/>
+        <a:font script="Viet" typeface="Arial"/>
+        <a:font script="Uigh" typeface="Microsoft Uighur"/>
+        <a:font script="Geor" typeface="Sylfaen"/>
+      </a:majorFont>
+      <a:minorFont>
+        <a:latin typeface="Garamond" panose="02020404030301010803"/>
+        <a:ea typeface=""/>
+        <a:cs typeface=""/>
+        <a:font script="Jpan" typeface="ＭＳ Ｐゴシック"/>
+        <a:font script="Hang" typeface="돋움"/>
+        <a:font script="Hans" typeface="方正舒体"/>
+        <a:font script="Hant" typeface="微軟正黑體"/>
+        <a:font script="Arab" typeface="Arial"/>
+        <a:font script="Hebr" typeface="Arial"/>
+        <a:font script="Thai" typeface="Cordia New"/>
+        <a:font script="Ethi" typeface="Nyala"/>
+        <a:font script="Beng" typeface="Vrinda"/>
+        <a:font script="Gujr" typeface="Shruti"/>
+        <a:font script="Khmr" typeface="DaunPenh"/>
+        <a:font script="Knda" typeface="Tunga"/>
+        <a:font script="Guru" typeface="Raavi"/>
+        <a:font script="Cans" typeface="Euphemia"/>
+        <a:font script="Cher" typeface="Plantagenet Cherokee"/>
+        <a:font script="Yiii" typeface="Microsoft Yi Baiti"/>
+        <a:font script="Tibt" typeface="Microsoft Himalaya"/>
+        <a:font script="Thaa" typeface="MV Boli"/>
+        <a:font script="Deva" typeface="Mangal"/>
+        <a:font script="Telu" typeface="Gautami"/>
+        <a:font script="Taml" typeface="Latha"/>
+        <a:font script="Syrc" typeface="Estrangelo Edessa"/>
+        <a:font script="Orya" typeface="Kalinga"/>
+        <a:font script="Mlym" typeface="Kartika"/>
+        <a:font script="Laoo" typeface="DokChampa"/>
+        <a:font script="Sinh" typeface="Iskoola Pota"/>
+        <a:font script="Mong" typeface="Mongolian Baiti"/>
+        <a:font script="Viet" typeface="Arial"/>
+        <a:font script="Uigh" typeface="Microsoft Uighur"/>
+        <a:font script="Geor" typeface="Sylfaen"/>
+      </a:minorFont>
+    </a:fontScheme>
+    <a:fmtScheme name="Office">
+      <a:fillStyleLst>
+        <a:solidFill>
+          <a:schemeClr val="phClr"/>
+        </a:solidFill>
+        <a:gradFill rotWithShape="1">
+          <a:gsLst>
+            <a:gs pos="0">
+              <a:schemeClr val="phClr">
+                <a:lumMod val="110000"/>
+                <a:satMod val="105000"/>
+                <a:tint val="67000"/>
+              </a:schemeClr>
+            </a:gs>
+            <a:gs pos="50000">
+              <a:schemeClr val="phClr">
+                <a:lumMod val="105000"/>
+                <a:satMod val="103000"/>
+                <a:tint val="73000"/>
+              </a:schemeClr>
+            </a:gs>
+            <a:gs pos="100000">
+              <a:schemeClr val="phClr">
+                <a:lumMod val="105000"/>
+                <a:satMod val="109000"/>
+                <a:tint val="81000"/>
+              </a:schemeClr>
+            </a:gs>
+          </a:gsLst>
+          <a:lin ang="5400000" scaled="0"/>
+        </a:gradFill>
+        <a:gradFill rotWithShape="1">
+          <a:gsLst>
+            <a:gs pos="0">
+              <a:schemeClr val="phClr">
+                <a:satMod val="103000"/>
+                <a:lumMod val="102000"/>
+                <a:tint val="94000"/>
+              </a:schemeClr>
+            </a:gs>
+            <a:gs pos="50000">
+              <a:schemeClr val="phClr">
+                <a:satMod val="110000"/>
+                <a:lumMod val="100000"/>
+                <a:shade val="100000"/>
+              </a:schemeClr>
+            </a:gs>
+            <a:gs pos="100000">
+              <a:schemeClr val="phClr">
+                <a:lumMod val="99000"/>
+                <a:satMod val="120000"/>
+                <a:shade val="78000"/>
+              </a:schemeClr>
+            </a:gs>
+          </a:gsLst>
+          <a:lin ang="5400000" scaled="0"/>
+        </a:gradFill>
+      </a:fillStyleLst>
+      <a:lnStyleLst>
+        <a:ln w="6350" cap="flat" cmpd="sng" algn="ctr">
+          <a:solidFill>
+            <a:schemeClr val="phClr"/>
+          </a:solidFill>
+          <a:prstDash val="solid"/>
+          <a:miter lim="800000"/>
+        </a:ln>
+        <a:ln w="12700" cap="flat" cmpd="sng" algn="ctr">
+          <a:solidFill>
+            <a:schemeClr val="phClr"/>
+          </a:solidFill>
+          <a:prstDash val="solid"/>
+          <a:miter lim="800000"/>
+        </a:ln>
+        <a:ln w="19050" cap="flat" cmpd="sng" algn="ctr">
+          <a:solidFill>
+            <a:schemeClr val="phClr"/>
+          </a:solidFill>
+          <a:prstDash val="solid"/>
+          <a:miter lim="800000"/>
+        </a:ln>
+      </a:lnStyleLst>
+      <a:effectStyleLst>
+        <a:effectStyle>
+          <a:effectLst/>
+        </a:effectStyle>
+        <a:effectStyle>
+          <a:effectLst/>
+        </a:effectStyle>
+        <a:effectStyle>
+          <a:effectLst>
+            <a:outerShdw blurRad="57150" dist="19050" dir="5400000" algn="ctr" rotWithShape="0">
+              <a:srgbClr val="000000">
+                <a:alpha val="63000"/>
+              </a:srgbClr>
+            </a:outerShdw>
+          </a:effectLst>
+        </a:effectStyle>
+      </a:effectStyleLst>
+      <a:bgFillStyleLst>
+        <a:solidFill>
+          <a:schemeClr val="phClr"/>
+        </a:solidFill>
+        <a:solidFill>
+          <a:schemeClr val="phClr">
+            <a:tint val="95000"/>
+            <a:satMod val="170000"/>
+          </a:schemeClr>
+        </a:solidFill>
+        <a:gradFill rotWithShape="1">
+          <a:gsLst>
+            <a:gs pos="0">
+              <a:schemeClr val="phClr">
+                <a:tint val="93000"/>
+                <a:satMod val="150000"/>
+                <a:shade val="98000"/>
+                <a:lumMod val="102000"/>
+              </a:schemeClr>
+            </a:gs>
+            <a:gs pos="50000">
+              <a:schemeClr val="phClr">
+                <a:tint val="98000"/>
+                <a:satMod val="130000"/>
+                <a:shade val="90000"/>
+                <a:lumMod val="103000"/>
+              </a:schemeClr>
+            </a:gs>
+            <a:gs pos="100000">
+              <a:schemeClr val="phClr">
+                <a:shade val="63000"/>
+                <a:satMod val="120000"/>
+              </a:schemeClr>
+            </a:gs>
+          </a:gsLst>
+          <a:lin ang="5400000" scaled="0"/>
+        </a:gradFill>
+      </a:bgFillStyleLst>
+    </a:fmtScheme>
+  </a:themeElements>
+  <a:objectDefaults/>
+  <a:extraClrSchemeLst/>
+  <a:extLst>
+    <a:ext uri="{05A4C25C-085E-4340-85A3-A5531E510DB2}">
+      <thm15:themeFamily xmlns:thm15="http://schemas.microsoft.com/office/thememl/2012/main" name="Office Theme" id="{62F939B6-93AF-4DB8-9C6B-D6C7DFDC589F}" vid="{4A3C46E8-61CC-4603-A589-7422A47A8E4A}"/>
+    </a:ext>
+  </a:extLst>
+</a:theme>
+</file>
+
+<file path=ppt/theme/theme3.xml><?xml version="1.0" encoding="utf-8"?>
 <a:theme xmlns:a="http://schemas.openxmlformats.org/drawingml/2006/main" name="Office Theme">
   <a:themeElements>
     <a:clrScheme name="Office">
